--- a/pmc1/PMC-AI-Technical-Overview.pptx
+++ b/pmc1/PMC-AI-Technical-Overview.pptx
@@ -4,6 +4,9 @@
   <p:sldMasterIdLst>
     <p:sldMasterId id="2147483648" r:id="rId1"/>
   </p:sldMasterIdLst>
+  <p:notesMasterIdLst>
+    <p:notesMasterId r:id="rId11"/>
+  </p:notesMasterIdLst>
   <p:sldIdLst>
     <p:sldId id="256" r:id="rId2"/>
     <p:sldId id="257" r:id="rId3"/>
@@ -15,10 +18,7 @@
     <p:sldId id="263" r:id="rId9"/>
     <p:sldId id="264" r:id="rId10"/>
   </p:sldIdLst>
-  <p:notesMasterIdLst>
-    <p:notesMasterId r:id="rId11"/>
-  </p:notesMasterIdLst>
-  <p:sldSz cx="9144000" cy="6858000"/>
+  <p:sldSz cx="9144000" cy="6858000" type="screen4x3"/>
   <p:notesSz cx="6858000" cy="9144000"/>
   <p:defaultTextStyle>
     <a:lvl1pPr marL="0" algn="l" defTabSz="914400" rtl="0" eaLnBrk="1" latinLnBrk="0" hangingPunct="1">
@@ -112,6 +112,11 @@
       </a:defRPr>
     </a:lvl9pPr>
   </p:defaultTextStyle>
+  <p:extLst>
+    <p:ext uri="{EFAFB233-063F-42B5-8137-9DF3F51BA10A}">
+      <p15:sldGuideLst xmlns:p15="http://schemas.microsoft.com/office/powerpoint/2012/main"/>
+    </p:ext>
+  </p:extLst>
 </p:presentation>
 </file>
 
@@ -137,234 +142,10 @@
           <a:chExt cx="0" cy="0"/>
         </a:xfrm>
       </p:grpSpPr>
-      <p:sp>
-        <p:nvSpPr>
-          <p:cNvPr id="2" name="Header Placeholder 1"/>
-          <p:cNvSpPr>
-            <a:spLocks noGrp="1"/>
-          </p:cNvSpPr>
-          <p:nvPr>
-            <p:ph type="hdr" sz="quarter"/>
-          </p:nvPr>
-        </p:nvSpPr>
-        <p:spPr>
-          <a:xfrm>
-            <a:off x="0" y="0"/>
-            <a:ext cx="2971800" cy="458788"/>
-          </a:xfrm>
-          <a:prstGeom prst="rect">
-            <a:avLst/>
-          </a:prstGeom>
-        </p:spPr>
-        <p:txBody>
-          <a:bodyPr vert="horz" lIns="91440" tIns="45720" rIns="91440" bIns="45720" rtlCol="0"/>
-          <a:lstStyle>
-            <a:lvl1pPr algn="l">
-              <a:defRPr sz="1200"/>
-            </a:lvl1pPr>
-          </a:lstStyle>
-          <a:p>
-            <a:endParaRPr lang="en-US"/>
-          </a:p>
-        </p:txBody>
-      </p:sp>
-      <p:sp>
-        <p:nvSpPr>
-          <p:cNvPr id="3" name="Date Placeholder 2"/>
-          <p:cNvSpPr>
-            <a:spLocks noGrp="1"/>
-          </p:cNvSpPr>
-          <p:nvPr>
-            <p:ph type="dt" idx="1"/>
-          </p:nvPr>
-        </p:nvSpPr>
-        <p:spPr>
-          <a:xfrm>
-            <a:off x="3884613" y="0"/>
-            <a:ext cx="2971800" cy="458788"/>
-          </a:xfrm>
-          <a:prstGeom prst="rect">
-            <a:avLst/>
-          </a:prstGeom>
-        </p:spPr>
-        <p:txBody>
-          <a:bodyPr vert="horz" lIns="91440" tIns="45720" rIns="91440" bIns="45720" rtlCol="0"/>
-          <a:lstStyle>
-            <a:lvl1pPr algn="r">
-              <a:defRPr sz="1200"/>
-            </a:lvl1pPr>
-          </a:lstStyle>
-          <a:p>
-            <a:fld id="{5282F153-3F37-0F45-9E97-73ACFA13230C}" type="datetimeFigureOut">
-              <a:rPr lang="en-US"/>
-              <a:t>7/23/19</a:t>
-            </a:fld>
-            <a:endParaRPr lang="en-US"/>
-          </a:p>
-        </p:txBody>
-      </p:sp>
-      <p:sp>
-        <p:nvSpPr>
-          <p:cNvPr id="4" name="Slide Image Placeholder 3"/>
-          <p:cNvSpPr>
-            <a:spLocks noGrp="1" noRot="1" noChangeAspect="1"/>
-          </p:cNvSpPr>
-          <p:nvPr>
-            <p:ph type="sldImg" idx="2"/>
-          </p:nvPr>
-        </p:nvSpPr>
-        <p:spPr>
-          <a:xfrm>
-            <a:off x="685800" y="1143000"/>
-            <a:ext cx="5486400" cy="3086100"/>
-          </a:xfrm>
-          <a:prstGeom prst="rect">
-            <a:avLst/>
-          </a:prstGeom>
-          <a:noFill/>
-          <a:ln w="12700">
-            <a:solidFill>
-              <a:prstClr val="black"/>
-            </a:solidFill>
-          </a:ln>
-        </p:spPr>
-        <p:txBody>
-          <a:bodyPr vert="horz" lIns="91440" tIns="45720" rIns="91440" bIns="45720" rtlCol="0" anchor="ctr"/>
-          <a:lstStyle/>
-          <a:p>
-            <a:endParaRPr lang="en-US"/>
-          </a:p>
-        </p:txBody>
-      </p:sp>
-      <p:sp>
-        <p:nvSpPr>
-          <p:cNvPr id="5" name="Notes Placeholder 4"/>
-          <p:cNvSpPr>
-            <a:spLocks noGrp="1"/>
-          </p:cNvSpPr>
-          <p:nvPr>
-            <p:ph type="body" sz="quarter" idx="3"/>
-          </p:nvPr>
-        </p:nvSpPr>
-        <p:spPr>
-          <a:xfrm>
-            <a:off x="685800" y="4400550"/>
-            <a:ext cx="5486400" cy="3600450"/>
-          </a:xfrm>
-          <a:prstGeom prst="rect">
-            <a:avLst/>
-          </a:prstGeom>
-        </p:spPr>
-        <p:txBody>
-          <a:bodyPr vert="horz" lIns="91440" tIns="45720" rIns="91440" bIns="45720" rtlCol="0"/>
-          <a:lstStyle/>
-          <a:p>
-            <a:pPr lvl="0"/>
-            <a:r>
-              <a:rPr lang="en-US"/>
-              <a:t>Click to edit Master text styles</a:t>
-            </a:r>
-          </a:p>
-          <a:p>
-            <a:pPr lvl="1"/>
-            <a:r>
-              <a:rPr lang="en-US"/>
-              <a:t>Second level</a:t>
-            </a:r>
-          </a:p>
-          <a:p>
-            <a:pPr lvl="2"/>
-            <a:r>
-              <a:rPr lang="en-US"/>
-              <a:t>Third level</a:t>
-            </a:r>
-          </a:p>
-          <a:p>
-            <a:pPr lvl="3"/>
-            <a:r>
-              <a:rPr lang="en-US"/>
-              <a:t>Fourth level</a:t>
-            </a:r>
-          </a:p>
-          <a:p>
-            <a:pPr lvl="4"/>
-            <a:r>
-              <a:rPr lang="en-US"/>
-              <a:t>Fifth level</a:t>
-            </a:r>
-          </a:p>
-        </p:txBody>
-      </p:sp>
-      <p:sp>
-        <p:nvSpPr>
-          <p:cNvPr id="6" name="Footer Placeholder 5"/>
-          <p:cNvSpPr>
-            <a:spLocks noGrp="1"/>
-          </p:cNvSpPr>
-          <p:nvPr>
-            <p:ph type="ftr" sz="quarter" idx="4"/>
-          </p:nvPr>
-        </p:nvSpPr>
-        <p:spPr>
-          <a:xfrm>
-            <a:off x="0" y="8685213"/>
-            <a:ext cx="2971800" cy="458787"/>
-          </a:xfrm>
-          <a:prstGeom prst="rect">
-            <a:avLst/>
-          </a:prstGeom>
-        </p:spPr>
-        <p:txBody>
-          <a:bodyPr vert="horz" lIns="91440" tIns="45720" rIns="91440" bIns="45720" rtlCol="0" anchor="b"/>
-          <a:lstStyle>
-            <a:lvl1pPr algn="l">
-              <a:defRPr sz="1200"/>
-            </a:lvl1pPr>
-          </a:lstStyle>
-          <a:p>
-            <a:endParaRPr lang="en-US"/>
-          </a:p>
-        </p:txBody>
-      </p:sp>
-      <p:sp>
-        <p:nvSpPr>
-          <p:cNvPr id="7" name="Slide Number Placeholder 6"/>
-          <p:cNvSpPr>
-            <a:spLocks noGrp="1"/>
-          </p:cNvSpPr>
-          <p:nvPr>
-            <p:ph type="sldNum" sz="quarter" idx="5"/>
-          </p:nvPr>
-        </p:nvSpPr>
-        <p:spPr>
-          <a:xfrm>
-            <a:off x="3884613" y="8685213"/>
-            <a:ext cx="2971800" cy="458787"/>
-          </a:xfrm>
-          <a:prstGeom prst="rect">
-            <a:avLst/>
-          </a:prstGeom>
-        </p:spPr>
-        <p:txBody>
-          <a:bodyPr vert="horz" lIns="91440" tIns="45720" rIns="91440" bIns="45720" rtlCol="0" anchor="b"/>
-          <a:lstStyle>
-            <a:lvl1pPr algn="r">
-              <a:defRPr sz="1200"/>
-            </a:lvl1pPr>
-          </a:lstStyle>
-          <a:p>
-            <a:fld id="{CE5E9CC1-C706-0F49-92D6-E571CC5EEA8F}" type="slidenum">
-              <a:rPr lang="en-US"/>
-              <a:t>‹#›</a:t>
-            </a:fld>
-            <a:endParaRPr lang="en-US"/>
-          </a:p>
-        </p:txBody>
-      </p:sp>
     </p:spTree>
     <p:extLst>
       <p:ext uri="{BB962C8B-B14F-4D97-AF65-F5344CB8AC3E}">
-        <p14:creationId xmlns:p14="http://schemas.microsoft.com/office/powerpoint/2010/main" val="1024086991"/>
+        <p14:creationId xmlns:p14="http://schemas.microsoft.com/office/powerpoint/2010/main" val="2903586887"/>
       </p:ext>
     </p:extLst>
   </p:cSld>
@@ -508,10 +289,6 @@
           <a:bodyPr/>
           <a:lstStyle/>
           <a:p>
-            <a:r>
-              <a:rPr lang="en-US" dirty="0"/>
-              <a:t/>
-            </a:r>
             <a:endParaRPr lang="en-US" dirty="0"/>
           </a:p>
         </p:txBody>
@@ -596,10 +373,6 @@
           <a:bodyPr/>
           <a:lstStyle/>
           <a:p>
-            <a:r>
-              <a:rPr lang="en-US" dirty="0"/>
-              <a:t/>
-            </a:r>
             <a:endParaRPr lang="en-US" dirty="0"/>
           </a:p>
         </p:txBody>
@@ -684,10 +457,6 @@
           <a:bodyPr/>
           <a:lstStyle/>
           <a:p>
-            <a:r>
-              <a:rPr lang="en-US" dirty="0"/>
-              <a:t/>
-            </a:r>
             <a:endParaRPr lang="en-US" dirty="0"/>
           </a:p>
         </p:txBody>
@@ -772,10 +541,6 @@
           <a:bodyPr/>
           <a:lstStyle/>
           <a:p>
-            <a:r>
-              <a:rPr lang="en-US" dirty="0"/>
-              <a:t/>
-            </a:r>
             <a:endParaRPr lang="en-US" dirty="0"/>
           </a:p>
         </p:txBody>
@@ -860,10 +625,6 @@
           <a:bodyPr/>
           <a:lstStyle/>
           <a:p>
-            <a:r>
-              <a:rPr lang="en-US" dirty="0"/>
-              <a:t/>
-            </a:r>
             <a:endParaRPr lang="en-US" dirty="0"/>
           </a:p>
         </p:txBody>
@@ -948,10 +709,6 @@
           <a:bodyPr/>
           <a:lstStyle/>
           <a:p>
-            <a:r>
-              <a:rPr lang="en-US" dirty="0"/>
-              <a:t/>
-            </a:r>
             <a:endParaRPr lang="en-US" dirty="0"/>
           </a:p>
         </p:txBody>
@@ -1036,10 +793,6 @@
           <a:bodyPr/>
           <a:lstStyle/>
           <a:p>
-            <a:r>
-              <a:rPr lang="en-US" dirty="0"/>
-              <a:t/>
-            </a:r>
             <a:endParaRPr lang="en-US" dirty="0"/>
           </a:p>
         </p:txBody>
@@ -1124,10 +877,6 @@
           <a:bodyPr/>
           <a:lstStyle/>
           <a:p>
-            <a:r>
-              <a:rPr lang="en-US" dirty="0"/>
-              <a:t/>
-            </a:r>
             <a:endParaRPr lang="en-US" dirty="0"/>
           </a:p>
         </p:txBody>
@@ -1212,10 +961,6 @@
           <a:bodyPr/>
           <a:lstStyle/>
           <a:p>
-            <a:r>
-              <a:rPr lang="en-US" dirty="0"/>
-              <a:t/>
-            </a:r>
             <a:endParaRPr lang="en-US" dirty="0"/>
           </a:p>
         </p:txBody>
@@ -1289,6 +1034,11 @@
 <file path=ppt/slideMasters/slideMaster1.xml><?xml version="1.0" encoding="utf-8"?>
 <p:sldMaster xmlns:a="http://schemas.openxmlformats.org/drawingml/2006/main" xmlns:r="http://schemas.openxmlformats.org/officeDocument/2006/relationships" xmlns:p="http://schemas.openxmlformats.org/presentationml/2006/main">
   <p:cSld>
+    <p:bg>
+      <p:bgRef idx="1001">
+        <a:schemeClr val="bg1"/>
+      </p:bgRef>
+    </p:bg>
     <p:spTree>
       <p:nvGrpSpPr>
         <p:cNvPr id="1" name=""/>
@@ -1571,6 +1321,7 @@
         <a:solidFill>
           <a:srgbClr val="1E3A5F"/>
         </a:solidFill>
+        <a:effectLst/>
       </p:bgPr>
     </p:bg>
     <p:spTree>
@@ -1611,6 +1362,13 @@
             <a:prstDash val="solid"/>
           </a:ln>
         </p:spPr>
+        <p:txBody>
+          <a:bodyPr/>
+          <a:lstStyle/>
+          <a:p>
+            <a:endParaRPr lang="en-US"/>
+          </a:p>
+        </p:txBody>
       </p:sp>
       <p:sp>
         <p:nvSpPr>
@@ -1633,7 +1391,7 @@
           <a:bodyPr wrap="square" rtlCol="0" anchor="ctr"/>
           <a:lstStyle/>
           <a:p>
-            <a:pPr algn="l" indent="0" marL="0">
+            <a:pPr marL="0" indent="0" algn="l">
               <a:buNone/>
             </a:pPr>
             <a:r>
@@ -1650,7 +1408,7 @@
             <a:endParaRPr lang="en-US" sz="4400" dirty="0"/>
           </a:p>
           <a:p>
-            <a:pPr algn="l" indent="0" marL="0">
+            <a:pPr marL="0" indent="0" algn="l">
               <a:buNone/>
             </a:pPr>
             <a:r>
@@ -1689,7 +1447,7 @@
           <a:bodyPr wrap="square" rtlCol="0" anchor="ctr"/>
           <a:lstStyle/>
           <a:p>
-            <a:pPr algn="l" indent="0" marL="0">
+            <a:pPr marL="0" indent="0" algn="l">
               <a:buNone/>
             </a:pPr>
             <a:r>
@@ -1728,7 +1486,7 @@
           <a:bodyPr wrap="square" rtlCol="0" anchor="ctr"/>
           <a:lstStyle/>
           <a:p>
-            <a:pPr algn="l" indent="0" marL="0">
+            <a:pPr marL="0" indent="0" algn="l">
               <a:buNone/>
             </a:pPr>
             <a:r>
@@ -1767,7 +1525,7 @@
           <a:bodyPr wrap="square" rtlCol="0" anchor="ctr"/>
           <a:lstStyle/>
           <a:p>
-            <a:pPr algn="r" indent="0" marL="0">
+            <a:pPr marL="0" indent="0" algn="r">
               <a:buNone/>
             </a:pPr>
             <a:r>
@@ -1801,6 +1559,7 @@
         <a:solidFill>
           <a:srgbClr val="F4F6F9"/>
         </a:solidFill>
+        <a:effectLst/>
       </p:bgPr>
     </p:bg>
     <p:spTree>
@@ -1841,6 +1600,13 @@
             <a:prstDash val="solid"/>
           </a:ln>
         </p:spPr>
+        <p:txBody>
+          <a:bodyPr/>
+          <a:lstStyle/>
+          <a:p>
+            <a:endParaRPr lang="en-US"/>
+          </a:p>
+        </p:txBody>
       </p:sp>
       <p:sp>
         <p:nvSpPr>
@@ -1863,7 +1629,7 @@
           <a:bodyPr wrap="square" lIns="0" tIns="0" rIns="0" bIns="0" rtlCol="0" anchor="ctr"/>
           <a:lstStyle/>
           <a:p>
-            <a:pPr algn="l" indent="0" marL="0">
+            <a:pPr marL="0" indent="0" algn="l">
               <a:buNone/>
             </a:pPr>
             <a:r>
@@ -1905,6 +1671,13 @@
             <a:prstDash val="solid"/>
           </a:ln>
         </p:spPr>
+        <p:txBody>
+          <a:bodyPr/>
+          <a:lstStyle/>
+          <a:p>
+            <a:endParaRPr lang="en-US"/>
+          </a:p>
+        </p:txBody>
       </p:sp>
       <p:sp>
         <p:nvSpPr>
@@ -1960,7 +1733,7 @@
                 <a:ea typeface="Calibri Light" pitchFamily="34" charset="-122"/>
                 <a:cs typeface="Calibri Light" pitchFamily="34" charset="-120"/>
               </a:rPr>
-              <a:t>Hosted on psd1.net (Pasco School District cPanel server)</a:t>
+              <a:t>Hosted on psd1.net (cPanel server)</a:t>
             </a:r>
             <a:endParaRPr lang="en-US" sz="1700" dirty="0"/>
           </a:p>
@@ -2047,6 +1820,13 @@
             <a:prstDash val="solid"/>
           </a:ln>
         </p:spPr>
+        <p:txBody>
+          <a:bodyPr/>
+          <a:lstStyle/>
+          <a:p>
+            <a:endParaRPr lang="en-US"/>
+          </a:p>
+        </p:txBody>
       </p:sp>
       <p:sp>
         <p:nvSpPr>
@@ -2069,7 +1849,7 @@
           <a:bodyPr wrap="square" rtlCol="0" anchor="ctr"/>
           <a:lstStyle/>
           <a:p>
-            <a:pPr algn="ctr" indent="0" marL="0">
+            <a:pPr marL="0" indent="0" algn="ctr">
               <a:buNone/>
             </a:pPr>
             <a:r>
@@ -2083,7 +1863,7 @@
             <a:endParaRPr lang="en-US" sz="4800" dirty="0"/>
           </a:p>
           <a:p>
-            <a:pPr algn="ctr" indent="0" marL="0">
+            <a:pPr marL="0" indent="0" algn="ctr">
               <a:buNone/>
             </a:pPr>
             <a:r>
@@ -2114,6 +1894,7 @@
         <a:solidFill>
           <a:srgbClr val="F4F6F9"/>
         </a:solidFill>
+        <a:effectLst/>
       </p:bgPr>
     </p:bg>
     <p:spTree>
@@ -2154,6 +1935,13 @@
             <a:prstDash val="solid"/>
           </a:ln>
         </p:spPr>
+        <p:txBody>
+          <a:bodyPr/>
+          <a:lstStyle/>
+          <a:p>
+            <a:endParaRPr lang="en-US"/>
+          </a:p>
+        </p:txBody>
       </p:sp>
       <p:sp>
         <p:nvSpPr>
@@ -2176,7 +1964,7 @@
           <a:bodyPr wrap="square" lIns="0" tIns="0" rIns="0" bIns="0" rtlCol="0" anchor="ctr"/>
           <a:lstStyle/>
           <a:p>
-            <a:pPr algn="l" indent="0" marL="0">
+            <a:pPr marL="0" indent="0" algn="l">
               <a:buNone/>
             </a:pPr>
             <a:r>
@@ -2218,6 +2006,13 @@
             <a:prstDash val="solid"/>
           </a:ln>
         </p:spPr>
+        <p:txBody>
+          <a:bodyPr/>
+          <a:lstStyle/>
+          <a:p>
+            <a:endParaRPr lang="en-US"/>
+          </a:p>
+        </p:txBody>
       </p:sp>
       <p:sp>
         <p:nvSpPr>
@@ -2330,7 +2125,7 @@
                 <a:ea typeface="Calibri Light" pitchFamily="34" charset="-122"/>
                 <a:cs typeface="Calibri Light" pitchFamily="34" charset="-120"/>
               </a:rPr>
-              <a:t>English &amp; Spanish — auto-detected</a:t>
+              <a:t>English &amp; Spanish &amp; ??? — auto-detected</a:t>
             </a:r>
             <a:endParaRPr lang="en-US" sz="1500" dirty="0"/>
           </a:p>
@@ -2379,6 +2174,13 @@
             <a:prstDash val="solid"/>
           </a:ln>
         </p:spPr>
+        <p:txBody>
+          <a:bodyPr/>
+          <a:lstStyle/>
+          <a:p>
+            <a:endParaRPr lang="en-US"/>
+          </a:p>
+        </p:txBody>
       </p:sp>
       <p:sp>
         <p:nvSpPr>
@@ -2401,7 +2203,7 @@
           <a:bodyPr wrap="square" rtlCol="0" anchor="ctr"/>
           <a:lstStyle/>
           <a:p>
-            <a:pPr algn="ctr" indent="0" marL="0">
+            <a:pPr marL="0" indent="0" algn="ctr">
               <a:buNone/>
             </a:pPr>
             <a:r>
@@ -2415,7 +2217,7 @@
             <a:endParaRPr lang="en-US" sz="1400" dirty="0"/>
           </a:p>
           <a:p>
-            <a:pPr algn="ctr" indent="0" marL="0">
+            <a:pPr marL="0" indent="0" algn="ctr">
               <a:buNone/>
             </a:pPr>
             <a:r>
@@ -2430,7 +2232,7 @@
             <a:endParaRPr lang="en-US" sz="1400" dirty="0"/>
           </a:p>
           <a:p>
-            <a:pPr algn="ctr" indent="0" marL="0">
+            <a:pPr marL="0" indent="0" algn="ctr">
               <a:buNone/>
             </a:pPr>
             <a:r>
@@ -2444,7 +2246,7 @@
             <a:endParaRPr lang="en-US" sz="1400" dirty="0"/>
           </a:p>
           <a:p>
-            <a:pPr algn="ctr" indent="0" marL="0">
+            <a:pPr marL="0" indent="0" algn="ctr">
               <a:buNone/>
             </a:pPr>
             <a:r>
@@ -2459,7 +2261,7 @@
             <a:endParaRPr lang="en-US" sz="1400" dirty="0"/>
           </a:p>
           <a:p>
-            <a:pPr algn="ctr" indent="0" marL="0">
+            <a:pPr marL="0" indent="0" algn="ctr">
               <a:buNone/>
             </a:pPr>
             <a:r>
@@ -2473,7 +2275,7 @@
             <a:endParaRPr lang="en-US" sz="1400" dirty="0"/>
           </a:p>
           <a:p>
-            <a:pPr algn="ctr" indent="0" marL="0">
+            <a:pPr marL="0" indent="0" algn="ctr">
               <a:buNone/>
             </a:pPr>
             <a:r>
@@ -2504,6 +2306,7 @@
         <a:solidFill>
           <a:srgbClr val="F4F6F9"/>
         </a:solidFill>
+        <a:effectLst/>
       </p:bgPr>
     </p:bg>
     <p:spTree>
@@ -2544,6 +2347,13 @@
             <a:prstDash val="solid"/>
           </a:ln>
         </p:spPr>
+        <p:txBody>
+          <a:bodyPr/>
+          <a:lstStyle/>
+          <a:p>
+            <a:endParaRPr lang="en-US"/>
+          </a:p>
+        </p:txBody>
       </p:sp>
       <p:sp>
         <p:nvSpPr>
@@ -2566,7 +2376,7 @@
           <a:bodyPr wrap="square" lIns="0" tIns="0" rIns="0" bIns="0" rtlCol="0" anchor="ctr"/>
           <a:lstStyle/>
           <a:p>
-            <a:pPr algn="l" indent="0" marL="0">
+            <a:pPr marL="0" indent="0" algn="l">
               <a:buNone/>
             </a:pPr>
             <a:r>
@@ -2608,6 +2418,13 @@
             <a:prstDash val="solid"/>
           </a:ln>
         </p:spPr>
+        <p:txBody>
+          <a:bodyPr/>
+          <a:lstStyle/>
+          <a:p>
+            <a:endParaRPr lang="en-US"/>
+          </a:p>
+        </p:txBody>
       </p:sp>
       <p:sp>
         <p:nvSpPr>
@@ -2633,6 +2450,13 @@
             <a:prstDash val="solid"/>
           </a:ln>
         </p:spPr>
+        <p:txBody>
+          <a:bodyPr/>
+          <a:lstStyle/>
+          <a:p>
+            <a:endParaRPr lang="en-US"/>
+          </a:p>
+        </p:txBody>
       </p:sp>
       <p:sp>
         <p:nvSpPr>
@@ -2655,7 +2479,7 @@
           <a:bodyPr wrap="square" rtlCol="0" anchor="ctr"/>
           <a:lstStyle/>
           <a:p>
-            <a:pPr algn="ctr" indent="0" marL="0">
+            <a:pPr marL="0" indent="0" algn="ctr">
               <a:buNone/>
             </a:pPr>
             <a:r>
@@ -2669,7 +2493,7 @@
             <a:endParaRPr lang="en-US" sz="1600" dirty="0"/>
           </a:p>
           <a:p>
-            <a:pPr algn="ctr" indent="0" marL="0">
+            <a:pPr marL="0" indent="0" algn="ctr">
               <a:buNone/>
             </a:pPr>
             <a:r>
@@ -2684,7 +2508,7 @@
             <a:endParaRPr lang="en-US" sz="1600" dirty="0"/>
           </a:p>
           <a:p>
-            <a:pPr algn="ctr" indent="0" marL="0">
+            <a:pPr marL="0" indent="0" algn="ctr">
               <a:buNone/>
             </a:pPr>
             <a:r>
@@ -2698,7 +2522,7 @@
             <a:endParaRPr lang="en-US" sz="1600" dirty="0"/>
           </a:p>
           <a:p>
-            <a:pPr algn="ctr" indent="0" marL="0">
+            <a:pPr marL="0" indent="0" algn="ctr">
               <a:buNone/>
             </a:pPr>
             <a:r>
@@ -2737,6 +2561,13 @@
             <a:prstDash val="solid"/>
           </a:ln>
         </p:spPr>
+        <p:txBody>
+          <a:bodyPr/>
+          <a:lstStyle/>
+          <a:p>
+            <a:endParaRPr lang="en-US"/>
+          </a:p>
+        </p:txBody>
       </p:sp>
       <p:sp>
         <p:nvSpPr>
@@ -2759,7 +2590,7 @@
           <a:bodyPr wrap="square" rtlCol="0" anchor="ctr"/>
           <a:lstStyle/>
           <a:p>
-            <a:pPr algn="ctr" indent="0" marL="0">
+            <a:pPr marL="0" indent="0" algn="ctr">
               <a:buNone/>
             </a:pPr>
             <a:r>
@@ -2773,7 +2604,7 @@
             <a:endParaRPr lang="en-US" sz="1600" dirty="0"/>
           </a:p>
           <a:p>
-            <a:pPr algn="ctr" indent="0" marL="0">
+            <a:pPr marL="0" indent="0" algn="ctr">
               <a:buNone/>
             </a:pPr>
             <a:r>
@@ -2788,7 +2619,7 @@
             <a:endParaRPr lang="en-US" sz="1600" dirty="0"/>
           </a:p>
           <a:p>
-            <a:pPr algn="ctr" indent="0" marL="0">
+            <a:pPr marL="0" indent="0" algn="ctr">
               <a:buNone/>
             </a:pPr>
             <a:r>
@@ -2802,7 +2633,7 @@
             <a:endParaRPr lang="en-US" sz="1600" dirty="0"/>
           </a:p>
           <a:p>
-            <a:pPr algn="ctr" indent="0" marL="0">
+            <a:pPr marL="0" indent="0" algn="ctr">
               <a:buNone/>
             </a:pPr>
             <a:r>
@@ -2841,6 +2672,13 @@
             <a:prstDash val="solid"/>
           </a:ln>
         </p:spPr>
+        <p:txBody>
+          <a:bodyPr/>
+          <a:lstStyle/>
+          <a:p>
+            <a:endParaRPr lang="en-US"/>
+          </a:p>
+        </p:txBody>
       </p:sp>
       <p:sp>
         <p:nvSpPr>
@@ -2863,7 +2701,7 @@
           <a:bodyPr wrap="square" rtlCol="0" anchor="ctr"/>
           <a:lstStyle/>
           <a:p>
-            <a:pPr algn="ctr" indent="0" marL="0">
+            <a:pPr marL="0" indent="0" algn="ctr">
               <a:buNone/>
             </a:pPr>
             <a:r>
@@ -2877,7 +2715,7 @@
             <a:endParaRPr lang="en-US" sz="1600" dirty="0"/>
           </a:p>
           <a:p>
-            <a:pPr algn="ctr" indent="0" marL="0">
+            <a:pPr marL="0" indent="0" algn="ctr">
               <a:buNone/>
             </a:pPr>
             <a:r>
@@ -2892,7 +2730,7 @@
             <a:endParaRPr lang="en-US" sz="1600" dirty="0"/>
           </a:p>
           <a:p>
-            <a:pPr algn="ctr" indent="0" marL="0">
+            <a:pPr marL="0" indent="0" algn="ctr">
               <a:buNone/>
             </a:pPr>
             <a:r>
@@ -2906,7 +2744,7 @@
             <a:endParaRPr lang="en-US" sz="1600" dirty="0"/>
           </a:p>
           <a:p>
-            <a:pPr algn="ctr" indent="0" marL="0">
+            <a:pPr marL="0" indent="0" algn="ctr">
               <a:buNone/>
             </a:pPr>
             <a:r>
@@ -2944,6 +2782,13 @@
             <a:tailEnd type="arrow"/>
           </a:ln>
         </p:spPr>
+        <p:txBody>
+          <a:bodyPr/>
+          <a:lstStyle/>
+          <a:p>
+            <a:endParaRPr lang="en-US"/>
+          </a:p>
+        </p:txBody>
       </p:sp>
       <p:sp>
         <p:nvSpPr>
@@ -2968,6 +2813,13 @@
             <a:tailEnd type="arrow"/>
           </a:ln>
         </p:spPr>
+        <p:txBody>
+          <a:bodyPr/>
+          <a:lstStyle/>
+          <a:p>
+            <a:endParaRPr lang="en-US"/>
+          </a:p>
+        </p:txBody>
       </p:sp>
       <p:sp>
         <p:nvSpPr>
@@ -3040,6 +2892,7 @@
         <a:solidFill>
           <a:srgbClr val="F4F6F9"/>
         </a:solidFill>
+        <a:effectLst/>
       </p:bgPr>
     </p:bg>
     <p:spTree>
@@ -3080,6 +2933,13 @@
             <a:prstDash val="solid"/>
           </a:ln>
         </p:spPr>
+        <p:txBody>
+          <a:bodyPr/>
+          <a:lstStyle/>
+          <a:p>
+            <a:endParaRPr lang="en-US"/>
+          </a:p>
+        </p:txBody>
       </p:sp>
       <p:sp>
         <p:nvSpPr>
@@ -3102,7 +2962,7 @@
           <a:bodyPr wrap="square" lIns="0" tIns="0" rIns="0" bIns="0" rtlCol="0" anchor="ctr"/>
           <a:lstStyle/>
           <a:p>
-            <a:pPr algn="l" indent="0" marL="0">
+            <a:pPr marL="0" indent="0" algn="l">
               <a:buNone/>
             </a:pPr>
             <a:r>
@@ -3144,6 +3004,13 @@
             <a:prstDash val="solid"/>
           </a:ln>
         </p:spPr>
+        <p:txBody>
+          <a:bodyPr/>
+          <a:lstStyle/>
+          <a:p>
+            <a:endParaRPr lang="en-US"/>
+          </a:p>
+        </p:txBody>
       </p:sp>
       <p:sp>
         <p:nvSpPr>
@@ -3169,6 +3036,13 @@
             <a:prstDash val="solid"/>
           </a:ln>
         </p:spPr>
+        <p:txBody>
+          <a:bodyPr/>
+          <a:lstStyle/>
+          <a:p>
+            <a:endParaRPr lang="en-US"/>
+          </a:p>
+        </p:txBody>
       </p:sp>
       <p:sp>
         <p:nvSpPr>
@@ -3191,7 +3065,7 @@
           <a:bodyPr wrap="square" lIns="0" tIns="0" rIns="0" bIns="0" rtlCol="0" anchor="ctr"/>
           <a:lstStyle/>
           <a:p>
-            <a:pPr algn="l" indent="0" marL="0">
+            <a:pPr marL="0" indent="0" algn="l">
               <a:buNone/>
             </a:pPr>
             <a:r>
@@ -3230,7 +3104,7 @@
           <a:bodyPr wrap="square" lIns="0" tIns="0" rIns="0" bIns="0" rtlCol="0" anchor="ctr"/>
           <a:lstStyle/>
           <a:p>
-            <a:pPr algn="l" indent="0" marL="0">
+            <a:pPr marL="0" indent="0" algn="l">
               <a:buNone/>
             </a:pPr>
             <a:r>
@@ -3272,6 +3146,13 @@
             <a:prstDash val="solid"/>
           </a:ln>
         </p:spPr>
+        <p:txBody>
+          <a:bodyPr/>
+          <a:lstStyle/>
+          <a:p>
+            <a:endParaRPr lang="en-US"/>
+          </a:p>
+        </p:txBody>
       </p:sp>
       <p:sp>
         <p:nvSpPr>
@@ -3294,7 +3175,7 @@
           <a:bodyPr wrap="square" lIns="0" tIns="0" rIns="0" bIns="0" rtlCol="0" anchor="ctr"/>
           <a:lstStyle/>
           <a:p>
-            <a:pPr algn="l" indent="0" marL="0">
+            <a:pPr marL="0" indent="0" algn="l">
               <a:buNone/>
             </a:pPr>
             <a:r>
@@ -3333,7 +3214,7 @@
           <a:bodyPr wrap="square" lIns="0" tIns="0" rIns="0" bIns="0" rtlCol="0" anchor="ctr"/>
           <a:lstStyle/>
           <a:p>
-            <a:pPr algn="l" indent="0" marL="0">
+            <a:pPr marL="0" indent="0" algn="l">
               <a:buNone/>
             </a:pPr>
             <a:r>
@@ -3375,6 +3256,13 @@
             <a:prstDash val="solid"/>
           </a:ln>
         </p:spPr>
+        <p:txBody>
+          <a:bodyPr/>
+          <a:lstStyle/>
+          <a:p>
+            <a:endParaRPr lang="en-US"/>
+          </a:p>
+        </p:txBody>
       </p:sp>
       <p:sp>
         <p:nvSpPr>
@@ -3397,7 +3285,7 @@
           <a:bodyPr wrap="square" lIns="0" tIns="0" rIns="0" bIns="0" rtlCol="0" anchor="ctr"/>
           <a:lstStyle/>
           <a:p>
-            <a:pPr algn="l" indent="0" marL="0">
+            <a:pPr marL="0" indent="0" algn="l">
               <a:buNone/>
             </a:pPr>
             <a:r>
@@ -3436,7 +3324,7 @@
           <a:bodyPr wrap="square" lIns="0" tIns="0" rIns="0" bIns="0" rtlCol="0" anchor="ctr"/>
           <a:lstStyle/>
           <a:p>
-            <a:pPr algn="l" indent="0" marL="0">
+            <a:pPr marL="0" indent="0" algn="l">
               <a:buNone/>
             </a:pPr>
             <a:r>
@@ -3478,6 +3366,13 @@
             <a:prstDash val="solid"/>
           </a:ln>
         </p:spPr>
+        <p:txBody>
+          <a:bodyPr/>
+          <a:lstStyle/>
+          <a:p>
+            <a:endParaRPr lang="en-US"/>
+          </a:p>
+        </p:txBody>
       </p:sp>
       <p:sp>
         <p:nvSpPr>
@@ -3500,7 +3395,7 @@
           <a:bodyPr wrap="square" lIns="0" tIns="0" rIns="0" bIns="0" rtlCol="0" anchor="ctr"/>
           <a:lstStyle/>
           <a:p>
-            <a:pPr algn="l" indent="0" marL="0">
+            <a:pPr marL="0" indent="0" algn="l">
               <a:buNone/>
             </a:pPr>
             <a:r>
@@ -3539,7 +3434,7 @@
           <a:bodyPr wrap="square" lIns="0" tIns="0" rIns="0" bIns="0" rtlCol="0" anchor="ctr"/>
           <a:lstStyle/>
           <a:p>
-            <a:pPr algn="l" indent="0" marL="0">
+            <a:pPr marL="0" indent="0" algn="l">
               <a:buNone/>
             </a:pPr>
             <a:r>
@@ -3581,6 +3476,13 @@
             <a:prstDash val="solid"/>
           </a:ln>
         </p:spPr>
+        <p:txBody>
+          <a:bodyPr/>
+          <a:lstStyle/>
+          <a:p>
+            <a:endParaRPr lang="en-US"/>
+          </a:p>
+        </p:txBody>
       </p:sp>
       <p:sp>
         <p:nvSpPr>
@@ -3603,7 +3505,7 @@
           <a:bodyPr wrap="square" lIns="0" tIns="0" rIns="0" bIns="0" rtlCol="0" anchor="ctr"/>
           <a:lstStyle/>
           <a:p>
-            <a:pPr algn="l" indent="0" marL="0">
+            <a:pPr marL="0" indent="0" algn="l">
               <a:buNone/>
             </a:pPr>
             <a:r>
@@ -3642,7 +3544,7 @@
           <a:bodyPr wrap="square" lIns="0" tIns="0" rIns="0" bIns="0" rtlCol="0" anchor="ctr"/>
           <a:lstStyle/>
           <a:p>
-            <a:pPr algn="l" indent="0" marL="0">
+            <a:pPr marL="0" indent="0" algn="l">
               <a:buNone/>
             </a:pPr>
             <a:r>
@@ -3684,6 +3586,13 @@
             <a:prstDash val="solid"/>
           </a:ln>
         </p:spPr>
+        <p:txBody>
+          <a:bodyPr/>
+          <a:lstStyle/>
+          <a:p>
+            <a:endParaRPr lang="en-US"/>
+          </a:p>
+        </p:txBody>
       </p:sp>
       <p:sp>
         <p:nvSpPr>
@@ -3706,7 +3615,7 @@
           <a:bodyPr wrap="square" lIns="0" tIns="0" rIns="0" bIns="0" rtlCol="0" anchor="ctr"/>
           <a:lstStyle/>
           <a:p>
-            <a:pPr algn="l" indent="0" marL="0">
+            <a:pPr marL="0" indent="0" algn="l">
               <a:buNone/>
             </a:pPr>
             <a:r>
@@ -3745,7 +3654,7 @@
           <a:bodyPr wrap="square" lIns="0" tIns="0" rIns="0" bIns="0" rtlCol="0" anchor="ctr"/>
           <a:lstStyle/>
           <a:p>
-            <a:pPr algn="l" indent="0" marL="0">
+            <a:pPr marL="0" indent="0" algn="l">
               <a:buNone/>
             </a:pPr>
             <a:r>
@@ -3787,6 +3696,13 @@
             <a:prstDash val="solid"/>
           </a:ln>
         </p:spPr>
+        <p:txBody>
+          <a:bodyPr/>
+          <a:lstStyle/>
+          <a:p>
+            <a:endParaRPr lang="en-US"/>
+          </a:p>
+        </p:txBody>
       </p:sp>
       <p:sp>
         <p:nvSpPr>
@@ -3809,7 +3725,7 @@
           <a:bodyPr wrap="square" lIns="0" tIns="0" rIns="0" bIns="0" rtlCol="0" anchor="ctr"/>
           <a:lstStyle/>
           <a:p>
-            <a:pPr algn="l" indent="0" marL="0">
+            <a:pPr marL="0" indent="0" algn="l">
               <a:buNone/>
             </a:pPr>
             <a:r>
@@ -3848,7 +3764,7 @@
           <a:bodyPr wrap="square" lIns="0" tIns="0" rIns="0" bIns="0" rtlCol="0" anchor="ctr"/>
           <a:lstStyle/>
           <a:p>
-            <a:pPr algn="l" indent="0" marL="0">
+            <a:pPr marL="0" indent="0" algn="l">
               <a:buNone/>
             </a:pPr>
             <a:r>
@@ -3890,6 +3806,13 @@
             <a:prstDash val="solid"/>
           </a:ln>
         </p:spPr>
+        <p:txBody>
+          <a:bodyPr/>
+          <a:lstStyle/>
+          <a:p>
+            <a:endParaRPr lang="en-US"/>
+          </a:p>
+        </p:txBody>
       </p:sp>
       <p:sp>
         <p:nvSpPr>
@@ -3912,7 +3835,7 @@
           <a:bodyPr wrap="square" lIns="0" tIns="0" rIns="0" bIns="0" rtlCol="0" anchor="ctr"/>
           <a:lstStyle/>
           <a:p>
-            <a:pPr algn="l" indent="0" marL="0">
+            <a:pPr marL="0" indent="0" algn="l">
               <a:buNone/>
             </a:pPr>
             <a:r>
@@ -3951,7 +3874,7 @@
           <a:bodyPr wrap="square" lIns="0" tIns="0" rIns="0" bIns="0" rtlCol="0" anchor="ctr"/>
           <a:lstStyle/>
           <a:p>
-            <a:pPr algn="l" indent="0" marL="0">
+            <a:pPr marL="0" indent="0" algn="l">
               <a:buNone/>
             </a:pPr>
             <a:r>
@@ -3985,6 +3908,7 @@
         <a:solidFill>
           <a:srgbClr val="F4F6F9"/>
         </a:solidFill>
+        <a:effectLst/>
       </p:bgPr>
     </p:bg>
     <p:spTree>
@@ -4025,6 +3949,13 @@
             <a:prstDash val="solid"/>
           </a:ln>
         </p:spPr>
+        <p:txBody>
+          <a:bodyPr/>
+          <a:lstStyle/>
+          <a:p>
+            <a:endParaRPr lang="en-US"/>
+          </a:p>
+        </p:txBody>
       </p:sp>
       <p:sp>
         <p:nvSpPr>
@@ -4047,7 +3978,7 @@
           <a:bodyPr wrap="square" lIns="0" tIns="0" rIns="0" bIns="0" rtlCol="0" anchor="ctr"/>
           <a:lstStyle/>
           <a:p>
-            <a:pPr algn="l" indent="0" marL="0">
+            <a:pPr marL="0" indent="0" algn="l">
               <a:buNone/>
             </a:pPr>
             <a:r>
@@ -4089,6 +4020,13 @@
             <a:prstDash val="solid"/>
           </a:ln>
         </p:spPr>
+        <p:txBody>
+          <a:bodyPr/>
+          <a:lstStyle/>
+          <a:p>
+            <a:endParaRPr lang="en-US"/>
+          </a:p>
+        </p:txBody>
       </p:sp>
       <p:sp>
         <p:nvSpPr>
@@ -4114,6 +4052,13 @@
             <a:prstDash val="solid"/>
           </a:ln>
         </p:spPr>
+        <p:txBody>
+          <a:bodyPr/>
+          <a:lstStyle/>
+          <a:p>
+            <a:endParaRPr lang="en-US"/>
+          </a:p>
+        </p:txBody>
       </p:sp>
       <p:sp>
         <p:nvSpPr>
@@ -4136,7 +4081,7 @@
           <a:bodyPr wrap="square" rtlCol="0" anchor="ctr"/>
           <a:lstStyle/>
           <a:p>
-            <a:pPr algn="ctr" indent="0" marL="0">
+            <a:pPr marL="0" indent="0" algn="ctr">
               <a:buNone/>
             </a:pPr>
             <a:r>
@@ -4150,7 +4095,7 @@
             <a:endParaRPr lang="en-US" sz="1800" dirty="0"/>
           </a:p>
           <a:p>
-            <a:pPr algn="ctr" indent="0" marL="0">
+            <a:pPr marL="0" indent="0" algn="ctr">
               <a:buNone/>
             </a:pPr>
             <a:r>
@@ -4165,7 +4110,7 @@
             <a:endParaRPr lang="en-US" sz="1800" dirty="0"/>
           </a:p>
           <a:p>
-            <a:pPr algn="ctr" indent="0" marL="0">
+            <a:pPr marL="0" indent="0" algn="ctr">
               <a:buNone/>
             </a:pPr>
             <a:r>
@@ -4179,7 +4124,7 @@
             <a:endParaRPr lang="en-US" sz="1800" dirty="0"/>
           </a:p>
           <a:p>
-            <a:pPr algn="ctr" indent="0" marL="0">
+            <a:pPr marL="0" indent="0" algn="ctr">
               <a:buNone/>
             </a:pPr>
             <a:r>
@@ -4193,7 +4138,7 @@
             <a:endParaRPr lang="en-US" sz="1800" dirty="0"/>
           </a:p>
           <a:p>
-            <a:pPr algn="ctr" indent="0" marL="0">
+            <a:pPr marL="0" indent="0" algn="ctr">
               <a:buNone/>
             </a:pPr>
             <a:r>
@@ -4232,6 +4177,13 @@
             <a:prstDash val="solid"/>
           </a:ln>
         </p:spPr>
+        <p:txBody>
+          <a:bodyPr/>
+          <a:lstStyle/>
+          <a:p>
+            <a:endParaRPr lang="en-US"/>
+          </a:p>
+        </p:txBody>
       </p:sp>
       <p:sp>
         <p:nvSpPr>
@@ -4254,7 +4206,7 @@
           <a:bodyPr wrap="square" rtlCol="0" anchor="ctr"/>
           <a:lstStyle/>
           <a:p>
-            <a:pPr algn="ctr" indent="0" marL="0">
+            <a:pPr marL="0" indent="0" algn="ctr">
               <a:buNone/>
             </a:pPr>
             <a:r>
@@ -4268,7 +4220,7 @@
             <a:endParaRPr lang="en-US" sz="1800" dirty="0"/>
           </a:p>
           <a:p>
-            <a:pPr algn="ctr" indent="0" marL="0">
+            <a:pPr marL="0" indent="0" algn="ctr">
               <a:buNone/>
             </a:pPr>
             <a:r>
@@ -4283,7 +4235,7 @@
             <a:endParaRPr lang="en-US" sz="1800" dirty="0"/>
           </a:p>
           <a:p>
-            <a:pPr algn="ctr" indent="0" marL="0">
+            <a:pPr marL="0" indent="0" algn="ctr">
               <a:buNone/>
             </a:pPr>
             <a:r>
@@ -4297,7 +4249,7 @@
             <a:endParaRPr lang="en-US" sz="1800" dirty="0"/>
           </a:p>
           <a:p>
-            <a:pPr algn="ctr" indent="0" marL="0">
+            <a:pPr marL="0" indent="0" algn="ctr">
               <a:buNone/>
             </a:pPr>
             <a:r>
@@ -4311,7 +4263,7 @@
             <a:endParaRPr lang="en-US" sz="1800" dirty="0"/>
           </a:p>
           <a:p>
-            <a:pPr algn="ctr" indent="0" marL="0">
+            <a:pPr marL="0" indent="0" algn="ctr">
               <a:buNone/>
             </a:pPr>
             <a:r>
@@ -4350,6 +4302,13 @@
             <a:prstDash val="solid"/>
           </a:ln>
         </p:spPr>
+        <p:txBody>
+          <a:bodyPr/>
+          <a:lstStyle/>
+          <a:p>
+            <a:endParaRPr lang="en-US"/>
+          </a:p>
+        </p:txBody>
       </p:sp>
       <p:sp>
         <p:nvSpPr>
@@ -4372,7 +4331,7 @@
           <a:bodyPr wrap="square" rtlCol="0" anchor="ctr"/>
           <a:lstStyle/>
           <a:p>
-            <a:pPr algn="ctr" indent="0" marL="0">
+            <a:pPr marL="0" indent="0" algn="ctr">
               <a:buNone/>
             </a:pPr>
             <a:r>
@@ -4386,7 +4345,7 @@
             <a:endParaRPr lang="en-US" sz="2800" dirty="0"/>
           </a:p>
           <a:p>
-            <a:pPr algn="ctr" indent="0" marL="0">
+            <a:pPr marL="0" indent="0" algn="ctr">
               <a:buNone/>
             </a:pPr>
             <a:r>
@@ -4425,6 +4384,13 @@
             <a:prstDash val="solid"/>
           </a:ln>
         </p:spPr>
+        <p:txBody>
+          <a:bodyPr/>
+          <a:lstStyle/>
+          <a:p>
+            <a:endParaRPr lang="en-US"/>
+          </a:p>
+        </p:txBody>
       </p:sp>
       <p:sp>
         <p:nvSpPr>
@@ -4447,7 +4413,7 @@
           <a:bodyPr wrap="square" rtlCol="0" anchor="ctr"/>
           <a:lstStyle/>
           <a:p>
-            <a:pPr algn="ctr" indent="0" marL="0">
+            <a:pPr marL="0" indent="0" algn="ctr">
               <a:buNone/>
             </a:pPr>
             <a:r>
@@ -4461,7 +4427,7 @@
             <a:endParaRPr lang="en-US" sz="2800" dirty="0"/>
           </a:p>
           <a:p>
-            <a:pPr algn="ctr" indent="0" marL="0">
+            <a:pPr marL="0" indent="0" algn="ctr">
               <a:buNone/>
             </a:pPr>
             <a:r>
@@ -4492,6 +4458,7 @@
         <a:solidFill>
           <a:srgbClr val="F4F6F9"/>
         </a:solidFill>
+        <a:effectLst/>
       </p:bgPr>
     </p:bg>
     <p:spTree>
@@ -4532,6 +4499,13 @@
             <a:prstDash val="solid"/>
           </a:ln>
         </p:spPr>
+        <p:txBody>
+          <a:bodyPr/>
+          <a:lstStyle/>
+          <a:p>
+            <a:endParaRPr lang="en-US"/>
+          </a:p>
+        </p:txBody>
       </p:sp>
       <p:sp>
         <p:nvSpPr>
@@ -4554,7 +4528,7 @@
           <a:bodyPr wrap="square" lIns="0" tIns="0" rIns="0" bIns="0" rtlCol="0" anchor="ctr"/>
           <a:lstStyle/>
           <a:p>
-            <a:pPr algn="l" indent="0" marL="0">
+            <a:pPr marL="0" indent="0" algn="l">
               <a:buNone/>
             </a:pPr>
             <a:r>
@@ -4596,6 +4570,13 @@
             <a:prstDash val="solid"/>
           </a:ln>
         </p:spPr>
+        <p:txBody>
+          <a:bodyPr/>
+          <a:lstStyle/>
+          <a:p>
+            <a:endParaRPr lang="en-US"/>
+          </a:p>
+        </p:txBody>
       </p:sp>
       <p:sp>
         <p:nvSpPr>
@@ -4621,6 +4602,13 @@
             <a:prstDash val="solid"/>
           </a:ln>
         </p:spPr>
+        <p:txBody>
+          <a:bodyPr/>
+          <a:lstStyle/>
+          <a:p>
+            <a:endParaRPr lang="en-US"/>
+          </a:p>
+        </p:txBody>
       </p:sp>
       <p:sp>
         <p:nvSpPr>
@@ -4643,7 +4631,7 @@
           <a:bodyPr wrap="square" rtlCol="0" anchor="ctr"/>
           <a:lstStyle/>
           <a:p>
-            <a:pPr algn="ctr" indent="0" marL="0">
+            <a:pPr marL="0" indent="0" algn="ctr">
               <a:buNone/>
             </a:pPr>
             <a:r>
@@ -4657,7 +4645,7 @@
             <a:endParaRPr lang="en-US" sz="1500" dirty="0"/>
           </a:p>
           <a:p>
-            <a:pPr algn="ctr" indent="0" marL="0">
+            <a:pPr marL="0" indent="0" algn="ctr">
               <a:buNone/>
             </a:pPr>
             <a:r>
@@ -4672,7 +4660,7 @@
             <a:endParaRPr lang="en-US" sz="1500" dirty="0"/>
           </a:p>
           <a:p>
-            <a:pPr algn="ctr" indent="0" marL="0">
+            <a:pPr marL="0" indent="0" algn="ctr">
               <a:buNone/>
             </a:pPr>
             <a:r>
@@ -4711,6 +4699,13 @@
             <a:prstDash val="solid"/>
           </a:ln>
         </p:spPr>
+        <p:txBody>
+          <a:bodyPr/>
+          <a:lstStyle/>
+          <a:p>
+            <a:endParaRPr lang="en-US"/>
+          </a:p>
+        </p:txBody>
       </p:sp>
       <p:sp>
         <p:nvSpPr>
@@ -4733,7 +4728,7 @@
           <a:bodyPr wrap="square" rtlCol="0" anchor="ctr"/>
           <a:lstStyle/>
           <a:p>
-            <a:pPr algn="ctr" indent="0" marL="0">
+            <a:pPr marL="0" indent="0" algn="ctr">
               <a:buNone/>
             </a:pPr>
             <a:r>
@@ -4747,7 +4742,7 @@
             <a:endParaRPr lang="en-US" sz="1500" dirty="0"/>
           </a:p>
           <a:p>
-            <a:pPr algn="ctr" indent="0" marL="0">
+            <a:pPr marL="0" indent="0" algn="ctr">
               <a:buNone/>
             </a:pPr>
             <a:r>
@@ -4762,7 +4757,7 @@
             <a:endParaRPr lang="en-US" sz="1500" dirty="0"/>
           </a:p>
           <a:p>
-            <a:pPr algn="ctr" indent="0" marL="0">
+            <a:pPr marL="0" indent="0" algn="ctr">
               <a:buNone/>
             </a:pPr>
             <a:r>
@@ -4801,6 +4796,13 @@
             <a:prstDash val="solid"/>
           </a:ln>
         </p:spPr>
+        <p:txBody>
+          <a:bodyPr/>
+          <a:lstStyle/>
+          <a:p>
+            <a:endParaRPr lang="en-US"/>
+          </a:p>
+        </p:txBody>
       </p:sp>
       <p:sp>
         <p:nvSpPr>
@@ -4823,7 +4825,7 @@
           <a:bodyPr wrap="square" rtlCol="0" anchor="ctr"/>
           <a:lstStyle/>
           <a:p>
-            <a:pPr algn="ctr" indent="0" marL="0">
+            <a:pPr marL="0" indent="0" algn="ctr">
               <a:buNone/>
             </a:pPr>
             <a:r>
@@ -4837,7 +4839,7 @@
             <a:endParaRPr lang="en-US" sz="1500" dirty="0"/>
           </a:p>
           <a:p>
-            <a:pPr algn="ctr" indent="0" marL="0">
+            <a:pPr marL="0" indent="0" algn="ctr">
               <a:buNone/>
             </a:pPr>
             <a:r>
@@ -4852,7 +4854,7 @@
             <a:endParaRPr lang="en-US" sz="1500" dirty="0"/>
           </a:p>
           <a:p>
-            <a:pPr algn="ctr" indent="0" marL="0">
+            <a:pPr marL="0" indent="0" algn="ctr">
               <a:buNone/>
             </a:pPr>
             <a:r>
@@ -4891,6 +4893,13 @@
             <a:prstDash val="solid"/>
           </a:ln>
         </p:spPr>
+        <p:txBody>
+          <a:bodyPr/>
+          <a:lstStyle/>
+          <a:p>
+            <a:endParaRPr lang="en-US"/>
+          </a:p>
+        </p:txBody>
       </p:sp>
       <p:sp>
         <p:nvSpPr>
@@ -4913,7 +4922,7 @@
           <a:bodyPr wrap="square" rtlCol="0" anchor="ctr"/>
           <a:lstStyle/>
           <a:p>
-            <a:pPr algn="ctr" indent="0" marL="0">
+            <a:pPr marL="0" indent="0" algn="ctr">
               <a:buNone/>
             </a:pPr>
             <a:r>
@@ -4927,7 +4936,7 @@
             <a:endParaRPr lang="en-US" sz="1500" dirty="0"/>
           </a:p>
           <a:p>
-            <a:pPr algn="ctr" indent="0" marL="0">
+            <a:pPr marL="0" indent="0" algn="ctr">
               <a:buNone/>
             </a:pPr>
             <a:r>
@@ -4942,7 +4951,7 @@
             <a:endParaRPr lang="en-US" sz="1500" dirty="0"/>
           </a:p>
           <a:p>
-            <a:pPr algn="ctr" indent="0" marL="0">
+            <a:pPr marL="0" indent="0" algn="ctr">
               <a:buNone/>
             </a:pPr>
             <a:r>
@@ -4981,6 +4990,13 @@
             <a:prstDash val="solid"/>
           </a:ln>
         </p:spPr>
+        <p:txBody>
+          <a:bodyPr/>
+          <a:lstStyle/>
+          <a:p>
+            <a:endParaRPr lang="en-US"/>
+          </a:p>
+        </p:txBody>
       </p:sp>
       <p:sp>
         <p:nvSpPr>
@@ -5003,7 +5019,7 @@
           <a:bodyPr wrap="square" rtlCol="0" anchor="ctr"/>
           <a:lstStyle/>
           <a:p>
-            <a:pPr algn="ctr" indent="0" marL="0">
+            <a:pPr marL="0" indent="0" algn="ctr">
               <a:buNone/>
             </a:pPr>
             <a:r>
@@ -5017,7 +5033,7 @@
             <a:endParaRPr lang="en-US" sz="1500" dirty="0"/>
           </a:p>
           <a:p>
-            <a:pPr algn="ctr" indent="0" marL="0">
+            <a:pPr marL="0" indent="0" algn="ctr">
               <a:buNone/>
             </a:pPr>
             <a:r>
@@ -5032,7 +5048,7 @@
             <a:endParaRPr lang="en-US" sz="1500" dirty="0"/>
           </a:p>
           <a:p>
-            <a:pPr algn="ctr" indent="0" marL="0">
+            <a:pPr marL="0" indent="0" algn="ctr">
               <a:buNone/>
             </a:pPr>
             <a:r>
@@ -5071,6 +5087,13 @@
             <a:prstDash val="solid"/>
           </a:ln>
         </p:spPr>
+        <p:txBody>
+          <a:bodyPr/>
+          <a:lstStyle/>
+          <a:p>
+            <a:endParaRPr lang="en-US"/>
+          </a:p>
+        </p:txBody>
       </p:sp>
       <p:sp>
         <p:nvSpPr>
@@ -5093,7 +5116,7 @@
           <a:bodyPr wrap="square" rtlCol="0" anchor="ctr"/>
           <a:lstStyle/>
           <a:p>
-            <a:pPr algn="ctr" indent="0" marL="0">
+            <a:pPr marL="0" indent="0" algn="ctr">
               <a:buNone/>
             </a:pPr>
             <a:r>
@@ -5107,7 +5130,7 @@
             <a:endParaRPr lang="en-US" sz="1500" dirty="0"/>
           </a:p>
           <a:p>
-            <a:pPr algn="ctr" indent="0" marL="0">
+            <a:pPr marL="0" indent="0" algn="ctr">
               <a:buNone/>
             </a:pPr>
             <a:r>
@@ -5122,7 +5145,7 @@
             <a:endParaRPr lang="en-US" sz="1500" dirty="0"/>
           </a:p>
           <a:p>
-            <a:pPr algn="ctr" indent="0" marL="0">
+            <a:pPr marL="0" indent="0" algn="ctr">
               <a:buNone/>
             </a:pPr>
             <a:r>
@@ -5158,7 +5181,7 @@
           <a:bodyPr wrap="square" rtlCol="0" anchor="ctr"/>
           <a:lstStyle/>
           <a:p>
-            <a:pPr algn="ctr" indent="0" marL="0">
+            <a:pPr marL="0" indent="0" algn="ctr">
               <a:buNone/>
             </a:pPr>
             <a:r>
@@ -5192,6 +5215,7 @@
         <a:solidFill>
           <a:srgbClr val="F4F6F9"/>
         </a:solidFill>
+        <a:effectLst/>
       </p:bgPr>
     </p:bg>
     <p:spTree>
@@ -5232,6 +5256,13 @@
             <a:prstDash val="solid"/>
           </a:ln>
         </p:spPr>
+        <p:txBody>
+          <a:bodyPr/>
+          <a:lstStyle/>
+          <a:p>
+            <a:endParaRPr lang="en-US"/>
+          </a:p>
+        </p:txBody>
       </p:sp>
       <p:sp>
         <p:nvSpPr>
@@ -5254,7 +5285,7 @@
           <a:bodyPr wrap="square" lIns="0" tIns="0" rIns="0" bIns="0" rtlCol="0" anchor="ctr"/>
           <a:lstStyle/>
           <a:p>
-            <a:pPr algn="l" indent="0" marL="0">
+            <a:pPr marL="0" indent="0" algn="l">
               <a:buNone/>
             </a:pPr>
             <a:r>
@@ -5296,6 +5327,13 @@
             <a:prstDash val="solid"/>
           </a:ln>
         </p:spPr>
+        <p:txBody>
+          <a:bodyPr/>
+          <a:lstStyle/>
+          <a:p>
+            <a:endParaRPr lang="en-US"/>
+          </a:p>
+        </p:txBody>
       </p:sp>
       <p:sp>
         <p:nvSpPr>
@@ -5321,6 +5359,13 @@
             <a:prstDash val="solid"/>
           </a:ln>
         </p:spPr>
+        <p:txBody>
+          <a:bodyPr/>
+          <a:lstStyle/>
+          <a:p>
+            <a:endParaRPr lang="en-US"/>
+          </a:p>
+        </p:txBody>
       </p:sp>
       <p:sp>
         <p:nvSpPr>
@@ -5343,7 +5388,7 @@
           <a:bodyPr wrap="square" lIns="0" tIns="0" rIns="0" bIns="0" rtlCol="0" anchor="ctr"/>
           <a:lstStyle/>
           <a:p>
-            <a:pPr algn="ctr" indent="0" marL="0">
+            <a:pPr marL="0" indent="0" algn="ctr">
               <a:buNone/>
             </a:pPr>
             <a:r>
@@ -5379,7 +5424,7 @@
           <a:bodyPr wrap="square" rtlCol="0" anchor="ctr"/>
           <a:lstStyle/>
           <a:p>
-            <a:pPr algn="l" indent="0" marL="0">
+            <a:pPr marL="0" indent="0" algn="l">
               <a:buNone/>
             </a:pPr>
             <a:r>
@@ -5421,6 +5466,13 @@
             <a:prstDash val="solid"/>
           </a:ln>
         </p:spPr>
+        <p:txBody>
+          <a:bodyPr/>
+          <a:lstStyle/>
+          <a:p>
+            <a:endParaRPr lang="en-US"/>
+          </a:p>
+        </p:txBody>
       </p:sp>
       <p:sp>
         <p:nvSpPr>
@@ -5443,7 +5495,7 @@
           <a:bodyPr wrap="square" lIns="0" tIns="0" rIns="0" bIns="0" rtlCol="0" anchor="ctr"/>
           <a:lstStyle/>
           <a:p>
-            <a:pPr algn="ctr" indent="0" marL="0">
+            <a:pPr marL="0" indent="0" algn="ctr">
               <a:buNone/>
             </a:pPr>
             <a:r>
@@ -5479,7 +5531,7 @@
           <a:bodyPr wrap="square" rtlCol="0" anchor="ctr"/>
           <a:lstStyle/>
           <a:p>
-            <a:pPr algn="l" indent="0" marL="0">
+            <a:pPr marL="0" indent="0" algn="l">
               <a:buNone/>
             </a:pPr>
             <a:r>
@@ -5521,6 +5573,13 @@
             <a:prstDash val="solid"/>
           </a:ln>
         </p:spPr>
+        <p:txBody>
+          <a:bodyPr/>
+          <a:lstStyle/>
+          <a:p>
+            <a:endParaRPr lang="en-US"/>
+          </a:p>
+        </p:txBody>
       </p:sp>
       <p:sp>
         <p:nvSpPr>
@@ -5543,7 +5602,7 @@
           <a:bodyPr wrap="square" lIns="0" tIns="0" rIns="0" bIns="0" rtlCol="0" anchor="ctr"/>
           <a:lstStyle/>
           <a:p>
-            <a:pPr algn="ctr" indent="0" marL="0">
+            <a:pPr marL="0" indent="0" algn="ctr">
               <a:buNone/>
             </a:pPr>
             <a:r>
@@ -5579,7 +5638,7 @@
           <a:bodyPr wrap="square" rtlCol="0" anchor="ctr"/>
           <a:lstStyle/>
           <a:p>
-            <a:pPr algn="l" indent="0" marL="0">
+            <a:pPr marL="0" indent="0" algn="l">
               <a:buNone/>
             </a:pPr>
             <a:r>
@@ -5621,6 +5680,13 @@
             <a:prstDash val="solid"/>
           </a:ln>
         </p:spPr>
+        <p:txBody>
+          <a:bodyPr/>
+          <a:lstStyle/>
+          <a:p>
+            <a:endParaRPr lang="en-US"/>
+          </a:p>
+        </p:txBody>
       </p:sp>
       <p:sp>
         <p:nvSpPr>
@@ -5643,7 +5709,7 @@
           <a:bodyPr wrap="square" lIns="0" tIns="0" rIns="0" bIns="0" rtlCol="0" anchor="ctr"/>
           <a:lstStyle/>
           <a:p>
-            <a:pPr algn="ctr" indent="0" marL="0">
+            <a:pPr marL="0" indent="0" algn="ctr">
               <a:buNone/>
             </a:pPr>
             <a:r>
@@ -5679,7 +5745,7 @@
           <a:bodyPr wrap="square" rtlCol="0" anchor="ctr"/>
           <a:lstStyle/>
           <a:p>
-            <a:pPr algn="l" indent="0" marL="0">
+            <a:pPr marL="0" indent="0" algn="l">
               <a:buNone/>
             </a:pPr>
             <a:r>
@@ -5721,6 +5787,13 @@
             <a:prstDash val="solid"/>
           </a:ln>
         </p:spPr>
+        <p:txBody>
+          <a:bodyPr/>
+          <a:lstStyle/>
+          <a:p>
+            <a:endParaRPr lang="en-US"/>
+          </a:p>
+        </p:txBody>
       </p:sp>
       <p:sp>
         <p:nvSpPr>
@@ -5743,7 +5816,7 @@
           <a:bodyPr wrap="square" lIns="0" tIns="0" rIns="0" bIns="0" rtlCol="0" anchor="ctr"/>
           <a:lstStyle/>
           <a:p>
-            <a:pPr algn="ctr" indent="0" marL="0">
+            <a:pPr marL="0" indent="0" algn="ctr">
               <a:buNone/>
             </a:pPr>
             <a:r>
@@ -5779,7 +5852,7 @@
           <a:bodyPr wrap="square" rtlCol="0" anchor="ctr"/>
           <a:lstStyle/>
           <a:p>
-            <a:pPr algn="l" indent="0" marL="0">
+            <a:pPr marL="0" indent="0" algn="l">
               <a:buNone/>
             </a:pPr>
             <a:r>
@@ -5821,6 +5894,13 @@
             <a:prstDash val="solid"/>
           </a:ln>
         </p:spPr>
+        <p:txBody>
+          <a:bodyPr/>
+          <a:lstStyle/>
+          <a:p>
+            <a:endParaRPr lang="en-US"/>
+          </a:p>
+        </p:txBody>
       </p:sp>
       <p:sp>
         <p:nvSpPr>
@@ -5843,7 +5923,7 @@
           <a:bodyPr wrap="square" lIns="0" tIns="0" rIns="0" bIns="0" rtlCol="0" anchor="ctr"/>
           <a:lstStyle/>
           <a:p>
-            <a:pPr algn="ctr" indent="0" marL="0">
+            <a:pPr marL="0" indent="0" algn="ctr">
               <a:buNone/>
             </a:pPr>
             <a:r>
@@ -5879,7 +5959,7 @@
           <a:bodyPr wrap="square" rtlCol="0" anchor="ctr"/>
           <a:lstStyle/>
           <a:p>
-            <a:pPr algn="l" indent="0" marL="0">
+            <a:pPr marL="0" indent="0" algn="l">
               <a:buNone/>
             </a:pPr>
             <a:r>
@@ -5921,6 +6001,13 @@
             <a:prstDash val="solid"/>
           </a:ln>
         </p:spPr>
+        <p:txBody>
+          <a:bodyPr/>
+          <a:lstStyle/>
+          <a:p>
+            <a:endParaRPr lang="en-US"/>
+          </a:p>
+        </p:txBody>
       </p:sp>
       <p:sp>
         <p:nvSpPr>
@@ -5943,7 +6030,7 @@
           <a:bodyPr wrap="square" lIns="0" tIns="0" rIns="0" bIns="0" rtlCol="0" anchor="ctr"/>
           <a:lstStyle/>
           <a:p>
-            <a:pPr algn="ctr" indent="0" marL="0">
+            <a:pPr marL="0" indent="0" algn="ctr">
               <a:buNone/>
             </a:pPr>
             <a:r>
@@ -5979,7 +6066,7 @@
           <a:bodyPr wrap="square" rtlCol="0" anchor="ctr"/>
           <a:lstStyle/>
           <a:p>
-            <a:pPr algn="l" indent="0" marL="0">
+            <a:pPr marL="0" indent="0" algn="l">
               <a:buNone/>
             </a:pPr>
             <a:r>
@@ -6021,6 +6108,13 @@
             <a:prstDash val="solid"/>
           </a:ln>
         </p:spPr>
+        <p:txBody>
+          <a:bodyPr/>
+          <a:lstStyle/>
+          <a:p>
+            <a:endParaRPr lang="en-US"/>
+          </a:p>
+        </p:txBody>
       </p:sp>
       <p:sp>
         <p:nvSpPr>
@@ -6043,7 +6137,7 @@
           <a:bodyPr wrap="square" lIns="0" tIns="0" rIns="0" bIns="0" rtlCol="0" anchor="ctr"/>
           <a:lstStyle/>
           <a:p>
-            <a:pPr algn="ctr" indent="0" marL="0">
+            <a:pPr marL="0" indent="0" algn="ctr">
               <a:buNone/>
             </a:pPr>
             <a:r>
@@ -6079,7 +6173,7 @@
           <a:bodyPr wrap="square" rtlCol="0" anchor="ctr"/>
           <a:lstStyle/>
           <a:p>
-            <a:pPr algn="l" indent="0" marL="0">
+            <a:pPr marL="0" indent="0" algn="l">
               <a:buNone/>
             </a:pPr>
             <a:r>
@@ -6119,6 +6213,13 @@
             <a:prstDash val="dash"/>
           </a:ln>
         </p:spPr>
+        <p:txBody>
+          <a:bodyPr/>
+          <a:lstStyle/>
+          <a:p>
+            <a:endParaRPr lang="en-US"/>
+          </a:p>
+        </p:txBody>
       </p:sp>
     </p:spTree>
   </p:cSld>
@@ -6136,6 +6237,7 @@
         <a:solidFill>
           <a:srgbClr val="1E3A5F"/>
         </a:solidFill>
+        <a:effectLst/>
       </p:bgPr>
     </p:bg>
     <p:spTree>
@@ -6173,7 +6275,7 @@
           <a:bodyPr wrap="square" rtlCol="0" anchor="ctr"/>
           <a:lstStyle/>
           <a:p>
-            <a:pPr algn="l" indent="0" marL="0">
+            <a:pPr marL="0" indent="0" algn="l">
               <a:buNone/>
             </a:pPr>
             <a:r>
@@ -6185,45 +6287,68 @@
                 <a:ea typeface="Calibri" pitchFamily="34" charset="-122"/>
                 <a:cs typeface="Calibri" pitchFamily="34" charset="-120"/>
               </a:rPr>
-              <a:t>Next Steps</a:t>
-            </a:r>
-            <a:endParaRPr lang="en-US" sz="4400" dirty="0"/>
-          </a:p>
-        </p:txBody>
-      </p:sp>
-      <p:sp>
-        <p:nvSpPr>
-          <p:cNvPr id="3" name="Text 1"/>
-          <p:cNvSpPr/>
-          <p:nvPr/>
-        </p:nvSpPr>
-        <p:spPr>
-          <a:xfrm>
-            <a:off x="457200" y="1371600"/>
-            <a:ext cx="457200" cy="731520"/>
-          </a:xfrm>
-          <a:prstGeom prst="rect">
-            <a:avLst/>
-          </a:prstGeom>
-          <a:noFill/>
-          <a:ln/>
-        </p:spPr>
-        <p:txBody>
-          <a:bodyPr wrap="square" lIns="0" tIns="0" rIns="0" bIns="0" rtlCol="0" anchor="ctr"/>
-          <a:lstStyle/>
-          <a:p>
-            <a:pPr algn="ctr" indent="0" marL="0">
-              <a:buNone/>
-            </a:pPr>
-            <a:r>
-              <a:rPr lang="en-US" sz="3000" b="1" dirty="0">
-                <a:solidFill>
-                  <a:srgbClr val="C9A84C"/>
+              <a:t>Next Steps </a:t>
+            </a:r>
+            <a:r>
+              <a:rPr lang="en-US" sz="4400" b="1">
+                <a:solidFill>
+                  <a:srgbClr val="FFFFFF"/>
                 </a:solidFill>
                 <a:latin typeface="Calibri" pitchFamily="34" charset="0"/>
                 <a:ea typeface="Calibri" pitchFamily="34" charset="-122"/>
                 <a:cs typeface="Calibri" pitchFamily="34" charset="-120"/>
               </a:rPr>
+              <a:t>(from Claude </a:t>
+            </a:r>
+            <a:r>
+              <a:rPr lang="en-US" sz="4400" b="1">
+                <a:solidFill>
+                  <a:srgbClr val="FFFFFF"/>
+                </a:solidFill>
+                <a:latin typeface="Calibri" pitchFamily="34" charset="0"/>
+                <a:ea typeface="Calibri" pitchFamily="34" charset="-122"/>
+                <a:cs typeface="Calibri" pitchFamily="34" charset="-120"/>
+                <a:sym typeface="Wingdings" panose="05000000000000000000" pitchFamily="2" charset="2"/>
+              </a:rPr>
+              <a:t>)</a:t>
+            </a:r>
+            <a:endParaRPr lang="en-US" sz="4400" dirty="0"/>
+          </a:p>
+        </p:txBody>
+      </p:sp>
+      <p:sp>
+        <p:nvSpPr>
+          <p:cNvPr id="3" name="Text 1"/>
+          <p:cNvSpPr/>
+          <p:nvPr/>
+        </p:nvSpPr>
+        <p:spPr>
+          <a:xfrm>
+            <a:off x="457200" y="1371600"/>
+            <a:ext cx="457200" cy="731520"/>
+          </a:xfrm>
+          <a:prstGeom prst="rect">
+            <a:avLst/>
+          </a:prstGeom>
+          <a:noFill/>
+          <a:ln/>
+        </p:spPr>
+        <p:txBody>
+          <a:bodyPr wrap="square" lIns="0" tIns="0" rIns="0" bIns="0" rtlCol="0" anchor="ctr"/>
+          <a:lstStyle/>
+          <a:p>
+            <a:pPr marL="0" indent="0" algn="ctr">
+              <a:buNone/>
+            </a:pPr>
+            <a:r>
+              <a:rPr lang="en-US" sz="3000" b="1" dirty="0">
+                <a:solidFill>
+                  <a:srgbClr val="C9A84C"/>
+                </a:solidFill>
+                <a:latin typeface="Calibri" pitchFamily="34" charset="0"/>
+                <a:ea typeface="Calibri" pitchFamily="34" charset="-122"/>
+                <a:cs typeface="Calibri" pitchFamily="34" charset="-120"/>
+              </a:rPr>
               <a:t>1</a:t>
             </a:r>
             <a:endParaRPr lang="en-US" sz="3000" dirty="0"/>
@@ -6251,7 +6376,7 @@
           <a:bodyPr wrap="square" rtlCol="0" anchor="ctr"/>
           <a:lstStyle/>
           <a:p>
-            <a:pPr algn="l" indent="0" marL="0">
+            <a:pPr marL="0" indent="0" algn="l">
               <a:buNone/>
             </a:pPr>
             <a:r>
@@ -6290,7 +6415,7 @@
           <a:bodyPr wrap="square" lIns="0" tIns="0" rIns="0" bIns="0" rtlCol="0" anchor="ctr"/>
           <a:lstStyle/>
           <a:p>
-            <a:pPr algn="ctr" indent="0" marL="0">
+            <a:pPr marL="0" indent="0" algn="ctr">
               <a:buNone/>
             </a:pPr>
             <a:r>
@@ -6329,7 +6454,7 @@
           <a:bodyPr wrap="square" rtlCol="0" anchor="ctr"/>
           <a:lstStyle/>
           <a:p>
-            <a:pPr algn="l" indent="0" marL="0">
+            <a:pPr marL="0" indent="0" algn="l">
               <a:buNone/>
             </a:pPr>
             <a:r>
@@ -6368,7 +6493,7 @@
           <a:bodyPr wrap="square" lIns="0" tIns="0" rIns="0" bIns="0" rtlCol="0" anchor="ctr"/>
           <a:lstStyle/>
           <a:p>
-            <a:pPr algn="ctr" indent="0" marL="0">
+            <a:pPr marL="0" indent="0" algn="ctr">
               <a:buNone/>
             </a:pPr>
             <a:r>
@@ -6407,7 +6532,7 @@
           <a:bodyPr wrap="square" rtlCol="0" anchor="ctr"/>
           <a:lstStyle/>
           <a:p>
-            <a:pPr algn="l" indent="0" marL="0">
+            <a:pPr marL="0" indent="0" algn="l">
               <a:buNone/>
             </a:pPr>
             <a:r>
@@ -6446,7 +6571,7 @@
           <a:bodyPr wrap="square" lIns="0" tIns="0" rIns="0" bIns="0" rtlCol="0" anchor="ctr"/>
           <a:lstStyle/>
           <a:p>
-            <a:pPr algn="ctr" indent="0" marL="0">
+            <a:pPr marL="0" indent="0" algn="ctr">
               <a:buNone/>
             </a:pPr>
             <a:r>
@@ -6485,7 +6610,7 @@
           <a:bodyPr wrap="square" rtlCol="0" anchor="ctr"/>
           <a:lstStyle/>
           <a:p>
-            <a:pPr algn="l" indent="0" marL="0">
+            <a:pPr marL="0" indent="0" algn="l">
               <a:buNone/>
             </a:pPr>
             <a:r>
@@ -6527,6 +6652,13 @@
             <a:prstDash val="solid"/>
           </a:ln>
         </p:spPr>
+        <p:txBody>
+          <a:bodyPr/>
+          <a:lstStyle/>
+          <a:p>
+            <a:endParaRPr lang="en-US"/>
+          </a:p>
+        </p:txBody>
       </p:sp>
       <p:sp>
         <p:nvSpPr>
@@ -6549,7 +6681,7 @@
           <a:bodyPr wrap="square" rtlCol="0" anchor="ctr"/>
           <a:lstStyle/>
           <a:p>
-            <a:pPr algn="ctr" indent="0" marL="0">
+            <a:pPr marL="0" indent="0" algn="ctr">
               <a:buNone/>
             </a:pPr>
             <a:r>
@@ -6560,9 +6692,6 @@
               </a:rPr>
               <a:t>John Weisenfeld  ·  jweisenfeld@psd1.org     </a:t>
             </a:r>
-            <a:pPr algn="ctr" indent="0" marL="0">
-              <a:buNone/>
-            </a:pPr>
             <a:r>
               <a:rPr lang="en-US" sz="1400" b="1" dirty="0">
                 <a:solidFill>
@@ -6876,4 +7005,319 @@
     </a:ext>
   </a:extLst>
 </a:theme>
+</file>
+
+<file path=ppt/theme/theme2.xml><?xml version="1.0" encoding="utf-8"?>
+<a:theme xmlns:a="http://schemas.openxmlformats.org/drawingml/2006/main" name="Office Theme">
+  <a:themeElements>
+    <a:clrScheme name="Office">
+      <a:dk1>
+        <a:sysClr val="windowText" lastClr="000000"/>
+      </a:dk1>
+      <a:lt1>
+        <a:sysClr val="window" lastClr="FFFFFF"/>
+      </a:lt1>
+      <a:dk2>
+        <a:srgbClr val="0E2841"/>
+      </a:dk2>
+      <a:lt2>
+        <a:srgbClr val="E8E8E8"/>
+      </a:lt2>
+      <a:accent1>
+        <a:srgbClr val="156082"/>
+      </a:accent1>
+      <a:accent2>
+        <a:srgbClr val="E97132"/>
+      </a:accent2>
+      <a:accent3>
+        <a:srgbClr val="196B24"/>
+      </a:accent3>
+      <a:accent4>
+        <a:srgbClr val="0F9ED5"/>
+      </a:accent4>
+      <a:accent5>
+        <a:srgbClr val="A02B93"/>
+      </a:accent5>
+      <a:accent6>
+        <a:srgbClr val="4EA72E"/>
+      </a:accent6>
+      <a:hlink>
+        <a:srgbClr val="467886"/>
+      </a:hlink>
+      <a:folHlink>
+        <a:srgbClr val="96607D"/>
+      </a:folHlink>
+    </a:clrScheme>
+    <a:fontScheme name="Office">
+      <a:majorFont>
+        <a:latin typeface="Aptos Display" panose="02110004020202020204"/>
+        <a:ea typeface=""/>
+        <a:cs typeface=""/>
+        <a:font script="Jpan" typeface="游ゴシック Light"/>
+        <a:font script="Hang" typeface="맑은 고딕"/>
+        <a:font script="Hans" typeface="等线 Light"/>
+        <a:font script="Hant" typeface="新細明體"/>
+        <a:font script="Arab" typeface="Times New Roman"/>
+        <a:font script="Hebr" typeface="Times New Roman"/>
+        <a:font script="Thai" typeface="Angsana New"/>
+        <a:font script="Ethi" typeface="Nyala"/>
+        <a:font script="Beng" typeface="Vrinda"/>
+        <a:font script="Gujr" typeface="Shruti"/>
+        <a:font script="Khmr" typeface="MoolBoran"/>
+        <a:font script="Knda" typeface="Tunga"/>
+        <a:font script="Guru" typeface="Raavi"/>
+        <a:font script="Cans" typeface="Euphemia"/>
+        <a:font script="Cher" typeface="Plantagenet Cherokee"/>
+        <a:font script="Yiii" typeface="Microsoft Yi Baiti"/>
+        <a:font script="Tibt" typeface="Microsoft Himalaya"/>
+        <a:font script="Thaa" typeface="MV Boli"/>
+        <a:font script="Deva" typeface="Mangal"/>
+        <a:font script="Telu" typeface="Gautami"/>
+        <a:font script="Taml" typeface="Latha"/>
+        <a:font script="Syrc" typeface="Estrangelo Edessa"/>
+        <a:font script="Orya" typeface="Kalinga"/>
+        <a:font script="Mlym" typeface="Kartika"/>
+        <a:font script="Laoo" typeface="DokChampa"/>
+        <a:font script="Sinh" typeface="Iskoola Pota"/>
+        <a:font script="Mong" typeface="Mongolian Baiti"/>
+        <a:font script="Viet" typeface="Times New Roman"/>
+        <a:font script="Uigh" typeface="Microsoft Uighur"/>
+        <a:font script="Geor" typeface="Sylfaen"/>
+        <a:font script="Armn" typeface="Arial"/>
+        <a:font script="Bugi" typeface="Leelawadee UI"/>
+        <a:font script="Bopo" typeface="Microsoft JhengHei"/>
+        <a:font script="Java" typeface="Javanese Text"/>
+        <a:font script="Lisu" typeface="Segoe UI"/>
+        <a:font script="Mymr" typeface="Myanmar Text"/>
+        <a:font script="Nkoo" typeface="Ebrima"/>
+        <a:font script="Olck" typeface="Nirmala UI"/>
+        <a:font script="Osma" typeface="Ebrima"/>
+        <a:font script="Phag" typeface="Phagspa"/>
+        <a:font script="Syrn" typeface="Estrangelo Edessa"/>
+        <a:font script="Syrj" typeface="Estrangelo Edessa"/>
+        <a:font script="Syre" typeface="Estrangelo Edessa"/>
+        <a:font script="Sora" typeface="Nirmala UI"/>
+        <a:font script="Tale" typeface="Microsoft Tai Le"/>
+        <a:font script="Talu" typeface="Microsoft New Tai Lue"/>
+        <a:font script="Tfng" typeface="Ebrima"/>
+      </a:majorFont>
+      <a:minorFont>
+        <a:latin typeface="Aptos" panose="02110004020202020204"/>
+        <a:ea typeface=""/>
+        <a:cs typeface=""/>
+        <a:font script="Jpan" typeface="游ゴシック"/>
+        <a:font script="Hang" typeface="맑은 고딕"/>
+        <a:font script="Hans" typeface="等线"/>
+        <a:font script="Hant" typeface="新細明體"/>
+        <a:font script="Arab" typeface="Arial"/>
+        <a:font script="Hebr" typeface="Arial"/>
+        <a:font script="Thai" typeface="Cordia New"/>
+        <a:font script="Ethi" typeface="Nyala"/>
+        <a:font script="Beng" typeface="Vrinda"/>
+        <a:font script="Gujr" typeface="Shruti"/>
+        <a:font script="Khmr" typeface="DaunPenh"/>
+        <a:font script="Knda" typeface="Tunga"/>
+        <a:font script="Guru" typeface="Raavi"/>
+        <a:font script="Cans" typeface="Euphemia"/>
+        <a:font script="Cher" typeface="Plantagenet Cherokee"/>
+        <a:font script="Yiii" typeface="Microsoft Yi Baiti"/>
+        <a:font script="Tibt" typeface="Microsoft Himalaya"/>
+        <a:font script="Thaa" typeface="MV Boli"/>
+        <a:font script="Deva" typeface="Mangal"/>
+        <a:font script="Telu" typeface="Gautami"/>
+        <a:font script="Taml" typeface="Latha"/>
+        <a:font script="Syrc" typeface="Estrangelo Edessa"/>
+        <a:font script="Orya" typeface="Kalinga"/>
+        <a:font script="Mlym" typeface="Kartika"/>
+        <a:font script="Laoo" typeface="DokChampa"/>
+        <a:font script="Sinh" typeface="Iskoola Pota"/>
+        <a:font script="Mong" typeface="Mongolian Baiti"/>
+        <a:font script="Viet" typeface="Arial"/>
+        <a:font script="Uigh" typeface="Microsoft Uighur"/>
+        <a:font script="Geor" typeface="Sylfaen"/>
+        <a:font script="Armn" typeface="Arial"/>
+        <a:font script="Bugi" typeface="Leelawadee UI"/>
+        <a:font script="Bopo" typeface="Microsoft JhengHei"/>
+        <a:font script="Java" typeface="Javanese Text"/>
+        <a:font script="Lisu" typeface="Segoe UI"/>
+        <a:font script="Mymr" typeface="Myanmar Text"/>
+        <a:font script="Nkoo" typeface="Ebrima"/>
+        <a:font script="Olck" typeface="Nirmala UI"/>
+        <a:font script="Osma" typeface="Ebrima"/>
+        <a:font script="Phag" typeface="Phagspa"/>
+        <a:font script="Syrn" typeface="Estrangelo Edessa"/>
+        <a:font script="Syrj" typeface="Estrangelo Edessa"/>
+        <a:font script="Syre" typeface="Estrangelo Edessa"/>
+        <a:font script="Sora" typeface="Nirmala UI"/>
+        <a:font script="Tale" typeface="Microsoft Tai Le"/>
+        <a:font script="Talu" typeface="Microsoft New Tai Lue"/>
+        <a:font script="Tfng" typeface="Ebrima"/>
+      </a:minorFont>
+    </a:fontScheme>
+    <a:fmtScheme name="Office">
+      <a:fillStyleLst>
+        <a:solidFill>
+          <a:schemeClr val="phClr"/>
+        </a:solidFill>
+        <a:gradFill rotWithShape="1">
+          <a:gsLst>
+            <a:gs pos="0">
+              <a:schemeClr val="phClr">
+                <a:lumMod val="110000"/>
+                <a:satMod val="105000"/>
+                <a:tint val="67000"/>
+              </a:schemeClr>
+            </a:gs>
+            <a:gs pos="50000">
+              <a:schemeClr val="phClr">
+                <a:lumMod val="105000"/>
+                <a:satMod val="103000"/>
+                <a:tint val="73000"/>
+              </a:schemeClr>
+            </a:gs>
+            <a:gs pos="100000">
+              <a:schemeClr val="phClr">
+                <a:lumMod val="105000"/>
+                <a:satMod val="109000"/>
+                <a:tint val="81000"/>
+              </a:schemeClr>
+            </a:gs>
+          </a:gsLst>
+          <a:lin ang="5400000" scaled="0"/>
+        </a:gradFill>
+        <a:gradFill rotWithShape="1">
+          <a:gsLst>
+            <a:gs pos="0">
+              <a:schemeClr val="phClr">
+                <a:satMod val="103000"/>
+                <a:lumMod val="102000"/>
+                <a:tint val="94000"/>
+              </a:schemeClr>
+            </a:gs>
+            <a:gs pos="50000">
+              <a:schemeClr val="phClr">
+                <a:satMod val="110000"/>
+                <a:lumMod val="100000"/>
+                <a:shade val="100000"/>
+              </a:schemeClr>
+            </a:gs>
+            <a:gs pos="100000">
+              <a:schemeClr val="phClr">
+                <a:lumMod val="99000"/>
+                <a:satMod val="120000"/>
+                <a:shade val="78000"/>
+              </a:schemeClr>
+            </a:gs>
+          </a:gsLst>
+          <a:lin ang="5400000" scaled="0"/>
+        </a:gradFill>
+      </a:fillStyleLst>
+      <a:lnStyleLst>
+        <a:ln w="12700" cap="flat" cmpd="sng" algn="ctr">
+          <a:solidFill>
+            <a:schemeClr val="phClr"/>
+          </a:solidFill>
+          <a:prstDash val="solid"/>
+          <a:miter lim="800000"/>
+        </a:ln>
+        <a:ln w="19050" cap="flat" cmpd="sng" algn="ctr">
+          <a:solidFill>
+            <a:schemeClr val="phClr"/>
+          </a:solidFill>
+          <a:prstDash val="solid"/>
+          <a:miter lim="800000"/>
+        </a:ln>
+        <a:ln w="25400" cap="flat" cmpd="sng" algn="ctr">
+          <a:solidFill>
+            <a:schemeClr val="phClr"/>
+          </a:solidFill>
+          <a:prstDash val="solid"/>
+          <a:miter lim="800000"/>
+        </a:ln>
+      </a:lnStyleLst>
+      <a:effectStyleLst>
+        <a:effectStyle>
+          <a:effectLst/>
+        </a:effectStyle>
+        <a:effectStyle>
+          <a:effectLst/>
+        </a:effectStyle>
+        <a:effectStyle>
+          <a:effectLst>
+            <a:outerShdw blurRad="57150" dist="19050" dir="5400000" algn="ctr" rotWithShape="0">
+              <a:srgbClr val="000000">
+                <a:alpha val="63000"/>
+              </a:srgbClr>
+            </a:outerShdw>
+          </a:effectLst>
+        </a:effectStyle>
+      </a:effectStyleLst>
+      <a:bgFillStyleLst>
+        <a:solidFill>
+          <a:schemeClr val="phClr"/>
+        </a:solidFill>
+        <a:solidFill>
+          <a:schemeClr val="phClr">
+            <a:tint val="95000"/>
+            <a:satMod val="170000"/>
+          </a:schemeClr>
+        </a:solidFill>
+        <a:gradFill rotWithShape="1">
+          <a:gsLst>
+            <a:gs pos="0">
+              <a:schemeClr val="phClr">
+                <a:tint val="93000"/>
+                <a:satMod val="150000"/>
+                <a:shade val="98000"/>
+                <a:lumMod val="102000"/>
+              </a:schemeClr>
+            </a:gs>
+            <a:gs pos="50000">
+              <a:schemeClr val="phClr">
+                <a:tint val="98000"/>
+                <a:satMod val="130000"/>
+                <a:shade val="90000"/>
+                <a:lumMod val="103000"/>
+              </a:schemeClr>
+            </a:gs>
+            <a:gs pos="100000">
+              <a:schemeClr val="phClr">
+                <a:shade val="63000"/>
+                <a:satMod val="120000"/>
+              </a:schemeClr>
+            </a:gs>
+          </a:gsLst>
+          <a:lin ang="5400000" scaled="0"/>
+        </a:gradFill>
+      </a:bgFillStyleLst>
+    </a:fmtScheme>
+  </a:themeElements>
+  <a:objectDefaults>
+    <a:lnDef>
+      <a:spPr/>
+      <a:bodyPr/>
+      <a:lstStyle/>
+      <a:style>
+        <a:lnRef idx="2">
+          <a:schemeClr val="accent1"/>
+        </a:lnRef>
+        <a:fillRef idx="0">
+          <a:schemeClr val="accent1"/>
+        </a:fillRef>
+        <a:effectRef idx="1">
+          <a:schemeClr val="accent1"/>
+        </a:effectRef>
+        <a:fontRef idx="minor">
+          <a:schemeClr val="tx1"/>
+        </a:fontRef>
+      </a:style>
+    </a:lnDef>
+  </a:objectDefaults>
+  <a:extraClrSchemeLst/>
+  <a:extLst>
+    <a:ext uri="{05A4C25C-085E-4340-85A3-A5531E510DB2}">
+      <thm15:themeFamily xmlns:thm15="http://schemas.microsoft.com/office/thememl/2012/main" name="Office Theme" id="{2E142A2C-CD16-42D6-873A-C26D2A0506FA}" vid="{1BDDFF52-6CD6-40A5-AB3C-68EB2F1E4D0A}"/>
+    </a:ext>
+  </a:extLst>
+</a:theme>
 </file>
--- a/pmc1/PMC-AI-Technical-Overview.pptx
+++ b/pmc1/PMC-AI-Technical-Overview.pptx
@@ -5,7 +5,7 @@
     <p:sldMasterId id="2147483648" r:id="rId1"/>
   </p:sldMasterIdLst>
   <p:notesMasterIdLst>
-    <p:notesMasterId r:id="rId11"/>
+    <p:notesMasterId r:id="rId17"/>
   </p:notesMasterIdLst>
   <p:sldIdLst>
     <p:sldId id="256" r:id="rId2"/>
@@ -17,6 +17,12 @@
     <p:sldId id="262" r:id="rId8"/>
     <p:sldId id="263" r:id="rId9"/>
     <p:sldId id="264" r:id="rId10"/>
+    <p:sldId id="266" r:id="rId11"/>
+    <p:sldId id="265" r:id="rId12"/>
+    <p:sldId id="267" r:id="rId13"/>
+    <p:sldId id="268" r:id="rId14"/>
+    <p:sldId id="269" r:id="rId15"/>
+    <p:sldId id="270" r:id="rId16"/>
   </p:sldIdLst>
   <p:sldSz cx="9144000" cy="6858000" type="screen4x3"/>
   <p:notesSz cx="6858000" cy="9144000"/>
@@ -320,6 +326,114 @@
     <p:extLst>
       <p:ext uri="{BB962C8B-B14F-4D97-AF65-F5344CB8AC3E}">
         <p14:creationId xmlns:p14="http://schemas.microsoft.com/office/powerpoint/2010/main" val="1024086991"/>
+      </p:ext>
+    </p:extLst>
+  </p:cSld>
+  <p:clrMapOvr>
+    <a:masterClrMapping/>
+  </p:clrMapOvr>
+</p:notes>
+</file>
+
+<file path=ppt/notesSlides/notesSlide10.xml><?xml version="1.0" encoding="utf-8"?>
+<p:notes xmlns:a="http://schemas.openxmlformats.org/drawingml/2006/main" xmlns:r="http://schemas.openxmlformats.org/officeDocument/2006/relationships" xmlns:p="http://schemas.openxmlformats.org/presentationml/2006/main">
+  <p:cSld>
+    <p:spTree>
+      <p:nvGrpSpPr>
+        <p:cNvPr id="1" name="">
+          <a:extLst>
+            <a:ext uri="{FF2B5EF4-FFF2-40B4-BE49-F238E27FC236}">
+              <a16:creationId xmlns:a16="http://schemas.microsoft.com/office/drawing/2014/main" id="{09E4E049-E296-E330-DCB9-FD8D1B850381}"/>
+            </a:ext>
+          </a:extLst>
+        </p:cNvPr>
+        <p:cNvGrpSpPr/>
+        <p:nvPr/>
+      </p:nvGrpSpPr>
+      <p:grpSpPr>
+        <a:xfrm>
+          <a:off x="0" y="0"/>
+          <a:ext cx="0" cy="0"/>
+          <a:chOff x="0" y="0"/>
+          <a:chExt cx="0" cy="0"/>
+        </a:xfrm>
+      </p:grpSpPr>
+      <p:sp>
+        <p:nvSpPr>
+          <p:cNvPr id="2" name="Slide Image Placeholder 1">
+            <a:extLst>
+              <a:ext uri="{FF2B5EF4-FFF2-40B4-BE49-F238E27FC236}">
+                <a16:creationId xmlns:a16="http://schemas.microsoft.com/office/drawing/2014/main" id="{45995B04-8784-2643-4F46-0B178A88550C}"/>
+              </a:ext>
+            </a:extLst>
+          </p:cNvPr>
+          <p:cNvSpPr>
+            <a:spLocks noGrp="1" noRot="1" noChangeAspect="1"/>
+          </p:cNvSpPr>
+          <p:nvPr>
+            <p:ph type="sldImg"/>
+          </p:nvPr>
+        </p:nvSpPr>
+        <p:spPr/>
+      </p:sp>
+      <p:sp>
+        <p:nvSpPr>
+          <p:cNvPr id="3" name="Notes Placeholder 2">
+            <a:extLst>
+              <a:ext uri="{FF2B5EF4-FFF2-40B4-BE49-F238E27FC236}">
+                <a16:creationId xmlns:a16="http://schemas.microsoft.com/office/drawing/2014/main" id="{71044592-F4ED-46CA-3304-75941E8FC194}"/>
+              </a:ext>
+            </a:extLst>
+          </p:cNvPr>
+          <p:cNvSpPr>
+            <a:spLocks noGrp="1"/>
+          </p:cNvSpPr>
+          <p:nvPr>
+            <p:ph type="body" idx="1"/>
+          </p:nvPr>
+        </p:nvSpPr>
+        <p:spPr/>
+        <p:txBody>
+          <a:bodyPr/>
+          <a:lstStyle/>
+          <a:p>
+            <a:endParaRPr lang="en-US" dirty="0"/>
+          </a:p>
+        </p:txBody>
+      </p:sp>
+      <p:sp>
+        <p:nvSpPr>
+          <p:cNvPr id="4" name="Slide Number Placeholder 3">
+            <a:extLst>
+              <a:ext uri="{FF2B5EF4-FFF2-40B4-BE49-F238E27FC236}">
+                <a16:creationId xmlns:a16="http://schemas.microsoft.com/office/drawing/2014/main" id="{8DD88F99-D018-0692-F84B-032CC6C25CEF}"/>
+              </a:ext>
+            </a:extLst>
+          </p:cNvPr>
+          <p:cNvSpPr>
+            <a:spLocks noGrp="1"/>
+          </p:cNvSpPr>
+          <p:nvPr>
+            <p:ph type="sldNum" sz="quarter" idx="10"/>
+          </p:nvPr>
+        </p:nvSpPr>
+        <p:spPr/>
+        <p:txBody>
+          <a:bodyPr/>
+          <a:lstStyle/>
+          <a:p>
+            <a:fld id="{F7021451-1387-4CA6-816F-3879F97B5CBC}" type="slidenum">
+              <a:rPr lang="en-US"/>
+              <a:t>10</a:t>
+            </a:fld>
+            <a:endParaRPr lang="en-US"/>
+          </a:p>
+        </p:txBody>
+      </p:sp>
+    </p:spTree>
+    <p:extLst>
+      <p:ext uri="{BB962C8B-B14F-4D97-AF65-F5344CB8AC3E}">
+        <p14:creationId xmlns:p14="http://schemas.microsoft.com/office/powerpoint/2010/main" val="4040371786"/>
       </p:ext>
     </p:extLst>
   </p:cSld>
@@ -1551,6 +1665,525 @@
 </p:sld>
 </file>
 
+<file path=ppt/slides/slide10.xml><?xml version="1.0" encoding="utf-8"?>
+<p:sld xmlns:a="http://schemas.openxmlformats.org/drawingml/2006/main" xmlns:r="http://schemas.openxmlformats.org/officeDocument/2006/relationships" xmlns:p="http://schemas.openxmlformats.org/presentationml/2006/main">
+  <p:cSld>
+    <p:bg>
+      <p:bgPr>
+        <a:solidFill>
+          <a:srgbClr val="F4F6F9"/>
+        </a:solidFill>
+        <a:effectLst/>
+      </p:bgPr>
+    </p:bg>
+    <p:spTree>
+      <p:nvGrpSpPr>
+        <p:cNvPr id="1" name="">
+          <a:extLst>
+            <a:ext uri="{FF2B5EF4-FFF2-40B4-BE49-F238E27FC236}">
+              <a16:creationId xmlns:a16="http://schemas.microsoft.com/office/drawing/2014/main" id="{866E3B75-CCF9-925F-DFCB-FB97D858655B}"/>
+            </a:ext>
+          </a:extLst>
+        </p:cNvPr>
+        <p:cNvGrpSpPr/>
+        <p:nvPr/>
+      </p:nvGrpSpPr>
+      <p:grpSpPr>
+        <a:xfrm>
+          <a:off x="0" y="0"/>
+          <a:ext cx="0" cy="0"/>
+          <a:chOff x="0" y="0"/>
+          <a:chExt cx="0" cy="0"/>
+        </a:xfrm>
+      </p:grpSpPr>
+      <p:sp>
+        <p:nvSpPr>
+          <p:cNvPr id="2" name="Shape 0">
+            <a:extLst>
+              <a:ext uri="{FF2B5EF4-FFF2-40B4-BE49-F238E27FC236}">
+                <a16:creationId xmlns:a16="http://schemas.microsoft.com/office/drawing/2014/main" id="{823FF64E-6A4F-CEC4-7F43-6F42860D925B}"/>
+              </a:ext>
+            </a:extLst>
+          </p:cNvPr>
+          <p:cNvSpPr/>
+          <p:nvPr/>
+        </p:nvSpPr>
+        <p:spPr>
+          <a:xfrm>
+            <a:off x="0" y="0"/>
+            <a:ext cx="9144000" cy="1005840"/>
+          </a:xfrm>
+          <a:prstGeom prst="rect">
+            <a:avLst/>
+          </a:prstGeom>
+          <a:solidFill>
+            <a:srgbClr val="1E3A5F"/>
+          </a:solidFill>
+          <a:ln w="12700">
+            <a:solidFill>
+              <a:srgbClr val="1E3A5F"/>
+            </a:solidFill>
+            <a:prstDash val="solid"/>
+          </a:ln>
+        </p:spPr>
+        <p:txBody>
+          <a:bodyPr/>
+          <a:lstStyle/>
+          <a:p>
+            <a:endParaRPr lang="en-US"/>
+          </a:p>
+        </p:txBody>
+      </p:sp>
+      <p:sp>
+        <p:nvSpPr>
+          <p:cNvPr id="3" name="Text 1">
+            <a:extLst>
+              <a:ext uri="{FF2B5EF4-FFF2-40B4-BE49-F238E27FC236}">
+                <a16:creationId xmlns:a16="http://schemas.microsoft.com/office/drawing/2014/main" id="{0EC70E84-9DDC-92B2-F69C-7D8A5BCF549F}"/>
+              </a:ext>
+            </a:extLst>
+          </p:cNvPr>
+          <p:cNvSpPr/>
+          <p:nvPr/>
+        </p:nvSpPr>
+        <p:spPr>
+          <a:xfrm>
+            <a:off x="320040" y="0"/>
+            <a:ext cx="8686800" cy="1005840"/>
+          </a:xfrm>
+          <a:prstGeom prst="rect">
+            <a:avLst/>
+          </a:prstGeom>
+          <a:noFill/>
+          <a:ln/>
+        </p:spPr>
+        <p:txBody>
+          <a:bodyPr wrap="square" lIns="0" tIns="0" rIns="0" bIns="0" rtlCol="0" anchor="ctr"/>
+          <a:lstStyle/>
+          <a:p>
+            <a:pPr marL="0" indent="0" algn="l">
+              <a:buNone/>
+            </a:pPr>
+            <a:r>
+              <a:rPr lang="en-US" sz="2800" b="1" dirty="0">
+                <a:solidFill>
+                  <a:srgbClr val="FFFFFF"/>
+                </a:solidFill>
+                <a:latin typeface="Calibri" pitchFamily="34" charset="0"/>
+                <a:ea typeface="Calibri" pitchFamily="34" charset="-122"/>
+                <a:cs typeface="Calibri" pitchFamily="34" charset="-120"/>
+              </a:rPr>
+              <a:t>Appendix Slides</a:t>
+            </a:r>
+            <a:endParaRPr lang="en-US" sz="2800" dirty="0"/>
+          </a:p>
+        </p:txBody>
+      </p:sp>
+      <p:sp>
+        <p:nvSpPr>
+          <p:cNvPr id="4" name="Shape 2">
+            <a:extLst>
+              <a:ext uri="{FF2B5EF4-FFF2-40B4-BE49-F238E27FC236}">
+                <a16:creationId xmlns:a16="http://schemas.microsoft.com/office/drawing/2014/main" id="{C72D1E39-FA88-4574-93B4-2E32E51D9AE6}"/>
+              </a:ext>
+            </a:extLst>
+          </p:cNvPr>
+          <p:cNvSpPr/>
+          <p:nvPr/>
+        </p:nvSpPr>
+        <p:spPr>
+          <a:xfrm>
+            <a:off x="0" y="1005840"/>
+            <a:ext cx="73152" cy="5852160"/>
+          </a:xfrm>
+          <a:prstGeom prst="rect">
+            <a:avLst/>
+          </a:prstGeom>
+          <a:solidFill>
+            <a:srgbClr val="C9A84C"/>
+          </a:solidFill>
+          <a:ln w="12700">
+            <a:solidFill>
+              <a:srgbClr val="C9A84C"/>
+            </a:solidFill>
+            <a:prstDash val="solid"/>
+          </a:ln>
+        </p:spPr>
+        <p:txBody>
+          <a:bodyPr/>
+          <a:lstStyle/>
+          <a:p>
+            <a:endParaRPr lang="en-US"/>
+          </a:p>
+        </p:txBody>
+      </p:sp>
+      <p:sp>
+        <p:nvSpPr>
+          <p:cNvPr id="30" name="Rectangle 29">
+            <a:extLst>
+              <a:ext uri="{FF2B5EF4-FFF2-40B4-BE49-F238E27FC236}">
+                <a16:creationId xmlns:a16="http://schemas.microsoft.com/office/drawing/2014/main" id="{3F58F285-8D29-CFAA-4CCD-3687707E254F}"/>
+              </a:ext>
+            </a:extLst>
+          </p:cNvPr>
+          <p:cNvSpPr/>
+          <p:nvPr/>
+        </p:nvSpPr>
+        <p:spPr>
+          <a:xfrm>
+            <a:off x="1002471" y="2967335"/>
+            <a:ext cx="7139070" cy="923330"/>
+          </a:xfrm>
+          <a:prstGeom prst="rect">
+            <a:avLst/>
+          </a:prstGeom>
+          <a:noFill/>
+        </p:spPr>
+        <p:txBody>
+          <a:bodyPr wrap="none" lIns="91440" tIns="45720" rIns="91440" bIns="45720">
+            <a:spAutoFit/>
+          </a:bodyPr>
+          <a:lstStyle/>
+          <a:p>
+            <a:pPr algn="ctr"/>
+            <a:r>
+              <a:rPr lang="en-US" sz="5400" b="1" cap="none" spc="0" dirty="0">
+                <a:ln w="13462">
+                  <a:solidFill>
+                    <a:schemeClr val="bg1"/>
+                  </a:solidFill>
+                  <a:prstDash val="solid"/>
+                </a:ln>
+                <a:solidFill>
+                  <a:schemeClr val="tx1">
+                    <a:lumMod val="85000"/>
+                    <a:lumOff val="15000"/>
+                  </a:schemeClr>
+                </a:solidFill>
+                <a:effectLst>
+                  <a:outerShdw dist="38100" dir="2700000" algn="bl" rotWithShape="0">
+                    <a:schemeClr val="accent5"/>
+                  </a:outerShdw>
+                </a:effectLst>
+              </a:rPr>
+              <a:t>What are the real costs?</a:t>
+            </a:r>
+          </a:p>
+        </p:txBody>
+      </p:sp>
+    </p:spTree>
+    <p:extLst>
+      <p:ext uri="{BB962C8B-B14F-4D97-AF65-F5344CB8AC3E}">
+        <p14:creationId xmlns:p14="http://schemas.microsoft.com/office/powerpoint/2010/main" val="3563193614"/>
+      </p:ext>
+    </p:extLst>
+  </p:cSld>
+  <p:clrMapOvr>
+    <a:masterClrMapping/>
+  </p:clrMapOvr>
+</p:sld>
+</file>
+
+<file path=ppt/slides/slide11.xml><?xml version="1.0" encoding="utf-8"?>
+<p:sld xmlns:a="http://schemas.openxmlformats.org/drawingml/2006/main" xmlns:r="http://schemas.openxmlformats.org/officeDocument/2006/relationships" xmlns:p="http://schemas.openxmlformats.org/presentationml/2006/main">
+  <p:cSld>
+    <p:spTree>
+      <p:nvGrpSpPr>
+        <p:cNvPr id="1" name=""/>
+        <p:cNvGrpSpPr/>
+        <p:nvPr/>
+      </p:nvGrpSpPr>
+      <p:grpSpPr>
+        <a:xfrm>
+          <a:off x="0" y="0"/>
+          <a:ext cx="0" cy="0"/>
+          <a:chOff x="0" y="0"/>
+          <a:chExt cx="0" cy="0"/>
+        </a:xfrm>
+      </p:grpSpPr>
+      <p:pic>
+        <p:nvPicPr>
+          <p:cNvPr id="3" name="Picture 2">
+            <a:extLst>
+              <a:ext uri="{FF2B5EF4-FFF2-40B4-BE49-F238E27FC236}">
+                <a16:creationId xmlns:a16="http://schemas.microsoft.com/office/drawing/2014/main" id="{EC83C595-4059-C2E2-6D5D-D5EB0FB9CB10}"/>
+              </a:ext>
+            </a:extLst>
+          </p:cNvPr>
+          <p:cNvPicPr>
+            <a:picLocks noChangeAspect="1"/>
+          </p:cNvPicPr>
+          <p:nvPr/>
+        </p:nvPicPr>
+        <p:blipFill>
+          <a:blip r:embed="rId2"/>
+          <a:stretch>
+            <a:fillRect/>
+          </a:stretch>
+        </p:blipFill>
+        <p:spPr>
+          <a:xfrm>
+            <a:off x="794810" y="1518971"/>
+            <a:ext cx="7554379" cy="3820058"/>
+          </a:xfrm>
+          <a:prstGeom prst="rect">
+            <a:avLst/>
+          </a:prstGeom>
+        </p:spPr>
+      </p:pic>
+    </p:spTree>
+    <p:extLst>
+      <p:ext uri="{BB962C8B-B14F-4D97-AF65-F5344CB8AC3E}">
+        <p14:creationId xmlns:p14="http://schemas.microsoft.com/office/powerpoint/2010/main" val="2214251691"/>
+      </p:ext>
+    </p:extLst>
+  </p:cSld>
+  <p:clrMapOvr>
+    <a:masterClrMapping/>
+  </p:clrMapOvr>
+</p:sld>
+</file>
+
+<file path=ppt/slides/slide12.xml><?xml version="1.0" encoding="utf-8"?>
+<p:sld xmlns:a="http://schemas.openxmlformats.org/drawingml/2006/main" xmlns:r="http://schemas.openxmlformats.org/officeDocument/2006/relationships" xmlns:p="http://schemas.openxmlformats.org/presentationml/2006/main">
+  <p:cSld>
+    <p:spTree>
+      <p:nvGrpSpPr>
+        <p:cNvPr id="1" name=""/>
+        <p:cNvGrpSpPr/>
+        <p:nvPr/>
+      </p:nvGrpSpPr>
+      <p:grpSpPr>
+        <a:xfrm>
+          <a:off x="0" y="0"/>
+          <a:ext cx="0" cy="0"/>
+          <a:chOff x="0" y="0"/>
+          <a:chExt cx="0" cy="0"/>
+        </a:xfrm>
+      </p:grpSpPr>
+      <p:pic>
+        <p:nvPicPr>
+          <p:cNvPr id="3" name="Picture 2">
+            <a:extLst>
+              <a:ext uri="{FF2B5EF4-FFF2-40B4-BE49-F238E27FC236}">
+                <a16:creationId xmlns:a16="http://schemas.microsoft.com/office/drawing/2014/main" id="{D7E0C1DB-4EAD-6A6E-6B9E-8020202D6202}"/>
+              </a:ext>
+            </a:extLst>
+          </p:cNvPr>
+          <p:cNvPicPr>
+            <a:picLocks noChangeAspect="1"/>
+          </p:cNvPicPr>
+          <p:nvPr/>
+        </p:nvPicPr>
+        <p:blipFill>
+          <a:blip r:embed="rId2"/>
+          <a:stretch>
+            <a:fillRect/>
+          </a:stretch>
+        </p:blipFill>
+        <p:spPr>
+          <a:xfrm>
+            <a:off x="804336" y="461548"/>
+            <a:ext cx="7535327" cy="5934903"/>
+          </a:xfrm>
+          <a:prstGeom prst="rect">
+            <a:avLst/>
+          </a:prstGeom>
+        </p:spPr>
+      </p:pic>
+    </p:spTree>
+    <p:extLst>
+      <p:ext uri="{BB962C8B-B14F-4D97-AF65-F5344CB8AC3E}">
+        <p14:creationId xmlns:p14="http://schemas.microsoft.com/office/powerpoint/2010/main" val="378501961"/>
+      </p:ext>
+    </p:extLst>
+  </p:cSld>
+  <p:clrMapOvr>
+    <a:masterClrMapping/>
+  </p:clrMapOvr>
+</p:sld>
+</file>
+
+<file path=ppt/slides/slide13.xml><?xml version="1.0" encoding="utf-8"?>
+<p:sld xmlns:a="http://schemas.openxmlformats.org/drawingml/2006/main" xmlns:r="http://schemas.openxmlformats.org/officeDocument/2006/relationships" xmlns:p="http://schemas.openxmlformats.org/presentationml/2006/main">
+  <p:cSld>
+    <p:spTree>
+      <p:nvGrpSpPr>
+        <p:cNvPr id="1" name=""/>
+        <p:cNvGrpSpPr/>
+        <p:nvPr/>
+      </p:nvGrpSpPr>
+      <p:grpSpPr>
+        <a:xfrm>
+          <a:off x="0" y="0"/>
+          <a:ext cx="0" cy="0"/>
+          <a:chOff x="0" y="0"/>
+          <a:chExt cx="0" cy="0"/>
+        </a:xfrm>
+      </p:grpSpPr>
+      <p:pic>
+        <p:nvPicPr>
+          <p:cNvPr id="3" name="Picture 2">
+            <a:extLst>
+              <a:ext uri="{FF2B5EF4-FFF2-40B4-BE49-F238E27FC236}">
+                <a16:creationId xmlns:a16="http://schemas.microsoft.com/office/drawing/2014/main" id="{24505F14-8EBD-1334-9C17-9DAB75B3627F}"/>
+              </a:ext>
+            </a:extLst>
+          </p:cNvPr>
+          <p:cNvPicPr>
+            <a:picLocks noChangeAspect="1"/>
+          </p:cNvPicPr>
+          <p:nvPr/>
+        </p:nvPicPr>
+        <p:blipFill>
+          <a:blip r:embed="rId2"/>
+          <a:stretch>
+            <a:fillRect/>
+          </a:stretch>
+        </p:blipFill>
+        <p:spPr>
+          <a:xfrm>
+            <a:off x="809100" y="2576393"/>
+            <a:ext cx="7525800" cy="1705213"/>
+          </a:xfrm>
+          <a:prstGeom prst="rect">
+            <a:avLst/>
+          </a:prstGeom>
+        </p:spPr>
+      </p:pic>
+    </p:spTree>
+    <p:extLst>
+      <p:ext uri="{BB962C8B-B14F-4D97-AF65-F5344CB8AC3E}">
+        <p14:creationId xmlns:p14="http://schemas.microsoft.com/office/powerpoint/2010/main" val="821936111"/>
+      </p:ext>
+    </p:extLst>
+  </p:cSld>
+  <p:clrMapOvr>
+    <a:masterClrMapping/>
+  </p:clrMapOvr>
+</p:sld>
+</file>
+
+<file path=ppt/slides/slide14.xml><?xml version="1.0" encoding="utf-8"?>
+<p:sld xmlns:a="http://schemas.openxmlformats.org/drawingml/2006/main" xmlns:r="http://schemas.openxmlformats.org/officeDocument/2006/relationships" xmlns:p="http://schemas.openxmlformats.org/presentationml/2006/main">
+  <p:cSld>
+    <p:spTree>
+      <p:nvGrpSpPr>
+        <p:cNvPr id="1" name=""/>
+        <p:cNvGrpSpPr/>
+        <p:nvPr/>
+      </p:nvGrpSpPr>
+      <p:grpSpPr>
+        <a:xfrm>
+          <a:off x="0" y="0"/>
+          <a:ext cx="0" cy="0"/>
+          <a:chOff x="0" y="0"/>
+          <a:chExt cx="0" cy="0"/>
+        </a:xfrm>
+      </p:grpSpPr>
+      <p:pic>
+        <p:nvPicPr>
+          <p:cNvPr id="3" name="Picture 2">
+            <a:extLst>
+              <a:ext uri="{FF2B5EF4-FFF2-40B4-BE49-F238E27FC236}">
+                <a16:creationId xmlns:a16="http://schemas.microsoft.com/office/drawing/2014/main" id="{3EBCA751-E8A4-5FF0-4BFB-5D88A0881A72}"/>
+              </a:ext>
+            </a:extLst>
+          </p:cNvPr>
+          <p:cNvPicPr>
+            <a:picLocks noChangeAspect="1"/>
+          </p:cNvPicPr>
+          <p:nvPr/>
+        </p:nvPicPr>
+        <p:blipFill>
+          <a:blip r:embed="rId2"/>
+          <a:stretch>
+            <a:fillRect/>
+          </a:stretch>
+        </p:blipFill>
+        <p:spPr>
+          <a:xfrm>
+            <a:off x="813863" y="2042919"/>
+            <a:ext cx="7516274" cy="2772162"/>
+          </a:xfrm>
+          <a:prstGeom prst="rect">
+            <a:avLst/>
+          </a:prstGeom>
+        </p:spPr>
+      </p:pic>
+    </p:spTree>
+    <p:extLst>
+      <p:ext uri="{BB962C8B-B14F-4D97-AF65-F5344CB8AC3E}">
+        <p14:creationId xmlns:p14="http://schemas.microsoft.com/office/powerpoint/2010/main" val="166257228"/>
+      </p:ext>
+    </p:extLst>
+  </p:cSld>
+  <p:clrMapOvr>
+    <a:masterClrMapping/>
+  </p:clrMapOvr>
+</p:sld>
+</file>
+
+<file path=ppt/slides/slide15.xml><?xml version="1.0" encoding="utf-8"?>
+<p:sld xmlns:a="http://schemas.openxmlformats.org/drawingml/2006/main" xmlns:r="http://schemas.openxmlformats.org/officeDocument/2006/relationships" xmlns:p="http://schemas.openxmlformats.org/presentationml/2006/main">
+  <p:cSld>
+    <p:spTree>
+      <p:nvGrpSpPr>
+        <p:cNvPr id="1" name=""/>
+        <p:cNvGrpSpPr/>
+        <p:nvPr/>
+      </p:nvGrpSpPr>
+      <p:grpSpPr>
+        <a:xfrm>
+          <a:off x="0" y="0"/>
+          <a:ext cx="0" cy="0"/>
+          <a:chOff x="0" y="0"/>
+          <a:chExt cx="0" cy="0"/>
+        </a:xfrm>
+      </p:grpSpPr>
+      <p:pic>
+        <p:nvPicPr>
+          <p:cNvPr id="3" name="Picture 2">
+            <a:extLst>
+              <a:ext uri="{FF2B5EF4-FFF2-40B4-BE49-F238E27FC236}">
+                <a16:creationId xmlns:a16="http://schemas.microsoft.com/office/drawing/2014/main" id="{BEE265AB-1E2E-34B5-EB6B-77935FD7EB13}"/>
+              </a:ext>
+            </a:extLst>
+          </p:cNvPr>
+          <p:cNvPicPr>
+            <a:picLocks noChangeAspect="1"/>
+          </p:cNvPicPr>
+          <p:nvPr/>
+        </p:nvPicPr>
+        <p:blipFill>
+          <a:blip r:embed="rId2"/>
+          <a:stretch>
+            <a:fillRect/>
+          </a:stretch>
+        </p:blipFill>
+        <p:spPr>
+          <a:xfrm>
+            <a:off x="804336" y="1747603"/>
+            <a:ext cx="7535327" cy="3362794"/>
+          </a:xfrm>
+          <a:prstGeom prst="rect">
+            <a:avLst/>
+          </a:prstGeom>
+        </p:spPr>
+      </p:pic>
+    </p:spTree>
+    <p:extLst>
+      <p:ext uri="{BB962C8B-B14F-4D97-AF65-F5344CB8AC3E}">
+        <p14:creationId xmlns:p14="http://schemas.microsoft.com/office/powerpoint/2010/main" val="2215818830"/>
+      </p:ext>
+    </p:extLst>
+  </p:cSld>
+  <p:clrMapOvr>
+    <a:masterClrMapping/>
+  </p:clrMapOvr>
+</p:sld>
+</file>
+
 <file path=ppt/slides/slide2.xml><?xml version="1.0" encoding="utf-8"?>
 <p:sld xmlns:a="http://schemas.openxmlformats.org/drawingml/2006/main" xmlns:r="http://schemas.openxmlformats.org/officeDocument/2006/relationships" xmlns:p="http://schemas.openxmlformats.org/presentationml/2006/main">
   <p:cSld name="Slide 2">
@@ -1771,7 +2404,7 @@
                 <a:ea typeface="Calibri Light" pitchFamily="34" charset="-122"/>
                 <a:cs typeface="Calibri Light" pitchFamily="34" charset="-120"/>
               </a:rPr>
-              <a:t>Typical query cost under $0.01 with caching enabled</a:t>
+              <a:t>Flash queries typically cost $0.07-$0.15*</a:t>
             </a:r>
             <a:endParaRPr lang="en-US" sz="1700" dirty="0"/>
           </a:p>
@@ -1791,6 +2424,144 @@
                 <a:cs typeface="Calibri Light" pitchFamily="34" charset="-120"/>
               </a:rPr>
               <a:t>No user data collected — all sessions are anonymous</a:t>
+            </a:r>
+          </a:p>
+          <a:p>
+            <a:pPr>
+              <a:spcAft>
+                <a:spcPts val="800"/>
+              </a:spcAft>
+            </a:pPr>
+            <a:endParaRPr lang="en-US" sz="1700" dirty="0">
+              <a:solidFill>
+                <a:srgbClr val="1E3A5F"/>
+              </a:solidFill>
+              <a:latin typeface="Calibri Light" pitchFamily="34" charset="0"/>
+              <a:ea typeface="Calibri Light" pitchFamily="34" charset="-122"/>
+              <a:cs typeface="Calibri Light" pitchFamily="34" charset="-120"/>
+            </a:endParaRPr>
+          </a:p>
+          <a:p>
+            <a:pPr>
+              <a:spcAft>
+                <a:spcPts val="800"/>
+              </a:spcAft>
+            </a:pPr>
+            <a:endParaRPr lang="en-US" sz="1700" dirty="0">
+              <a:solidFill>
+                <a:srgbClr val="1E3A5F"/>
+              </a:solidFill>
+              <a:latin typeface="Calibri Light" pitchFamily="34" charset="0"/>
+              <a:ea typeface="Calibri Light" pitchFamily="34" charset="-122"/>
+              <a:cs typeface="Calibri Light" pitchFamily="34" charset="-120"/>
+            </a:endParaRPr>
+          </a:p>
+          <a:p>
+            <a:pPr>
+              <a:spcAft>
+                <a:spcPts val="800"/>
+              </a:spcAft>
+            </a:pPr>
+            <a:endParaRPr lang="en-US" sz="1700" dirty="0">
+              <a:solidFill>
+                <a:srgbClr val="1E3A5F"/>
+              </a:solidFill>
+              <a:latin typeface="Calibri Light" pitchFamily="34" charset="0"/>
+              <a:ea typeface="Calibri Light" pitchFamily="34" charset="-122"/>
+              <a:cs typeface="Calibri Light" pitchFamily="34" charset="-120"/>
+            </a:endParaRPr>
+          </a:p>
+          <a:p>
+            <a:pPr>
+              <a:spcAft>
+                <a:spcPts val="800"/>
+              </a:spcAft>
+            </a:pPr>
+            <a:endParaRPr lang="en-US" sz="1700" dirty="0">
+              <a:solidFill>
+                <a:srgbClr val="1E3A5F"/>
+              </a:solidFill>
+              <a:latin typeface="Calibri Light" pitchFamily="34" charset="0"/>
+              <a:ea typeface="Calibri Light" pitchFamily="34" charset="-122"/>
+              <a:cs typeface="Calibri Light" pitchFamily="34" charset="-120"/>
+            </a:endParaRPr>
+          </a:p>
+          <a:p>
+            <a:pPr>
+              <a:spcAft>
+                <a:spcPts val="800"/>
+              </a:spcAft>
+            </a:pPr>
+            <a:endParaRPr lang="en-US" sz="1700" dirty="0">
+              <a:solidFill>
+                <a:srgbClr val="1E3A5F"/>
+              </a:solidFill>
+              <a:latin typeface="Calibri Light" pitchFamily="34" charset="0"/>
+              <a:ea typeface="Calibri Light" pitchFamily="34" charset="-122"/>
+              <a:cs typeface="Calibri Light" pitchFamily="34" charset="-120"/>
+            </a:endParaRPr>
+          </a:p>
+          <a:p>
+            <a:pPr>
+              <a:spcAft>
+                <a:spcPts val="800"/>
+              </a:spcAft>
+            </a:pPr>
+            <a:endParaRPr lang="en-US" sz="1700" dirty="0">
+              <a:solidFill>
+                <a:srgbClr val="1E3A5F"/>
+              </a:solidFill>
+              <a:latin typeface="Calibri Light" pitchFamily="34" charset="0"/>
+              <a:ea typeface="Calibri Light" pitchFamily="34" charset="-122"/>
+              <a:cs typeface="Calibri Light" pitchFamily="34" charset="-120"/>
+            </a:endParaRPr>
+          </a:p>
+          <a:p>
+            <a:pPr>
+              <a:spcAft>
+                <a:spcPts val="800"/>
+              </a:spcAft>
+            </a:pPr>
+            <a:endParaRPr lang="en-US" sz="1700" dirty="0">
+              <a:solidFill>
+                <a:srgbClr val="1E3A5F"/>
+              </a:solidFill>
+              <a:latin typeface="Calibri Light" pitchFamily="34" charset="0"/>
+              <a:ea typeface="Calibri Light" pitchFamily="34" charset="-122"/>
+              <a:cs typeface="Calibri Light" pitchFamily="34" charset="-120"/>
+            </a:endParaRPr>
+          </a:p>
+          <a:p>
+            <a:pPr>
+              <a:spcAft>
+                <a:spcPts val="800"/>
+              </a:spcAft>
+            </a:pPr>
+            <a:endParaRPr lang="en-US" sz="1700" dirty="0">
+              <a:solidFill>
+                <a:srgbClr val="1E3A5F"/>
+              </a:solidFill>
+              <a:latin typeface="Calibri Light" pitchFamily="34" charset="0"/>
+              <a:ea typeface="Calibri Light" pitchFamily="34" charset="-122"/>
+              <a:cs typeface="Calibri Light" pitchFamily="34" charset="-120"/>
+            </a:endParaRPr>
+          </a:p>
+          <a:p>
+            <a:pPr>
+              <a:spcAft>
+                <a:spcPts val="800"/>
+              </a:spcAft>
+            </a:pPr>
+            <a:r>
+              <a:rPr lang="en-US" sz="1700" dirty="0">
+                <a:solidFill>
+                  <a:srgbClr val="1E3A5F"/>
+                </a:solidFill>
+                <a:latin typeface="Calibri Light" pitchFamily="34" charset="0"/>
+                <a:ea typeface="Calibri Light" pitchFamily="34" charset="-122"/>
+                <a:cs typeface="Calibri Light" pitchFamily="34" charset="-120"/>
+              </a:rPr>
+              <a:t>*See Appendix Slides for Breakdown</a:t>
             </a:r>
             <a:endParaRPr lang="en-US" sz="1700" dirty="0"/>
           </a:p>

--- a/pmc1/PMC-AI-Technical-Overview.pptx
+++ b/pmc1/PMC-AI-Technical-Overview.pptx
@@ -4761,7 +4761,7 @@
                 <a:ea typeface="Calibri" pitchFamily="34" charset="-122"/>
                 <a:cs typeface="Calibri" pitchFamily="34" charset="-120"/>
               </a:rPr>
-              <a:t>Caching: How Costs Stay Low</a:t>
+              <a:t>Understanding Query Costs</a:t>
             </a:r>
             <a:endParaRPr lang="en-US" sz="2800" dirty="0"/>
           </a:p>
@@ -4808,7 +4808,7 @@
         <p:spPr>
           <a:xfrm>
             <a:off x="457200" y="1280160"/>
-            <a:ext cx="3931920" cy="2560320"/>
+            <a:ext cx="3931920" cy="2286000"/>
           </a:xfrm>
           <a:prstGeom prst="rect">
             <a:avLst/>
@@ -4840,7 +4840,7 @@
         <p:spPr>
           <a:xfrm>
             <a:off x="457200" y="1280160"/>
-            <a:ext cx="3931920" cy="2560320"/>
+            <a:ext cx="3931920" cy="2286000"/>
           </a:xfrm>
           <a:prstGeom prst="rect">
             <a:avLst/>
@@ -4870,15 +4870,14 @@
               <a:buNone/>
             </a:pPr>
             <a:r>
-              <a:rPr lang="en-US" sz="500" dirty="0">
-                <a:solidFill>
-                  <a:srgbClr val="000000"/>
-                </a:solidFill>
-              </a:rPr>
-              <a:t>
-</a:t>
-            </a:r>
-            <a:endParaRPr lang="en-US" sz="1800" dirty="0"/>
+              <a:rPr lang="en-US" sz="400" dirty="0">
+                <a:solidFill>
+                  <a:srgbClr val="FFFFFF"/>
+                </a:solidFill>
+              </a:rPr>
+              <a:t xml:space="preserve"> </a:t>
+            </a:r>
+            <a:endParaRPr lang="en-US" sz="400" dirty="0"/>
           </a:p>
           <a:p>
             <a:pPr marL="0" indent="0" algn="ctr">
@@ -4892,7 +4891,7 @@
               </a:rPr>
               <a:t>Document uploaded once</a:t>
             </a:r>
-            <a:endParaRPr lang="en-US" sz="1800" dirty="0"/>
+            <a:endParaRPr lang="en-US" sz="1400" dirty="0"/>
           </a:p>
           <a:p>
             <a:pPr marL="0" indent="0" algn="ctr">
@@ -4906,7 +4905,7 @@
               </a:rPr>
               <a:t>Valid 48 hours</a:t>
             </a:r>
-            <a:endParaRPr lang="en-US" sz="1800" dirty="0"/>
+            <a:endParaRPr lang="en-US" sz="1400" dirty="0"/>
           </a:p>
           <a:p>
             <a:pPr marL="0" indent="0" algn="ctr">
@@ -4920,7 +4919,7 @@
               </a:rPr>
               <a:t>Refreshed nightly by cron</a:t>
             </a:r>
-            <a:endParaRPr lang="en-US" sz="1800" dirty="0"/>
+            <a:endParaRPr lang="en-US" sz="1400" dirty="0"/>
           </a:p>
         </p:txBody>
       </p:sp>
@@ -4933,7 +4932,7 @@
         <p:spPr>
           <a:xfrm>
             <a:off x="4754880" y="1280160"/>
-            <a:ext cx="3931920" cy="2560320"/>
+            <a:ext cx="3931920" cy="2286000"/>
           </a:xfrm>
           <a:prstGeom prst="rect">
             <a:avLst/>
@@ -4965,7 +4964,7 @@
         <p:spPr>
           <a:xfrm>
             <a:off x="4754880" y="1280160"/>
-            <a:ext cx="3931920" cy="2560320"/>
+            <a:ext cx="3931920" cy="2286000"/>
           </a:xfrm>
           <a:prstGeom prst="rect">
             <a:avLst/>
@@ -4995,15 +4994,14 @@
               <a:buNone/>
             </a:pPr>
             <a:r>
-              <a:rPr lang="en-US" sz="500" dirty="0">
-                <a:solidFill>
-                  <a:srgbClr val="000000"/>
-                </a:solidFill>
-              </a:rPr>
-              <a:t>
-</a:t>
-            </a:r>
-            <a:endParaRPr lang="en-US" sz="1800" dirty="0"/>
+              <a:rPr lang="en-US" sz="400" dirty="0">
+                <a:solidFill>
+                  <a:srgbClr val="FFFFFF"/>
+                </a:solidFill>
+              </a:rPr>
+              <a:t xml:space="preserve"> </a:t>
+            </a:r>
+            <a:endParaRPr lang="en-US" sz="400" dirty="0"/>
           </a:p>
           <a:p>
             <a:pPr marL="0" indent="0" algn="ctr">
@@ -5015,9 +5013,9 @@
                   <a:srgbClr val="CADCFC"/>
                 </a:solidFill>
               </a:rPr>
-              <a:t>Document in Gemini hot memory</a:t>
-            </a:r>
-            <a:endParaRPr lang="en-US" sz="1800" dirty="0"/>
+              <a:t>Gemini holds document in hot memory</a:t>
+            </a:r>
+            <a:endParaRPr lang="en-US" sz="1400" dirty="0"/>
           </a:p>
           <a:p>
             <a:pPr marL="0" indent="0" algn="ctr">
@@ -5029,23 +5027,23 @@
                   <a:srgbClr val="CADCFC"/>
                 </a:solidFill>
               </a:rPr>
-              <a:t>Valid 12 hours</a:t>
-            </a:r>
-            <a:endParaRPr lang="en-US" sz="1800" dirty="0"/>
+              <a:t>Valid 12 hours (lazy — created on first query)</a:t>
+            </a:r>
+            <a:endParaRPr lang="en-US" sz="1400" dirty="0"/>
           </a:p>
           <a:p>
             <a:pPr marL="0" indent="0" algn="ctr">
               <a:buNone/>
             </a:pPr>
             <a:r>
-              <a:rPr lang="en-US" sz="1300" dirty="0">
+              <a:rPr lang="en-US" sz="1400" dirty="0">
                 <a:solidFill>
                   <a:srgbClr val="CADCFC"/>
                 </a:solidFill>
               </a:rPr>
-              <a:t>~95% cache hit rate during business hours</a:t>
-            </a:r>
-            <a:endParaRPr lang="en-US" sz="1800" dirty="0"/>
+              <a:t>Cache storage: $1.00 per 1M tokens/hour</a:t>
+            </a:r>
+            <a:endParaRPr lang="en-US" sz="1400" dirty="0"/>
           </a:p>
         </p:txBody>
       </p:sp>
@@ -5057,8 +5055,8 @@
         </p:nvSpPr>
         <p:spPr>
           <a:xfrm>
-            <a:off x="457200" y="4160520"/>
-            <a:ext cx="3931920" cy="1554480"/>
+            <a:off x="457200" y="3718560"/>
+            <a:ext cx="2590800" cy="1143000"/>
           </a:xfrm>
           <a:prstGeom prst="rect">
             <a:avLst/>
@@ -5068,7 +5066,7 @@
           </a:solidFill>
           <a:ln w="19050">
             <a:solidFill>
-              <a:srgbClr val="C9A84C"/>
+              <a:srgbClr val="1E3A5F"/>
             </a:solidFill>
             <a:prstDash val="solid"/>
           </a:ln>
@@ -5089,8 +5087,8 @@
         </p:nvSpPr>
         <p:spPr>
           <a:xfrm>
-            <a:off x="457200" y="4160520"/>
-            <a:ext cx="3931920" cy="1554480"/>
+            <a:off x="457200" y="3718560"/>
+            <a:ext cx="2590800" cy="1143000"/>
           </a:xfrm>
           <a:prstGeom prst="rect">
             <a:avLst/>
@@ -5106,14 +5104,14 @@
               <a:buNone/>
             </a:pPr>
             <a:r>
-              <a:rPr lang="en-US" sz="2800" b="1" dirty="0">
+              <a:rPr lang="en-US" sz="4200" b="1" dirty="0">
                 <a:solidFill>
                   <a:srgbClr val="C9A84C"/>
                 </a:solidFill>
               </a:rPr>
-              <a:t>$0.002–0.005</a:t>
-            </a:r>
-            <a:endParaRPr lang="en-US" sz="2800" dirty="0"/>
+              <a:t>$0.01</a:t>
+            </a:r>
+            <a:endParaRPr lang="en-US" sz="4200" dirty="0"/>
           </a:p>
           <a:p>
             <a:pPr marL="0" indent="0" algn="ctr">
@@ -5125,9 +5123,9 @@
                   <a:srgbClr val="1E3A5F"/>
                 </a:solidFill>
               </a:rPr>
-              <a:t>Flash model / cached query</a:t>
-            </a:r>
-            <a:endParaRPr lang="en-US" sz="2800" dirty="0"/>
+              <a:t>Flash-Lite / cached query</a:t>
+            </a:r>
+            <a:endParaRPr lang="en-US" sz="1200" dirty="0"/>
           </a:p>
         </p:txBody>
       </p:sp>
@@ -5139,8 +5137,8 @@
         </p:nvSpPr>
         <p:spPr>
           <a:xfrm>
-            <a:off x="4754880" y="4160520"/>
-            <a:ext cx="3931920" cy="1554480"/>
+            <a:off x="3276600" y="3718560"/>
+            <a:ext cx="2590800" cy="1143000"/>
           </a:xfrm>
           <a:prstGeom prst="rect">
             <a:avLst/>
@@ -5150,7 +5148,7 @@
           </a:solidFill>
           <a:ln w="19050">
             <a:solidFill>
-              <a:srgbClr val="C9A84C"/>
+              <a:srgbClr val="1E3A5F"/>
             </a:solidFill>
             <a:prstDash val="solid"/>
           </a:ln>
@@ -5171,8 +5169,8 @@
         </p:nvSpPr>
         <p:spPr>
           <a:xfrm>
-            <a:off x="4754880" y="4160520"/>
-            <a:ext cx="3931920" cy="1554480"/>
+            <a:off x="3276600" y="3718560"/>
+            <a:ext cx="2590800" cy="1143000"/>
           </a:xfrm>
           <a:prstGeom prst="rect">
             <a:avLst/>
@@ -5188,14 +5186,14 @@
               <a:buNone/>
             </a:pPr>
             <a:r>
-              <a:rPr lang="en-US" sz="2800" b="1" dirty="0">
+              <a:rPr lang="en-US" sz="4200" b="1" dirty="0">
                 <a:solidFill>
                   <a:srgbClr val="C9A84C"/>
                 </a:solidFill>
               </a:rPr>
-              <a:t>$0.02–0.05</a:t>
-            </a:r>
-            <a:endParaRPr lang="en-US" sz="2800" dirty="0"/>
+              <a:t>$0.10</a:t>
+            </a:r>
+            <a:endParaRPr lang="en-US" sz="4200" dirty="0"/>
           </a:p>
           <a:p>
             <a:pPr marL="0" indent="0" algn="ctr">
@@ -5207,9 +5205,159 @@
                   <a:srgbClr val="1E3A5F"/>
                 </a:solidFill>
               </a:rPr>
-              <a:t>Pro model / cached query</a:t>
-            </a:r>
-            <a:endParaRPr lang="en-US" sz="2800" dirty="0"/>
+              <a:t>Flash 2.5 / cached query</a:t>
+            </a:r>
+            <a:endParaRPr lang="en-US" sz="1200" dirty="0"/>
+          </a:p>
+        </p:txBody>
+      </p:sp>
+      <p:sp>
+        <p:nvSpPr>
+          <p:cNvPr id="13" name="Shape 11"/>
+          <p:cNvSpPr/>
+          <p:nvPr/>
+        </p:nvSpPr>
+        <p:spPr>
+          <a:xfrm>
+            <a:off x="6096000" y="3718560"/>
+            <a:ext cx="2590800" cy="1143000"/>
+          </a:xfrm>
+          <a:prstGeom prst="rect">
+            <a:avLst/>
+          </a:prstGeom>
+          <a:solidFill>
+            <a:srgbClr val="F4F6F9"/>
+          </a:solidFill>
+          <a:ln w="19050">
+            <a:solidFill>
+              <a:srgbClr val="1E3A5F"/>
+            </a:solidFill>
+            <a:prstDash val="solid"/>
+          </a:ln>
+        </p:spPr>
+        <p:txBody>
+          <a:bodyPr/>
+          <a:lstStyle/>
+          <a:p>
+            <a:endParaRPr lang="en-US"/>
+          </a:p>
+        </p:txBody>
+      </p:sp>
+      <p:sp>
+        <p:nvSpPr>
+          <p:cNvPr id="14" name="Text 12"/>
+          <p:cNvSpPr/>
+          <p:nvPr/>
+        </p:nvSpPr>
+        <p:spPr>
+          <a:xfrm>
+            <a:off x="6096000" y="3718560"/>
+            <a:ext cx="2590800" cy="1143000"/>
+          </a:xfrm>
+          <a:prstGeom prst="rect">
+            <a:avLst/>
+          </a:prstGeom>
+          <a:noFill/>
+          <a:ln/>
+        </p:spPr>
+        <p:txBody>
+          <a:bodyPr wrap="square" rtlCol="0" anchor="ctr"/>
+          <a:lstStyle/>
+          <a:p>
+            <a:pPr marL="0" indent="0" algn="ctr">
+              <a:buNone/>
+            </a:pPr>
+            <a:r>
+              <a:rPr lang="en-US" sz="4200" b="1" dirty="0">
+                <a:solidFill>
+                  <a:srgbClr val="C9A84C"/>
+                </a:solidFill>
+              </a:rPr>
+              <a:t>$0.99</a:t>
+            </a:r>
+            <a:endParaRPr lang="en-US" sz="4200" dirty="0"/>
+          </a:p>
+          <a:p>
+            <a:pPr marL="0" indent="0" algn="ctr">
+              <a:buNone/>
+            </a:pPr>
+            <a:r>
+              <a:rPr lang="en-US" sz="1200" dirty="0">
+                <a:solidFill>
+                  <a:srgbClr val="1E3A5F"/>
+                </a:solidFill>
+              </a:rPr>
+              <a:t>Pro 2.5 / cached query</a:t>
+            </a:r>
+            <a:endParaRPr lang="en-US" sz="1200" dirty="0"/>
+          </a:p>
+        </p:txBody>
+      </p:sp>
+      <p:sp>
+        <p:nvSpPr>
+          <p:cNvPr id="15" name="Shape 13"/>
+          <p:cNvSpPr/>
+          <p:nvPr/>
+        </p:nvSpPr>
+        <p:spPr>
+          <a:xfrm>
+            <a:off x="457200" y="5030160"/>
+            <a:ext cx="8229600" cy="1143000"/>
+          </a:xfrm>
+          <a:prstGeom prst="rect">
+            <a:avLst/>
+          </a:prstGeom>
+          <a:solidFill>
+            <a:srgbClr val="2A4D7A"/>
+          </a:solidFill>
+          <a:ln w="12700">
+            <a:solidFill>
+              <a:srgbClr val="2A4D7A"/>
+            </a:solidFill>
+            <a:prstDash val="solid"/>
+          </a:ln>
+        </p:spPr>
+        <p:txBody>
+          <a:bodyPr/>
+          <a:lstStyle/>
+          <a:p>
+            <a:endParaRPr lang="en-US"/>
+          </a:p>
+        </p:txBody>
+      </p:sp>
+      <p:sp>
+        <p:nvSpPr>
+          <p:cNvPr id="16" name="Text 14"/>
+          <p:cNvSpPr/>
+          <p:nvPr/>
+        </p:nvSpPr>
+        <p:spPr>
+          <a:xfrm>
+            <a:off x="457200" y="5030160"/>
+            <a:ext cx="8229600" cy="1143000"/>
+          </a:xfrm>
+          <a:prstGeom prst="rect">
+            <a:avLst/>
+          </a:prstGeom>
+          <a:noFill/>
+          <a:ln/>
+        </p:spPr>
+        <p:txBody>
+          <a:bodyPr wrap="square" rtlCol="0" anchor="ctr"/>
+          <a:lstStyle/>
+          <a:p>
+            <a:pPr marL="228600" indent="0" algn="ctr">
+              <a:buNone/>
+            </a:pPr>
+            <a:r>
+              <a:rPr lang="en-US" sz="1400" dirty="0">
+                <a:solidFill>
+                  <a:srgbClr val="FFFFFF"/>
+                </a:solidFill>
+              </a:rPr>
+              <a:t>Cache storage is the dominant cost: ~$9/day baseline. Recommended for city deployment: Flash model with implicit caching (no storage fee) — estimated $50–100/month at typical staff usage.</a:t>
+            </a:r>
+            <a:endParaRPr lang="en-US" sz="1400" dirty="0"/>
           </a:p>
         </p:txBody>
       </p:sp>
@@ -7058,7 +7206,7 @@
                 <a:ea typeface="Calibri" pitchFamily="34" charset="-122"/>
                 <a:cs typeface="Calibri" pitchFamily="34" charset="-120"/>
               </a:rPr>
-              <a:t>Next Steps </a:t>
+              <a:t xml:space="preserve">Next Steps </a:t>
             </a:r>
             <a:r>
               <a:rPr lang="en-US" sz="4400" b="1">
@@ -7069,7 +7217,7 @@
                 <a:ea typeface="Calibri" pitchFamily="34" charset="-122"/>
                 <a:cs typeface="Calibri" pitchFamily="34" charset="-120"/>
               </a:rPr>
-              <a:t>(from Claude </a:t>
+              <a:t xml:space="preserve">(from Claude </a:t>
             </a:r>
             <a:r>
               <a:rPr lang="en-US" sz="4400" b="1">
@@ -7461,7 +7609,7 @@
                   <a:srgbClr val="FFFFFF"/>
                 </a:solidFill>
               </a:rPr>
-              <a:t>John Weisenfeld  ·  jweisenfeld@psd1.org     </a:t>
+              <a:t xml:space="preserve">John Weisenfeld  ·  jweisenfeld@psd1.org     </a:t>
             </a:r>
             <a:r>
               <a:rPr lang="en-US" sz="1400" b="1" dirty="0">

--- a/pmc1/PMC-AI-Technical-Overview.pptx
+++ b/pmc1/PMC-AI-Technical-Overview.pptx
@@ -5,7 +5,7 @@
     <p:sldMasterId id="2147483648" r:id="rId1"/>
   </p:sldMasterIdLst>
   <p:notesMasterIdLst>
-    <p:notesMasterId r:id="rId17"/>
+    <p:notesMasterId r:id="rId25"/>
   </p:notesMasterIdLst>
   <p:sldIdLst>
     <p:sldId id="256" r:id="rId2"/>
@@ -23,6 +23,14 @@
     <p:sldId id="268" r:id="rId14"/>
     <p:sldId id="269" r:id="rId15"/>
     <p:sldId id="270" r:id="rId16"/>
+    <p:sldId id="271" r:id="rId17"/>
+    <p:sldId id="272" r:id="rId18"/>
+    <p:sldId id="273" r:id="rId19"/>
+    <p:sldId id="274" r:id="rId20"/>
+    <p:sldId id="275" r:id="rId21"/>
+    <p:sldId id="276" r:id="rId22"/>
+    <p:sldId id="277" r:id="rId23"/>
+    <p:sldId id="278" r:id="rId24"/>
   </p:sldIdLst>
   <p:sldSz cx="9144000" cy="6858000" type="screen4x3"/>
   <p:notesSz cx="6858000" cy="9144000"/>
@@ -434,6 +442,330 @@
     <p:extLst>
       <p:ext uri="{BB962C8B-B14F-4D97-AF65-F5344CB8AC3E}">
         <p14:creationId xmlns:p14="http://schemas.microsoft.com/office/powerpoint/2010/main" val="4040371786"/>
+      </p:ext>
+    </p:extLst>
+  </p:cSld>
+  <p:clrMapOvr>
+    <a:masterClrMapping/>
+  </p:clrMapOvr>
+</p:notes>
+</file>
+
+<file path=ppt/notesSlides/notesSlide11.xml><?xml version="1.0" encoding="utf-8"?>
+<p:notes xmlns:a="http://schemas.openxmlformats.org/drawingml/2006/main" xmlns:r="http://schemas.openxmlformats.org/officeDocument/2006/relationships" xmlns:p="http://schemas.openxmlformats.org/presentationml/2006/main">
+  <p:cSld>
+    <p:spTree>
+      <p:nvGrpSpPr>
+        <p:cNvPr id="1" name="">
+          <a:extLst>
+            <a:ext uri="{FF2B5EF4-FFF2-40B4-BE49-F238E27FC236}">
+              <a16:creationId xmlns:a16="http://schemas.microsoft.com/office/drawing/2014/main" id="{A8DA362A-3954-9CE8-782D-6C4F76FFAB85}"/>
+            </a:ext>
+          </a:extLst>
+        </p:cNvPr>
+        <p:cNvGrpSpPr/>
+        <p:nvPr/>
+      </p:nvGrpSpPr>
+      <p:grpSpPr>
+        <a:xfrm>
+          <a:off x="0" y="0"/>
+          <a:ext cx="0" cy="0"/>
+          <a:chOff x="0" y="0"/>
+          <a:chExt cx="0" cy="0"/>
+        </a:xfrm>
+      </p:grpSpPr>
+      <p:sp>
+        <p:nvSpPr>
+          <p:cNvPr id="2" name="Slide Image Placeholder 1">
+            <a:extLst>
+              <a:ext uri="{FF2B5EF4-FFF2-40B4-BE49-F238E27FC236}">
+                <a16:creationId xmlns:a16="http://schemas.microsoft.com/office/drawing/2014/main" id="{FEEA3842-8A06-B572-98D0-60C9E4432324}"/>
+              </a:ext>
+            </a:extLst>
+          </p:cNvPr>
+          <p:cNvSpPr>
+            <a:spLocks noGrp="1" noRot="1" noChangeAspect="1"/>
+          </p:cNvSpPr>
+          <p:nvPr>
+            <p:ph type="sldImg"/>
+          </p:nvPr>
+        </p:nvSpPr>
+        <p:spPr/>
+      </p:sp>
+      <p:sp>
+        <p:nvSpPr>
+          <p:cNvPr id="3" name="Notes Placeholder 2">
+            <a:extLst>
+              <a:ext uri="{FF2B5EF4-FFF2-40B4-BE49-F238E27FC236}">
+                <a16:creationId xmlns:a16="http://schemas.microsoft.com/office/drawing/2014/main" id="{DE6F19C6-748A-905E-79DE-EA373DD14DE0}"/>
+              </a:ext>
+            </a:extLst>
+          </p:cNvPr>
+          <p:cNvSpPr>
+            <a:spLocks noGrp="1"/>
+          </p:cNvSpPr>
+          <p:nvPr>
+            <p:ph type="body" idx="1"/>
+          </p:nvPr>
+        </p:nvSpPr>
+        <p:spPr/>
+        <p:txBody>
+          <a:bodyPr/>
+          <a:lstStyle/>
+          <a:p>
+            <a:endParaRPr lang="en-US" dirty="0"/>
+          </a:p>
+        </p:txBody>
+      </p:sp>
+      <p:sp>
+        <p:nvSpPr>
+          <p:cNvPr id="4" name="Slide Number Placeholder 3">
+            <a:extLst>
+              <a:ext uri="{FF2B5EF4-FFF2-40B4-BE49-F238E27FC236}">
+                <a16:creationId xmlns:a16="http://schemas.microsoft.com/office/drawing/2014/main" id="{CBF5C14A-4972-4A9C-CC65-D61FD8E1994E}"/>
+              </a:ext>
+            </a:extLst>
+          </p:cNvPr>
+          <p:cNvSpPr>
+            <a:spLocks noGrp="1"/>
+          </p:cNvSpPr>
+          <p:nvPr>
+            <p:ph type="sldNum" sz="quarter" idx="10"/>
+          </p:nvPr>
+        </p:nvSpPr>
+        <p:spPr/>
+        <p:txBody>
+          <a:bodyPr/>
+          <a:lstStyle/>
+          <a:p>
+            <a:fld id="{F7021451-1387-4CA6-816F-3879F97B5CBC}" type="slidenum">
+              <a:rPr lang="en-US"/>
+              <a:t>16</a:t>
+            </a:fld>
+            <a:endParaRPr lang="en-US"/>
+          </a:p>
+        </p:txBody>
+      </p:sp>
+    </p:spTree>
+    <p:extLst>
+      <p:ext uri="{BB962C8B-B14F-4D97-AF65-F5344CB8AC3E}">
+        <p14:creationId xmlns:p14="http://schemas.microsoft.com/office/powerpoint/2010/main" val="3036807878"/>
+      </p:ext>
+    </p:extLst>
+  </p:cSld>
+  <p:clrMapOvr>
+    <a:masterClrMapping/>
+  </p:clrMapOvr>
+</p:notes>
+</file>
+
+<file path=ppt/notesSlides/notesSlide12.xml><?xml version="1.0" encoding="utf-8"?>
+<p:notes xmlns:a="http://schemas.openxmlformats.org/drawingml/2006/main" xmlns:r="http://schemas.openxmlformats.org/officeDocument/2006/relationships" xmlns:p="http://schemas.openxmlformats.org/presentationml/2006/main">
+  <p:cSld>
+    <p:spTree>
+      <p:nvGrpSpPr>
+        <p:cNvPr id="1" name="">
+          <a:extLst>
+            <a:ext uri="{FF2B5EF4-FFF2-40B4-BE49-F238E27FC236}">
+              <a16:creationId xmlns:a16="http://schemas.microsoft.com/office/drawing/2014/main" id="{26944880-5395-564F-D047-1BA3F7A132E1}"/>
+            </a:ext>
+          </a:extLst>
+        </p:cNvPr>
+        <p:cNvGrpSpPr/>
+        <p:nvPr/>
+      </p:nvGrpSpPr>
+      <p:grpSpPr>
+        <a:xfrm>
+          <a:off x="0" y="0"/>
+          <a:ext cx="0" cy="0"/>
+          <a:chOff x="0" y="0"/>
+          <a:chExt cx="0" cy="0"/>
+        </a:xfrm>
+      </p:grpSpPr>
+      <p:sp>
+        <p:nvSpPr>
+          <p:cNvPr id="2" name="Slide Image Placeholder 1">
+            <a:extLst>
+              <a:ext uri="{FF2B5EF4-FFF2-40B4-BE49-F238E27FC236}">
+                <a16:creationId xmlns:a16="http://schemas.microsoft.com/office/drawing/2014/main" id="{7B980B7B-3F36-7914-7B69-131C1CC09452}"/>
+              </a:ext>
+            </a:extLst>
+          </p:cNvPr>
+          <p:cNvSpPr>
+            <a:spLocks noGrp="1" noRot="1" noChangeAspect="1"/>
+          </p:cNvSpPr>
+          <p:nvPr>
+            <p:ph type="sldImg"/>
+          </p:nvPr>
+        </p:nvSpPr>
+        <p:spPr/>
+      </p:sp>
+      <p:sp>
+        <p:nvSpPr>
+          <p:cNvPr id="3" name="Notes Placeholder 2">
+            <a:extLst>
+              <a:ext uri="{FF2B5EF4-FFF2-40B4-BE49-F238E27FC236}">
+                <a16:creationId xmlns:a16="http://schemas.microsoft.com/office/drawing/2014/main" id="{0B5C65EA-BE0F-8FB9-DC56-E76E23DE5953}"/>
+              </a:ext>
+            </a:extLst>
+          </p:cNvPr>
+          <p:cNvSpPr>
+            <a:spLocks noGrp="1"/>
+          </p:cNvSpPr>
+          <p:nvPr>
+            <p:ph type="body" idx="1"/>
+          </p:nvPr>
+        </p:nvSpPr>
+        <p:spPr/>
+        <p:txBody>
+          <a:bodyPr/>
+          <a:lstStyle/>
+          <a:p>
+            <a:endParaRPr lang="en-US" dirty="0"/>
+          </a:p>
+        </p:txBody>
+      </p:sp>
+      <p:sp>
+        <p:nvSpPr>
+          <p:cNvPr id="4" name="Slide Number Placeholder 3">
+            <a:extLst>
+              <a:ext uri="{FF2B5EF4-FFF2-40B4-BE49-F238E27FC236}">
+                <a16:creationId xmlns:a16="http://schemas.microsoft.com/office/drawing/2014/main" id="{11792029-E089-D96F-6CD3-C6DD53F8C9B0}"/>
+              </a:ext>
+            </a:extLst>
+          </p:cNvPr>
+          <p:cNvSpPr>
+            <a:spLocks noGrp="1"/>
+          </p:cNvSpPr>
+          <p:nvPr>
+            <p:ph type="sldNum" sz="quarter" idx="10"/>
+          </p:nvPr>
+        </p:nvSpPr>
+        <p:spPr/>
+        <p:txBody>
+          <a:bodyPr/>
+          <a:lstStyle/>
+          <a:p>
+            <a:fld id="{F7021451-1387-4CA6-816F-3879F97B5CBC}" type="slidenum">
+              <a:rPr lang="en-US"/>
+              <a:t>22</a:t>
+            </a:fld>
+            <a:endParaRPr lang="en-US"/>
+          </a:p>
+        </p:txBody>
+      </p:sp>
+    </p:spTree>
+    <p:extLst>
+      <p:ext uri="{BB962C8B-B14F-4D97-AF65-F5344CB8AC3E}">
+        <p14:creationId xmlns:p14="http://schemas.microsoft.com/office/powerpoint/2010/main" val="2870441442"/>
+      </p:ext>
+    </p:extLst>
+  </p:cSld>
+  <p:clrMapOvr>
+    <a:masterClrMapping/>
+  </p:clrMapOvr>
+</p:notes>
+</file>
+
+<file path=ppt/notesSlides/notesSlide13.xml><?xml version="1.0" encoding="utf-8"?>
+<p:notes xmlns:a="http://schemas.openxmlformats.org/drawingml/2006/main" xmlns:r="http://schemas.openxmlformats.org/officeDocument/2006/relationships" xmlns:p="http://schemas.openxmlformats.org/presentationml/2006/main">
+  <p:cSld>
+    <p:spTree>
+      <p:nvGrpSpPr>
+        <p:cNvPr id="1" name="">
+          <a:extLst>
+            <a:ext uri="{FF2B5EF4-FFF2-40B4-BE49-F238E27FC236}">
+              <a16:creationId xmlns:a16="http://schemas.microsoft.com/office/drawing/2014/main" id="{CAF3CDC3-960B-DC8A-1E0E-941727EC6BBF}"/>
+            </a:ext>
+          </a:extLst>
+        </p:cNvPr>
+        <p:cNvGrpSpPr/>
+        <p:nvPr/>
+      </p:nvGrpSpPr>
+      <p:grpSpPr>
+        <a:xfrm>
+          <a:off x="0" y="0"/>
+          <a:ext cx="0" cy="0"/>
+          <a:chOff x="0" y="0"/>
+          <a:chExt cx="0" cy="0"/>
+        </a:xfrm>
+      </p:grpSpPr>
+      <p:sp>
+        <p:nvSpPr>
+          <p:cNvPr id="2" name="Slide Image Placeholder 1">
+            <a:extLst>
+              <a:ext uri="{FF2B5EF4-FFF2-40B4-BE49-F238E27FC236}">
+                <a16:creationId xmlns:a16="http://schemas.microsoft.com/office/drawing/2014/main" id="{75D17D75-E61A-FDCD-1B4B-767AE8675706}"/>
+              </a:ext>
+            </a:extLst>
+          </p:cNvPr>
+          <p:cNvSpPr>
+            <a:spLocks noGrp="1" noRot="1" noChangeAspect="1"/>
+          </p:cNvSpPr>
+          <p:nvPr>
+            <p:ph type="sldImg"/>
+          </p:nvPr>
+        </p:nvSpPr>
+        <p:spPr/>
+      </p:sp>
+      <p:sp>
+        <p:nvSpPr>
+          <p:cNvPr id="3" name="Notes Placeholder 2">
+            <a:extLst>
+              <a:ext uri="{FF2B5EF4-FFF2-40B4-BE49-F238E27FC236}">
+                <a16:creationId xmlns:a16="http://schemas.microsoft.com/office/drawing/2014/main" id="{2D63371D-8E36-5DFC-3E9B-DF8DA814183E}"/>
+              </a:ext>
+            </a:extLst>
+          </p:cNvPr>
+          <p:cNvSpPr>
+            <a:spLocks noGrp="1"/>
+          </p:cNvSpPr>
+          <p:nvPr>
+            <p:ph type="body" idx="1"/>
+          </p:nvPr>
+        </p:nvSpPr>
+        <p:spPr/>
+        <p:txBody>
+          <a:bodyPr/>
+          <a:lstStyle/>
+          <a:p>
+            <a:endParaRPr lang="en-US" dirty="0"/>
+          </a:p>
+        </p:txBody>
+      </p:sp>
+      <p:sp>
+        <p:nvSpPr>
+          <p:cNvPr id="4" name="Slide Number Placeholder 3">
+            <a:extLst>
+              <a:ext uri="{FF2B5EF4-FFF2-40B4-BE49-F238E27FC236}">
+                <a16:creationId xmlns:a16="http://schemas.microsoft.com/office/drawing/2014/main" id="{7CB78724-5C29-33B6-A830-6A96A13890E2}"/>
+              </a:ext>
+            </a:extLst>
+          </p:cNvPr>
+          <p:cNvSpPr>
+            <a:spLocks noGrp="1"/>
+          </p:cNvSpPr>
+          <p:nvPr>
+            <p:ph type="sldNum" sz="quarter" idx="10"/>
+          </p:nvPr>
+        </p:nvSpPr>
+        <p:spPr/>
+        <p:txBody>
+          <a:bodyPr/>
+          <a:lstStyle/>
+          <a:p>
+            <a:fld id="{F7021451-1387-4CA6-816F-3879F97B5CBC}" type="slidenum">
+              <a:rPr lang="en-US"/>
+              <a:t>23</a:t>
+            </a:fld>
+            <a:endParaRPr lang="en-US"/>
+          </a:p>
+        </p:txBody>
+      </p:sp>
+    </p:spTree>
+    <p:extLst>
+      <p:ext uri="{BB962C8B-B14F-4D97-AF65-F5344CB8AC3E}">
+        <p14:creationId xmlns:p14="http://schemas.microsoft.com/office/powerpoint/2010/main" val="2933388078"/>
       </p:ext>
     </p:extLst>
   </p:cSld>
@@ -1831,8 +2163,8 @@
         </p:nvSpPr>
         <p:spPr>
           <a:xfrm>
-            <a:off x="1002471" y="2967335"/>
-            <a:ext cx="7139070" cy="923330"/>
+            <a:off x="1084229" y="2967335"/>
+            <a:ext cx="6975563" cy="1754326"/>
           </a:xfrm>
           <a:prstGeom prst="rect">
             <a:avLst/>
@@ -1866,7 +2198,32 @@
                   </a:outerShdw>
                 </a:effectLst>
               </a:rPr>
-              <a:t>What are the real costs?</a:t>
+              <a:t>What are the real costs </a:t>
+            </a:r>
+          </a:p>
+          <a:p>
+            <a:pPr algn="ctr"/>
+            <a:r>
+              <a:rPr lang="en-US" sz="5400" b="1" cap="none" spc="0" dirty="0">
+                <a:ln w="13462">
+                  <a:solidFill>
+                    <a:schemeClr val="bg1"/>
+                  </a:solidFill>
+                  <a:prstDash val="solid"/>
+                </a:ln>
+                <a:solidFill>
+                  <a:schemeClr val="tx1">
+                    <a:lumMod val="85000"/>
+                    <a:lumOff val="15000"/>
+                  </a:schemeClr>
+                </a:solidFill>
+                <a:effectLst>
+                  <a:outerShdw dist="38100" dir="2700000" algn="bl" rotWithShape="0">
+                    <a:schemeClr val="accent5"/>
+                  </a:outerShdw>
+                </a:effectLst>
+              </a:rPr>
+              <a:t>when you use Gemini?</a:t>
             </a:r>
           </a:p>
         </p:txBody>
@@ -2184,6 +2541,430 @@
 </p:sld>
 </file>
 
+<file path=ppt/slides/slide16.xml><?xml version="1.0" encoding="utf-8"?>
+<p:sld xmlns:a="http://schemas.openxmlformats.org/drawingml/2006/main" xmlns:r="http://schemas.openxmlformats.org/officeDocument/2006/relationships" xmlns:p="http://schemas.openxmlformats.org/presentationml/2006/main">
+  <p:cSld>
+    <p:bg>
+      <p:bgPr>
+        <a:solidFill>
+          <a:srgbClr val="F4F6F9"/>
+        </a:solidFill>
+        <a:effectLst/>
+      </p:bgPr>
+    </p:bg>
+    <p:spTree>
+      <p:nvGrpSpPr>
+        <p:cNvPr id="1" name="">
+          <a:extLst>
+            <a:ext uri="{FF2B5EF4-FFF2-40B4-BE49-F238E27FC236}">
+              <a16:creationId xmlns:a16="http://schemas.microsoft.com/office/drawing/2014/main" id="{AA12B84B-FA4E-BDFA-C219-039A0C917D62}"/>
+            </a:ext>
+          </a:extLst>
+        </p:cNvPr>
+        <p:cNvGrpSpPr/>
+        <p:nvPr/>
+      </p:nvGrpSpPr>
+      <p:grpSpPr>
+        <a:xfrm>
+          <a:off x="0" y="0"/>
+          <a:ext cx="0" cy="0"/>
+          <a:chOff x="0" y="0"/>
+          <a:chExt cx="0" cy="0"/>
+        </a:xfrm>
+      </p:grpSpPr>
+      <p:sp>
+        <p:nvSpPr>
+          <p:cNvPr id="2" name="Shape 0">
+            <a:extLst>
+              <a:ext uri="{FF2B5EF4-FFF2-40B4-BE49-F238E27FC236}">
+                <a16:creationId xmlns:a16="http://schemas.microsoft.com/office/drawing/2014/main" id="{9A1030CC-B95D-CA2F-E42D-FDCBD4544688}"/>
+              </a:ext>
+            </a:extLst>
+          </p:cNvPr>
+          <p:cNvSpPr/>
+          <p:nvPr/>
+        </p:nvSpPr>
+        <p:spPr>
+          <a:xfrm>
+            <a:off x="0" y="0"/>
+            <a:ext cx="9144000" cy="1005840"/>
+          </a:xfrm>
+          <a:prstGeom prst="rect">
+            <a:avLst/>
+          </a:prstGeom>
+          <a:solidFill>
+            <a:srgbClr val="1E3A5F"/>
+          </a:solidFill>
+          <a:ln w="12700">
+            <a:solidFill>
+              <a:srgbClr val="1E3A5F"/>
+            </a:solidFill>
+            <a:prstDash val="solid"/>
+          </a:ln>
+        </p:spPr>
+        <p:txBody>
+          <a:bodyPr/>
+          <a:lstStyle/>
+          <a:p>
+            <a:endParaRPr lang="en-US"/>
+          </a:p>
+        </p:txBody>
+      </p:sp>
+      <p:sp>
+        <p:nvSpPr>
+          <p:cNvPr id="3" name="Text 1">
+            <a:extLst>
+              <a:ext uri="{FF2B5EF4-FFF2-40B4-BE49-F238E27FC236}">
+                <a16:creationId xmlns:a16="http://schemas.microsoft.com/office/drawing/2014/main" id="{605666B5-E130-EB60-C10E-A1D670675D75}"/>
+              </a:ext>
+            </a:extLst>
+          </p:cNvPr>
+          <p:cNvSpPr/>
+          <p:nvPr/>
+        </p:nvSpPr>
+        <p:spPr>
+          <a:xfrm>
+            <a:off x="320040" y="0"/>
+            <a:ext cx="8686800" cy="1005840"/>
+          </a:xfrm>
+          <a:prstGeom prst="rect">
+            <a:avLst/>
+          </a:prstGeom>
+          <a:noFill/>
+          <a:ln/>
+        </p:spPr>
+        <p:txBody>
+          <a:bodyPr wrap="square" lIns="0" tIns="0" rIns="0" bIns="0" rtlCol="0" anchor="ctr"/>
+          <a:lstStyle/>
+          <a:p>
+            <a:pPr marL="0" indent="0" algn="l">
+              <a:buNone/>
+            </a:pPr>
+            <a:r>
+              <a:rPr lang="en-US" sz="2800" b="1" dirty="0">
+                <a:solidFill>
+                  <a:srgbClr val="FFFFFF"/>
+                </a:solidFill>
+                <a:latin typeface="Calibri" pitchFamily="34" charset="0"/>
+                <a:ea typeface="Calibri" pitchFamily="34" charset="-122"/>
+                <a:cs typeface="Calibri" pitchFamily="34" charset="-120"/>
+              </a:rPr>
+              <a:t>Appendix Slides</a:t>
+            </a:r>
+            <a:endParaRPr lang="en-US" sz="2800" dirty="0"/>
+          </a:p>
+        </p:txBody>
+      </p:sp>
+      <p:sp>
+        <p:nvSpPr>
+          <p:cNvPr id="4" name="Shape 2">
+            <a:extLst>
+              <a:ext uri="{FF2B5EF4-FFF2-40B4-BE49-F238E27FC236}">
+                <a16:creationId xmlns:a16="http://schemas.microsoft.com/office/drawing/2014/main" id="{C8597C6B-B620-1D90-5F3A-6077BD4DEB8C}"/>
+              </a:ext>
+            </a:extLst>
+          </p:cNvPr>
+          <p:cNvSpPr/>
+          <p:nvPr/>
+        </p:nvSpPr>
+        <p:spPr>
+          <a:xfrm>
+            <a:off x="0" y="1005840"/>
+            <a:ext cx="73152" cy="5852160"/>
+          </a:xfrm>
+          <a:prstGeom prst="rect">
+            <a:avLst/>
+          </a:prstGeom>
+          <a:solidFill>
+            <a:srgbClr val="C9A84C"/>
+          </a:solidFill>
+          <a:ln w="12700">
+            <a:solidFill>
+              <a:srgbClr val="C9A84C"/>
+            </a:solidFill>
+            <a:prstDash val="solid"/>
+          </a:ln>
+        </p:spPr>
+        <p:txBody>
+          <a:bodyPr/>
+          <a:lstStyle/>
+          <a:p>
+            <a:endParaRPr lang="en-US"/>
+          </a:p>
+        </p:txBody>
+      </p:sp>
+      <p:sp>
+        <p:nvSpPr>
+          <p:cNvPr id="30" name="Rectangle 29">
+            <a:extLst>
+              <a:ext uri="{FF2B5EF4-FFF2-40B4-BE49-F238E27FC236}">
+                <a16:creationId xmlns:a16="http://schemas.microsoft.com/office/drawing/2014/main" id="{F1000D71-F914-9417-0188-901685256032}"/>
+              </a:ext>
+            </a:extLst>
+          </p:cNvPr>
+          <p:cNvSpPr/>
+          <p:nvPr/>
+        </p:nvSpPr>
+        <p:spPr>
+          <a:xfrm>
+            <a:off x="1084229" y="2967335"/>
+            <a:ext cx="6975563" cy="1754326"/>
+          </a:xfrm>
+          <a:prstGeom prst="rect">
+            <a:avLst/>
+          </a:prstGeom>
+          <a:noFill/>
+        </p:spPr>
+        <p:txBody>
+          <a:bodyPr wrap="none" lIns="91440" tIns="45720" rIns="91440" bIns="45720">
+            <a:spAutoFit/>
+          </a:bodyPr>
+          <a:lstStyle/>
+          <a:p>
+            <a:pPr algn="ctr"/>
+            <a:r>
+              <a:rPr lang="en-US" sz="5400" b="1" cap="none" spc="0" dirty="0">
+                <a:ln w="13462">
+                  <a:solidFill>
+                    <a:schemeClr val="bg1"/>
+                  </a:solidFill>
+                  <a:prstDash val="solid"/>
+                </a:ln>
+                <a:solidFill>
+                  <a:schemeClr val="tx1">
+                    <a:lumMod val="85000"/>
+                    <a:lumOff val="15000"/>
+                  </a:schemeClr>
+                </a:solidFill>
+                <a:effectLst>
+                  <a:outerShdw dist="38100" dir="2700000" algn="bl" rotWithShape="0">
+                    <a:schemeClr val="accent5"/>
+                  </a:outerShdw>
+                </a:effectLst>
+              </a:rPr>
+              <a:t>What are the real costs </a:t>
+            </a:r>
+          </a:p>
+          <a:p>
+            <a:pPr algn="ctr"/>
+            <a:r>
+              <a:rPr lang="en-US" sz="5400" b="1" cap="none" spc="0" dirty="0">
+                <a:ln w="13462">
+                  <a:solidFill>
+                    <a:schemeClr val="bg1"/>
+                  </a:solidFill>
+                  <a:prstDash val="solid"/>
+                </a:ln>
+                <a:solidFill>
+                  <a:schemeClr val="tx1">
+                    <a:lumMod val="85000"/>
+                    <a:lumOff val="15000"/>
+                  </a:schemeClr>
+                </a:solidFill>
+                <a:effectLst>
+                  <a:outerShdw dist="38100" dir="2700000" algn="bl" rotWithShape="0">
+                    <a:schemeClr val="accent5"/>
+                  </a:outerShdw>
+                </a:effectLst>
+              </a:rPr>
+              <a:t>when you use Claude?</a:t>
+            </a:r>
+          </a:p>
+        </p:txBody>
+      </p:sp>
+    </p:spTree>
+    <p:extLst>
+      <p:ext uri="{BB962C8B-B14F-4D97-AF65-F5344CB8AC3E}">
+        <p14:creationId xmlns:p14="http://schemas.microsoft.com/office/powerpoint/2010/main" val="3053891939"/>
+      </p:ext>
+    </p:extLst>
+  </p:cSld>
+  <p:clrMapOvr>
+    <a:masterClrMapping/>
+  </p:clrMapOvr>
+</p:sld>
+</file>
+
+<file path=ppt/slides/slide17.xml><?xml version="1.0" encoding="utf-8"?>
+<p:sld xmlns:a="http://schemas.openxmlformats.org/drawingml/2006/main" xmlns:r="http://schemas.openxmlformats.org/officeDocument/2006/relationships" xmlns:p="http://schemas.openxmlformats.org/presentationml/2006/main">
+  <p:cSld>
+    <p:spTree>
+      <p:nvGrpSpPr>
+        <p:cNvPr id="1" name=""/>
+        <p:cNvGrpSpPr/>
+        <p:nvPr/>
+      </p:nvGrpSpPr>
+      <p:grpSpPr>
+        <a:xfrm>
+          <a:off x="0" y="0"/>
+          <a:ext cx="0" cy="0"/>
+          <a:chOff x="0" y="0"/>
+          <a:chExt cx="0" cy="0"/>
+        </a:xfrm>
+      </p:grpSpPr>
+      <p:pic>
+        <p:nvPicPr>
+          <p:cNvPr id="3" name="Picture 2">
+            <a:extLst>
+              <a:ext uri="{FF2B5EF4-FFF2-40B4-BE49-F238E27FC236}">
+                <a16:creationId xmlns:a16="http://schemas.microsoft.com/office/drawing/2014/main" id="{61AB10B9-080C-BCB7-C874-1FC86387B4FA}"/>
+              </a:ext>
+            </a:extLst>
+          </p:cNvPr>
+          <p:cNvPicPr>
+            <a:picLocks noChangeAspect="1"/>
+          </p:cNvPicPr>
+          <p:nvPr/>
+        </p:nvPicPr>
+        <p:blipFill>
+          <a:blip r:embed="rId2"/>
+          <a:stretch>
+            <a:fillRect/>
+          </a:stretch>
+        </p:blipFill>
+        <p:spPr>
+          <a:xfrm>
+            <a:off x="804336" y="918812"/>
+            <a:ext cx="7535327" cy="5020376"/>
+          </a:xfrm>
+          <a:prstGeom prst="rect">
+            <a:avLst/>
+          </a:prstGeom>
+        </p:spPr>
+      </p:pic>
+    </p:spTree>
+    <p:extLst>
+      <p:ext uri="{BB962C8B-B14F-4D97-AF65-F5344CB8AC3E}">
+        <p14:creationId xmlns:p14="http://schemas.microsoft.com/office/powerpoint/2010/main" val="1371547175"/>
+      </p:ext>
+    </p:extLst>
+  </p:cSld>
+  <p:clrMapOvr>
+    <a:masterClrMapping/>
+  </p:clrMapOvr>
+</p:sld>
+</file>
+
+<file path=ppt/slides/slide18.xml><?xml version="1.0" encoding="utf-8"?>
+<p:sld xmlns:a="http://schemas.openxmlformats.org/drawingml/2006/main" xmlns:r="http://schemas.openxmlformats.org/officeDocument/2006/relationships" xmlns:p="http://schemas.openxmlformats.org/presentationml/2006/main">
+  <p:cSld>
+    <p:spTree>
+      <p:nvGrpSpPr>
+        <p:cNvPr id="1" name=""/>
+        <p:cNvGrpSpPr/>
+        <p:nvPr/>
+      </p:nvGrpSpPr>
+      <p:grpSpPr>
+        <a:xfrm>
+          <a:off x="0" y="0"/>
+          <a:ext cx="0" cy="0"/>
+          <a:chOff x="0" y="0"/>
+          <a:chExt cx="0" cy="0"/>
+        </a:xfrm>
+      </p:grpSpPr>
+      <p:pic>
+        <p:nvPicPr>
+          <p:cNvPr id="3" name="Picture 2">
+            <a:extLst>
+              <a:ext uri="{FF2B5EF4-FFF2-40B4-BE49-F238E27FC236}">
+                <a16:creationId xmlns:a16="http://schemas.microsoft.com/office/drawing/2014/main" id="{EF9AC412-82CA-2ED4-8815-BA0A162A0054}"/>
+              </a:ext>
+            </a:extLst>
+          </p:cNvPr>
+          <p:cNvPicPr>
+            <a:picLocks noChangeAspect="1"/>
+          </p:cNvPicPr>
+          <p:nvPr/>
+        </p:nvPicPr>
+        <p:blipFill>
+          <a:blip r:embed="rId2"/>
+          <a:stretch>
+            <a:fillRect/>
+          </a:stretch>
+        </p:blipFill>
+        <p:spPr>
+          <a:xfrm>
+            <a:off x="794810" y="1604708"/>
+            <a:ext cx="7554379" cy="3648584"/>
+          </a:xfrm>
+          <a:prstGeom prst="rect">
+            <a:avLst/>
+          </a:prstGeom>
+        </p:spPr>
+      </p:pic>
+    </p:spTree>
+    <p:extLst>
+      <p:ext uri="{BB962C8B-B14F-4D97-AF65-F5344CB8AC3E}">
+        <p14:creationId xmlns:p14="http://schemas.microsoft.com/office/powerpoint/2010/main" val="169456677"/>
+      </p:ext>
+    </p:extLst>
+  </p:cSld>
+  <p:clrMapOvr>
+    <a:masterClrMapping/>
+  </p:clrMapOvr>
+</p:sld>
+</file>
+
+<file path=ppt/slides/slide19.xml><?xml version="1.0" encoding="utf-8"?>
+<p:sld xmlns:a="http://schemas.openxmlformats.org/drawingml/2006/main" xmlns:r="http://schemas.openxmlformats.org/officeDocument/2006/relationships" xmlns:p="http://schemas.openxmlformats.org/presentationml/2006/main">
+  <p:cSld>
+    <p:spTree>
+      <p:nvGrpSpPr>
+        <p:cNvPr id="1" name=""/>
+        <p:cNvGrpSpPr/>
+        <p:nvPr/>
+      </p:nvGrpSpPr>
+      <p:grpSpPr>
+        <a:xfrm>
+          <a:off x="0" y="0"/>
+          <a:ext cx="0" cy="0"/>
+          <a:chOff x="0" y="0"/>
+          <a:chExt cx="0" cy="0"/>
+        </a:xfrm>
+      </p:grpSpPr>
+      <p:pic>
+        <p:nvPicPr>
+          <p:cNvPr id="3" name="Picture 2">
+            <a:extLst>
+              <a:ext uri="{FF2B5EF4-FFF2-40B4-BE49-F238E27FC236}">
+                <a16:creationId xmlns:a16="http://schemas.microsoft.com/office/drawing/2014/main" id="{84676E3E-344D-065F-AC22-C09C6F5EBD9E}"/>
+              </a:ext>
+            </a:extLst>
+          </p:cNvPr>
+          <p:cNvPicPr>
+            <a:picLocks noChangeAspect="1"/>
+          </p:cNvPicPr>
+          <p:nvPr/>
+        </p:nvPicPr>
+        <p:blipFill>
+          <a:blip r:embed="rId2"/>
+          <a:stretch>
+            <a:fillRect/>
+          </a:stretch>
+        </p:blipFill>
+        <p:spPr>
+          <a:xfrm>
+            <a:off x="804336" y="1099812"/>
+            <a:ext cx="7535327" cy="4658375"/>
+          </a:xfrm>
+          <a:prstGeom prst="rect">
+            <a:avLst/>
+          </a:prstGeom>
+        </p:spPr>
+      </p:pic>
+    </p:spTree>
+    <p:extLst>
+      <p:ext uri="{BB962C8B-B14F-4D97-AF65-F5344CB8AC3E}">
+        <p14:creationId xmlns:p14="http://schemas.microsoft.com/office/powerpoint/2010/main" val="3133835231"/>
+      </p:ext>
+    </p:extLst>
+  </p:cSld>
+  <p:clrMapOvr>
+    <a:masterClrMapping/>
+  </p:clrMapOvr>
+</p:sld>
+</file>
+
 <file path=ppt/slides/slide2.xml><?xml version="1.0" encoding="utf-8"?>
 <p:sld xmlns:a="http://schemas.openxmlformats.org/drawingml/2006/main" xmlns:r="http://schemas.openxmlformats.org/officeDocument/2006/relationships" xmlns:p="http://schemas.openxmlformats.org/presentationml/2006/main">
   <p:cSld name="Slide 2">
@@ -2629,7 +3410,7 @@
                   <a:srgbClr val="FFFFFF"/>
                 </a:solidFill>
               </a:rPr>
-              <a:t>$0.01</a:t>
+              <a:t>$0.11</a:t>
             </a:r>
             <a:endParaRPr lang="en-US" sz="4800" dirty="0"/>
           </a:p>
@@ -2650,6 +3431,865 @@
         </p:txBody>
       </p:sp>
     </p:spTree>
+  </p:cSld>
+  <p:clrMapOvr>
+    <a:masterClrMapping/>
+  </p:clrMapOvr>
+</p:sld>
+</file>
+
+<file path=ppt/slides/slide20.xml><?xml version="1.0" encoding="utf-8"?>
+<p:sld xmlns:a="http://schemas.openxmlformats.org/drawingml/2006/main" xmlns:r="http://schemas.openxmlformats.org/officeDocument/2006/relationships" xmlns:p="http://schemas.openxmlformats.org/presentationml/2006/main">
+  <p:cSld>
+    <p:spTree>
+      <p:nvGrpSpPr>
+        <p:cNvPr id="1" name=""/>
+        <p:cNvGrpSpPr/>
+        <p:nvPr/>
+      </p:nvGrpSpPr>
+      <p:grpSpPr>
+        <a:xfrm>
+          <a:off x="0" y="0"/>
+          <a:ext cx="0" cy="0"/>
+          <a:chOff x="0" y="0"/>
+          <a:chExt cx="0" cy="0"/>
+        </a:xfrm>
+      </p:grpSpPr>
+      <p:pic>
+        <p:nvPicPr>
+          <p:cNvPr id="3" name="Picture 2">
+            <a:extLst>
+              <a:ext uri="{FF2B5EF4-FFF2-40B4-BE49-F238E27FC236}">
+                <a16:creationId xmlns:a16="http://schemas.microsoft.com/office/drawing/2014/main" id="{34FE1DCA-D3C9-A2F2-9EC2-2BB1DA1A7E3E}"/>
+              </a:ext>
+            </a:extLst>
+          </p:cNvPr>
+          <p:cNvPicPr>
+            <a:picLocks noChangeAspect="1"/>
+          </p:cNvPicPr>
+          <p:nvPr/>
+        </p:nvPicPr>
+        <p:blipFill>
+          <a:blip r:embed="rId2"/>
+          <a:stretch>
+            <a:fillRect/>
+          </a:stretch>
+        </p:blipFill>
+        <p:spPr>
+          <a:xfrm>
+            <a:off x="813863" y="337706"/>
+            <a:ext cx="7516274" cy="6182588"/>
+          </a:xfrm>
+          <a:prstGeom prst="rect">
+            <a:avLst/>
+          </a:prstGeom>
+        </p:spPr>
+      </p:pic>
+    </p:spTree>
+    <p:extLst>
+      <p:ext uri="{BB962C8B-B14F-4D97-AF65-F5344CB8AC3E}">
+        <p14:creationId xmlns:p14="http://schemas.microsoft.com/office/powerpoint/2010/main" val="3951696093"/>
+      </p:ext>
+    </p:extLst>
+  </p:cSld>
+  <p:clrMapOvr>
+    <a:masterClrMapping/>
+  </p:clrMapOvr>
+</p:sld>
+</file>
+
+<file path=ppt/slides/slide21.xml><?xml version="1.0" encoding="utf-8"?>
+<p:sld xmlns:a="http://schemas.openxmlformats.org/drawingml/2006/main" xmlns:r="http://schemas.openxmlformats.org/officeDocument/2006/relationships" xmlns:p="http://schemas.openxmlformats.org/presentationml/2006/main">
+  <p:cSld>
+    <p:spTree>
+      <p:nvGrpSpPr>
+        <p:cNvPr id="1" name=""/>
+        <p:cNvGrpSpPr/>
+        <p:nvPr/>
+      </p:nvGrpSpPr>
+      <p:grpSpPr>
+        <a:xfrm>
+          <a:off x="0" y="0"/>
+          <a:ext cx="0" cy="0"/>
+          <a:chOff x="0" y="0"/>
+          <a:chExt cx="0" cy="0"/>
+        </a:xfrm>
+      </p:grpSpPr>
+      <p:pic>
+        <p:nvPicPr>
+          <p:cNvPr id="5" name="Picture 4">
+            <a:extLst>
+              <a:ext uri="{FF2B5EF4-FFF2-40B4-BE49-F238E27FC236}">
+                <a16:creationId xmlns:a16="http://schemas.microsoft.com/office/drawing/2014/main" id="{38E6871B-935D-6BD5-0811-AEDD39D1F66C}"/>
+              </a:ext>
+            </a:extLst>
+          </p:cNvPr>
+          <p:cNvPicPr>
+            <a:picLocks noChangeAspect="1"/>
+          </p:cNvPicPr>
+          <p:nvPr/>
+        </p:nvPicPr>
+        <p:blipFill>
+          <a:blip r:embed="rId2"/>
+          <a:stretch>
+            <a:fillRect/>
+          </a:stretch>
+        </p:blipFill>
+        <p:spPr>
+          <a:xfrm>
+            <a:off x="804336" y="204337"/>
+            <a:ext cx="7535327" cy="6449325"/>
+          </a:xfrm>
+          <a:prstGeom prst="rect">
+            <a:avLst/>
+          </a:prstGeom>
+        </p:spPr>
+      </p:pic>
+    </p:spTree>
+    <p:extLst>
+      <p:ext uri="{BB962C8B-B14F-4D97-AF65-F5344CB8AC3E}">
+        <p14:creationId xmlns:p14="http://schemas.microsoft.com/office/powerpoint/2010/main" val="166763090"/>
+      </p:ext>
+    </p:extLst>
+  </p:cSld>
+  <p:clrMapOvr>
+    <a:masterClrMapping/>
+  </p:clrMapOvr>
+</p:sld>
+</file>
+
+<file path=ppt/slides/slide22.xml><?xml version="1.0" encoding="utf-8"?>
+<p:sld xmlns:a="http://schemas.openxmlformats.org/drawingml/2006/main" xmlns:r="http://schemas.openxmlformats.org/officeDocument/2006/relationships" xmlns:p="http://schemas.openxmlformats.org/presentationml/2006/main">
+  <p:cSld>
+    <p:bg>
+      <p:bgPr>
+        <a:solidFill>
+          <a:srgbClr val="F4F6F9"/>
+        </a:solidFill>
+        <a:effectLst/>
+      </p:bgPr>
+    </p:bg>
+    <p:spTree>
+      <p:nvGrpSpPr>
+        <p:cNvPr id="1" name="">
+          <a:extLst>
+            <a:ext uri="{FF2B5EF4-FFF2-40B4-BE49-F238E27FC236}">
+              <a16:creationId xmlns:a16="http://schemas.microsoft.com/office/drawing/2014/main" id="{DE416E4F-F7B0-3365-4F34-930357A6432D}"/>
+            </a:ext>
+          </a:extLst>
+        </p:cNvPr>
+        <p:cNvGrpSpPr/>
+        <p:nvPr/>
+      </p:nvGrpSpPr>
+      <p:grpSpPr>
+        <a:xfrm>
+          <a:off x="0" y="0"/>
+          <a:ext cx="0" cy="0"/>
+          <a:chOff x="0" y="0"/>
+          <a:chExt cx="0" cy="0"/>
+        </a:xfrm>
+      </p:grpSpPr>
+      <p:sp>
+        <p:nvSpPr>
+          <p:cNvPr id="2" name="Shape 0">
+            <a:extLst>
+              <a:ext uri="{FF2B5EF4-FFF2-40B4-BE49-F238E27FC236}">
+                <a16:creationId xmlns:a16="http://schemas.microsoft.com/office/drawing/2014/main" id="{3EFD1AD2-8817-6B00-55AE-AFB110166E60}"/>
+              </a:ext>
+            </a:extLst>
+          </p:cNvPr>
+          <p:cNvSpPr/>
+          <p:nvPr/>
+        </p:nvSpPr>
+        <p:spPr>
+          <a:xfrm>
+            <a:off x="0" y="0"/>
+            <a:ext cx="9144000" cy="1005840"/>
+          </a:xfrm>
+          <a:prstGeom prst="rect">
+            <a:avLst/>
+          </a:prstGeom>
+          <a:solidFill>
+            <a:srgbClr val="1E3A5F"/>
+          </a:solidFill>
+          <a:ln w="12700">
+            <a:solidFill>
+              <a:srgbClr val="1E3A5F"/>
+            </a:solidFill>
+            <a:prstDash val="solid"/>
+          </a:ln>
+        </p:spPr>
+        <p:txBody>
+          <a:bodyPr/>
+          <a:lstStyle/>
+          <a:p>
+            <a:endParaRPr lang="en-US"/>
+          </a:p>
+        </p:txBody>
+      </p:sp>
+      <p:sp>
+        <p:nvSpPr>
+          <p:cNvPr id="3" name="Text 1">
+            <a:extLst>
+              <a:ext uri="{FF2B5EF4-FFF2-40B4-BE49-F238E27FC236}">
+                <a16:creationId xmlns:a16="http://schemas.microsoft.com/office/drawing/2014/main" id="{A11293A5-D60A-A77C-74A6-35587A7D3634}"/>
+              </a:ext>
+            </a:extLst>
+          </p:cNvPr>
+          <p:cNvSpPr/>
+          <p:nvPr/>
+        </p:nvSpPr>
+        <p:spPr>
+          <a:xfrm>
+            <a:off x="320040" y="0"/>
+            <a:ext cx="8686800" cy="1005840"/>
+          </a:xfrm>
+          <a:prstGeom prst="rect">
+            <a:avLst/>
+          </a:prstGeom>
+          <a:noFill/>
+          <a:ln/>
+        </p:spPr>
+        <p:txBody>
+          <a:bodyPr wrap="square" lIns="0" tIns="0" rIns="0" bIns="0" rtlCol="0" anchor="ctr"/>
+          <a:lstStyle/>
+          <a:p>
+            <a:pPr marL="0" indent="0" algn="l">
+              <a:buNone/>
+            </a:pPr>
+            <a:r>
+              <a:rPr lang="en-US" sz="2800" b="1" dirty="0">
+                <a:solidFill>
+                  <a:srgbClr val="FFFFFF"/>
+                </a:solidFill>
+                <a:latin typeface="Calibri" pitchFamily="34" charset="0"/>
+                <a:ea typeface="Calibri" pitchFamily="34" charset="-122"/>
+                <a:cs typeface="Calibri" pitchFamily="34" charset="-120"/>
+              </a:rPr>
+              <a:t>Which Tool is Which?</a:t>
+            </a:r>
+            <a:endParaRPr lang="en-US" sz="2800" dirty="0"/>
+          </a:p>
+        </p:txBody>
+      </p:sp>
+      <p:sp>
+        <p:nvSpPr>
+          <p:cNvPr id="4" name="Shape 2">
+            <a:extLst>
+              <a:ext uri="{FF2B5EF4-FFF2-40B4-BE49-F238E27FC236}">
+                <a16:creationId xmlns:a16="http://schemas.microsoft.com/office/drawing/2014/main" id="{36433EB1-274F-3BCD-554C-A62C79EEEA11}"/>
+              </a:ext>
+            </a:extLst>
+          </p:cNvPr>
+          <p:cNvSpPr/>
+          <p:nvPr/>
+        </p:nvSpPr>
+        <p:spPr>
+          <a:xfrm>
+            <a:off x="0" y="1005840"/>
+            <a:ext cx="73152" cy="5852160"/>
+          </a:xfrm>
+          <a:prstGeom prst="rect">
+            <a:avLst/>
+          </a:prstGeom>
+          <a:solidFill>
+            <a:srgbClr val="C9A84C"/>
+          </a:solidFill>
+          <a:ln w="12700">
+            <a:solidFill>
+              <a:srgbClr val="C9A84C"/>
+            </a:solidFill>
+            <a:prstDash val="solid"/>
+          </a:ln>
+        </p:spPr>
+        <p:txBody>
+          <a:bodyPr/>
+          <a:lstStyle/>
+          <a:p>
+            <a:endParaRPr lang="en-US"/>
+          </a:p>
+        </p:txBody>
+      </p:sp>
+      <p:sp>
+        <p:nvSpPr>
+          <p:cNvPr id="5" name="Text 3">
+            <a:extLst>
+              <a:ext uri="{FF2B5EF4-FFF2-40B4-BE49-F238E27FC236}">
+                <a16:creationId xmlns:a16="http://schemas.microsoft.com/office/drawing/2014/main" id="{71CC9ECC-451D-C085-4BF1-0C4C3E5D652F}"/>
+              </a:ext>
+            </a:extLst>
+          </p:cNvPr>
+          <p:cNvSpPr/>
+          <p:nvPr/>
+        </p:nvSpPr>
+        <p:spPr>
+          <a:xfrm>
+            <a:off x="320040" y="1234440"/>
+            <a:ext cx="4572000" cy="5212080"/>
+          </a:xfrm>
+          <a:prstGeom prst="rect">
+            <a:avLst/>
+          </a:prstGeom>
+          <a:noFill/>
+          <a:ln/>
+        </p:spPr>
+        <p:txBody>
+          <a:bodyPr wrap="square" rtlCol="0" anchor="t"/>
+          <a:lstStyle/>
+          <a:p>
+            <a:pPr>
+              <a:spcAft>
+                <a:spcPts val="700"/>
+              </a:spcAft>
+            </a:pPr>
+            <a:r>
+              <a:rPr lang="en-US" sz="1500" dirty="0">
+                <a:solidFill>
+                  <a:srgbClr val="1E3A5F"/>
+                </a:solidFill>
+                <a:latin typeface="Calibri Light" pitchFamily="34" charset="0"/>
+                <a:ea typeface="Calibri Light" pitchFamily="34" charset="-122"/>
+                <a:cs typeface="Calibri Light" pitchFamily="34" charset="-120"/>
+              </a:rPr>
+              <a:t>pmc1 is Gemini-based.</a:t>
+            </a:r>
+          </a:p>
+          <a:p>
+            <a:pPr>
+              <a:spcAft>
+                <a:spcPts val="700"/>
+              </a:spcAft>
+            </a:pPr>
+            <a:r>
+              <a:rPr lang="en-US" sz="1500" dirty="0">
+                <a:solidFill>
+                  <a:srgbClr val="1E3A5F"/>
+                </a:solidFill>
+                <a:latin typeface="Calibri Light" pitchFamily="34" charset="0"/>
+                <a:ea typeface="Calibri Light" pitchFamily="34" charset="-122"/>
+                <a:cs typeface="Calibri Light" pitchFamily="34" charset="-120"/>
+              </a:rPr>
+              <a:t>pmc2 is Claude-based.</a:t>
+            </a:r>
+          </a:p>
+          <a:p>
+            <a:pPr>
+              <a:spcAft>
+                <a:spcPts val="700"/>
+              </a:spcAft>
+            </a:pPr>
+            <a:r>
+              <a:rPr lang="en-US" sz="1500" dirty="0">
+                <a:solidFill>
+                  <a:srgbClr val="1E3A5F"/>
+                </a:solidFill>
+                <a:latin typeface="Calibri Light" pitchFamily="34" charset="0"/>
+                <a:ea typeface="Calibri Light" pitchFamily="34" charset="-122"/>
+                <a:cs typeface="Calibri Light" pitchFamily="34" charset="-120"/>
+              </a:rPr>
+              <a:t>pmc3 is ChatGPT-based.</a:t>
+            </a:r>
+          </a:p>
+          <a:p>
+            <a:pPr>
+              <a:spcAft>
+                <a:spcPts val="700"/>
+              </a:spcAft>
+            </a:pPr>
+            <a:endParaRPr lang="en-US" sz="1500" dirty="0">
+              <a:solidFill>
+                <a:srgbClr val="1E3A5F"/>
+              </a:solidFill>
+              <a:latin typeface="Calibri Light" pitchFamily="34" charset="0"/>
+              <a:ea typeface="Calibri Light" pitchFamily="34" charset="-122"/>
+              <a:cs typeface="Calibri Light" pitchFamily="34" charset="-120"/>
+            </a:endParaRPr>
+          </a:p>
+          <a:p>
+            <a:pPr>
+              <a:spcAft>
+                <a:spcPts val="700"/>
+              </a:spcAft>
+            </a:pPr>
+            <a:endParaRPr lang="en-US" sz="1500" dirty="0"/>
+          </a:p>
+        </p:txBody>
+      </p:sp>
+      <p:sp>
+        <p:nvSpPr>
+          <p:cNvPr id="6" name="Shape 4">
+            <a:extLst>
+              <a:ext uri="{FF2B5EF4-FFF2-40B4-BE49-F238E27FC236}">
+                <a16:creationId xmlns:a16="http://schemas.microsoft.com/office/drawing/2014/main" id="{D1EB98EE-CC60-40BE-D2C1-40334C8C182A}"/>
+              </a:ext>
+            </a:extLst>
+          </p:cNvPr>
+          <p:cNvSpPr/>
+          <p:nvPr/>
+        </p:nvSpPr>
+        <p:spPr>
+          <a:xfrm>
+            <a:off x="5212080" y="1828800"/>
+            <a:ext cx="3657600" cy="3200400"/>
+          </a:xfrm>
+          <a:prstGeom prst="rect">
+            <a:avLst/>
+          </a:prstGeom>
+          <a:solidFill>
+            <a:srgbClr val="1E3A5F"/>
+          </a:solidFill>
+          <a:ln w="31750">
+            <a:solidFill>
+              <a:srgbClr val="C9A84C"/>
+            </a:solidFill>
+            <a:prstDash val="solid"/>
+          </a:ln>
+        </p:spPr>
+        <p:txBody>
+          <a:bodyPr/>
+          <a:lstStyle/>
+          <a:p>
+            <a:endParaRPr lang="en-US"/>
+          </a:p>
+        </p:txBody>
+      </p:sp>
+      <p:sp>
+        <p:nvSpPr>
+          <p:cNvPr id="7" name="Text 5">
+            <a:extLst>
+              <a:ext uri="{FF2B5EF4-FFF2-40B4-BE49-F238E27FC236}">
+                <a16:creationId xmlns:a16="http://schemas.microsoft.com/office/drawing/2014/main" id="{660CD30E-BC28-4894-1F4F-0546BAB9FEDA}"/>
+              </a:ext>
+            </a:extLst>
+          </p:cNvPr>
+          <p:cNvSpPr/>
+          <p:nvPr/>
+        </p:nvSpPr>
+        <p:spPr>
+          <a:xfrm>
+            <a:off x="5212080" y="1828800"/>
+            <a:ext cx="3657600" cy="3200400"/>
+          </a:xfrm>
+          <a:prstGeom prst="rect">
+            <a:avLst/>
+          </a:prstGeom>
+          <a:noFill/>
+          <a:ln/>
+        </p:spPr>
+        <p:txBody>
+          <a:bodyPr wrap="square" rtlCol="0" anchor="ctr"/>
+          <a:lstStyle/>
+          <a:p>
+            <a:pPr marL="0" indent="0" algn="ctr">
+              <a:buNone/>
+            </a:pPr>
+            <a:r>
+              <a:rPr lang="en-US" sz="1400" i="1" dirty="0">
+                <a:solidFill>
+                  <a:srgbClr val="CADCFC"/>
+                </a:solidFill>
+              </a:rPr>
+              <a:t>Try it live:</a:t>
+            </a:r>
+            <a:endParaRPr lang="en-US" sz="1400" dirty="0"/>
+          </a:p>
+          <a:p>
+            <a:pPr marL="0" indent="0" algn="ctr">
+              <a:buNone/>
+            </a:pPr>
+            <a:r>
+              <a:rPr lang="en-US" sz="600" dirty="0">
+                <a:solidFill>
+                  <a:srgbClr val="000000"/>
+                </a:solidFill>
+              </a:rPr>
+              <a:t>
+</a:t>
+            </a:r>
+            <a:endParaRPr lang="en-US" sz="1400" dirty="0"/>
+          </a:p>
+          <a:p>
+            <a:pPr algn="ctr"/>
+            <a:r>
+              <a:rPr lang="en-US" b="1" dirty="0">
+                <a:solidFill>
+                  <a:srgbClr val="C9A84C"/>
+                </a:solidFill>
+              </a:rPr>
+              <a:t>https://psd1.net/pmc1</a:t>
+            </a:r>
+            <a:endParaRPr lang="en-US" sz="1400" dirty="0"/>
+          </a:p>
+          <a:p>
+            <a:pPr algn="ctr"/>
+            <a:r>
+              <a:rPr lang="en-US" b="1" dirty="0">
+                <a:solidFill>
+                  <a:srgbClr val="C9A84C"/>
+                </a:solidFill>
+              </a:rPr>
+              <a:t>https://psd1.net/pmc2</a:t>
+            </a:r>
+            <a:endParaRPr lang="en-US" sz="1400" dirty="0"/>
+          </a:p>
+          <a:p>
+            <a:pPr marL="0" indent="0" algn="ctr">
+              <a:buNone/>
+            </a:pPr>
+            <a:r>
+              <a:rPr lang="en-US" sz="1800" b="1" dirty="0">
+                <a:solidFill>
+                  <a:srgbClr val="C9A84C"/>
+                </a:solidFill>
+              </a:rPr>
+              <a:t>https://psd1.net/pmc</a:t>
+            </a:r>
+            <a:r>
+              <a:rPr lang="en-US" b="1" dirty="0">
+                <a:solidFill>
+                  <a:srgbClr val="C9A84C"/>
+                </a:solidFill>
+              </a:rPr>
+              <a:t>3 </a:t>
+            </a:r>
+            <a:endParaRPr lang="en-US" sz="1400" dirty="0"/>
+          </a:p>
+          <a:p>
+            <a:pPr marL="0" indent="0" algn="ctr">
+              <a:buNone/>
+            </a:pPr>
+            <a:r>
+              <a:rPr lang="en-US" sz="600" dirty="0">
+                <a:solidFill>
+                  <a:srgbClr val="000000"/>
+                </a:solidFill>
+              </a:rPr>
+              <a:t>
+</a:t>
+            </a:r>
+            <a:endParaRPr lang="en-US" sz="1400" dirty="0"/>
+          </a:p>
+          <a:p>
+            <a:pPr marL="0" indent="0" algn="ctr">
+              <a:buNone/>
+            </a:pPr>
+            <a:r>
+              <a:rPr lang="en-US" sz="1300" i="1" dirty="0">
+                <a:solidFill>
+                  <a:srgbClr val="FFFFFF"/>
+                </a:solidFill>
+              </a:rPr>
+              <a:t>Ask it anything about the</a:t>
+            </a:r>
+            <a:endParaRPr lang="en-US" sz="1400" dirty="0"/>
+          </a:p>
+          <a:p>
+            <a:pPr marL="0" indent="0" algn="ctr">
+              <a:buNone/>
+            </a:pPr>
+            <a:r>
+              <a:rPr lang="en-US" sz="1300" i="1" dirty="0">
+                <a:solidFill>
+                  <a:srgbClr val="FFFFFF"/>
+                </a:solidFill>
+              </a:rPr>
+              <a:t>Pasco Municipal Code</a:t>
+            </a:r>
+            <a:endParaRPr lang="en-US" sz="1400" dirty="0"/>
+          </a:p>
+        </p:txBody>
+      </p:sp>
+    </p:spTree>
+    <p:extLst>
+      <p:ext uri="{BB962C8B-B14F-4D97-AF65-F5344CB8AC3E}">
+        <p14:creationId xmlns:p14="http://schemas.microsoft.com/office/powerpoint/2010/main" val="74350300"/>
+      </p:ext>
+    </p:extLst>
+  </p:cSld>
+  <p:clrMapOvr>
+    <a:masterClrMapping/>
+  </p:clrMapOvr>
+</p:sld>
+</file>
+
+<file path=ppt/slides/slide23.xml><?xml version="1.0" encoding="utf-8"?>
+<p:sld xmlns:a="http://schemas.openxmlformats.org/drawingml/2006/main" xmlns:r="http://schemas.openxmlformats.org/officeDocument/2006/relationships" xmlns:p="http://schemas.openxmlformats.org/presentationml/2006/main">
+  <p:cSld>
+    <p:bg>
+      <p:bgPr>
+        <a:solidFill>
+          <a:srgbClr val="F4F6F9"/>
+        </a:solidFill>
+        <a:effectLst/>
+      </p:bgPr>
+    </p:bg>
+    <p:spTree>
+      <p:nvGrpSpPr>
+        <p:cNvPr id="1" name="">
+          <a:extLst>
+            <a:ext uri="{FF2B5EF4-FFF2-40B4-BE49-F238E27FC236}">
+              <a16:creationId xmlns:a16="http://schemas.microsoft.com/office/drawing/2014/main" id="{E2BBC48B-7159-82AA-D98C-F5466301EC0C}"/>
+            </a:ext>
+          </a:extLst>
+        </p:cNvPr>
+        <p:cNvGrpSpPr/>
+        <p:nvPr/>
+      </p:nvGrpSpPr>
+      <p:grpSpPr>
+        <a:xfrm>
+          <a:off x="0" y="0"/>
+          <a:ext cx="0" cy="0"/>
+          <a:chOff x="0" y="0"/>
+          <a:chExt cx="0" cy="0"/>
+        </a:xfrm>
+      </p:grpSpPr>
+      <p:sp>
+        <p:nvSpPr>
+          <p:cNvPr id="2" name="Shape 0">
+            <a:extLst>
+              <a:ext uri="{FF2B5EF4-FFF2-40B4-BE49-F238E27FC236}">
+                <a16:creationId xmlns:a16="http://schemas.microsoft.com/office/drawing/2014/main" id="{8900F427-41DA-880B-405B-409954CF0BA6}"/>
+              </a:ext>
+            </a:extLst>
+          </p:cNvPr>
+          <p:cNvSpPr/>
+          <p:nvPr/>
+        </p:nvSpPr>
+        <p:spPr>
+          <a:xfrm>
+            <a:off x="0" y="0"/>
+            <a:ext cx="9144000" cy="1005840"/>
+          </a:xfrm>
+          <a:prstGeom prst="rect">
+            <a:avLst/>
+          </a:prstGeom>
+          <a:solidFill>
+            <a:srgbClr val="1E3A5F"/>
+          </a:solidFill>
+          <a:ln w="12700">
+            <a:solidFill>
+              <a:srgbClr val="1E3A5F"/>
+            </a:solidFill>
+            <a:prstDash val="solid"/>
+          </a:ln>
+        </p:spPr>
+        <p:txBody>
+          <a:bodyPr/>
+          <a:lstStyle/>
+          <a:p>
+            <a:endParaRPr lang="en-US"/>
+          </a:p>
+        </p:txBody>
+      </p:sp>
+      <p:sp>
+        <p:nvSpPr>
+          <p:cNvPr id="3" name="Text 1">
+            <a:extLst>
+              <a:ext uri="{FF2B5EF4-FFF2-40B4-BE49-F238E27FC236}">
+                <a16:creationId xmlns:a16="http://schemas.microsoft.com/office/drawing/2014/main" id="{5599253D-D28E-5DF0-402E-9E66DF19EA41}"/>
+              </a:ext>
+            </a:extLst>
+          </p:cNvPr>
+          <p:cNvSpPr/>
+          <p:nvPr/>
+        </p:nvSpPr>
+        <p:spPr>
+          <a:xfrm>
+            <a:off x="320040" y="0"/>
+            <a:ext cx="8686800" cy="1005840"/>
+          </a:xfrm>
+          <a:prstGeom prst="rect">
+            <a:avLst/>
+          </a:prstGeom>
+          <a:noFill/>
+          <a:ln/>
+        </p:spPr>
+        <p:txBody>
+          <a:bodyPr wrap="square" lIns="0" tIns="0" rIns="0" bIns="0" rtlCol="0" anchor="ctr"/>
+          <a:lstStyle/>
+          <a:p>
+            <a:pPr marL="0" indent="0" algn="l">
+              <a:buNone/>
+            </a:pPr>
+            <a:r>
+              <a:rPr lang="en-US" sz="2800" b="1" dirty="0">
+                <a:solidFill>
+                  <a:srgbClr val="FFFFFF"/>
+                </a:solidFill>
+                <a:latin typeface="Calibri" pitchFamily="34" charset="0"/>
+                <a:ea typeface="Calibri" pitchFamily="34" charset="-122"/>
+                <a:cs typeface="Calibri" pitchFamily="34" charset="-120"/>
+              </a:rPr>
+              <a:t>Appendix Slides</a:t>
+            </a:r>
+            <a:endParaRPr lang="en-US" sz="2800" dirty="0"/>
+          </a:p>
+        </p:txBody>
+      </p:sp>
+      <p:sp>
+        <p:nvSpPr>
+          <p:cNvPr id="4" name="Shape 2">
+            <a:extLst>
+              <a:ext uri="{FF2B5EF4-FFF2-40B4-BE49-F238E27FC236}">
+                <a16:creationId xmlns:a16="http://schemas.microsoft.com/office/drawing/2014/main" id="{B2336075-5450-36E9-DF18-D784AE7EE671}"/>
+              </a:ext>
+            </a:extLst>
+          </p:cNvPr>
+          <p:cNvSpPr/>
+          <p:nvPr/>
+        </p:nvSpPr>
+        <p:spPr>
+          <a:xfrm>
+            <a:off x="0" y="1005840"/>
+            <a:ext cx="73152" cy="5852160"/>
+          </a:xfrm>
+          <a:prstGeom prst="rect">
+            <a:avLst/>
+          </a:prstGeom>
+          <a:solidFill>
+            <a:srgbClr val="C9A84C"/>
+          </a:solidFill>
+          <a:ln w="12700">
+            <a:solidFill>
+              <a:srgbClr val="C9A84C"/>
+            </a:solidFill>
+            <a:prstDash val="solid"/>
+          </a:ln>
+        </p:spPr>
+        <p:txBody>
+          <a:bodyPr/>
+          <a:lstStyle/>
+          <a:p>
+            <a:endParaRPr lang="en-US"/>
+          </a:p>
+        </p:txBody>
+      </p:sp>
+      <p:sp>
+        <p:nvSpPr>
+          <p:cNvPr id="30" name="Rectangle 29">
+            <a:extLst>
+              <a:ext uri="{FF2B5EF4-FFF2-40B4-BE49-F238E27FC236}">
+                <a16:creationId xmlns:a16="http://schemas.microsoft.com/office/drawing/2014/main" id="{D3EA0C88-66A4-2D63-C556-88A1C892CA37}"/>
+              </a:ext>
+            </a:extLst>
+          </p:cNvPr>
+          <p:cNvSpPr/>
+          <p:nvPr/>
+        </p:nvSpPr>
+        <p:spPr>
+          <a:xfrm>
+            <a:off x="1017127" y="2967335"/>
+            <a:ext cx="7109767" cy="1754326"/>
+          </a:xfrm>
+          <a:prstGeom prst="rect">
+            <a:avLst/>
+          </a:prstGeom>
+          <a:noFill/>
+        </p:spPr>
+        <p:txBody>
+          <a:bodyPr wrap="none" lIns="91440" tIns="45720" rIns="91440" bIns="45720">
+            <a:spAutoFit/>
+          </a:bodyPr>
+          <a:lstStyle/>
+          <a:p>
+            <a:pPr algn="ctr"/>
+            <a:r>
+              <a:rPr lang="en-US" sz="5400" b="1" cap="none" spc="0" dirty="0">
+                <a:ln w="13462">
+                  <a:solidFill>
+                    <a:schemeClr val="bg1"/>
+                  </a:solidFill>
+                  <a:prstDash val="solid"/>
+                </a:ln>
+                <a:solidFill>
+                  <a:schemeClr val="tx1">
+                    <a:lumMod val="85000"/>
+                    <a:lumOff val="15000"/>
+                  </a:schemeClr>
+                </a:solidFill>
+                <a:effectLst>
+                  <a:outerShdw dist="38100" dir="2700000" algn="bl" rotWithShape="0">
+                    <a:schemeClr val="accent5"/>
+                  </a:outerShdw>
+                </a:effectLst>
+              </a:rPr>
+              <a:t>What are the real costs </a:t>
+            </a:r>
+          </a:p>
+          <a:p>
+            <a:pPr algn="ctr"/>
+            <a:r>
+              <a:rPr lang="en-US" sz="5400" b="1" cap="none" spc="0" dirty="0">
+                <a:ln w="13462">
+                  <a:solidFill>
+                    <a:schemeClr val="bg1"/>
+                  </a:solidFill>
+                  <a:prstDash val="solid"/>
+                </a:ln>
+                <a:solidFill>
+                  <a:schemeClr val="tx1">
+                    <a:lumMod val="85000"/>
+                    <a:lumOff val="15000"/>
+                  </a:schemeClr>
+                </a:solidFill>
+                <a:effectLst>
+                  <a:outerShdw dist="38100" dir="2700000" algn="bl" rotWithShape="0">
+                    <a:schemeClr val="accent5"/>
+                  </a:outerShdw>
+                </a:effectLst>
+              </a:rPr>
+              <a:t>when you </a:t>
+            </a:r>
+            <a:r>
+              <a:rPr lang="en-US" sz="5400" b="1" cap="none" spc="0">
+                <a:ln w="13462">
+                  <a:solidFill>
+                    <a:schemeClr val="bg1"/>
+                  </a:solidFill>
+                  <a:prstDash val="solid"/>
+                </a:ln>
+                <a:solidFill>
+                  <a:schemeClr val="tx1">
+                    <a:lumMod val="85000"/>
+                    <a:lumOff val="15000"/>
+                  </a:schemeClr>
+                </a:solidFill>
+                <a:effectLst>
+                  <a:outerShdw dist="38100" dir="2700000" algn="bl" rotWithShape="0">
+                    <a:schemeClr val="accent5"/>
+                  </a:outerShdw>
+                </a:effectLst>
+              </a:rPr>
+              <a:t>use ChatGPT?</a:t>
+            </a:r>
+            <a:endParaRPr lang="en-US" sz="5400" b="1" cap="none" spc="0" dirty="0">
+              <a:ln w="13462">
+                <a:solidFill>
+                  <a:schemeClr val="bg1"/>
+                </a:solidFill>
+                <a:prstDash val="solid"/>
+              </a:ln>
+              <a:solidFill>
+                <a:schemeClr val="tx1">
+                  <a:lumMod val="85000"/>
+                  <a:lumOff val="15000"/>
+                </a:schemeClr>
+              </a:solidFill>
+              <a:effectLst>
+                <a:outerShdw dist="38100" dir="2700000" algn="bl" rotWithShape="0">
+                  <a:schemeClr val="accent5"/>
+                </a:outerShdw>
+              </a:effectLst>
+            </a:endParaRPr>
+          </a:p>
+        </p:txBody>
+      </p:sp>
+    </p:spTree>
+    <p:extLst>
+      <p:ext uri="{BB962C8B-B14F-4D97-AF65-F5344CB8AC3E}">
+        <p14:creationId xmlns:p14="http://schemas.microsoft.com/office/powerpoint/2010/main" val="1365329884"/>
+      </p:ext>
+    </p:extLst>
   </p:cSld>
   <p:clrMapOvr>
     <a:masterClrMapping/>
@@ -4875,7 +6515,7 @@
                   <a:srgbClr val="FFFFFF"/>
                 </a:solidFill>
               </a:rPr>
-              <a:t xml:space="preserve"> </a:t>
+              <a:t> </a:t>
             </a:r>
             <a:endParaRPr lang="en-US" sz="400" dirty="0"/>
           </a:p>
@@ -4999,7 +6639,7 @@
                   <a:srgbClr val="FFFFFF"/>
                 </a:solidFill>
               </a:rPr>
-              <a:t xml:space="preserve"> </a:t>
+              <a:t> </a:t>
             </a:r>
             <a:endParaRPr lang="en-US" sz="400" dirty="0"/>
           </a:p>
@@ -7206,7 +8846,7 @@
                 <a:ea typeface="Calibri" pitchFamily="34" charset="-122"/>
                 <a:cs typeface="Calibri" pitchFamily="34" charset="-120"/>
               </a:rPr>
-              <a:t xml:space="preserve">Next Steps </a:t>
+              <a:t>Next Steps </a:t>
             </a:r>
             <a:r>
               <a:rPr lang="en-US" sz="4400" b="1">
@@ -7217,7 +8857,7 @@
                 <a:ea typeface="Calibri" pitchFamily="34" charset="-122"/>
                 <a:cs typeface="Calibri" pitchFamily="34" charset="-120"/>
               </a:rPr>
-              <a:t xml:space="preserve">(from Claude </a:t>
+              <a:t>(from Claude </a:t>
             </a:r>
             <a:r>
               <a:rPr lang="en-US" sz="4400" b="1">
@@ -7609,7 +9249,7 @@
                   <a:srgbClr val="FFFFFF"/>
                 </a:solidFill>
               </a:rPr>
-              <a:t xml:space="preserve">John Weisenfeld  ·  jweisenfeld@psd1.org     </a:t>
+              <a:t>John Weisenfeld  ·  jweisenfeld@psd1.org     </a:t>
             </a:r>
             <a:r>
               <a:rPr lang="en-US" sz="1400" b="1" dirty="0">

--- a/pmc1/PMC-AI-Technical-Overview.pptx
+++ b/pmc1/PMC-AI-Technical-Overview.pptx
@@ -5,7 +5,7 @@
     <p:sldMasterId id="2147483648" r:id="rId1"/>
   </p:sldMasterIdLst>
   <p:notesMasterIdLst>
-    <p:notesMasterId r:id="rId25"/>
+    <p:notesMasterId r:id="rId27"/>
   </p:notesMasterIdLst>
   <p:sldIdLst>
     <p:sldId id="256" r:id="rId2"/>
@@ -31,6 +31,8 @@
     <p:sldId id="276" r:id="rId22"/>
     <p:sldId id="277" r:id="rId23"/>
     <p:sldId id="278" r:id="rId24"/>
+    <p:sldId id="279" r:id="rId25"/>
+    <p:sldId id="280" r:id="rId26"/>
   </p:sldIdLst>
   <p:sldSz cx="9144000" cy="6858000" type="screen4x3"/>
   <p:notesSz cx="6858000" cy="9144000"/>
@@ -4288,6 +4290,459 @@
     <p:extLst>
       <p:ext uri="{BB962C8B-B14F-4D97-AF65-F5344CB8AC3E}">
         <p14:creationId xmlns:p14="http://schemas.microsoft.com/office/powerpoint/2010/main" val="1365329884"/>
+      </p:ext>
+    </p:extLst>
+  </p:cSld>
+  <p:clrMapOvr>
+    <a:masterClrMapping/>
+  </p:clrMapOvr>
+</p:sld>
+</file>
+
+<file path=ppt/slides/slide24.xml><?xml version="1.0" encoding="utf-8"?>
+<p:sld xmlns:a="http://schemas.openxmlformats.org/drawingml/2006/main" xmlns:r="http://schemas.openxmlformats.org/officeDocument/2006/relationships" xmlns:p="http://schemas.openxmlformats.org/presentationml/2006/main">
+  <p:cSld>
+    <p:bg>
+      <p:bgPr>
+        <a:solidFill>
+          <a:schemeClr val="bg1"/>
+        </a:solidFill>
+        <a:effectLst/>
+      </p:bgPr>
+    </p:bg>
+    <p:spTree>
+      <p:nvGrpSpPr>
+        <p:cNvPr id="1" name=""/>
+        <p:cNvGrpSpPr/>
+        <p:nvPr/>
+      </p:nvGrpSpPr>
+      <p:grpSpPr>
+        <a:xfrm>
+          <a:off x="0" y="0"/>
+          <a:ext cx="0" cy="0"/>
+          <a:chOff x="0" y="0"/>
+          <a:chExt cx="0" cy="0"/>
+        </a:xfrm>
+      </p:grpSpPr>
+      <p:sp>
+        <p:nvSpPr>
+          <p:cNvPr id="8" name="Rectangle 7">
+            <a:extLst>
+              <a:ext uri="{FF2B5EF4-FFF2-40B4-BE49-F238E27FC236}">
+                <a16:creationId xmlns:a16="http://schemas.microsoft.com/office/drawing/2014/main" id="{32BC26D8-82FB-445E-AA49-62A77D7C1EE0}"/>
+              </a:ext>
+              <a:ext uri="{C183D7F6-B498-43B3-948B-1728B52AA6E4}">
+                <adec:decorative xmlns:adec="http://schemas.microsoft.com/office/drawing/2017/decorative" val="1"/>
+              </a:ext>
+            </a:extLst>
+          </p:cNvPr>
+          <p:cNvSpPr>
+            <a:spLocks noGrp="1" noRot="1" noChangeAspect="1" noMove="1" noResize="1" noEditPoints="1" noAdjustHandles="1" noChangeArrowheads="1" noChangeShapeType="1" noTextEdit="1"/>
+          </p:cNvSpPr>
+          <p:nvPr>
+            <p:extLst>
+              <p:ext uri="{386F3935-93C4-4BCD-93E2-E3B085C9AB24}">
+                <p16:designElem xmlns:p16="http://schemas.microsoft.com/office/powerpoint/2015/main" val="1"/>
+              </p:ext>
+            </p:extLst>
+          </p:nvPr>
+        </p:nvSpPr>
+        <p:spPr>
+          <a:xfrm>
+            <a:off x="0" y="0"/>
+            <a:ext cx="9144000" cy="6858000"/>
+          </a:xfrm>
+          <a:prstGeom prst="rect">
+            <a:avLst/>
+          </a:prstGeom>
+          <a:solidFill>
+            <a:srgbClr val="506A85"/>
+          </a:solidFill>
+          <a:ln>
+            <a:noFill/>
+          </a:ln>
+        </p:spPr>
+        <p:style>
+          <a:lnRef idx="2">
+            <a:schemeClr val="accent1">
+              <a:shade val="50000"/>
+            </a:schemeClr>
+          </a:lnRef>
+          <a:fillRef idx="1">
+            <a:schemeClr val="accent1"/>
+          </a:fillRef>
+          <a:effectRef idx="0">
+            <a:schemeClr val="accent1"/>
+          </a:effectRef>
+          <a:fontRef idx="minor">
+            <a:schemeClr val="lt1"/>
+          </a:fontRef>
+        </p:style>
+        <p:txBody>
+          <a:bodyPr rtlCol="0" anchor="ctr"/>
+          <a:lstStyle/>
+          <a:p>
+            <a:pPr algn="ctr"/>
+            <a:endParaRPr lang="en-US"/>
+          </a:p>
+        </p:txBody>
+      </p:sp>
+      <p:sp>
+        <p:nvSpPr>
+          <p:cNvPr id="10" name="Rectangle 9">
+            <a:extLst>
+              <a:ext uri="{FF2B5EF4-FFF2-40B4-BE49-F238E27FC236}">
+                <a16:creationId xmlns:a16="http://schemas.microsoft.com/office/drawing/2014/main" id="{CB44330D-EA18-4254-AA95-EB49948539B8}"/>
+              </a:ext>
+              <a:ext uri="{C183D7F6-B498-43B3-948B-1728B52AA6E4}">
+                <adec:decorative xmlns:adec="http://schemas.microsoft.com/office/drawing/2017/decorative" val="1"/>
+              </a:ext>
+            </a:extLst>
+          </p:cNvPr>
+          <p:cNvSpPr>
+            <a:spLocks noGrp="1" noRot="1" noChangeAspect="1" noMove="1" noResize="1" noEditPoints="1" noAdjustHandles="1" noChangeArrowheads="1" noChangeShapeType="1" noTextEdit="1"/>
+          </p:cNvSpPr>
+          <p:nvPr>
+            <p:extLst>
+              <p:ext uri="{386F3935-93C4-4BCD-93E2-E3B085C9AB24}">
+                <p16:designElem xmlns:p16="http://schemas.microsoft.com/office/powerpoint/2015/main" val="1"/>
+              </p:ext>
+            </p:extLst>
+          </p:nvPr>
+        </p:nvSpPr>
+        <p:spPr>
+          <a:xfrm>
+            <a:off x="357759" y="480060"/>
+            <a:ext cx="8428482" cy="5897880"/>
+          </a:xfrm>
+          <a:prstGeom prst="rect">
+            <a:avLst/>
+          </a:prstGeom>
+          <a:solidFill>
+            <a:srgbClr val="FFFFFF"/>
+          </a:solidFill>
+          <a:ln>
+            <a:noFill/>
+          </a:ln>
+        </p:spPr>
+        <p:style>
+          <a:lnRef idx="2">
+            <a:schemeClr val="accent1">
+              <a:shade val="50000"/>
+            </a:schemeClr>
+          </a:lnRef>
+          <a:fillRef idx="1">
+            <a:schemeClr val="accent1"/>
+          </a:fillRef>
+          <a:effectRef idx="0">
+            <a:schemeClr val="accent1"/>
+          </a:effectRef>
+          <a:fontRef idx="minor">
+            <a:schemeClr val="lt1"/>
+          </a:fontRef>
+        </p:style>
+        <p:txBody>
+          <a:bodyPr rtlCol="0" anchor="ctr"/>
+          <a:lstStyle/>
+          <a:p>
+            <a:pPr algn="ctr"/>
+            <a:endParaRPr lang="en-US"/>
+          </a:p>
+        </p:txBody>
+      </p:sp>
+      <p:pic>
+        <p:nvPicPr>
+          <p:cNvPr id="3" name="Picture 2">
+            <a:extLst>
+              <a:ext uri="{FF2B5EF4-FFF2-40B4-BE49-F238E27FC236}">
+                <a16:creationId xmlns:a16="http://schemas.microsoft.com/office/drawing/2014/main" id="{006E788D-8935-99EE-B717-9828DB194E7F}"/>
+              </a:ext>
+            </a:extLst>
+          </p:cNvPr>
+          <p:cNvPicPr>
+            <a:picLocks noChangeAspect="1"/>
+          </p:cNvPicPr>
+          <p:nvPr/>
+        </p:nvPicPr>
+        <p:blipFill>
+          <a:blip r:embed="rId2"/>
+          <a:stretch>
+            <a:fillRect/>
+          </a:stretch>
+        </p:blipFill>
+        <p:spPr>
+          <a:xfrm>
+            <a:off x="1247162" y="643467"/>
+            <a:ext cx="6649674" cy="5571066"/>
+          </a:xfrm>
+          <a:prstGeom prst="rect">
+            <a:avLst/>
+          </a:prstGeom>
+        </p:spPr>
+      </p:pic>
+    </p:spTree>
+    <p:extLst>
+      <p:ext uri="{BB962C8B-B14F-4D97-AF65-F5344CB8AC3E}">
+        <p14:creationId xmlns:p14="http://schemas.microsoft.com/office/powerpoint/2010/main" val="3101521944"/>
+      </p:ext>
+    </p:extLst>
+  </p:cSld>
+  <p:clrMapOvr>
+    <a:masterClrMapping/>
+  </p:clrMapOvr>
+</p:sld>
+</file>
+
+<file path=ppt/slides/slide25.xml><?xml version="1.0" encoding="utf-8"?>
+<p:sld xmlns:a="http://schemas.openxmlformats.org/drawingml/2006/main" xmlns:r="http://schemas.openxmlformats.org/officeDocument/2006/relationships" xmlns:p="http://schemas.openxmlformats.org/presentationml/2006/main">
+  <p:cSld>
+    <p:bg>
+      <p:bgPr>
+        <a:solidFill>
+          <a:schemeClr val="bg1"/>
+        </a:solidFill>
+        <a:effectLst/>
+      </p:bgPr>
+    </p:bg>
+    <p:spTree>
+      <p:nvGrpSpPr>
+        <p:cNvPr id="1" name=""/>
+        <p:cNvGrpSpPr/>
+        <p:nvPr/>
+      </p:nvGrpSpPr>
+      <p:grpSpPr>
+        <a:xfrm>
+          <a:off x="0" y="0"/>
+          <a:ext cx="0" cy="0"/>
+          <a:chOff x="0" y="0"/>
+          <a:chExt cx="0" cy="0"/>
+        </a:xfrm>
+      </p:grpSpPr>
+      <p:sp>
+        <p:nvSpPr>
+          <p:cNvPr id="8" name="Rectangle 7">
+            <a:extLst>
+              <a:ext uri="{FF2B5EF4-FFF2-40B4-BE49-F238E27FC236}">
+                <a16:creationId xmlns:a16="http://schemas.microsoft.com/office/drawing/2014/main" id="{B9FF99BD-075F-4761-A995-6FC574BD25EA}"/>
+              </a:ext>
+              <a:ext uri="{C183D7F6-B498-43B3-948B-1728B52AA6E4}">
+                <adec:decorative xmlns:adec="http://schemas.microsoft.com/office/drawing/2017/decorative" val="1"/>
+              </a:ext>
+            </a:extLst>
+          </p:cNvPr>
+          <p:cNvSpPr>
+            <a:spLocks noGrp="1" noRot="1" noChangeAspect="1" noMove="1" noResize="1" noEditPoints="1" noAdjustHandles="1" noChangeArrowheads="1" noChangeShapeType="1" noTextEdit="1"/>
+          </p:cNvSpPr>
+          <p:nvPr>
+            <p:extLst>
+              <p:ext uri="{386F3935-93C4-4BCD-93E2-E3B085C9AB24}">
+                <p16:designElem xmlns:p16="http://schemas.microsoft.com/office/powerpoint/2015/main" val="1"/>
+              </p:ext>
+            </p:extLst>
+          </p:nvPr>
+        </p:nvSpPr>
+        <p:spPr>
+          <a:xfrm>
+            <a:off x="0" y="0"/>
+            <a:ext cx="9144000" cy="6858000"/>
+          </a:xfrm>
+          <a:prstGeom prst="rect">
+            <a:avLst/>
+          </a:prstGeom>
+          <a:solidFill>
+            <a:schemeClr val="bg1">
+              <a:lumMod val="65000"/>
+            </a:schemeClr>
+          </a:solidFill>
+          <a:ln>
+            <a:noFill/>
+          </a:ln>
+        </p:spPr>
+        <p:style>
+          <a:lnRef idx="2">
+            <a:schemeClr val="accent1">
+              <a:shade val="50000"/>
+            </a:schemeClr>
+          </a:lnRef>
+          <a:fillRef idx="1">
+            <a:schemeClr val="accent1"/>
+          </a:fillRef>
+          <a:effectRef idx="0">
+            <a:schemeClr val="accent1"/>
+          </a:effectRef>
+          <a:fontRef idx="minor">
+            <a:schemeClr val="lt1"/>
+          </a:fontRef>
+        </p:style>
+        <p:txBody>
+          <a:bodyPr rtlCol="0" anchor="ctr"/>
+          <a:lstStyle/>
+          <a:p>
+            <a:pPr algn="ctr"/>
+            <a:endParaRPr lang="en-US"/>
+          </a:p>
+        </p:txBody>
+      </p:sp>
+      <p:sp>
+        <p:nvSpPr>
+          <p:cNvPr id="10" name="Rectangle 9">
+            <a:extLst>
+              <a:ext uri="{FF2B5EF4-FFF2-40B4-BE49-F238E27FC236}">
+                <a16:creationId xmlns:a16="http://schemas.microsoft.com/office/drawing/2014/main" id="{A7B21A54-9BA3-4EA9-B460-5A829ADD9051}"/>
+              </a:ext>
+              <a:ext uri="{C183D7F6-B498-43B3-948B-1728B52AA6E4}">
+                <adec:decorative xmlns:adec="http://schemas.microsoft.com/office/drawing/2017/decorative" val="1"/>
+              </a:ext>
+            </a:extLst>
+          </p:cNvPr>
+          <p:cNvSpPr>
+            <a:spLocks noGrp="1" noRot="1" noChangeAspect="1" noMove="1" noResize="1" noEditPoints="1" noAdjustHandles="1" noChangeArrowheads="1" noChangeShapeType="1" noTextEdit="1"/>
+          </p:cNvSpPr>
+          <p:nvPr>
+            <p:extLst>
+              <p:ext uri="{386F3935-93C4-4BCD-93E2-E3B085C9AB24}">
+                <p16:designElem xmlns:p16="http://schemas.microsoft.com/office/powerpoint/2015/main" val="1"/>
+              </p:ext>
+            </p:extLst>
+          </p:nvPr>
+        </p:nvSpPr>
+        <p:spPr>
+          <a:xfrm>
+            <a:off x="357759" y="480060"/>
+            <a:ext cx="8428482" cy="5897880"/>
+          </a:xfrm>
+          <a:prstGeom prst="rect">
+            <a:avLst/>
+          </a:prstGeom>
+          <a:noFill/>
+          <a:ln>
+            <a:solidFill>
+              <a:schemeClr val="bg1"/>
+            </a:solidFill>
+          </a:ln>
+        </p:spPr>
+        <p:style>
+          <a:lnRef idx="2">
+            <a:schemeClr val="accent1">
+              <a:shade val="50000"/>
+            </a:schemeClr>
+          </a:lnRef>
+          <a:fillRef idx="1">
+            <a:schemeClr val="accent1"/>
+          </a:fillRef>
+          <a:effectRef idx="0">
+            <a:schemeClr val="accent1"/>
+          </a:effectRef>
+          <a:fontRef idx="minor">
+            <a:schemeClr val="lt1"/>
+          </a:fontRef>
+        </p:style>
+        <p:txBody>
+          <a:bodyPr rtlCol="0" anchor="ctr"/>
+          <a:lstStyle/>
+          <a:p>
+            <a:pPr algn="ctr"/>
+            <a:endParaRPr lang="en-US"/>
+          </a:p>
+        </p:txBody>
+      </p:sp>
+      <p:sp>
+        <p:nvSpPr>
+          <p:cNvPr id="12" name="Rectangle 11">
+            <a:extLst>
+              <a:ext uri="{FF2B5EF4-FFF2-40B4-BE49-F238E27FC236}">
+                <a16:creationId xmlns:a16="http://schemas.microsoft.com/office/drawing/2014/main" id="{6FA8F714-B9D8-488A-8CCA-E9948FF913A9}"/>
+              </a:ext>
+              <a:ext uri="{C183D7F6-B498-43B3-948B-1728B52AA6E4}">
+                <adec:decorative xmlns:adec="http://schemas.microsoft.com/office/drawing/2017/decorative" val="1"/>
+              </a:ext>
+            </a:extLst>
+          </p:cNvPr>
+          <p:cNvSpPr>
+            <a:spLocks noGrp="1" noRot="1" noChangeAspect="1" noMove="1" noResize="1" noEditPoints="1" noAdjustHandles="1" noChangeArrowheads="1" noChangeShapeType="1" noTextEdit="1"/>
+          </p:cNvSpPr>
+          <p:nvPr>
+            <p:extLst>
+              <p:ext uri="{386F3935-93C4-4BCD-93E2-E3B085C9AB24}">
+                <p16:designElem xmlns:p16="http://schemas.microsoft.com/office/powerpoint/2015/main" val="1"/>
+              </p:ext>
+            </p:extLst>
+          </p:nvPr>
+        </p:nvSpPr>
+        <p:spPr>
+          <a:xfrm>
+            <a:off x="482599" y="643468"/>
+            <a:ext cx="8178800" cy="5571066"/>
+          </a:xfrm>
+          <a:prstGeom prst="rect">
+            <a:avLst/>
+          </a:prstGeom>
+          <a:solidFill>
+            <a:srgbClr val="FFFFFF"/>
+          </a:solidFill>
+          <a:ln>
+            <a:noFill/>
+          </a:ln>
+        </p:spPr>
+        <p:style>
+          <a:lnRef idx="2">
+            <a:schemeClr val="accent1">
+              <a:shade val="50000"/>
+            </a:schemeClr>
+          </a:lnRef>
+          <a:fillRef idx="1">
+            <a:schemeClr val="accent1"/>
+          </a:fillRef>
+          <a:effectRef idx="0">
+            <a:schemeClr val="accent1"/>
+          </a:effectRef>
+          <a:fontRef idx="minor">
+            <a:schemeClr val="lt1"/>
+          </a:fontRef>
+        </p:style>
+        <p:txBody>
+          <a:bodyPr rtlCol="0" anchor="ctr"/>
+          <a:lstStyle/>
+          <a:p>
+            <a:pPr algn="ctr"/>
+            <a:endParaRPr lang="en-US"/>
+          </a:p>
+        </p:txBody>
+      </p:sp>
+      <p:pic>
+        <p:nvPicPr>
+          <p:cNvPr id="3" name="Picture 2">
+            <a:extLst>
+              <a:ext uri="{FF2B5EF4-FFF2-40B4-BE49-F238E27FC236}">
+                <a16:creationId xmlns:a16="http://schemas.microsoft.com/office/drawing/2014/main" id="{17A05E77-9C7D-2378-27E9-E780DDF61BC9}"/>
+              </a:ext>
+            </a:extLst>
+          </p:cNvPr>
+          <p:cNvPicPr>
+            <a:picLocks noChangeAspect="1"/>
+          </p:cNvPicPr>
+          <p:nvPr/>
+        </p:nvPicPr>
+        <p:blipFill>
+          <a:blip r:embed="rId2"/>
+          <a:stretch>
+            <a:fillRect/>
+          </a:stretch>
+        </p:blipFill>
+        <p:spPr>
+          <a:xfrm>
+            <a:off x="1234043" y="1123527"/>
+            <a:ext cx="6675908" cy="4604800"/>
+          </a:xfrm>
+          <a:prstGeom prst="rect">
+            <a:avLst/>
+          </a:prstGeom>
+        </p:spPr>
+      </p:pic>
+    </p:spTree>
+    <p:extLst>
+      <p:ext uri="{BB962C8B-B14F-4D97-AF65-F5344CB8AC3E}">
+        <p14:creationId xmlns:p14="http://schemas.microsoft.com/office/powerpoint/2010/main" val="3387466194"/>
       </p:ext>
     </p:extLst>
   </p:cSld>

--- a/pmc1/PMC-AI-Technical-Overview.pptx
+++ b/pmc1/PMC-AI-Technical-Overview.pptx
@@ -5,44 +5,47 @@
     <p:sldMasterId id="2147483650" r:id="rId1"/>
   </p:sldMasterIdLst>
   <p:notesMasterIdLst>
-    <p:notesMasterId r:id="rId37"/>
+    <p:notesMasterId r:id="rId40"/>
   </p:notesMasterIdLst>
   <p:sldIdLst>
     <p:sldId id="256" r:id="rId2"/>
-    <p:sldId id="285" r:id="rId3"/>
-    <p:sldId id="277" r:id="rId4"/>
-    <p:sldId id="257" r:id="rId5"/>
-    <p:sldId id="258" r:id="rId6"/>
-    <p:sldId id="259" r:id="rId7"/>
-    <p:sldId id="260" r:id="rId8"/>
-    <p:sldId id="261" r:id="rId9"/>
-    <p:sldId id="262" r:id="rId10"/>
-    <p:sldId id="263" r:id="rId11"/>
-    <p:sldId id="264" r:id="rId12"/>
-    <p:sldId id="266" r:id="rId13"/>
-    <p:sldId id="265" r:id="rId14"/>
-    <p:sldId id="267" r:id="rId15"/>
-    <p:sldId id="268" r:id="rId16"/>
-    <p:sldId id="269" r:id="rId17"/>
-    <p:sldId id="270" r:id="rId18"/>
-    <p:sldId id="281" r:id="rId19"/>
-    <p:sldId id="282" r:id="rId20"/>
-    <p:sldId id="283" r:id="rId21"/>
-    <p:sldId id="284" r:id="rId22"/>
-    <p:sldId id="271" r:id="rId23"/>
-    <p:sldId id="272" r:id="rId24"/>
-    <p:sldId id="273" r:id="rId25"/>
-    <p:sldId id="274" r:id="rId26"/>
-    <p:sldId id="275" r:id="rId27"/>
-    <p:sldId id="276" r:id="rId28"/>
-    <p:sldId id="286" r:id="rId29"/>
-    <p:sldId id="287" r:id="rId30"/>
-    <p:sldId id="288" r:id="rId31"/>
-    <p:sldId id="278" r:id="rId32"/>
-    <p:sldId id="279" r:id="rId33"/>
-    <p:sldId id="280" r:id="rId34"/>
-    <p:sldId id="290" r:id="rId35"/>
-    <p:sldId id="291" r:id="rId36"/>
+    <p:sldId id="295" r:id="rId3"/>
+    <p:sldId id="285" r:id="rId4"/>
+    <p:sldId id="277" r:id="rId5"/>
+    <p:sldId id="257" r:id="rId6"/>
+    <p:sldId id="258" r:id="rId7"/>
+    <p:sldId id="259" r:id="rId8"/>
+    <p:sldId id="260" r:id="rId9"/>
+    <p:sldId id="261" r:id="rId10"/>
+    <p:sldId id="262" r:id="rId11"/>
+    <p:sldId id="263" r:id="rId12"/>
+    <p:sldId id="264" r:id="rId13"/>
+    <p:sldId id="266" r:id="rId14"/>
+    <p:sldId id="265" r:id="rId15"/>
+    <p:sldId id="267" r:id="rId16"/>
+    <p:sldId id="268" r:id="rId17"/>
+    <p:sldId id="269" r:id="rId18"/>
+    <p:sldId id="270" r:id="rId19"/>
+    <p:sldId id="281" r:id="rId20"/>
+    <p:sldId id="282" r:id="rId21"/>
+    <p:sldId id="283" r:id="rId22"/>
+    <p:sldId id="284" r:id="rId23"/>
+    <p:sldId id="271" r:id="rId24"/>
+    <p:sldId id="272" r:id="rId25"/>
+    <p:sldId id="273" r:id="rId26"/>
+    <p:sldId id="274" r:id="rId27"/>
+    <p:sldId id="275" r:id="rId28"/>
+    <p:sldId id="276" r:id="rId29"/>
+    <p:sldId id="286" r:id="rId30"/>
+    <p:sldId id="287" r:id="rId31"/>
+    <p:sldId id="288" r:id="rId32"/>
+    <p:sldId id="278" r:id="rId33"/>
+    <p:sldId id="279" r:id="rId34"/>
+    <p:sldId id="280" r:id="rId35"/>
+    <p:sldId id="290" r:id="rId36"/>
+    <p:sldId id="294" r:id="rId37"/>
+    <p:sldId id="293" r:id="rId38"/>
+    <p:sldId id="292" r:id="rId39"/>
   </p:sldIdLst>
   <p:sldSz cx="9144000" cy="6858000" type="screen4x3"/>
   <p:notesSz cx="6858000" cy="9144000"/>
@@ -147,6 +150,7 @@
         <p14:section name="Default Section" id="{084EEA54-6324-4A09-B3FB-F92E4D0848D3}">
           <p14:sldIdLst>
             <p14:sldId id="256"/>
+            <p14:sldId id="295"/>
             <p14:sldId id="285"/>
             <p14:sldId id="277"/>
             <p14:sldId id="257"/>
@@ -196,7 +200,9 @@
         <p14:section name="Backstory" id="{3B61981A-34B7-4122-AB31-B71C3C9B6127}">
           <p14:sldIdLst>
             <p14:sldId id="290"/>
-            <p14:sldId id="291"/>
+            <p14:sldId id="294"/>
+            <p14:sldId id="293"/>
+            <p14:sldId id="292"/>
           </p14:sldIdLst>
         </p14:section>
       </p14:sectionLst>
@@ -482,7 +488,7 @@
           <a:p>
             <a:fld id="{F7021451-1387-4CA6-816F-3879F97B5CBC}" type="slidenum">
               <a:rPr lang="en-US"/>
-              <a:t>10</a:t>
+              <a:t>11</a:t>
             </a:fld>
             <a:endParaRPr lang="en-US"/>
           </a:p>
@@ -566,7 +572,7 @@
           <a:p>
             <a:fld id="{F7021451-1387-4CA6-816F-3879F97B5CBC}" type="slidenum">
               <a:rPr lang="en-US"/>
-              <a:t>11</a:t>
+              <a:t>12</a:t>
             </a:fld>
             <a:endParaRPr lang="en-US"/>
           </a:p>
@@ -674,7 +680,7 @@
           <a:p>
             <a:fld id="{F7021451-1387-4CA6-816F-3879F97B5CBC}" type="slidenum">
               <a:rPr lang="en-US"/>
-              <a:t>12</a:t>
+              <a:t>13</a:t>
             </a:fld>
             <a:endParaRPr lang="en-US"/>
           </a:p>
@@ -1212,7 +1218,7 @@
           <a:p>
             <a:fld id="{F7021451-1387-4CA6-816F-3879F97B5CBC}" type="slidenum">
               <a:rPr lang="en-US"/>
-              <a:t>22</a:t>
+              <a:t>23</a:t>
             </a:fld>
             <a:endParaRPr lang="en-US"/>
           </a:p>
@@ -1320,7 +1326,7 @@
           <a:p>
             <a:fld id="{F7021451-1387-4CA6-816F-3879F97B5CBC}" type="slidenum">
               <a:rPr lang="en-US"/>
-              <a:t>31</a:t>
+              <a:t>32</a:t>
             </a:fld>
             <a:endParaRPr lang="en-US"/>
           </a:p>
@@ -1428,7 +1434,7 @@
           <a:p>
             <a:fld id="{F7021451-1387-4CA6-816F-3879F97B5CBC}" type="slidenum">
               <a:rPr lang="en-US"/>
-              <a:t>2</a:t>
+              <a:t>3</a:t>
             </a:fld>
             <a:endParaRPr lang="en-US"/>
           </a:p>
@@ -1536,7 +1542,7 @@
           <a:p>
             <a:fld id="{F7021451-1387-4CA6-816F-3879F97B5CBC}" type="slidenum">
               <a:rPr lang="en-US"/>
-              <a:t>34</a:t>
+              <a:t>35</a:t>
             </a:fld>
             <a:endParaRPr lang="en-US"/>
           </a:p>
@@ -1644,7 +1650,7 @@
           <a:p>
             <a:fld id="{F7021451-1387-4CA6-816F-3879F97B5CBC}" type="slidenum">
               <a:rPr lang="en-US"/>
-              <a:t>3</a:t>
+              <a:t>4</a:t>
             </a:fld>
             <a:endParaRPr lang="en-US"/>
           </a:p>
@@ -1728,7 +1734,7 @@
           <a:p>
             <a:fld id="{F7021451-1387-4CA6-816F-3879F97B5CBC}" type="slidenum">
               <a:rPr lang="en-US"/>
-              <a:t>4</a:t>
+              <a:t>5</a:t>
             </a:fld>
             <a:endParaRPr lang="en-US"/>
           </a:p>
@@ -1812,7 +1818,7 @@
           <a:p>
             <a:fld id="{F7021451-1387-4CA6-816F-3879F97B5CBC}" type="slidenum">
               <a:rPr lang="en-US"/>
-              <a:t>5</a:t>
+              <a:t>6</a:t>
             </a:fld>
             <a:endParaRPr lang="en-US"/>
           </a:p>
@@ -1896,7 +1902,7 @@
           <a:p>
             <a:fld id="{F7021451-1387-4CA6-816F-3879F97B5CBC}" type="slidenum">
               <a:rPr lang="en-US"/>
-              <a:t>6</a:t>
+              <a:t>7</a:t>
             </a:fld>
             <a:endParaRPr lang="en-US"/>
           </a:p>
@@ -1980,7 +1986,7 @@
           <a:p>
             <a:fld id="{F7021451-1387-4CA6-816F-3879F97B5CBC}" type="slidenum">
               <a:rPr lang="en-US"/>
-              <a:t>7</a:t>
+              <a:t>8</a:t>
             </a:fld>
             <a:endParaRPr lang="en-US"/>
           </a:p>
@@ -2064,7 +2070,7 @@
           <a:p>
             <a:fld id="{F7021451-1387-4CA6-816F-3879F97B5CBC}" type="slidenum">
               <a:rPr lang="en-US"/>
-              <a:t>8</a:t>
+              <a:t>9</a:t>
             </a:fld>
             <a:endParaRPr lang="en-US"/>
           </a:p>
@@ -2148,7 +2154,7 @@
           <a:p>
             <a:fld id="{F7021451-1387-4CA6-816F-3879F97B5CBC}" type="slidenum">
               <a:rPr lang="en-US"/>
-              <a:t>9</a:t>
+              <a:t>10</a:t>
             </a:fld>
             <a:endParaRPr lang="en-US"/>
           </a:p>
@@ -2298,7 +2304,7 @@
           <a:p>
             <a:fld id="{C764DE79-268F-4C1A-8933-263129D2AF90}" type="datetimeFigureOut">
               <a:rPr lang="en-US" dirty="0"/>
-              <a:t>4/9/2026</a:t>
+              <a:t>4/10/2026</a:t>
             </a:fld>
             <a:endParaRPr lang="en-US" dirty="0"/>
           </a:p>
@@ -2469,7 +2475,7 @@
           <a:p>
             <a:fld id="{C764DE79-268F-4C1A-8933-263129D2AF90}" type="datetimeFigureOut">
               <a:rPr lang="en-US" dirty="0"/>
-              <a:t>4/9/2026</a:t>
+              <a:t>4/10/2026</a:t>
             </a:fld>
             <a:endParaRPr lang="en-US" dirty="0"/>
           </a:p>
@@ -2650,7 +2656,7 @@
           <a:p>
             <a:fld id="{C764DE79-268F-4C1A-8933-263129D2AF90}" type="datetimeFigureOut">
               <a:rPr lang="en-US" dirty="0"/>
-              <a:t>4/9/2026</a:t>
+              <a:t>4/10/2026</a:t>
             </a:fld>
             <a:endParaRPr lang="en-US" dirty="0"/>
           </a:p>
@@ -2856,7 +2862,7 @@
           <a:p>
             <a:fld id="{C764DE79-268F-4C1A-8933-263129D2AF90}" type="datetimeFigureOut">
               <a:rPr lang="en-US" dirty="0"/>
-              <a:t>4/9/2026</a:t>
+              <a:t>4/10/2026</a:t>
             </a:fld>
             <a:endParaRPr lang="en-US" dirty="0"/>
           </a:p>
@@ -3101,7 +3107,7 @@
           <a:p>
             <a:fld id="{C764DE79-268F-4C1A-8933-263129D2AF90}" type="datetimeFigureOut">
               <a:rPr lang="en-US" dirty="0"/>
-              <a:t>4/9/2026</a:t>
+              <a:t>4/10/2026</a:t>
             </a:fld>
             <a:endParaRPr lang="en-US" dirty="0"/>
           </a:p>
@@ -3334,7 +3340,7 @@
           <a:p>
             <a:fld id="{C764DE79-268F-4C1A-8933-263129D2AF90}" type="datetimeFigureOut">
               <a:rPr lang="en-US" dirty="0"/>
-              <a:t>4/9/2026</a:t>
+              <a:t>4/10/2026</a:t>
             </a:fld>
             <a:endParaRPr lang="en-US" dirty="0"/>
           </a:p>
@@ -3702,7 +3708,7 @@
           <a:p>
             <a:fld id="{C764DE79-268F-4C1A-8933-263129D2AF90}" type="datetimeFigureOut">
               <a:rPr lang="en-US" dirty="0"/>
-              <a:t>4/9/2026</a:t>
+              <a:t>4/10/2026</a:t>
             </a:fld>
             <a:endParaRPr lang="en-US" dirty="0"/>
           </a:p>
@@ -3821,7 +3827,7 @@
           <a:p>
             <a:fld id="{C764DE79-268F-4C1A-8933-263129D2AF90}" type="datetimeFigureOut">
               <a:rPr lang="en-US" dirty="0"/>
-              <a:t>4/9/2026</a:t>
+              <a:t>4/10/2026</a:t>
             </a:fld>
             <a:endParaRPr lang="en-US" dirty="0"/>
           </a:p>
@@ -3917,7 +3923,7 @@
           <a:p>
             <a:fld id="{C764DE79-268F-4C1A-8933-263129D2AF90}" type="datetimeFigureOut">
               <a:rPr lang="en-US" dirty="0"/>
-              <a:t>4/9/2026</a:t>
+              <a:t>4/10/2026</a:t>
             </a:fld>
             <a:endParaRPr lang="en-US" dirty="0"/>
           </a:p>
@@ -4195,7 +4201,7 @@
           <a:p>
             <a:fld id="{C764DE79-268F-4C1A-8933-263129D2AF90}" type="datetimeFigureOut">
               <a:rPr lang="en-US" dirty="0"/>
-              <a:t>4/9/2026</a:t>
+              <a:t>4/10/2026</a:t>
             </a:fld>
             <a:endParaRPr lang="en-US" dirty="0"/>
           </a:p>
@@ -4453,7 +4459,7 @@
           <a:p>
             <a:fld id="{C764DE79-268F-4C1A-8933-263129D2AF90}" type="datetimeFigureOut">
               <a:rPr lang="en-US" dirty="0"/>
-              <a:t>4/9/2026</a:t>
+              <a:t>4/10/2026</a:t>
             </a:fld>
             <a:endParaRPr lang="en-US" dirty="0"/>
           </a:p>
@@ -4667,7 +4673,7 @@
           <a:p>
             <a:fld id="{C764DE79-268F-4C1A-8933-263129D2AF90}" type="datetimeFigureOut">
               <a:rPr lang="en-US" dirty="0"/>
-              <a:t>4/9/2026</a:t>
+              <a:t>4/10/2026</a:t>
             </a:fld>
             <a:endParaRPr lang="en-US" dirty="0"/>
           </a:p>
@@ -5325,6 +5331,763 @@
 
 <file path=ppt/slides/slide10.xml><?xml version="1.0" encoding="utf-8"?>
 <p:sld xmlns:a="http://schemas.openxmlformats.org/drawingml/2006/main" xmlns:r="http://schemas.openxmlformats.org/officeDocument/2006/relationships" xmlns:p="http://schemas.openxmlformats.org/presentationml/2006/main">
+  <p:cSld name="Slide 7">
+    <p:bg>
+      <p:bgPr>
+        <a:solidFill>
+          <a:srgbClr val="F4F6F9"/>
+        </a:solidFill>
+        <a:effectLst/>
+      </p:bgPr>
+    </p:bg>
+    <p:spTree>
+      <p:nvGrpSpPr>
+        <p:cNvPr id="1" name=""/>
+        <p:cNvGrpSpPr/>
+        <p:nvPr/>
+      </p:nvGrpSpPr>
+      <p:grpSpPr>
+        <a:xfrm>
+          <a:off x="0" y="0"/>
+          <a:ext cx="0" cy="0"/>
+          <a:chOff x="0" y="0"/>
+          <a:chExt cx="0" cy="0"/>
+        </a:xfrm>
+      </p:grpSpPr>
+      <p:sp>
+        <p:nvSpPr>
+          <p:cNvPr id="2" name="Shape 0"/>
+          <p:cNvSpPr/>
+          <p:nvPr/>
+        </p:nvSpPr>
+        <p:spPr>
+          <a:xfrm>
+            <a:off x="0" y="0"/>
+            <a:ext cx="9144000" cy="1005840"/>
+          </a:xfrm>
+          <a:prstGeom prst="rect">
+            <a:avLst/>
+          </a:prstGeom>
+          <a:solidFill>
+            <a:srgbClr val="1E3A5F"/>
+          </a:solidFill>
+          <a:ln w="12700">
+            <a:solidFill>
+              <a:srgbClr val="1E3A5F"/>
+            </a:solidFill>
+            <a:prstDash val="solid"/>
+          </a:ln>
+        </p:spPr>
+        <p:txBody>
+          <a:bodyPr/>
+          <a:lstStyle/>
+          <a:p>
+            <a:endParaRPr lang="en-US"/>
+          </a:p>
+        </p:txBody>
+      </p:sp>
+      <p:sp>
+        <p:nvSpPr>
+          <p:cNvPr id="3" name="Text 1"/>
+          <p:cNvSpPr/>
+          <p:nvPr/>
+        </p:nvSpPr>
+        <p:spPr>
+          <a:xfrm>
+            <a:off x="320040" y="0"/>
+            <a:ext cx="8686800" cy="1005840"/>
+          </a:xfrm>
+          <a:prstGeom prst="rect">
+            <a:avLst/>
+          </a:prstGeom>
+          <a:noFill/>
+          <a:ln/>
+        </p:spPr>
+        <p:txBody>
+          <a:bodyPr wrap="square" lIns="0" tIns="0" rIns="0" bIns="0" rtlCol="0" anchor="ctr"/>
+          <a:lstStyle/>
+          <a:p>
+            <a:pPr marL="0" indent="0" algn="l">
+              <a:buNone/>
+            </a:pPr>
+            <a:r>
+              <a:rPr lang="en-US" sz="2800" b="1" dirty="0">
+                <a:solidFill>
+                  <a:srgbClr val="FFFFFF"/>
+                </a:solidFill>
+                <a:latin typeface="Calibri" pitchFamily="34" charset="0"/>
+                <a:ea typeface="Calibri" pitchFamily="34" charset="-122"/>
+                <a:cs typeface="Calibri" pitchFamily="34" charset="-120"/>
+              </a:rPr>
+              <a:t>Replicating for Any City Department</a:t>
+            </a:r>
+            <a:endParaRPr lang="en-US" sz="2800" dirty="0"/>
+          </a:p>
+        </p:txBody>
+      </p:sp>
+      <p:sp>
+        <p:nvSpPr>
+          <p:cNvPr id="4" name="Shape 2"/>
+          <p:cNvSpPr/>
+          <p:nvPr/>
+        </p:nvSpPr>
+        <p:spPr>
+          <a:xfrm>
+            <a:off x="0" y="1005840"/>
+            <a:ext cx="73152" cy="5852160"/>
+          </a:xfrm>
+          <a:prstGeom prst="rect">
+            <a:avLst/>
+          </a:prstGeom>
+          <a:solidFill>
+            <a:srgbClr val="C9A84C"/>
+          </a:solidFill>
+          <a:ln w="12700">
+            <a:solidFill>
+              <a:srgbClr val="C9A84C"/>
+            </a:solidFill>
+            <a:prstDash val="solid"/>
+          </a:ln>
+        </p:spPr>
+        <p:txBody>
+          <a:bodyPr/>
+          <a:lstStyle/>
+          <a:p>
+            <a:endParaRPr lang="en-US"/>
+          </a:p>
+        </p:txBody>
+      </p:sp>
+      <p:sp>
+        <p:nvSpPr>
+          <p:cNvPr id="5" name="Shape 3"/>
+          <p:cNvSpPr/>
+          <p:nvPr/>
+        </p:nvSpPr>
+        <p:spPr>
+          <a:xfrm>
+            <a:off x="320040" y="1234440"/>
+            <a:ext cx="2651760" cy="1508760"/>
+          </a:xfrm>
+          <a:prstGeom prst="rect">
+            <a:avLst/>
+          </a:prstGeom>
+          <a:solidFill>
+            <a:srgbClr val="1E3A5F"/>
+          </a:solidFill>
+          <a:ln w="12700">
+            <a:solidFill>
+              <a:srgbClr val="C9A84C"/>
+            </a:solidFill>
+            <a:prstDash val="solid"/>
+          </a:ln>
+        </p:spPr>
+        <p:txBody>
+          <a:bodyPr/>
+          <a:lstStyle/>
+          <a:p>
+            <a:endParaRPr lang="en-US"/>
+          </a:p>
+        </p:txBody>
+      </p:sp>
+      <p:sp>
+        <p:nvSpPr>
+          <p:cNvPr id="6" name="Text 4"/>
+          <p:cNvSpPr/>
+          <p:nvPr/>
+        </p:nvSpPr>
+        <p:spPr>
+          <a:xfrm>
+            <a:off x="320040" y="1234440"/>
+            <a:ext cx="2651760" cy="1508760"/>
+          </a:xfrm>
+          <a:prstGeom prst="rect">
+            <a:avLst/>
+          </a:prstGeom>
+          <a:noFill/>
+          <a:ln/>
+        </p:spPr>
+        <p:txBody>
+          <a:bodyPr wrap="square" rtlCol="0" anchor="ctr"/>
+          <a:lstStyle/>
+          <a:p>
+            <a:pPr marL="0" indent="0" algn="ctr">
+              <a:buNone/>
+            </a:pPr>
+            <a:r>
+              <a:rPr lang="en-US" sz="1500" b="1" dirty="0">
+                <a:solidFill>
+                  <a:srgbClr val="FFFFFF"/>
+                </a:solidFill>
+              </a:rPr>
+              <a:t>Any Document</a:t>
+            </a:r>
+            <a:endParaRPr lang="en-US" sz="1500" dirty="0"/>
+          </a:p>
+          <a:p>
+            <a:pPr marL="0" indent="0" algn="ctr">
+              <a:buNone/>
+            </a:pPr>
+            <a:r>
+              <a:rPr lang="en-US" sz="400" dirty="0">
+                <a:solidFill>
+                  <a:srgbClr val="000000"/>
+                </a:solidFill>
+              </a:rPr>
+              <a:t>
+</a:t>
+            </a:r>
+            <a:endParaRPr lang="en-US" sz="1500" dirty="0"/>
+          </a:p>
+          <a:p>
+            <a:pPr marL="0" indent="0" algn="ctr">
+              <a:buNone/>
+            </a:pPr>
+            <a:r>
+              <a:rPr lang="en-US" sz="1200" dirty="0">
+                <a:solidFill>
+                  <a:srgbClr val="CADCFC"/>
+                </a:solidFill>
+              </a:rPr>
+              <a:t>Zoning, HR, Budgets, Permits</a:t>
+            </a:r>
+            <a:endParaRPr lang="en-US" sz="1500" dirty="0"/>
+          </a:p>
+        </p:txBody>
+      </p:sp>
+      <p:sp>
+        <p:nvSpPr>
+          <p:cNvPr id="7" name="Shape 5"/>
+          <p:cNvSpPr/>
+          <p:nvPr/>
+        </p:nvSpPr>
+        <p:spPr>
+          <a:xfrm>
+            <a:off x="3200400" y="1234440"/>
+            <a:ext cx="2651760" cy="1508760"/>
+          </a:xfrm>
+          <a:prstGeom prst="rect">
+            <a:avLst/>
+          </a:prstGeom>
+          <a:solidFill>
+            <a:srgbClr val="1E3A5F"/>
+          </a:solidFill>
+          <a:ln w="12700">
+            <a:solidFill>
+              <a:srgbClr val="C9A84C"/>
+            </a:solidFill>
+            <a:prstDash val="solid"/>
+          </a:ln>
+        </p:spPr>
+        <p:txBody>
+          <a:bodyPr/>
+          <a:lstStyle/>
+          <a:p>
+            <a:endParaRPr lang="en-US"/>
+          </a:p>
+        </p:txBody>
+      </p:sp>
+      <p:sp>
+        <p:nvSpPr>
+          <p:cNvPr id="8" name="Text 6"/>
+          <p:cNvSpPr/>
+          <p:nvPr/>
+        </p:nvSpPr>
+        <p:spPr>
+          <a:xfrm>
+            <a:off x="3200400" y="1234440"/>
+            <a:ext cx="2651760" cy="1508760"/>
+          </a:xfrm>
+          <a:prstGeom prst="rect">
+            <a:avLst/>
+          </a:prstGeom>
+          <a:noFill/>
+          <a:ln/>
+        </p:spPr>
+        <p:txBody>
+          <a:bodyPr wrap="square" rtlCol="0" anchor="ctr"/>
+          <a:lstStyle/>
+          <a:p>
+            <a:pPr marL="0" indent="0" algn="ctr">
+              <a:buNone/>
+            </a:pPr>
+            <a:r>
+              <a:rPr lang="en-US" sz="1500" b="1" dirty="0">
+                <a:solidFill>
+                  <a:srgbClr val="FFFFFF"/>
+                </a:solidFill>
+              </a:rPr>
+              <a:t>Own Folder</a:t>
+            </a:r>
+            <a:endParaRPr lang="en-US" sz="1500" dirty="0"/>
+          </a:p>
+          <a:p>
+            <a:pPr marL="0" indent="0" algn="ctr">
+              <a:buNone/>
+            </a:pPr>
+            <a:r>
+              <a:rPr lang="en-US" sz="400" dirty="0">
+                <a:solidFill>
+                  <a:srgbClr val="000000"/>
+                </a:solidFill>
+              </a:rPr>
+              <a:t>
+</a:t>
+            </a:r>
+            <a:endParaRPr lang="en-US" sz="1500" dirty="0"/>
+          </a:p>
+          <a:p>
+            <a:pPr marL="0" indent="0" algn="ctr">
+              <a:buNone/>
+            </a:pPr>
+            <a:r>
+              <a:rPr lang="en-US" sz="1200" dirty="0">
+                <a:solidFill>
+                  <a:srgbClr val="CADCFC"/>
+                </a:solidFill>
+              </a:rPr>
+              <a:t>Isolated deployment per dept</a:t>
+            </a:r>
+            <a:endParaRPr lang="en-US" sz="1500" dirty="0"/>
+          </a:p>
+        </p:txBody>
+      </p:sp>
+      <p:sp>
+        <p:nvSpPr>
+          <p:cNvPr id="9" name="Shape 7"/>
+          <p:cNvSpPr/>
+          <p:nvPr/>
+        </p:nvSpPr>
+        <p:spPr>
+          <a:xfrm>
+            <a:off x="6080760" y="1234440"/>
+            <a:ext cx="2651760" cy="1508760"/>
+          </a:xfrm>
+          <a:prstGeom prst="rect">
+            <a:avLst/>
+          </a:prstGeom>
+          <a:solidFill>
+            <a:srgbClr val="1E3A5F"/>
+          </a:solidFill>
+          <a:ln w="12700">
+            <a:solidFill>
+              <a:srgbClr val="C9A84C"/>
+            </a:solidFill>
+            <a:prstDash val="solid"/>
+          </a:ln>
+        </p:spPr>
+        <p:txBody>
+          <a:bodyPr/>
+          <a:lstStyle/>
+          <a:p>
+            <a:endParaRPr lang="en-US"/>
+          </a:p>
+        </p:txBody>
+      </p:sp>
+      <p:sp>
+        <p:nvSpPr>
+          <p:cNvPr id="10" name="Text 8"/>
+          <p:cNvSpPr/>
+          <p:nvPr/>
+        </p:nvSpPr>
+        <p:spPr>
+          <a:xfrm>
+            <a:off x="6080760" y="1234440"/>
+            <a:ext cx="2651760" cy="1508760"/>
+          </a:xfrm>
+          <a:prstGeom prst="rect">
+            <a:avLst/>
+          </a:prstGeom>
+          <a:noFill/>
+          <a:ln/>
+        </p:spPr>
+        <p:txBody>
+          <a:bodyPr wrap="square" rtlCol="0" anchor="ctr"/>
+          <a:lstStyle/>
+          <a:p>
+            <a:pPr marL="0" indent="0" algn="ctr">
+              <a:buNone/>
+            </a:pPr>
+            <a:r>
+              <a:rPr lang="en-US" sz="1500" b="1" dirty="0">
+                <a:solidFill>
+                  <a:srgbClr val="FFFFFF"/>
+                </a:solidFill>
+              </a:rPr>
+              <a:t>Custom System Prompt</a:t>
+            </a:r>
+            <a:endParaRPr lang="en-US" sz="1500" dirty="0"/>
+          </a:p>
+          <a:p>
+            <a:pPr marL="0" indent="0" algn="ctr">
+              <a:buNone/>
+            </a:pPr>
+            <a:r>
+              <a:rPr lang="en-US" sz="400" dirty="0">
+                <a:solidFill>
+                  <a:srgbClr val="000000"/>
+                </a:solidFill>
+              </a:rPr>
+              <a:t>
+</a:t>
+            </a:r>
+            <a:endParaRPr lang="en-US" sz="1500" dirty="0"/>
+          </a:p>
+          <a:p>
+            <a:pPr marL="0" indent="0" algn="ctr">
+              <a:buNone/>
+            </a:pPr>
+            <a:r>
+              <a:rPr lang="en-US" sz="1200" dirty="0">
+                <a:solidFill>
+                  <a:srgbClr val="CADCFC"/>
+                </a:solidFill>
+              </a:rPr>
+              <a:t>Defines AI expertise &amp; tone</a:t>
+            </a:r>
+            <a:endParaRPr lang="en-US" sz="1500" dirty="0"/>
+          </a:p>
+        </p:txBody>
+      </p:sp>
+      <p:sp>
+        <p:nvSpPr>
+          <p:cNvPr id="11" name="Shape 9"/>
+          <p:cNvSpPr/>
+          <p:nvPr/>
+        </p:nvSpPr>
+        <p:spPr>
+          <a:xfrm>
+            <a:off x="320040" y="2926080"/>
+            <a:ext cx="2651760" cy="1508760"/>
+          </a:xfrm>
+          <a:prstGeom prst="rect">
+            <a:avLst/>
+          </a:prstGeom>
+          <a:solidFill>
+            <a:srgbClr val="1E3A5F"/>
+          </a:solidFill>
+          <a:ln w="12700">
+            <a:solidFill>
+              <a:srgbClr val="C9A84C"/>
+            </a:solidFill>
+            <a:prstDash val="solid"/>
+          </a:ln>
+        </p:spPr>
+        <p:txBody>
+          <a:bodyPr/>
+          <a:lstStyle/>
+          <a:p>
+            <a:endParaRPr lang="en-US"/>
+          </a:p>
+        </p:txBody>
+      </p:sp>
+      <p:sp>
+        <p:nvSpPr>
+          <p:cNvPr id="12" name="Text 10"/>
+          <p:cNvSpPr/>
+          <p:nvPr/>
+        </p:nvSpPr>
+        <p:spPr>
+          <a:xfrm>
+            <a:off x="320040" y="2926080"/>
+            <a:ext cx="2651760" cy="1508760"/>
+          </a:xfrm>
+          <a:prstGeom prst="rect">
+            <a:avLst/>
+          </a:prstGeom>
+          <a:noFill/>
+          <a:ln/>
+        </p:spPr>
+        <p:txBody>
+          <a:bodyPr wrap="square" rtlCol="0" anchor="ctr"/>
+          <a:lstStyle/>
+          <a:p>
+            <a:pPr marL="0" indent="0" algn="ctr">
+              <a:buNone/>
+            </a:pPr>
+            <a:r>
+              <a:rPr lang="en-US" sz="1500" b="1" dirty="0">
+                <a:solidFill>
+                  <a:srgbClr val="FFFFFF"/>
+                </a:solidFill>
+              </a:rPr>
+              <a:t>2–4 Hours</a:t>
+            </a:r>
+            <a:endParaRPr lang="en-US" sz="1500" dirty="0"/>
+          </a:p>
+          <a:p>
+            <a:pPr marL="0" indent="0" algn="ctr">
+              <a:buNone/>
+            </a:pPr>
+            <a:r>
+              <a:rPr lang="en-US" sz="400" dirty="0">
+                <a:solidFill>
+                  <a:srgbClr val="000000"/>
+                </a:solidFill>
+              </a:rPr>
+              <a:t>
+</a:t>
+            </a:r>
+            <a:endParaRPr lang="en-US" sz="1500" dirty="0"/>
+          </a:p>
+          <a:p>
+            <a:pPr marL="0" indent="0" algn="ctr">
+              <a:buNone/>
+            </a:pPr>
+            <a:r>
+              <a:rPr lang="en-US" sz="1200" dirty="0">
+                <a:solidFill>
+                  <a:srgbClr val="CADCFC"/>
+                </a:solidFill>
+              </a:rPr>
+              <a:t>Estimated setup per department</a:t>
+            </a:r>
+            <a:endParaRPr lang="en-US" sz="1500" dirty="0"/>
+          </a:p>
+        </p:txBody>
+      </p:sp>
+      <p:sp>
+        <p:nvSpPr>
+          <p:cNvPr id="13" name="Shape 11"/>
+          <p:cNvSpPr/>
+          <p:nvPr/>
+        </p:nvSpPr>
+        <p:spPr>
+          <a:xfrm>
+            <a:off x="3200400" y="2926080"/>
+            <a:ext cx="2651760" cy="1508760"/>
+          </a:xfrm>
+          <a:prstGeom prst="rect">
+            <a:avLst/>
+          </a:prstGeom>
+          <a:solidFill>
+            <a:srgbClr val="1E3A5F"/>
+          </a:solidFill>
+          <a:ln w="12700">
+            <a:solidFill>
+              <a:srgbClr val="C9A84C"/>
+            </a:solidFill>
+            <a:prstDash val="solid"/>
+          </a:ln>
+        </p:spPr>
+        <p:txBody>
+          <a:bodyPr/>
+          <a:lstStyle/>
+          <a:p>
+            <a:endParaRPr lang="en-US"/>
+          </a:p>
+        </p:txBody>
+      </p:sp>
+      <p:sp>
+        <p:nvSpPr>
+          <p:cNvPr id="14" name="Text 12"/>
+          <p:cNvSpPr/>
+          <p:nvPr/>
+        </p:nvSpPr>
+        <p:spPr>
+          <a:xfrm>
+            <a:off x="3200400" y="2926080"/>
+            <a:ext cx="2651760" cy="1508760"/>
+          </a:xfrm>
+          <a:prstGeom prst="rect">
+            <a:avLst/>
+          </a:prstGeom>
+          <a:noFill/>
+          <a:ln/>
+        </p:spPr>
+        <p:txBody>
+          <a:bodyPr wrap="square" rtlCol="0" anchor="ctr"/>
+          <a:lstStyle/>
+          <a:p>
+            <a:pPr marL="0" indent="0" algn="ctr">
+              <a:buNone/>
+            </a:pPr>
+            <a:r>
+              <a:rPr lang="en-US" sz="1500" b="1" dirty="0">
+                <a:solidFill>
+                  <a:srgbClr val="FFFFFF"/>
+                </a:solidFill>
+              </a:rPr>
+              <a:t>Shared API Key</a:t>
+            </a:r>
+            <a:endParaRPr lang="en-US" sz="1500" dirty="0"/>
+          </a:p>
+          <a:p>
+            <a:pPr marL="0" indent="0" algn="ctr">
+              <a:buNone/>
+            </a:pPr>
+            <a:r>
+              <a:rPr lang="en-US" sz="400" dirty="0">
+                <a:solidFill>
+                  <a:srgbClr val="000000"/>
+                </a:solidFill>
+              </a:rPr>
+              <a:t>
+</a:t>
+            </a:r>
+            <a:endParaRPr lang="en-US" sz="1500" dirty="0"/>
+          </a:p>
+          <a:p>
+            <a:pPr marL="0" indent="0" algn="ctr">
+              <a:buNone/>
+            </a:pPr>
+            <a:r>
+              <a:rPr lang="en-US" sz="1200" dirty="0">
+                <a:solidFill>
+                  <a:srgbClr val="CADCFC"/>
+                </a:solidFill>
+              </a:rPr>
+              <a:t>Or each dept provisions their own</a:t>
+            </a:r>
+            <a:endParaRPr lang="en-US" sz="1500" dirty="0"/>
+          </a:p>
+        </p:txBody>
+      </p:sp>
+      <p:sp>
+        <p:nvSpPr>
+          <p:cNvPr id="15" name="Shape 13"/>
+          <p:cNvSpPr/>
+          <p:nvPr/>
+        </p:nvSpPr>
+        <p:spPr>
+          <a:xfrm>
+            <a:off x="6080760" y="2926080"/>
+            <a:ext cx="2651760" cy="1508760"/>
+          </a:xfrm>
+          <a:prstGeom prst="rect">
+            <a:avLst/>
+          </a:prstGeom>
+          <a:solidFill>
+            <a:srgbClr val="1E3A5F"/>
+          </a:solidFill>
+          <a:ln w="12700">
+            <a:solidFill>
+              <a:srgbClr val="C9A84C"/>
+            </a:solidFill>
+            <a:prstDash val="solid"/>
+          </a:ln>
+        </p:spPr>
+        <p:txBody>
+          <a:bodyPr/>
+          <a:lstStyle/>
+          <a:p>
+            <a:endParaRPr lang="en-US"/>
+          </a:p>
+        </p:txBody>
+      </p:sp>
+      <p:sp>
+        <p:nvSpPr>
+          <p:cNvPr id="16" name="Text 14"/>
+          <p:cNvSpPr/>
+          <p:nvPr/>
+        </p:nvSpPr>
+        <p:spPr>
+          <a:xfrm>
+            <a:off x="6080760" y="2926080"/>
+            <a:ext cx="2651760" cy="1508760"/>
+          </a:xfrm>
+          <a:prstGeom prst="rect">
+            <a:avLst/>
+          </a:prstGeom>
+          <a:noFill/>
+          <a:ln/>
+        </p:spPr>
+        <p:txBody>
+          <a:bodyPr wrap="square" rtlCol="0" anchor="ctr"/>
+          <a:lstStyle/>
+          <a:p>
+            <a:pPr marL="0" indent="0" algn="ctr">
+              <a:buNone/>
+            </a:pPr>
+            <a:r>
+              <a:rPr lang="en-US" sz="1500" b="1" dirty="0">
+                <a:solidFill>
+                  <a:srgbClr val="FFFFFF"/>
+                </a:solidFill>
+              </a:rPr>
+              <a:t>Under $20/mo</a:t>
+            </a:r>
+            <a:endParaRPr lang="en-US" sz="1500" dirty="0"/>
+          </a:p>
+          <a:p>
+            <a:pPr marL="0" indent="0" algn="ctr">
+              <a:buNone/>
+            </a:pPr>
+            <a:r>
+              <a:rPr lang="en-US" sz="400" dirty="0">
+                <a:solidFill>
+                  <a:srgbClr val="000000"/>
+                </a:solidFill>
+              </a:rPr>
+              <a:t>
+</a:t>
+            </a:r>
+            <a:endParaRPr lang="en-US" sz="1500" dirty="0"/>
+          </a:p>
+          <a:p>
+            <a:pPr marL="0" indent="0" algn="ctr">
+              <a:buNone/>
+            </a:pPr>
+            <a:r>
+              <a:rPr lang="en-US" sz="1200" dirty="0">
+                <a:solidFill>
+                  <a:srgbClr val="CADCFC"/>
+                </a:solidFill>
+              </a:rPr>
+              <a:t>Typical city staff usage</a:t>
+            </a:r>
+            <a:endParaRPr lang="en-US" sz="1500" dirty="0"/>
+          </a:p>
+        </p:txBody>
+      </p:sp>
+      <p:sp>
+        <p:nvSpPr>
+          <p:cNvPr id="17" name="Text 15"/>
+          <p:cNvSpPr/>
+          <p:nvPr/>
+        </p:nvSpPr>
+        <p:spPr>
+          <a:xfrm>
+            <a:off x="320040" y="6263640"/>
+            <a:ext cx="8503920" cy="457200"/>
+          </a:xfrm>
+          <a:prstGeom prst="rect">
+            <a:avLst/>
+          </a:prstGeom>
+          <a:noFill/>
+          <a:ln/>
+        </p:spPr>
+        <p:txBody>
+          <a:bodyPr wrap="square" rtlCol="0" anchor="ctr"/>
+          <a:lstStyle/>
+          <a:p>
+            <a:pPr marL="0" indent="0" algn="ctr">
+              <a:buNone/>
+            </a:pPr>
+            <a:r>
+              <a:rPr lang="en-US" sz="1300" i="1" dirty="0">
+                <a:solidFill>
+                  <a:srgbClr val="1E3A5F"/>
+                </a:solidFill>
+                <a:latin typeface="Calibri Light" pitchFamily="34" charset="0"/>
+                <a:ea typeface="Calibri Light" pitchFamily="34" charset="-122"/>
+                <a:cs typeface="Calibri Light" pitchFamily="34" charset="-120"/>
+              </a:rPr>
+              <a:t>All code is open source and sharable — no licensing or vendor lock-in</a:t>
+            </a:r>
+            <a:endParaRPr lang="en-US" sz="1300" dirty="0"/>
+          </a:p>
+        </p:txBody>
+      </p:sp>
+    </p:spTree>
+  </p:cSld>
+  <p:clrMapOvr>
+    <a:masterClrMapping/>
+  </p:clrMapOvr>
+</p:sld>
+</file>
+
+<file path=ppt/slides/slide11.xml><?xml version="1.0" encoding="utf-8"?>
+<p:sld xmlns:a="http://schemas.openxmlformats.org/drawingml/2006/main" xmlns:r="http://schemas.openxmlformats.org/officeDocument/2006/relationships" xmlns:p="http://schemas.openxmlformats.org/presentationml/2006/main">
   <p:cSld name="Slide 8">
     <p:bg>
       <p:bgPr>
@@ -6345,7 +7108,7 @@
 </p:sld>
 </file>
 
-<file path=ppt/slides/slide11.xml><?xml version="1.0" encoding="utf-8"?>
+<file path=ppt/slides/slide12.xml><?xml version="1.0" encoding="utf-8"?>
 <p:sld xmlns:a="http://schemas.openxmlformats.org/drawingml/2006/main" xmlns:r="http://schemas.openxmlformats.org/officeDocument/2006/relationships" xmlns:p="http://schemas.openxmlformats.org/presentationml/2006/main">
   <p:cSld name="Slide 9">
     <p:bg>
@@ -6828,7 +7591,7 @@
 </p:sld>
 </file>
 
-<file path=ppt/slides/slide12.xml><?xml version="1.0" encoding="utf-8"?>
+<file path=ppt/slides/slide13.xml><?xml version="1.0" encoding="utf-8"?>
 <p:sld xmlns:a="http://schemas.openxmlformats.org/drawingml/2006/main" xmlns:r="http://schemas.openxmlformats.org/officeDocument/2006/relationships" xmlns:p="http://schemas.openxmlformats.org/presentationml/2006/main">
   <p:cSld>
     <p:bg>
@@ -7107,66 +7870,6 @@
     <p:extLst>
       <p:ext uri="{BB962C8B-B14F-4D97-AF65-F5344CB8AC3E}">
         <p14:creationId xmlns:p14="http://schemas.microsoft.com/office/powerpoint/2010/main" val="3563193614"/>
-      </p:ext>
-    </p:extLst>
-  </p:cSld>
-  <p:clrMapOvr>
-    <a:masterClrMapping/>
-  </p:clrMapOvr>
-</p:sld>
-</file>
-
-<file path=ppt/slides/slide13.xml><?xml version="1.0" encoding="utf-8"?>
-<p:sld xmlns:a="http://schemas.openxmlformats.org/drawingml/2006/main" xmlns:r="http://schemas.openxmlformats.org/officeDocument/2006/relationships" xmlns:p="http://schemas.openxmlformats.org/presentationml/2006/main">
-  <p:cSld>
-    <p:spTree>
-      <p:nvGrpSpPr>
-        <p:cNvPr id="1" name=""/>
-        <p:cNvGrpSpPr/>
-        <p:nvPr/>
-      </p:nvGrpSpPr>
-      <p:grpSpPr>
-        <a:xfrm>
-          <a:off x="0" y="0"/>
-          <a:ext cx="0" cy="0"/>
-          <a:chOff x="0" y="0"/>
-          <a:chExt cx="0" cy="0"/>
-        </a:xfrm>
-      </p:grpSpPr>
-      <p:pic>
-        <p:nvPicPr>
-          <p:cNvPr id="3" name="Picture 2">
-            <a:extLst>
-              <a:ext uri="{FF2B5EF4-FFF2-40B4-BE49-F238E27FC236}">
-                <a16:creationId xmlns:a16="http://schemas.microsoft.com/office/drawing/2014/main" id="{EC83C595-4059-C2E2-6D5D-D5EB0FB9CB10}"/>
-              </a:ext>
-            </a:extLst>
-          </p:cNvPr>
-          <p:cNvPicPr>
-            <a:picLocks noChangeAspect="1"/>
-          </p:cNvPicPr>
-          <p:nvPr/>
-        </p:nvPicPr>
-        <p:blipFill>
-          <a:blip r:embed="rId3"/>
-          <a:stretch>
-            <a:fillRect/>
-          </a:stretch>
-        </p:blipFill>
-        <p:spPr>
-          <a:xfrm>
-            <a:off x="794810" y="1518971"/>
-            <a:ext cx="7554379" cy="3820058"/>
-          </a:xfrm>
-          <a:prstGeom prst="rect">
-            <a:avLst/>
-          </a:prstGeom>
-        </p:spPr>
-      </p:pic>
-    </p:spTree>
-    <p:extLst>
-      <p:ext uri="{BB962C8B-B14F-4D97-AF65-F5344CB8AC3E}">
-        <p14:creationId xmlns:p14="http://schemas.microsoft.com/office/powerpoint/2010/main" val="2214251691"/>
       </p:ext>
     </p:extLst>
   </p:cSld>
@@ -7198,7 +7901,7 @@
           <p:cNvPr id="3" name="Picture 2">
             <a:extLst>
               <a:ext uri="{FF2B5EF4-FFF2-40B4-BE49-F238E27FC236}">
-                <a16:creationId xmlns:a16="http://schemas.microsoft.com/office/drawing/2014/main" id="{D7E0C1DB-4EAD-6A6E-6B9E-8020202D6202}"/>
+                <a16:creationId xmlns:a16="http://schemas.microsoft.com/office/drawing/2014/main" id="{EC83C595-4059-C2E2-6D5D-D5EB0FB9CB10}"/>
               </a:ext>
             </a:extLst>
           </p:cNvPr>
@@ -7215,8 +7918,8 @@
         </p:blipFill>
         <p:spPr>
           <a:xfrm>
-            <a:off x="804336" y="461548"/>
-            <a:ext cx="7535327" cy="5934903"/>
+            <a:off x="794810" y="1518971"/>
+            <a:ext cx="7554379" cy="3820058"/>
           </a:xfrm>
           <a:prstGeom prst="rect">
             <a:avLst/>
@@ -7226,7 +7929,7 @@
     </p:spTree>
     <p:extLst>
       <p:ext uri="{BB962C8B-B14F-4D97-AF65-F5344CB8AC3E}">
-        <p14:creationId xmlns:p14="http://schemas.microsoft.com/office/powerpoint/2010/main" val="378501961"/>
+        <p14:creationId xmlns:p14="http://schemas.microsoft.com/office/powerpoint/2010/main" val="2214251691"/>
       </p:ext>
     </p:extLst>
   </p:cSld>
@@ -7258,7 +7961,7 @@
           <p:cNvPr id="3" name="Picture 2">
             <a:extLst>
               <a:ext uri="{FF2B5EF4-FFF2-40B4-BE49-F238E27FC236}">
-                <a16:creationId xmlns:a16="http://schemas.microsoft.com/office/drawing/2014/main" id="{24505F14-8EBD-1334-9C17-9DAB75B3627F}"/>
+                <a16:creationId xmlns:a16="http://schemas.microsoft.com/office/drawing/2014/main" id="{D7E0C1DB-4EAD-6A6E-6B9E-8020202D6202}"/>
               </a:ext>
             </a:extLst>
           </p:cNvPr>
@@ -7275,8 +7978,8 @@
         </p:blipFill>
         <p:spPr>
           <a:xfrm>
-            <a:off x="809100" y="2576393"/>
-            <a:ext cx="7525800" cy="1705213"/>
+            <a:off x="804336" y="461548"/>
+            <a:ext cx="7535327" cy="5934903"/>
           </a:xfrm>
           <a:prstGeom prst="rect">
             <a:avLst/>
@@ -7286,7 +7989,7 @@
     </p:spTree>
     <p:extLst>
       <p:ext uri="{BB962C8B-B14F-4D97-AF65-F5344CB8AC3E}">
-        <p14:creationId xmlns:p14="http://schemas.microsoft.com/office/powerpoint/2010/main" val="821936111"/>
+        <p14:creationId xmlns:p14="http://schemas.microsoft.com/office/powerpoint/2010/main" val="378501961"/>
       </p:ext>
     </p:extLst>
   </p:cSld>
@@ -7318,7 +8021,7 @@
           <p:cNvPr id="3" name="Picture 2">
             <a:extLst>
               <a:ext uri="{FF2B5EF4-FFF2-40B4-BE49-F238E27FC236}">
-                <a16:creationId xmlns:a16="http://schemas.microsoft.com/office/drawing/2014/main" id="{3EBCA751-E8A4-5FF0-4BFB-5D88A0881A72}"/>
+                <a16:creationId xmlns:a16="http://schemas.microsoft.com/office/drawing/2014/main" id="{24505F14-8EBD-1334-9C17-9DAB75B3627F}"/>
               </a:ext>
             </a:extLst>
           </p:cNvPr>
@@ -7335,8 +8038,8 @@
         </p:blipFill>
         <p:spPr>
           <a:xfrm>
-            <a:off x="813863" y="2042919"/>
-            <a:ext cx="7516274" cy="2772162"/>
+            <a:off x="809100" y="2576393"/>
+            <a:ext cx="7525800" cy="1705213"/>
           </a:xfrm>
           <a:prstGeom prst="rect">
             <a:avLst/>
@@ -7346,7 +8049,7 @@
     </p:spTree>
     <p:extLst>
       <p:ext uri="{BB962C8B-B14F-4D97-AF65-F5344CB8AC3E}">
-        <p14:creationId xmlns:p14="http://schemas.microsoft.com/office/powerpoint/2010/main" val="166257228"/>
+        <p14:creationId xmlns:p14="http://schemas.microsoft.com/office/powerpoint/2010/main" val="821936111"/>
       </p:ext>
     </p:extLst>
   </p:cSld>
@@ -7378,6 +8081,66 @@
           <p:cNvPr id="3" name="Picture 2">
             <a:extLst>
               <a:ext uri="{FF2B5EF4-FFF2-40B4-BE49-F238E27FC236}">
+                <a16:creationId xmlns:a16="http://schemas.microsoft.com/office/drawing/2014/main" id="{3EBCA751-E8A4-5FF0-4BFB-5D88A0881A72}"/>
+              </a:ext>
+            </a:extLst>
+          </p:cNvPr>
+          <p:cNvPicPr>
+            <a:picLocks noChangeAspect="1"/>
+          </p:cNvPicPr>
+          <p:nvPr/>
+        </p:nvPicPr>
+        <p:blipFill>
+          <a:blip r:embed="rId3"/>
+          <a:stretch>
+            <a:fillRect/>
+          </a:stretch>
+        </p:blipFill>
+        <p:spPr>
+          <a:xfrm>
+            <a:off x="813863" y="2042919"/>
+            <a:ext cx="7516274" cy="2772162"/>
+          </a:xfrm>
+          <a:prstGeom prst="rect">
+            <a:avLst/>
+          </a:prstGeom>
+        </p:spPr>
+      </p:pic>
+    </p:spTree>
+    <p:extLst>
+      <p:ext uri="{BB962C8B-B14F-4D97-AF65-F5344CB8AC3E}">
+        <p14:creationId xmlns:p14="http://schemas.microsoft.com/office/powerpoint/2010/main" val="166257228"/>
+      </p:ext>
+    </p:extLst>
+  </p:cSld>
+  <p:clrMapOvr>
+    <a:masterClrMapping/>
+  </p:clrMapOvr>
+</p:sld>
+</file>
+
+<file path=ppt/slides/slide18.xml><?xml version="1.0" encoding="utf-8"?>
+<p:sld xmlns:a="http://schemas.openxmlformats.org/drawingml/2006/main" xmlns:r="http://schemas.openxmlformats.org/officeDocument/2006/relationships" xmlns:p="http://schemas.openxmlformats.org/presentationml/2006/main">
+  <p:cSld>
+    <p:spTree>
+      <p:nvGrpSpPr>
+        <p:cNvPr id="1" name=""/>
+        <p:cNvGrpSpPr/>
+        <p:nvPr/>
+      </p:nvGrpSpPr>
+      <p:grpSpPr>
+        <a:xfrm>
+          <a:off x="0" y="0"/>
+          <a:ext cx="0" cy="0"/>
+          <a:chOff x="0" y="0"/>
+          <a:chExt cx="0" cy="0"/>
+        </a:xfrm>
+      </p:grpSpPr>
+      <p:pic>
+        <p:nvPicPr>
+          <p:cNvPr id="3" name="Picture 2">
+            <a:extLst>
+              <a:ext uri="{FF2B5EF4-FFF2-40B4-BE49-F238E27FC236}">
                 <a16:creationId xmlns:a16="http://schemas.microsoft.com/office/drawing/2014/main" id="{BEE265AB-1E2E-34B5-EB6B-77935FD7EB13}"/>
               </a:ext>
             </a:extLst>
@@ -7416,7 +8179,7 @@
 </p:sld>
 </file>
 
-<file path=ppt/slides/slide18.xml><?xml version="1.0" encoding="utf-8"?>
+<file path=ppt/slides/slide19.xml><?xml version="1.0" encoding="utf-8"?>
 <p:sld xmlns:a="http://schemas.openxmlformats.org/drawingml/2006/main" xmlns:r="http://schemas.openxmlformats.org/officeDocument/2006/relationships" xmlns:p="http://schemas.openxmlformats.org/presentationml/2006/main">
   <p:cSld>
     <p:bg>
@@ -7484,17 +8247,9 @@
 </p:sld>
 </file>
 
-<file path=ppt/slides/slide19.xml><?xml version="1.0" encoding="utf-8"?>
+<file path=ppt/slides/slide2.xml><?xml version="1.0" encoding="utf-8"?>
 <p:sld xmlns:a="http://schemas.openxmlformats.org/drawingml/2006/main" xmlns:r="http://schemas.openxmlformats.org/officeDocument/2006/relationships" xmlns:p="http://schemas.openxmlformats.org/presentationml/2006/main">
   <p:cSld>
-    <p:bg>
-      <p:bgPr>
-        <a:solidFill>
-          <a:schemeClr val="bg1"/>
-        </a:solidFill>
-        <a:effectLst/>
-      </p:bgPr>
-    </p:bg>
     <p:spTree>
       <p:nvGrpSpPr>
         <p:cNvPr id="1" name=""/>
@@ -7509,593 +8264,107 @@
           <a:chExt cx="0" cy="0"/>
         </a:xfrm>
       </p:grpSpPr>
-      <p:pic>
-        <p:nvPicPr>
-          <p:cNvPr id="3" name="Picture 2">
-            <a:extLst>
-              <a:ext uri="{FF2B5EF4-FFF2-40B4-BE49-F238E27FC236}">
-                <a16:creationId xmlns:a16="http://schemas.microsoft.com/office/drawing/2014/main" id="{A4944570-433C-AC75-3F0A-DAA7DE622AE3}"/>
-              </a:ext>
-            </a:extLst>
-          </p:cNvPr>
-          <p:cNvPicPr>
-            <a:picLocks noChangeAspect="1"/>
-          </p:cNvPicPr>
-          <p:nvPr/>
-        </p:nvPicPr>
-        <p:blipFill>
-          <a:blip r:embed="rId2"/>
-          <a:stretch>
-            <a:fillRect/>
-          </a:stretch>
-        </p:blipFill>
-        <p:spPr>
-          <a:xfrm>
-            <a:off x="0" y="857250"/>
-            <a:ext cx="9144000" cy="5143500"/>
-          </a:xfrm>
-          <a:prstGeom prst="rect">
-            <a:avLst/>
-          </a:prstGeom>
-        </p:spPr>
-      </p:pic>
+      <mc:AlternateContent xmlns:mc="http://schemas.openxmlformats.org/markup-compatibility/2006">
+        <mc:Choice xmlns:psez="http://schemas.microsoft.com/office/powerpoint/2016/sectionzoom" Requires="psez">
+          <p:graphicFrame>
+            <p:nvGraphicFramePr>
+              <p:cNvPr id="3" name="Section Zoom 2">
+                <a:extLst>
+                  <a:ext uri="{FF2B5EF4-FFF2-40B4-BE49-F238E27FC236}">
+                    <a16:creationId xmlns:a16="http://schemas.microsoft.com/office/drawing/2014/main" id="{2C81DECB-705A-ABDE-5195-207FE2CA7BB8}"/>
+                  </a:ext>
+                </a:extLst>
+              </p:cNvPr>
+              <p:cNvGraphicFramePr>
+                <a:graphicFrameLocks noChangeAspect="1"/>
+              </p:cNvGraphicFramePr>
+              <p:nvPr>
+                <p:extLst>
+                  <p:ext uri="{D42A27DB-BD31-4B8C-83A1-F6EECF244321}">
+                    <p14:modId xmlns:p14="http://schemas.microsoft.com/office/powerpoint/2010/main" val="3740637226"/>
+                  </p:ext>
+                </p:extLst>
+              </p:nvPr>
+            </p:nvGraphicFramePr>
+            <p:xfrm>
+              <a:off x="2255783" y="1691837"/>
+              <a:ext cx="4632434" cy="3474326"/>
+            </p:xfrm>
+            <a:graphic>
+              <a:graphicData uri="http://schemas.microsoft.com/office/powerpoint/2016/sectionzoom">
+                <psez:sectionZm>
+                  <psez:sectionZmObj sectionId="{3B61981A-34B7-4122-AB31-B71C3C9B6127}">
+                    <psez:zmPr id="{309F4209-FE7E-48E1-A9E0-51D5CE441F8D}" transitionDur="1000">
+                      <p166:blipFill xmlns:p166="http://schemas.microsoft.com/office/powerpoint/2016/6/main">
+                        <a:blip r:embed="rId2"/>
+                        <a:stretch>
+                          <a:fillRect/>
+                        </a:stretch>
+                      </p166:blipFill>
+                      <p166:spPr xmlns:p166="http://schemas.microsoft.com/office/powerpoint/2016/6/main">
+                        <a:xfrm>
+                          <a:off x="0" y="0"/>
+                          <a:ext cx="4632434" cy="3474326"/>
+                        </a:xfrm>
+                        <a:prstGeom prst="rect">
+                          <a:avLst/>
+                        </a:prstGeom>
+                        <a:ln w="3175">
+                          <a:solidFill>
+                            <a:prstClr val="ltGray"/>
+                          </a:solidFill>
+                        </a:ln>
+                      </p166:spPr>
+                    </psez:zmPr>
+                  </psez:sectionZmObj>
+                </psez:sectionZm>
+              </a:graphicData>
+            </a:graphic>
+          </p:graphicFrame>
+        </mc:Choice>
+        <mc:Fallback>
+          <p:pic>
+            <p:nvPicPr>
+              <p:cNvPr id="3" name="Section Zoom 2">
+                <a:hlinkClick r:id="rId3" action="ppaction://hlinksldjump"/>
+                <a:extLst>
+                  <a:ext uri="{FF2B5EF4-FFF2-40B4-BE49-F238E27FC236}">
+                    <a16:creationId xmlns:a16="http://schemas.microsoft.com/office/drawing/2014/main" id="{2C81DECB-705A-ABDE-5195-207FE2CA7BB8}"/>
+                  </a:ext>
+                </a:extLst>
+              </p:cNvPr>
+              <p:cNvPicPr>
+                <a:picLocks noGrp="1" noRot="1" noChangeAspect="1" noMove="1" noResize="1" noEditPoints="1" noAdjustHandles="1" noChangeArrowheads="1" noChangeShapeType="1"/>
+              </p:cNvPicPr>
+              <p:nvPr/>
+            </p:nvPicPr>
+            <p:blipFill>
+              <a:blip r:embed="rId2"/>
+              <a:stretch>
+                <a:fillRect/>
+              </a:stretch>
+            </p:blipFill>
+            <p:spPr>
+              <a:xfrm>
+                <a:off x="2255783" y="1691837"/>
+                <a:ext cx="4632434" cy="3474326"/>
+              </a:xfrm>
+              <a:prstGeom prst="rect">
+                <a:avLst/>
+              </a:prstGeom>
+              <a:ln w="3175">
+                <a:solidFill>
+                  <a:prstClr val="ltGray"/>
+                </a:solidFill>
+              </a:ln>
+            </p:spPr>
+          </p:pic>
+        </mc:Fallback>
+      </mc:AlternateContent>
     </p:spTree>
     <p:extLst>
       <p:ext uri="{BB962C8B-B14F-4D97-AF65-F5344CB8AC3E}">
-        <p14:creationId xmlns:p14="http://schemas.microsoft.com/office/powerpoint/2010/main" val="1944560194"/>
-      </p:ext>
-    </p:extLst>
-  </p:cSld>
-  <p:clrMapOvr>
-    <a:masterClrMapping/>
-  </p:clrMapOvr>
-</p:sld>
-</file>
-
-<file path=ppt/slides/slide2.xml><?xml version="1.0" encoding="utf-8"?>
-<p:sld xmlns:a="http://schemas.openxmlformats.org/drawingml/2006/main" xmlns:r="http://schemas.openxmlformats.org/officeDocument/2006/relationships" xmlns:p="http://schemas.openxmlformats.org/presentationml/2006/main">
-  <p:cSld>
-    <p:bg>
-      <p:bgPr>
-        <a:solidFill>
-          <a:srgbClr val="1E3A5F"/>
-        </a:solidFill>
-        <a:effectLst/>
-      </p:bgPr>
-    </p:bg>
-    <p:spTree>
-      <p:nvGrpSpPr>
-        <p:cNvPr id="1" name="">
-          <a:extLst>
-            <a:ext uri="{FF2B5EF4-FFF2-40B4-BE49-F238E27FC236}">
-              <a16:creationId xmlns:a16="http://schemas.microsoft.com/office/drawing/2014/main" id="{FEFB7B71-0F6D-817C-A11E-7992059DE835}"/>
-            </a:ext>
-          </a:extLst>
-        </p:cNvPr>
-        <p:cNvGrpSpPr/>
-        <p:nvPr/>
-      </p:nvGrpSpPr>
-      <p:grpSpPr>
-        <a:xfrm>
-          <a:off x="0" y="0"/>
-          <a:ext cx="0" cy="0"/>
-          <a:chOff x="0" y="0"/>
-          <a:chExt cx="0" cy="0"/>
-        </a:xfrm>
-      </p:grpSpPr>
-      <p:sp>
-        <p:nvSpPr>
-          <p:cNvPr id="2" name="Text 0">
-            <a:extLst>
-              <a:ext uri="{FF2B5EF4-FFF2-40B4-BE49-F238E27FC236}">
-                <a16:creationId xmlns:a16="http://schemas.microsoft.com/office/drawing/2014/main" id="{C052831D-8EDE-B107-400D-3080A659C9C3}"/>
-              </a:ext>
-            </a:extLst>
-          </p:cNvPr>
-          <p:cNvSpPr/>
-          <p:nvPr/>
-        </p:nvSpPr>
-        <p:spPr>
-          <a:xfrm>
-            <a:off x="548640" y="365760"/>
-            <a:ext cx="8046720" cy="1005840"/>
-          </a:xfrm>
-          <a:prstGeom prst="rect">
-            <a:avLst/>
-          </a:prstGeom>
-          <a:noFill/>
-          <a:ln/>
-        </p:spPr>
-        <p:txBody>
-          <a:bodyPr wrap="square" rtlCol="0" anchor="ctr"/>
-          <a:lstStyle/>
-          <a:p>
-            <a:pPr marL="0" indent="0" algn="l">
-              <a:buNone/>
-            </a:pPr>
-            <a:r>
-              <a:rPr lang="en-US" sz="3600" b="1" dirty="0">
-                <a:solidFill>
-                  <a:srgbClr val="FFFFFF"/>
-                </a:solidFill>
-                <a:latin typeface="Calibri" pitchFamily="34" charset="0"/>
-                <a:ea typeface="Calibri" pitchFamily="34" charset="-122"/>
-                <a:cs typeface="Calibri" pitchFamily="34" charset="-120"/>
-              </a:rPr>
-              <a:t>John’s Observations </a:t>
-            </a:r>
-          </a:p>
-          <a:p>
-            <a:pPr marL="0" indent="0" algn="l">
-              <a:buNone/>
-            </a:pPr>
-            <a:r>
-              <a:rPr lang="en-US" sz="3600" b="1" dirty="0">
-                <a:solidFill>
-                  <a:srgbClr val="FFFFFF"/>
-                </a:solidFill>
-                <a:latin typeface="Calibri" pitchFamily="34" charset="0"/>
-                <a:ea typeface="Calibri" pitchFamily="34" charset="-122"/>
-                <a:cs typeface="Calibri" pitchFamily="34" charset="-120"/>
-              </a:rPr>
-              <a:t>(If You Only Read One Slide)</a:t>
-            </a:r>
-            <a:endParaRPr lang="en-US" sz="3600" dirty="0"/>
-          </a:p>
-        </p:txBody>
-      </p:sp>
-      <p:sp>
-        <p:nvSpPr>
-          <p:cNvPr id="3" name="Text 1">
-            <a:extLst>
-              <a:ext uri="{FF2B5EF4-FFF2-40B4-BE49-F238E27FC236}">
-                <a16:creationId xmlns:a16="http://schemas.microsoft.com/office/drawing/2014/main" id="{B50851A7-98C6-7E5C-E6D6-C3BF88E3F231}"/>
-              </a:ext>
-            </a:extLst>
-          </p:cNvPr>
-          <p:cNvSpPr/>
-          <p:nvPr/>
-        </p:nvSpPr>
-        <p:spPr>
-          <a:xfrm>
-            <a:off x="457200" y="1371600"/>
-            <a:ext cx="457200" cy="731520"/>
-          </a:xfrm>
-          <a:prstGeom prst="rect">
-            <a:avLst/>
-          </a:prstGeom>
-          <a:noFill/>
-          <a:ln/>
-        </p:spPr>
-        <p:txBody>
-          <a:bodyPr wrap="square" lIns="0" tIns="0" rIns="0" bIns="0" rtlCol="0" anchor="ctr"/>
-          <a:lstStyle/>
-          <a:p>
-            <a:pPr marL="0" indent="0" algn="ctr">
-              <a:buNone/>
-            </a:pPr>
-            <a:r>
-              <a:rPr lang="en-US" sz="3000" b="1" dirty="0">
-                <a:solidFill>
-                  <a:srgbClr val="C9A84C"/>
-                </a:solidFill>
-                <a:latin typeface="Calibri" pitchFamily="34" charset="0"/>
-                <a:ea typeface="Calibri" pitchFamily="34" charset="-122"/>
-                <a:cs typeface="Calibri" pitchFamily="34" charset="-120"/>
-              </a:rPr>
-              <a:t>1</a:t>
-            </a:r>
-            <a:endParaRPr lang="en-US" sz="3000" dirty="0"/>
-          </a:p>
-        </p:txBody>
-      </p:sp>
-      <p:sp>
-        <p:nvSpPr>
-          <p:cNvPr id="4" name="Text 2">
-            <a:extLst>
-              <a:ext uri="{FF2B5EF4-FFF2-40B4-BE49-F238E27FC236}">
-                <a16:creationId xmlns:a16="http://schemas.microsoft.com/office/drawing/2014/main" id="{9F6D1636-F594-C78A-B06D-E82ED98460C6}"/>
-              </a:ext>
-            </a:extLst>
-          </p:cNvPr>
-          <p:cNvSpPr/>
-          <p:nvPr/>
-        </p:nvSpPr>
-        <p:spPr>
-          <a:xfrm>
-            <a:off x="1051560" y="1371600"/>
-            <a:ext cx="7680960" cy="731520"/>
-          </a:xfrm>
-          <a:prstGeom prst="rect">
-            <a:avLst/>
-          </a:prstGeom>
-          <a:noFill/>
-          <a:ln/>
-        </p:spPr>
-        <p:txBody>
-          <a:bodyPr wrap="square" rtlCol="0" anchor="ctr"/>
-          <a:lstStyle/>
-          <a:p>
-            <a:pPr marL="0" indent="0" algn="l">
-              <a:buNone/>
-            </a:pPr>
-            <a:r>
-              <a:rPr lang="en-US" sz="1800" dirty="0">
-                <a:solidFill>
-                  <a:srgbClr val="FFFFFF"/>
-                </a:solidFill>
-                <a:latin typeface="Calibri Light" pitchFamily="34" charset="0"/>
-                <a:ea typeface="Calibri Light" pitchFamily="34" charset="-122"/>
-                <a:cs typeface="Calibri Light" pitchFamily="34" charset="-120"/>
-              </a:rPr>
-              <a:t>Not all AI are created equal.</a:t>
-            </a:r>
-            <a:endParaRPr lang="en-US" sz="1800" dirty="0"/>
-          </a:p>
-        </p:txBody>
-      </p:sp>
-      <p:sp>
-        <p:nvSpPr>
-          <p:cNvPr id="5" name="Text 3">
-            <a:extLst>
-              <a:ext uri="{FF2B5EF4-FFF2-40B4-BE49-F238E27FC236}">
-                <a16:creationId xmlns:a16="http://schemas.microsoft.com/office/drawing/2014/main" id="{1BCAD0C1-13B2-33BF-B2B4-FC5F33BD4D32}"/>
-              </a:ext>
-            </a:extLst>
-          </p:cNvPr>
-          <p:cNvSpPr/>
-          <p:nvPr/>
-        </p:nvSpPr>
-        <p:spPr>
-          <a:xfrm>
-            <a:off x="457200" y="2331720"/>
-            <a:ext cx="457200" cy="731520"/>
-          </a:xfrm>
-          <a:prstGeom prst="rect">
-            <a:avLst/>
-          </a:prstGeom>
-          <a:noFill/>
-          <a:ln/>
-        </p:spPr>
-        <p:txBody>
-          <a:bodyPr wrap="square" lIns="0" tIns="0" rIns="0" bIns="0" rtlCol="0" anchor="ctr"/>
-          <a:lstStyle/>
-          <a:p>
-            <a:pPr marL="0" indent="0" algn="ctr">
-              <a:buNone/>
-            </a:pPr>
-            <a:r>
-              <a:rPr lang="en-US" sz="3000" b="1" dirty="0">
-                <a:solidFill>
-                  <a:srgbClr val="C9A84C"/>
-                </a:solidFill>
-                <a:latin typeface="Calibri" pitchFamily="34" charset="0"/>
-                <a:ea typeface="Calibri" pitchFamily="34" charset="-122"/>
-                <a:cs typeface="Calibri" pitchFamily="34" charset="-120"/>
-              </a:rPr>
-              <a:t>2</a:t>
-            </a:r>
-            <a:endParaRPr lang="en-US" sz="3000" dirty="0"/>
-          </a:p>
-        </p:txBody>
-      </p:sp>
-      <p:sp>
-        <p:nvSpPr>
-          <p:cNvPr id="6" name="Text 4">
-            <a:extLst>
-              <a:ext uri="{FF2B5EF4-FFF2-40B4-BE49-F238E27FC236}">
-                <a16:creationId xmlns:a16="http://schemas.microsoft.com/office/drawing/2014/main" id="{866C078A-E4B3-D560-D5DF-FA05516D5D14}"/>
-              </a:ext>
-            </a:extLst>
-          </p:cNvPr>
-          <p:cNvSpPr/>
-          <p:nvPr/>
-        </p:nvSpPr>
-        <p:spPr>
-          <a:xfrm>
-            <a:off x="1051560" y="2331720"/>
-            <a:ext cx="7680960" cy="731520"/>
-          </a:xfrm>
-          <a:prstGeom prst="rect">
-            <a:avLst/>
-          </a:prstGeom>
-          <a:noFill/>
-          <a:ln/>
-        </p:spPr>
-        <p:txBody>
-          <a:bodyPr wrap="square" rtlCol="0" anchor="ctr"/>
-          <a:lstStyle/>
-          <a:p>
-            <a:pPr marL="0" indent="0" algn="l">
-              <a:buNone/>
-            </a:pPr>
-            <a:r>
-              <a:rPr lang="en-US" sz="1800" dirty="0">
-                <a:solidFill>
-                  <a:srgbClr val="FFFFFF"/>
-                </a:solidFill>
-                <a:latin typeface="Calibri Light" pitchFamily="34" charset="0"/>
-                <a:ea typeface="Calibri Light" pitchFamily="34" charset="-122"/>
-                <a:cs typeface="Calibri Light" pitchFamily="34" charset="-120"/>
-              </a:rPr>
-              <a:t>You have to pay something to get access to “best” models.</a:t>
-            </a:r>
-            <a:endParaRPr lang="en-US" sz="1800" dirty="0"/>
-          </a:p>
-        </p:txBody>
-      </p:sp>
-      <p:sp>
-        <p:nvSpPr>
-          <p:cNvPr id="7" name="Text 5">
-            <a:extLst>
-              <a:ext uri="{FF2B5EF4-FFF2-40B4-BE49-F238E27FC236}">
-                <a16:creationId xmlns:a16="http://schemas.microsoft.com/office/drawing/2014/main" id="{4B0F6C50-769C-9574-942C-FE5F78B0205A}"/>
-              </a:ext>
-            </a:extLst>
-          </p:cNvPr>
-          <p:cNvSpPr/>
-          <p:nvPr/>
-        </p:nvSpPr>
-        <p:spPr>
-          <a:xfrm>
-            <a:off x="457200" y="3291840"/>
-            <a:ext cx="457200" cy="731520"/>
-          </a:xfrm>
-          <a:prstGeom prst="rect">
-            <a:avLst/>
-          </a:prstGeom>
-          <a:noFill/>
-          <a:ln/>
-        </p:spPr>
-        <p:txBody>
-          <a:bodyPr wrap="square" lIns="0" tIns="0" rIns="0" bIns="0" rtlCol="0" anchor="ctr"/>
-          <a:lstStyle/>
-          <a:p>
-            <a:pPr marL="0" indent="0" algn="ctr">
-              <a:buNone/>
-            </a:pPr>
-            <a:r>
-              <a:rPr lang="en-US" sz="3000" b="1" dirty="0">
-                <a:solidFill>
-                  <a:srgbClr val="C9A84C"/>
-                </a:solidFill>
-                <a:latin typeface="Calibri" pitchFamily="34" charset="0"/>
-                <a:ea typeface="Calibri" pitchFamily="34" charset="-122"/>
-                <a:cs typeface="Calibri" pitchFamily="34" charset="-120"/>
-              </a:rPr>
-              <a:t>3</a:t>
-            </a:r>
-            <a:endParaRPr lang="en-US" sz="3000" dirty="0"/>
-          </a:p>
-        </p:txBody>
-      </p:sp>
-      <p:sp>
-        <p:nvSpPr>
-          <p:cNvPr id="8" name="Text 6">
-            <a:extLst>
-              <a:ext uri="{FF2B5EF4-FFF2-40B4-BE49-F238E27FC236}">
-                <a16:creationId xmlns:a16="http://schemas.microsoft.com/office/drawing/2014/main" id="{901053BB-3E70-09D2-46B3-321C55AAE973}"/>
-              </a:ext>
-            </a:extLst>
-          </p:cNvPr>
-          <p:cNvSpPr/>
-          <p:nvPr/>
-        </p:nvSpPr>
-        <p:spPr>
-          <a:xfrm>
-            <a:off x="1051560" y="3291840"/>
-            <a:ext cx="7680960" cy="731520"/>
-          </a:xfrm>
-          <a:prstGeom prst="rect">
-            <a:avLst/>
-          </a:prstGeom>
-          <a:noFill/>
-          <a:ln/>
-        </p:spPr>
-        <p:txBody>
-          <a:bodyPr wrap="square" rtlCol="0" anchor="ctr"/>
-          <a:lstStyle/>
-          <a:p>
-            <a:pPr marL="0" indent="0" algn="l">
-              <a:buNone/>
-            </a:pPr>
-            <a:r>
-              <a:rPr lang="en-US" sz="1800" dirty="0">
-                <a:solidFill>
-                  <a:srgbClr val="FFFFFF"/>
-                </a:solidFill>
-                <a:latin typeface="Calibri Light" pitchFamily="34" charset="0"/>
-                <a:ea typeface="Calibri Light" pitchFamily="34" charset="-122"/>
-                <a:cs typeface="Calibri Light" pitchFamily="34" charset="-120"/>
-              </a:rPr>
-              <a:t>If you start paying, you have to stay on top of costs.  They can balloon quickly.</a:t>
-            </a:r>
-            <a:endParaRPr lang="en-US" sz="1800" dirty="0"/>
-          </a:p>
-        </p:txBody>
-      </p:sp>
-      <p:sp>
-        <p:nvSpPr>
-          <p:cNvPr id="9" name="Text 7">
-            <a:extLst>
-              <a:ext uri="{FF2B5EF4-FFF2-40B4-BE49-F238E27FC236}">
-                <a16:creationId xmlns:a16="http://schemas.microsoft.com/office/drawing/2014/main" id="{372729F0-ED7E-5EE0-8608-261362D6D009}"/>
-              </a:ext>
-            </a:extLst>
-          </p:cNvPr>
-          <p:cNvSpPr/>
-          <p:nvPr/>
-        </p:nvSpPr>
-        <p:spPr>
-          <a:xfrm>
-            <a:off x="457200" y="4251960"/>
-            <a:ext cx="457200" cy="731520"/>
-          </a:xfrm>
-          <a:prstGeom prst="rect">
-            <a:avLst/>
-          </a:prstGeom>
-          <a:noFill/>
-          <a:ln/>
-        </p:spPr>
-        <p:txBody>
-          <a:bodyPr wrap="square" lIns="0" tIns="0" rIns="0" bIns="0" rtlCol="0" anchor="ctr"/>
-          <a:lstStyle/>
-          <a:p>
-            <a:pPr marL="0" indent="0" algn="ctr">
-              <a:buNone/>
-            </a:pPr>
-            <a:r>
-              <a:rPr lang="en-US" sz="3000" b="1" dirty="0">
-                <a:solidFill>
-                  <a:srgbClr val="C9A84C"/>
-                </a:solidFill>
-                <a:latin typeface="Calibri" pitchFamily="34" charset="0"/>
-                <a:ea typeface="Calibri" pitchFamily="34" charset="-122"/>
-                <a:cs typeface="Calibri" pitchFamily="34" charset="-120"/>
-              </a:rPr>
-              <a:t>4</a:t>
-            </a:r>
-            <a:endParaRPr lang="en-US" sz="3000" dirty="0"/>
-          </a:p>
-        </p:txBody>
-      </p:sp>
-      <p:sp>
-        <p:nvSpPr>
-          <p:cNvPr id="10" name="Text 8">
-            <a:extLst>
-              <a:ext uri="{FF2B5EF4-FFF2-40B4-BE49-F238E27FC236}">
-                <a16:creationId xmlns:a16="http://schemas.microsoft.com/office/drawing/2014/main" id="{8B3DD3A0-C49D-5A38-1B73-79CD3B867CC8}"/>
-              </a:ext>
-            </a:extLst>
-          </p:cNvPr>
-          <p:cNvSpPr/>
-          <p:nvPr/>
-        </p:nvSpPr>
-        <p:spPr>
-          <a:xfrm>
-            <a:off x="1051560" y="4251960"/>
-            <a:ext cx="7680960" cy="731520"/>
-          </a:xfrm>
-          <a:prstGeom prst="rect">
-            <a:avLst/>
-          </a:prstGeom>
-          <a:noFill/>
-          <a:ln/>
-        </p:spPr>
-        <p:txBody>
-          <a:bodyPr wrap="square" rtlCol="0" anchor="ctr"/>
-          <a:lstStyle/>
-          <a:p>
-            <a:pPr marL="0" indent="0" algn="l">
-              <a:buNone/>
-            </a:pPr>
-            <a:r>
-              <a:rPr lang="en-US" sz="1800" dirty="0">
-                <a:solidFill>
-                  <a:srgbClr val="FFFFFF"/>
-                </a:solidFill>
-                <a:latin typeface="Calibri Light" pitchFamily="34" charset="0"/>
-                <a:ea typeface="Calibri Light" pitchFamily="34" charset="-122"/>
-                <a:cs typeface="Calibri Light" pitchFamily="34" charset="-120"/>
-              </a:rPr>
-              <a:t>“All these chatbots are a strategy to get you locked in long term” (Nate B. Jones)</a:t>
-            </a:r>
-            <a:endParaRPr lang="en-US" sz="1800" dirty="0"/>
-          </a:p>
-        </p:txBody>
-      </p:sp>
-      <p:sp>
-        <p:nvSpPr>
-          <p:cNvPr id="11" name="Shape 9">
-            <a:extLst>
-              <a:ext uri="{FF2B5EF4-FFF2-40B4-BE49-F238E27FC236}">
-                <a16:creationId xmlns:a16="http://schemas.microsoft.com/office/drawing/2014/main" id="{E57C9F07-3FBC-6097-D030-E219345DCF27}"/>
-              </a:ext>
-            </a:extLst>
-          </p:cNvPr>
-          <p:cNvSpPr/>
-          <p:nvPr/>
-        </p:nvSpPr>
-        <p:spPr>
-          <a:xfrm>
-            <a:off x="457200" y="5669280"/>
-            <a:ext cx="8229600" cy="914400"/>
-          </a:xfrm>
-          <a:prstGeom prst="rect">
-            <a:avLst/>
-          </a:prstGeom>
-          <a:solidFill>
-            <a:srgbClr val="2A4D7A"/>
-          </a:solidFill>
-          <a:ln w="12700">
-            <a:solidFill>
-              <a:srgbClr val="C9A84C"/>
-            </a:solidFill>
-            <a:prstDash val="solid"/>
-          </a:ln>
-        </p:spPr>
-        <p:txBody>
-          <a:bodyPr/>
-          <a:lstStyle/>
-          <a:p>
-            <a:endParaRPr lang="en-US"/>
-          </a:p>
-        </p:txBody>
-      </p:sp>
-      <p:sp>
-        <p:nvSpPr>
-          <p:cNvPr id="12" name="Text 10">
-            <a:extLst>
-              <a:ext uri="{FF2B5EF4-FFF2-40B4-BE49-F238E27FC236}">
-                <a16:creationId xmlns:a16="http://schemas.microsoft.com/office/drawing/2014/main" id="{D61DE9BA-9089-4F24-4A07-51B1C1F51937}"/>
-              </a:ext>
-            </a:extLst>
-          </p:cNvPr>
-          <p:cNvSpPr/>
-          <p:nvPr/>
-        </p:nvSpPr>
-        <p:spPr>
-          <a:xfrm>
-            <a:off x="457200" y="5669280"/>
-            <a:ext cx="8229600" cy="914400"/>
-          </a:xfrm>
-          <a:prstGeom prst="rect">
-            <a:avLst/>
-          </a:prstGeom>
-          <a:noFill/>
-          <a:ln/>
-        </p:spPr>
-        <p:txBody>
-          <a:bodyPr wrap="square" rtlCol="0" anchor="ctr"/>
-          <a:lstStyle/>
-          <a:p>
-            <a:pPr marL="0" indent="0" algn="ctr">
-              <a:buNone/>
-            </a:pPr>
-            <a:r>
-              <a:rPr lang="en-US" sz="1400" dirty="0">
-                <a:solidFill>
-                  <a:srgbClr val="FFFFFF"/>
-                </a:solidFill>
-              </a:rPr>
-              <a:t>John Weisenfeld  ·  jweisenfeld@psd1.org     </a:t>
-            </a:r>
-            <a:r>
-              <a:rPr lang="en-US" sz="1400" b="1" dirty="0">
-                <a:solidFill>
-                  <a:srgbClr val="C9A84C"/>
-                </a:solidFill>
-              </a:rPr>
-              <a:t>http://orionhs.us/pmc</a:t>
-            </a:r>
-            <a:endParaRPr lang="en-US" sz="1400" dirty="0"/>
-          </a:p>
-        </p:txBody>
-      </p:sp>
-    </p:spTree>
-    <p:extLst>
-      <p:ext uri="{BB962C8B-B14F-4D97-AF65-F5344CB8AC3E}">
-        <p14:creationId xmlns:p14="http://schemas.microsoft.com/office/powerpoint/2010/main" val="2126237490"/>
+        <p14:creationId xmlns:p14="http://schemas.microsoft.com/office/powerpoint/2010/main" val="1697961336"/>
       </p:ext>
     </p:extLst>
   </p:cSld>
@@ -8135,7 +8404,7 @@
           <p:cNvPr id="3" name="Picture 2">
             <a:extLst>
               <a:ext uri="{FF2B5EF4-FFF2-40B4-BE49-F238E27FC236}">
-                <a16:creationId xmlns:a16="http://schemas.microsoft.com/office/drawing/2014/main" id="{CDC67EC4-C693-66DC-170B-D0C140159EB2}"/>
+                <a16:creationId xmlns:a16="http://schemas.microsoft.com/office/drawing/2014/main" id="{A4944570-433C-AC75-3F0A-DAA7DE622AE3}"/>
               </a:ext>
             </a:extLst>
           </p:cNvPr>
@@ -8163,7 +8432,7 @@
     </p:spTree>
     <p:extLst>
       <p:ext uri="{BB962C8B-B14F-4D97-AF65-F5344CB8AC3E}">
-        <p14:creationId xmlns:p14="http://schemas.microsoft.com/office/powerpoint/2010/main" val="983639729"/>
+        <p14:creationId xmlns:p14="http://schemas.microsoft.com/office/powerpoint/2010/main" val="1944560194"/>
       </p:ext>
     </p:extLst>
   </p:cSld>
@@ -8203,6 +8472,74 @@
           <p:cNvPr id="3" name="Picture 2">
             <a:extLst>
               <a:ext uri="{FF2B5EF4-FFF2-40B4-BE49-F238E27FC236}">
+                <a16:creationId xmlns:a16="http://schemas.microsoft.com/office/drawing/2014/main" id="{CDC67EC4-C693-66DC-170B-D0C140159EB2}"/>
+              </a:ext>
+            </a:extLst>
+          </p:cNvPr>
+          <p:cNvPicPr>
+            <a:picLocks noChangeAspect="1"/>
+          </p:cNvPicPr>
+          <p:nvPr/>
+        </p:nvPicPr>
+        <p:blipFill>
+          <a:blip r:embed="rId2"/>
+          <a:stretch>
+            <a:fillRect/>
+          </a:stretch>
+        </p:blipFill>
+        <p:spPr>
+          <a:xfrm>
+            <a:off x="0" y="857250"/>
+            <a:ext cx="9144000" cy="5143500"/>
+          </a:xfrm>
+          <a:prstGeom prst="rect">
+            <a:avLst/>
+          </a:prstGeom>
+        </p:spPr>
+      </p:pic>
+    </p:spTree>
+    <p:extLst>
+      <p:ext uri="{BB962C8B-B14F-4D97-AF65-F5344CB8AC3E}">
+        <p14:creationId xmlns:p14="http://schemas.microsoft.com/office/powerpoint/2010/main" val="983639729"/>
+      </p:ext>
+    </p:extLst>
+  </p:cSld>
+  <p:clrMapOvr>
+    <a:masterClrMapping/>
+  </p:clrMapOvr>
+</p:sld>
+</file>
+
+<file path=ppt/slides/slide22.xml><?xml version="1.0" encoding="utf-8"?>
+<p:sld xmlns:a="http://schemas.openxmlformats.org/drawingml/2006/main" xmlns:r="http://schemas.openxmlformats.org/officeDocument/2006/relationships" xmlns:p="http://schemas.openxmlformats.org/presentationml/2006/main">
+  <p:cSld>
+    <p:bg>
+      <p:bgPr>
+        <a:solidFill>
+          <a:schemeClr val="bg1"/>
+        </a:solidFill>
+        <a:effectLst/>
+      </p:bgPr>
+    </p:bg>
+    <p:spTree>
+      <p:nvGrpSpPr>
+        <p:cNvPr id="1" name=""/>
+        <p:cNvGrpSpPr/>
+        <p:nvPr/>
+      </p:nvGrpSpPr>
+      <p:grpSpPr>
+        <a:xfrm>
+          <a:off x="0" y="0"/>
+          <a:ext cx="0" cy="0"/>
+          <a:chOff x="0" y="0"/>
+          <a:chExt cx="0" cy="0"/>
+        </a:xfrm>
+      </p:grpSpPr>
+      <p:pic>
+        <p:nvPicPr>
+          <p:cNvPr id="3" name="Picture 2">
+            <a:extLst>
+              <a:ext uri="{FF2B5EF4-FFF2-40B4-BE49-F238E27FC236}">
                 <a16:creationId xmlns:a16="http://schemas.microsoft.com/office/drawing/2014/main" id="{F8DA8506-521E-07F4-6620-CDBB298B6268}"/>
               </a:ext>
             </a:extLst>
@@ -8241,7 +8578,7 @@
 </p:sld>
 </file>
 
-<file path=ppt/slides/slide22.xml><?xml version="1.0" encoding="utf-8"?>
+<file path=ppt/slides/slide23.xml><?xml version="1.0" encoding="utf-8"?>
 <p:sld xmlns:a="http://schemas.openxmlformats.org/drawingml/2006/main" xmlns:r="http://schemas.openxmlformats.org/officeDocument/2006/relationships" xmlns:p="http://schemas.openxmlformats.org/presentationml/2006/main">
   <p:cSld>
     <p:bg>
@@ -8520,74 +8857,6 @@
     <p:extLst>
       <p:ext uri="{BB962C8B-B14F-4D97-AF65-F5344CB8AC3E}">
         <p14:creationId xmlns:p14="http://schemas.microsoft.com/office/powerpoint/2010/main" val="3053891939"/>
-      </p:ext>
-    </p:extLst>
-  </p:cSld>
-  <p:clrMapOvr>
-    <a:masterClrMapping/>
-  </p:clrMapOvr>
-</p:sld>
-</file>
-
-<file path=ppt/slides/slide23.xml><?xml version="1.0" encoding="utf-8"?>
-<p:sld xmlns:a="http://schemas.openxmlformats.org/drawingml/2006/main" xmlns:r="http://schemas.openxmlformats.org/officeDocument/2006/relationships" xmlns:p="http://schemas.openxmlformats.org/presentationml/2006/main">
-  <p:cSld>
-    <p:bg>
-      <p:bgPr>
-        <a:solidFill>
-          <a:schemeClr val="tx1"/>
-        </a:solidFill>
-        <a:effectLst/>
-      </p:bgPr>
-    </p:bg>
-    <p:spTree>
-      <p:nvGrpSpPr>
-        <p:cNvPr id="1" name=""/>
-        <p:cNvGrpSpPr/>
-        <p:nvPr/>
-      </p:nvGrpSpPr>
-      <p:grpSpPr>
-        <a:xfrm>
-          <a:off x="0" y="0"/>
-          <a:ext cx="0" cy="0"/>
-          <a:chOff x="0" y="0"/>
-          <a:chExt cx="0" cy="0"/>
-        </a:xfrm>
-      </p:grpSpPr>
-      <p:pic>
-        <p:nvPicPr>
-          <p:cNvPr id="3" name="Picture 2">
-            <a:extLst>
-              <a:ext uri="{FF2B5EF4-FFF2-40B4-BE49-F238E27FC236}">
-                <a16:creationId xmlns:a16="http://schemas.microsoft.com/office/drawing/2014/main" id="{61AB10B9-080C-BCB7-C874-1FC86387B4FA}"/>
-              </a:ext>
-            </a:extLst>
-          </p:cNvPr>
-          <p:cNvPicPr>
-            <a:picLocks noChangeAspect="1"/>
-          </p:cNvPicPr>
-          <p:nvPr/>
-        </p:nvPicPr>
-        <p:blipFill>
-          <a:blip r:embed="rId2"/>
-          <a:stretch>
-            <a:fillRect/>
-          </a:stretch>
-        </p:blipFill>
-        <p:spPr>
-          <a:xfrm>
-            <a:off x="804336" y="918812"/>
-            <a:ext cx="7535327" cy="5020376"/>
-          </a:xfrm>
-          <a:prstGeom prst="rect">
-            <a:avLst/>
-          </a:prstGeom>
-        </p:spPr>
-      </p:pic>
-    </p:spTree>
-    <p:extLst>
-      <p:ext uri="{BB962C8B-B14F-4D97-AF65-F5344CB8AC3E}">
-        <p14:creationId xmlns:p14="http://schemas.microsoft.com/office/powerpoint/2010/main" val="1371547175"/>
       </p:ext>
     </p:extLst>
   </p:cSld>
@@ -8627,7 +8896,7 @@
           <p:cNvPr id="3" name="Picture 2">
             <a:extLst>
               <a:ext uri="{FF2B5EF4-FFF2-40B4-BE49-F238E27FC236}">
-                <a16:creationId xmlns:a16="http://schemas.microsoft.com/office/drawing/2014/main" id="{EF9AC412-82CA-2ED4-8815-BA0A162A0054}"/>
+                <a16:creationId xmlns:a16="http://schemas.microsoft.com/office/drawing/2014/main" id="{61AB10B9-080C-BCB7-C874-1FC86387B4FA}"/>
               </a:ext>
             </a:extLst>
           </p:cNvPr>
@@ -8644,8 +8913,8 @@
         </p:blipFill>
         <p:spPr>
           <a:xfrm>
-            <a:off x="794810" y="1604708"/>
-            <a:ext cx="7554379" cy="3648584"/>
+            <a:off x="804336" y="918812"/>
+            <a:ext cx="7535327" cy="5020376"/>
           </a:xfrm>
           <a:prstGeom prst="rect">
             <a:avLst/>
@@ -8655,7 +8924,7 @@
     </p:spTree>
     <p:extLst>
       <p:ext uri="{BB962C8B-B14F-4D97-AF65-F5344CB8AC3E}">
-        <p14:creationId xmlns:p14="http://schemas.microsoft.com/office/powerpoint/2010/main" val="169456677"/>
+        <p14:creationId xmlns:p14="http://schemas.microsoft.com/office/powerpoint/2010/main" val="1371547175"/>
       </p:ext>
     </p:extLst>
   </p:cSld>
@@ -8695,7 +8964,7 @@
           <p:cNvPr id="3" name="Picture 2">
             <a:extLst>
               <a:ext uri="{FF2B5EF4-FFF2-40B4-BE49-F238E27FC236}">
-                <a16:creationId xmlns:a16="http://schemas.microsoft.com/office/drawing/2014/main" id="{84676E3E-344D-065F-AC22-C09C6F5EBD9E}"/>
+                <a16:creationId xmlns:a16="http://schemas.microsoft.com/office/drawing/2014/main" id="{EF9AC412-82CA-2ED4-8815-BA0A162A0054}"/>
               </a:ext>
             </a:extLst>
           </p:cNvPr>
@@ -8712,8 +8981,8 @@
         </p:blipFill>
         <p:spPr>
           <a:xfrm>
-            <a:off x="804336" y="1099812"/>
-            <a:ext cx="7535327" cy="4658375"/>
+            <a:off x="794810" y="1604708"/>
+            <a:ext cx="7554379" cy="3648584"/>
           </a:xfrm>
           <a:prstGeom prst="rect">
             <a:avLst/>
@@ -8723,7 +8992,7 @@
     </p:spTree>
     <p:extLst>
       <p:ext uri="{BB962C8B-B14F-4D97-AF65-F5344CB8AC3E}">
-        <p14:creationId xmlns:p14="http://schemas.microsoft.com/office/powerpoint/2010/main" val="3133835231"/>
+        <p14:creationId xmlns:p14="http://schemas.microsoft.com/office/powerpoint/2010/main" val="169456677"/>
       </p:ext>
     </p:extLst>
   </p:cSld>
@@ -8763,7 +9032,7 @@
           <p:cNvPr id="3" name="Picture 2">
             <a:extLst>
               <a:ext uri="{FF2B5EF4-FFF2-40B4-BE49-F238E27FC236}">
-                <a16:creationId xmlns:a16="http://schemas.microsoft.com/office/drawing/2014/main" id="{34FE1DCA-D3C9-A2F2-9EC2-2BB1DA1A7E3E}"/>
+                <a16:creationId xmlns:a16="http://schemas.microsoft.com/office/drawing/2014/main" id="{84676E3E-344D-065F-AC22-C09C6F5EBD9E}"/>
               </a:ext>
             </a:extLst>
           </p:cNvPr>
@@ -8780,8 +9049,8 @@
         </p:blipFill>
         <p:spPr>
           <a:xfrm>
-            <a:off x="813863" y="337706"/>
-            <a:ext cx="7516274" cy="6182588"/>
+            <a:off x="804336" y="1099812"/>
+            <a:ext cx="7535327" cy="4658375"/>
           </a:xfrm>
           <a:prstGeom prst="rect">
             <a:avLst/>
@@ -8791,7 +9060,7 @@
     </p:spTree>
     <p:extLst>
       <p:ext uri="{BB962C8B-B14F-4D97-AF65-F5344CB8AC3E}">
-        <p14:creationId xmlns:p14="http://schemas.microsoft.com/office/powerpoint/2010/main" val="3951696093"/>
+        <p14:creationId xmlns:p14="http://schemas.microsoft.com/office/powerpoint/2010/main" val="3133835231"/>
       </p:ext>
     </p:extLst>
   </p:cSld>
@@ -8828,10 +9097,10 @@
       </p:grpSpPr>
       <p:pic>
         <p:nvPicPr>
-          <p:cNvPr id="5" name="Picture 4">
+          <p:cNvPr id="3" name="Picture 2">
             <a:extLst>
               <a:ext uri="{FF2B5EF4-FFF2-40B4-BE49-F238E27FC236}">
-                <a16:creationId xmlns:a16="http://schemas.microsoft.com/office/drawing/2014/main" id="{38E6871B-935D-6BD5-0811-AEDD39D1F66C}"/>
+                <a16:creationId xmlns:a16="http://schemas.microsoft.com/office/drawing/2014/main" id="{34FE1DCA-D3C9-A2F2-9EC2-2BB1DA1A7E3E}"/>
               </a:ext>
             </a:extLst>
           </p:cNvPr>
@@ -8848,8 +9117,8 @@
         </p:blipFill>
         <p:spPr>
           <a:xfrm>
-            <a:off x="804336" y="204337"/>
-            <a:ext cx="7535327" cy="6449325"/>
+            <a:off x="813863" y="337706"/>
+            <a:ext cx="7516274" cy="6182588"/>
           </a:xfrm>
           <a:prstGeom prst="rect">
             <a:avLst/>
@@ -8859,7 +9128,7 @@
     </p:spTree>
     <p:extLst>
       <p:ext uri="{BB962C8B-B14F-4D97-AF65-F5344CB8AC3E}">
-        <p14:creationId xmlns:p14="http://schemas.microsoft.com/office/powerpoint/2010/main" val="166763090"/>
+        <p14:creationId xmlns:p14="http://schemas.microsoft.com/office/powerpoint/2010/main" val="3951696093"/>
       </p:ext>
     </p:extLst>
   </p:cSld>
@@ -8872,6 +9141,14 @@
 <file path=ppt/slides/slide28.xml><?xml version="1.0" encoding="utf-8"?>
 <p:sld xmlns:a="http://schemas.openxmlformats.org/drawingml/2006/main" xmlns:r="http://schemas.openxmlformats.org/officeDocument/2006/relationships" xmlns:p="http://schemas.openxmlformats.org/presentationml/2006/main">
   <p:cSld>
+    <p:bg>
+      <p:bgPr>
+        <a:solidFill>
+          <a:schemeClr val="tx1"/>
+        </a:solidFill>
+        <a:effectLst/>
+      </p:bgPr>
+    </p:bg>
     <p:spTree>
       <p:nvGrpSpPr>
         <p:cNvPr id="1" name=""/>
@@ -8888,10 +9165,10 @@
       </p:grpSpPr>
       <p:pic>
         <p:nvPicPr>
-          <p:cNvPr id="3" name="Picture 2">
+          <p:cNvPr id="5" name="Picture 4">
             <a:extLst>
               <a:ext uri="{FF2B5EF4-FFF2-40B4-BE49-F238E27FC236}">
-                <a16:creationId xmlns:a16="http://schemas.microsoft.com/office/drawing/2014/main" id="{6F17CBBC-1637-A20A-73FE-576A40DA731C}"/>
+                <a16:creationId xmlns:a16="http://schemas.microsoft.com/office/drawing/2014/main" id="{38E6871B-935D-6BD5-0811-AEDD39D1F66C}"/>
               </a:ext>
             </a:extLst>
           </p:cNvPr>
@@ -8908,67 +9185,18 @@
         </p:blipFill>
         <p:spPr>
           <a:xfrm>
-            <a:off x="0" y="857250"/>
-            <a:ext cx="9144000" cy="5143500"/>
+            <a:off x="804336" y="204337"/>
+            <a:ext cx="7535327" cy="6449325"/>
           </a:xfrm>
           <a:prstGeom prst="rect">
             <a:avLst/>
           </a:prstGeom>
         </p:spPr>
       </p:pic>
-      <p:sp>
-        <p:nvSpPr>
-          <p:cNvPr id="4" name="Explosion: 14 Points 3">
-            <a:extLst>
-              <a:ext uri="{FF2B5EF4-FFF2-40B4-BE49-F238E27FC236}">
-                <a16:creationId xmlns:a16="http://schemas.microsoft.com/office/drawing/2014/main" id="{E5F02F9A-6146-8391-A478-41BDE9904E98}"/>
-              </a:ext>
-            </a:extLst>
-          </p:cNvPr>
-          <p:cNvSpPr/>
-          <p:nvPr/>
-        </p:nvSpPr>
-        <p:spPr>
-          <a:xfrm>
-            <a:off x="6874013" y="2194928"/>
-            <a:ext cx="2806015" cy="2156353"/>
-          </a:xfrm>
-          <a:prstGeom prst="irregularSeal2">
-            <a:avLst/>
-          </a:prstGeom>
-        </p:spPr>
-        <p:style>
-          <a:lnRef idx="2">
-            <a:schemeClr val="accent1">
-              <a:shade val="15000"/>
-            </a:schemeClr>
-          </a:lnRef>
-          <a:fillRef idx="1">
-            <a:schemeClr val="accent1"/>
-          </a:fillRef>
-          <a:effectRef idx="0">
-            <a:schemeClr val="accent1"/>
-          </a:effectRef>
-          <a:fontRef idx="minor">
-            <a:schemeClr val="lt1"/>
-          </a:fontRef>
-        </p:style>
-        <p:txBody>
-          <a:bodyPr rtlCol="0" anchor="ctr"/>
-          <a:lstStyle/>
-          <a:p>
-            <a:pPr algn="ctr"/>
-            <a:r>
-              <a:rPr lang="en-US" dirty="0"/>
-              <a:t>Watch the burn!</a:t>
-            </a:r>
-          </a:p>
-        </p:txBody>
-      </p:sp>
     </p:spTree>
     <p:extLst>
       <p:ext uri="{BB962C8B-B14F-4D97-AF65-F5344CB8AC3E}">
-        <p14:creationId xmlns:p14="http://schemas.microsoft.com/office/powerpoint/2010/main" val="1794909013"/>
+        <p14:creationId xmlns:p14="http://schemas.microsoft.com/office/powerpoint/2010/main" val="166763090"/>
       </p:ext>
     </p:extLst>
   </p:cSld>
@@ -9000,7 +9228,7 @@
           <p:cNvPr id="3" name="Picture 2">
             <a:extLst>
               <a:ext uri="{FF2B5EF4-FFF2-40B4-BE49-F238E27FC236}">
-                <a16:creationId xmlns:a16="http://schemas.microsoft.com/office/drawing/2014/main" id="{E6681A5B-1366-7A60-D880-BC5F7EDD18A4}"/>
+                <a16:creationId xmlns:a16="http://schemas.microsoft.com/office/drawing/2014/main" id="{6F17CBBC-1637-A20A-73FE-576A40DA731C}"/>
               </a:ext>
             </a:extLst>
           </p:cNvPr>
@@ -9030,7 +9258,7 @@
           <p:cNvPr id="4" name="Explosion: 14 Points 3">
             <a:extLst>
               <a:ext uri="{FF2B5EF4-FFF2-40B4-BE49-F238E27FC236}">
-                <a16:creationId xmlns:a16="http://schemas.microsoft.com/office/drawing/2014/main" id="{E5B1A58F-2DBD-C14E-7903-D05B45E16A2D}"/>
+                <a16:creationId xmlns:a16="http://schemas.microsoft.com/office/drawing/2014/main" id="{E5F02F9A-6146-8391-A478-41BDE9904E98}"/>
               </a:ext>
             </a:extLst>
           </p:cNvPr>
@@ -9069,7 +9297,7 @@
             <a:pPr algn="ctr"/>
             <a:r>
               <a:rPr lang="en-US" dirty="0"/>
-              <a:t>That’s Better!</a:t>
+              <a:t>Watch the burn!</a:t>
             </a:r>
           </a:p>
         </p:txBody>
@@ -9077,7 +9305,7 @@
     </p:spTree>
     <p:extLst>
       <p:ext uri="{BB962C8B-B14F-4D97-AF65-F5344CB8AC3E}">
-        <p14:creationId xmlns:p14="http://schemas.microsoft.com/office/powerpoint/2010/main" val="1813628016"/>
+        <p14:creationId xmlns:p14="http://schemas.microsoft.com/office/powerpoint/2010/main" val="1794909013"/>
       </p:ext>
     </p:extLst>
   </p:cSld>
@@ -9093,7 +9321,7 @@
     <p:bg>
       <p:bgPr>
         <a:solidFill>
-          <a:srgbClr val="F4F6F9"/>
+          <a:srgbClr val="1E3A5F"/>
         </a:solidFill>
         <a:effectLst/>
       </p:bgPr>
@@ -9103,7 +9331,7 @@
         <p:cNvPr id="1" name="">
           <a:extLst>
             <a:ext uri="{FF2B5EF4-FFF2-40B4-BE49-F238E27FC236}">
-              <a16:creationId xmlns:a16="http://schemas.microsoft.com/office/drawing/2014/main" id="{DE416E4F-F7B0-3365-4F34-930357A6432D}"/>
+              <a16:creationId xmlns:a16="http://schemas.microsoft.com/office/drawing/2014/main" id="{FEFB7B71-0F6D-817C-A11E-7992059DE835}"/>
             </a:ext>
           </a:extLst>
         </p:cNvPr>
@@ -9120,10 +9348,10 @@
       </p:grpSpPr>
       <p:sp>
         <p:nvSpPr>
-          <p:cNvPr id="2" name="Shape 0">
+          <p:cNvPr id="2" name="Text 0">
             <a:extLst>
               <a:ext uri="{FF2B5EF4-FFF2-40B4-BE49-F238E27FC236}">
-                <a16:creationId xmlns:a16="http://schemas.microsoft.com/office/drawing/2014/main" id="{3EFD1AD2-8817-6B00-55AE-AFB110166E60}"/>
+                <a16:creationId xmlns:a16="http://schemas.microsoft.com/office/drawing/2014/main" id="{C052831D-8EDE-B107-400D-3080A659C9C3}"/>
               </a:ext>
             </a:extLst>
           </p:cNvPr>
@@ -9132,27 +9360,50 @@
         </p:nvSpPr>
         <p:spPr>
           <a:xfrm>
-            <a:off x="0" y="0"/>
-            <a:ext cx="9144000" cy="1005840"/>
-          </a:xfrm>
-          <a:prstGeom prst="rect">
-            <a:avLst/>
-          </a:prstGeom>
-          <a:solidFill>
-            <a:srgbClr val="1E3A5F"/>
-          </a:solidFill>
-          <a:ln w="12700">
-            <a:solidFill>
-              <a:srgbClr val="1E3A5F"/>
-            </a:solidFill>
-            <a:prstDash val="solid"/>
-          </a:ln>
-        </p:spPr>
-        <p:txBody>
-          <a:bodyPr/>
-          <a:lstStyle/>
-          <a:p>
-            <a:endParaRPr lang="en-US"/>
+            <a:off x="548640" y="365760"/>
+            <a:ext cx="8046720" cy="1005840"/>
+          </a:xfrm>
+          <a:prstGeom prst="rect">
+            <a:avLst/>
+          </a:prstGeom>
+          <a:noFill/>
+          <a:ln/>
+        </p:spPr>
+        <p:txBody>
+          <a:bodyPr wrap="square" rtlCol="0" anchor="ctr"/>
+          <a:lstStyle/>
+          <a:p>
+            <a:pPr marL="0" indent="0" algn="l">
+              <a:buNone/>
+            </a:pPr>
+            <a:r>
+              <a:rPr lang="en-US" sz="3600" b="1" dirty="0">
+                <a:solidFill>
+                  <a:srgbClr val="FFFFFF"/>
+                </a:solidFill>
+                <a:latin typeface="Calibri" pitchFamily="34" charset="0"/>
+                <a:ea typeface="Calibri" pitchFamily="34" charset="-122"/>
+                <a:cs typeface="Calibri" pitchFamily="34" charset="-120"/>
+              </a:rPr>
+              <a:t>John’s Observations </a:t>
+            </a:r>
+          </a:p>
+          <a:p>
+            <a:pPr marL="0" indent="0" algn="l">
+              <a:buNone/>
+            </a:pPr>
+            <a:r>
+              <a:rPr lang="en-US" sz="3600" b="1" dirty="0">
+                <a:solidFill>
+                  <a:srgbClr val="FFFFFF"/>
+                </a:solidFill>
+                <a:latin typeface="Calibri" pitchFamily="34" charset="0"/>
+                <a:ea typeface="Calibri" pitchFamily="34" charset="-122"/>
+                <a:cs typeface="Calibri" pitchFamily="34" charset="-120"/>
+              </a:rPr>
+              <a:t>(If You Only Read One Slide)</a:t>
+            </a:r>
+            <a:endParaRPr lang="en-US" sz="3600" dirty="0"/>
           </a:p>
         </p:txBody>
       </p:sp>
@@ -9161,7 +9412,7 @@
           <p:cNvPr id="3" name="Text 1">
             <a:extLst>
               <a:ext uri="{FF2B5EF4-FFF2-40B4-BE49-F238E27FC236}">
-                <a16:creationId xmlns:a16="http://schemas.microsoft.com/office/drawing/2014/main" id="{A11293A5-D60A-A77C-74A6-35587A7D3634}"/>
+                <a16:creationId xmlns:a16="http://schemas.microsoft.com/office/drawing/2014/main" id="{B50851A7-98C6-7E5C-E6D6-C3BF88E3F231}"/>
               </a:ext>
             </a:extLst>
           </p:cNvPr>
@@ -9170,8 +9421,8 @@
         </p:nvSpPr>
         <p:spPr>
           <a:xfrm>
-            <a:off x="320040" y="0"/>
-            <a:ext cx="8686800" cy="1005840"/>
+            <a:off x="457200" y="1371600"/>
+            <a:ext cx="457200" cy="731520"/>
           </a:xfrm>
           <a:prstGeom prst="rect">
             <a:avLst/>
@@ -9183,30 +9434,30 @@
           <a:bodyPr wrap="square" lIns="0" tIns="0" rIns="0" bIns="0" rtlCol="0" anchor="ctr"/>
           <a:lstStyle/>
           <a:p>
-            <a:pPr marL="0" indent="0" algn="l">
-              <a:buNone/>
-            </a:pPr>
-            <a:r>
-              <a:rPr lang="en-US" sz="2800" b="1" dirty="0">
-                <a:solidFill>
-                  <a:srgbClr val="FFFFFF"/>
+            <a:pPr marL="0" indent="0" algn="ctr">
+              <a:buNone/>
+            </a:pPr>
+            <a:r>
+              <a:rPr lang="en-US" sz="3000" b="1" dirty="0">
+                <a:solidFill>
+                  <a:srgbClr val="C9A84C"/>
                 </a:solidFill>
                 <a:latin typeface="Calibri" pitchFamily="34" charset="0"/>
                 <a:ea typeface="Calibri" pitchFamily="34" charset="-122"/>
                 <a:cs typeface="Calibri" pitchFamily="34" charset="-120"/>
               </a:rPr>
-              <a:t>Which Tool is Which? (More Versions as of 4/8/2026)</a:t>
-            </a:r>
-            <a:endParaRPr lang="en-US" sz="2800" dirty="0"/>
-          </a:p>
-        </p:txBody>
-      </p:sp>
-      <p:sp>
-        <p:nvSpPr>
-          <p:cNvPr id="4" name="Shape 2">
+              <a:t>1</a:t>
+            </a:r>
+            <a:endParaRPr lang="en-US" sz="3000" dirty="0"/>
+          </a:p>
+        </p:txBody>
+      </p:sp>
+      <p:sp>
+        <p:nvSpPr>
+          <p:cNvPr id="4" name="Text 2">
             <a:extLst>
               <a:ext uri="{FF2B5EF4-FFF2-40B4-BE49-F238E27FC236}">
-                <a16:creationId xmlns:a16="http://schemas.microsoft.com/office/drawing/2014/main" id="{36433EB1-274F-3BCD-554C-A62C79EEEA11}"/>
+                <a16:creationId xmlns:a16="http://schemas.microsoft.com/office/drawing/2014/main" id="{9F6D1636-F594-C78A-B06D-E82ED98460C6}"/>
               </a:ext>
             </a:extLst>
           </p:cNvPr>
@@ -9215,14 +9466,329 @@
         </p:nvSpPr>
         <p:spPr>
           <a:xfrm>
-            <a:off x="0" y="1005840"/>
-            <a:ext cx="73152" cy="5852160"/>
+            <a:off x="1051560" y="1371600"/>
+            <a:ext cx="7680960" cy="731520"/>
+          </a:xfrm>
+          <a:prstGeom prst="rect">
+            <a:avLst/>
+          </a:prstGeom>
+          <a:noFill/>
+          <a:ln/>
+        </p:spPr>
+        <p:txBody>
+          <a:bodyPr wrap="square" rtlCol="0" anchor="ctr"/>
+          <a:lstStyle/>
+          <a:p>
+            <a:pPr marL="0" indent="0" algn="l">
+              <a:buNone/>
+            </a:pPr>
+            <a:r>
+              <a:rPr lang="en-US" sz="1800" dirty="0">
+                <a:solidFill>
+                  <a:srgbClr val="FFFFFF"/>
+                </a:solidFill>
+                <a:latin typeface="Calibri Light" pitchFamily="34" charset="0"/>
+                <a:ea typeface="Calibri Light" pitchFamily="34" charset="-122"/>
+                <a:cs typeface="Calibri Light" pitchFamily="34" charset="-120"/>
+              </a:rPr>
+              <a:t>Not all AI are created equal.</a:t>
+            </a:r>
+            <a:endParaRPr lang="en-US" sz="1800" dirty="0"/>
+          </a:p>
+        </p:txBody>
+      </p:sp>
+      <p:sp>
+        <p:nvSpPr>
+          <p:cNvPr id="5" name="Text 3">
+            <a:extLst>
+              <a:ext uri="{FF2B5EF4-FFF2-40B4-BE49-F238E27FC236}">
+                <a16:creationId xmlns:a16="http://schemas.microsoft.com/office/drawing/2014/main" id="{1BCAD0C1-13B2-33BF-B2B4-FC5F33BD4D32}"/>
+              </a:ext>
+            </a:extLst>
+          </p:cNvPr>
+          <p:cNvSpPr/>
+          <p:nvPr/>
+        </p:nvSpPr>
+        <p:spPr>
+          <a:xfrm>
+            <a:off x="457200" y="2331720"/>
+            <a:ext cx="457200" cy="731520"/>
+          </a:xfrm>
+          <a:prstGeom prst="rect">
+            <a:avLst/>
+          </a:prstGeom>
+          <a:noFill/>
+          <a:ln/>
+        </p:spPr>
+        <p:txBody>
+          <a:bodyPr wrap="square" lIns="0" tIns="0" rIns="0" bIns="0" rtlCol="0" anchor="ctr"/>
+          <a:lstStyle/>
+          <a:p>
+            <a:pPr marL="0" indent="0" algn="ctr">
+              <a:buNone/>
+            </a:pPr>
+            <a:r>
+              <a:rPr lang="en-US" sz="3000" b="1" dirty="0">
+                <a:solidFill>
+                  <a:srgbClr val="C9A84C"/>
+                </a:solidFill>
+                <a:latin typeface="Calibri" pitchFamily="34" charset="0"/>
+                <a:ea typeface="Calibri" pitchFamily="34" charset="-122"/>
+                <a:cs typeface="Calibri" pitchFamily="34" charset="-120"/>
+              </a:rPr>
+              <a:t>2</a:t>
+            </a:r>
+            <a:endParaRPr lang="en-US" sz="3000" dirty="0"/>
+          </a:p>
+        </p:txBody>
+      </p:sp>
+      <p:sp>
+        <p:nvSpPr>
+          <p:cNvPr id="6" name="Text 4">
+            <a:extLst>
+              <a:ext uri="{FF2B5EF4-FFF2-40B4-BE49-F238E27FC236}">
+                <a16:creationId xmlns:a16="http://schemas.microsoft.com/office/drawing/2014/main" id="{866C078A-E4B3-D560-D5DF-FA05516D5D14}"/>
+              </a:ext>
+            </a:extLst>
+          </p:cNvPr>
+          <p:cNvSpPr/>
+          <p:nvPr/>
+        </p:nvSpPr>
+        <p:spPr>
+          <a:xfrm>
+            <a:off x="1051560" y="2331720"/>
+            <a:ext cx="7680960" cy="731520"/>
+          </a:xfrm>
+          <a:prstGeom prst="rect">
+            <a:avLst/>
+          </a:prstGeom>
+          <a:noFill/>
+          <a:ln/>
+        </p:spPr>
+        <p:txBody>
+          <a:bodyPr wrap="square" rtlCol="0" anchor="ctr"/>
+          <a:lstStyle/>
+          <a:p>
+            <a:pPr marL="0" indent="0" algn="l">
+              <a:buNone/>
+            </a:pPr>
+            <a:r>
+              <a:rPr lang="en-US" sz="1800" dirty="0">
+                <a:solidFill>
+                  <a:srgbClr val="FFFFFF"/>
+                </a:solidFill>
+                <a:latin typeface="Calibri Light" pitchFamily="34" charset="0"/>
+                <a:ea typeface="Calibri Light" pitchFamily="34" charset="-122"/>
+                <a:cs typeface="Calibri Light" pitchFamily="34" charset="-120"/>
+              </a:rPr>
+              <a:t>You have to pay something to get access to “best” models.</a:t>
+            </a:r>
+            <a:endParaRPr lang="en-US" sz="1800" dirty="0"/>
+          </a:p>
+        </p:txBody>
+      </p:sp>
+      <p:sp>
+        <p:nvSpPr>
+          <p:cNvPr id="7" name="Text 5">
+            <a:extLst>
+              <a:ext uri="{FF2B5EF4-FFF2-40B4-BE49-F238E27FC236}">
+                <a16:creationId xmlns:a16="http://schemas.microsoft.com/office/drawing/2014/main" id="{4B0F6C50-769C-9574-942C-FE5F78B0205A}"/>
+              </a:ext>
+            </a:extLst>
+          </p:cNvPr>
+          <p:cNvSpPr/>
+          <p:nvPr/>
+        </p:nvSpPr>
+        <p:spPr>
+          <a:xfrm>
+            <a:off x="457200" y="3291840"/>
+            <a:ext cx="457200" cy="731520"/>
+          </a:xfrm>
+          <a:prstGeom prst="rect">
+            <a:avLst/>
+          </a:prstGeom>
+          <a:noFill/>
+          <a:ln/>
+        </p:spPr>
+        <p:txBody>
+          <a:bodyPr wrap="square" lIns="0" tIns="0" rIns="0" bIns="0" rtlCol="0" anchor="ctr"/>
+          <a:lstStyle/>
+          <a:p>
+            <a:pPr marL="0" indent="0" algn="ctr">
+              <a:buNone/>
+            </a:pPr>
+            <a:r>
+              <a:rPr lang="en-US" sz="3000" b="1" dirty="0">
+                <a:solidFill>
+                  <a:srgbClr val="C9A84C"/>
+                </a:solidFill>
+                <a:latin typeface="Calibri" pitchFamily="34" charset="0"/>
+                <a:ea typeface="Calibri" pitchFamily="34" charset="-122"/>
+                <a:cs typeface="Calibri" pitchFamily="34" charset="-120"/>
+              </a:rPr>
+              <a:t>3</a:t>
+            </a:r>
+            <a:endParaRPr lang="en-US" sz="3000" dirty="0"/>
+          </a:p>
+        </p:txBody>
+      </p:sp>
+      <p:sp>
+        <p:nvSpPr>
+          <p:cNvPr id="8" name="Text 6">
+            <a:extLst>
+              <a:ext uri="{FF2B5EF4-FFF2-40B4-BE49-F238E27FC236}">
+                <a16:creationId xmlns:a16="http://schemas.microsoft.com/office/drawing/2014/main" id="{901053BB-3E70-09D2-46B3-321C55AAE973}"/>
+              </a:ext>
+            </a:extLst>
+          </p:cNvPr>
+          <p:cNvSpPr/>
+          <p:nvPr/>
+        </p:nvSpPr>
+        <p:spPr>
+          <a:xfrm>
+            <a:off x="1051560" y="3291840"/>
+            <a:ext cx="7680960" cy="731520"/>
+          </a:xfrm>
+          <a:prstGeom prst="rect">
+            <a:avLst/>
+          </a:prstGeom>
+          <a:noFill/>
+          <a:ln/>
+        </p:spPr>
+        <p:txBody>
+          <a:bodyPr wrap="square" rtlCol="0" anchor="ctr"/>
+          <a:lstStyle/>
+          <a:p>
+            <a:pPr marL="0" indent="0" algn="l">
+              <a:buNone/>
+            </a:pPr>
+            <a:r>
+              <a:rPr lang="en-US" sz="1800" dirty="0">
+                <a:solidFill>
+                  <a:srgbClr val="FFFFFF"/>
+                </a:solidFill>
+                <a:latin typeface="Calibri Light" pitchFamily="34" charset="0"/>
+                <a:ea typeface="Calibri Light" pitchFamily="34" charset="-122"/>
+                <a:cs typeface="Calibri Light" pitchFamily="34" charset="-120"/>
+              </a:rPr>
+              <a:t>If you start paying, you have to stay on top of costs.  They can balloon quickly.</a:t>
+            </a:r>
+            <a:endParaRPr lang="en-US" sz="1800" dirty="0"/>
+          </a:p>
+        </p:txBody>
+      </p:sp>
+      <p:sp>
+        <p:nvSpPr>
+          <p:cNvPr id="9" name="Text 7">
+            <a:extLst>
+              <a:ext uri="{FF2B5EF4-FFF2-40B4-BE49-F238E27FC236}">
+                <a16:creationId xmlns:a16="http://schemas.microsoft.com/office/drawing/2014/main" id="{372729F0-ED7E-5EE0-8608-261362D6D009}"/>
+              </a:ext>
+            </a:extLst>
+          </p:cNvPr>
+          <p:cNvSpPr/>
+          <p:nvPr/>
+        </p:nvSpPr>
+        <p:spPr>
+          <a:xfrm>
+            <a:off x="457200" y="4251960"/>
+            <a:ext cx="457200" cy="731520"/>
+          </a:xfrm>
+          <a:prstGeom prst="rect">
+            <a:avLst/>
+          </a:prstGeom>
+          <a:noFill/>
+          <a:ln/>
+        </p:spPr>
+        <p:txBody>
+          <a:bodyPr wrap="square" lIns="0" tIns="0" rIns="0" bIns="0" rtlCol="0" anchor="ctr"/>
+          <a:lstStyle/>
+          <a:p>
+            <a:pPr marL="0" indent="0" algn="ctr">
+              <a:buNone/>
+            </a:pPr>
+            <a:r>
+              <a:rPr lang="en-US" sz="3000" b="1" dirty="0">
+                <a:solidFill>
+                  <a:srgbClr val="C9A84C"/>
+                </a:solidFill>
+                <a:latin typeface="Calibri" pitchFamily="34" charset="0"/>
+                <a:ea typeface="Calibri" pitchFamily="34" charset="-122"/>
+                <a:cs typeface="Calibri" pitchFamily="34" charset="-120"/>
+              </a:rPr>
+              <a:t>4</a:t>
+            </a:r>
+            <a:endParaRPr lang="en-US" sz="3000" dirty="0"/>
+          </a:p>
+        </p:txBody>
+      </p:sp>
+      <p:sp>
+        <p:nvSpPr>
+          <p:cNvPr id="10" name="Text 8">
+            <a:extLst>
+              <a:ext uri="{FF2B5EF4-FFF2-40B4-BE49-F238E27FC236}">
+                <a16:creationId xmlns:a16="http://schemas.microsoft.com/office/drawing/2014/main" id="{8B3DD3A0-C49D-5A38-1B73-79CD3B867CC8}"/>
+              </a:ext>
+            </a:extLst>
+          </p:cNvPr>
+          <p:cNvSpPr/>
+          <p:nvPr/>
+        </p:nvSpPr>
+        <p:spPr>
+          <a:xfrm>
+            <a:off x="1051560" y="4251960"/>
+            <a:ext cx="7680960" cy="731520"/>
+          </a:xfrm>
+          <a:prstGeom prst="rect">
+            <a:avLst/>
+          </a:prstGeom>
+          <a:noFill/>
+          <a:ln/>
+        </p:spPr>
+        <p:txBody>
+          <a:bodyPr wrap="square" rtlCol="0" anchor="ctr"/>
+          <a:lstStyle/>
+          <a:p>
+            <a:pPr marL="0" indent="0" algn="l">
+              <a:buNone/>
+            </a:pPr>
+            <a:r>
+              <a:rPr lang="en-US" sz="1800" dirty="0">
+                <a:solidFill>
+                  <a:srgbClr val="FFFFFF"/>
+                </a:solidFill>
+                <a:latin typeface="Calibri Light" pitchFamily="34" charset="0"/>
+                <a:ea typeface="Calibri Light" pitchFamily="34" charset="-122"/>
+                <a:cs typeface="Calibri Light" pitchFamily="34" charset="-120"/>
+              </a:rPr>
+              <a:t>“All these chatbots are a strategy to get you locked in long term” (Nate B. Jones)</a:t>
+            </a:r>
+            <a:endParaRPr lang="en-US" sz="1800" dirty="0"/>
+          </a:p>
+        </p:txBody>
+      </p:sp>
+      <p:sp>
+        <p:nvSpPr>
+          <p:cNvPr id="11" name="Shape 9">
+            <a:extLst>
+              <a:ext uri="{FF2B5EF4-FFF2-40B4-BE49-F238E27FC236}">
+                <a16:creationId xmlns:a16="http://schemas.microsoft.com/office/drawing/2014/main" id="{E57C9F07-3FBC-6097-D030-E219345DCF27}"/>
+              </a:ext>
+            </a:extLst>
+          </p:cNvPr>
+          <p:cNvSpPr/>
+          <p:nvPr/>
+        </p:nvSpPr>
+        <p:spPr>
+          <a:xfrm>
+            <a:off x="457200" y="5669280"/>
+            <a:ext cx="8229600" cy="914400"/>
           </a:xfrm>
           <a:prstGeom prst="rect">
             <a:avLst/>
           </a:prstGeom>
           <a:solidFill>
-            <a:srgbClr val="C9A84C"/>
+            <a:srgbClr val="2A4D7A"/>
           </a:solidFill>
           <a:ln w="12700">
             <a:solidFill>
@@ -9241,10 +9807,10 @@
       </p:sp>
       <p:sp>
         <p:nvSpPr>
-          <p:cNvPr id="5" name="Text 3">
+          <p:cNvPr id="12" name="Text 10">
             <a:extLst>
               <a:ext uri="{FF2B5EF4-FFF2-40B4-BE49-F238E27FC236}">
-                <a16:creationId xmlns:a16="http://schemas.microsoft.com/office/drawing/2014/main" id="{71CC9ECC-451D-C085-4BF1-0C4C3E5D652F}"/>
+                <a16:creationId xmlns:a16="http://schemas.microsoft.com/office/drawing/2014/main" id="{D61DE9BA-9089-4F24-4A07-51B1C1F51937}"/>
               </a:ext>
             </a:extLst>
           </p:cNvPr>
@@ -9253,8 +9819,8 @@
         </p:nvSpPr>
         <p:spPr>
           <a:xfrm>
-            <a:off x="320040" y="1234440"/>
-            <a:ext cx="4572000" cy="5212080"/>
+            <a:off x="457200" y="5669280"/>
+            <a:ext cx="8229600" cy="914400"/>
           </a:xfrm>
           <a:prstGeom prst="rect">
             <a:avLst/>
@@ -9263,149 +9829,6 @@
           <a:ln/>
         </p:spPr>
         <p:txBody>
-          <a:bodyPr wrap="square" rtlCol="0" anchor="t"/>
-          <a:lstStyle/>
-          <a:p>
-            <a:pPr>
-              <a:spcAft>
-                <a:spcPts val="700"/>
-              </a:spcAft>
-            </a:pPr>
-            <a:r>
-              <a:rPr lang="en-US" sz="3200" dirty="0">
-                <a:solidFill>
-                  <a:srgbClr val="1E3A5F"/>
-                </a:solidFill>
-                <a:latin typeface="Calibri Light" pitchFamily="34" charset="0"/>
-                <a:ea typeface="Calibri Light" pitchFamily="34" charset="-122"/>
-                <a:cs typeface="Calibri Light" pitchFamily="34" charset="-120"/>
-              </a:rPr>
-              <a:t>pmc1 is Gemini-based.</a:t>
-            </a:r>
-          </a:p>
-          <a:p>
-            <a:pPr>
-              <a:spcAft>
-                <a:spcPts val="700"/>
-              </a:spcAft>
-            </a:pPr>
-            <a:r>
-              <a:rPr lang="en-US" sz="3200" dirty="0">
-                <a:solidFill>
-                  <a:srgbClr val="1E3A5F"/>
-                </a:solidFill>
-                <a:latin typeface="Calibri Light" pitchFamily="34" charset="0"/>
-                <a:ea typeface="Calibri Light" pitchFamily="34" charset="-122"/>
-                <a:cs typeface="Calibri Light" pitchFamily="34" charset="-120"/>
-              </a:rPr>
-              <a:t>pmc2 is Claude-based.</a:t>
-            </a:r>
-          </a:p>
-          <a:p>
-            <a:pPr>
-              <a:spcAft>
-                <a:spcPts val="700"/>
-              </a:spcAft>
-            </a:pPr>
-            <a:r>
-              <a:rPr lang="en-US" sz="3200" dirty="0">
-                <a:solidFill>
-                  <a:srgbClr val="1E3A5F"/>
-                </a:solidFill>
-                <a:latin typeface="Calibri Light" pitchFamily="34" charset="0"/>
-                <a:ea typeface="Calibri Light" pitchFamily="34" charset="-122"/>
-                <a:cs typeface="Calibri Light" pitchFamily="34" charset="-120"/>
-              </a:rPr>
-              <a:t>pmc3 is ChatGPT-based.</a:t>
-            </a:r>
-          </a:p>
-          <a:p>
-            <a:pPr>
-              <a:spcAft>
-                <a:spcPts val="700"/>
-              </a:spcAft>
-            </a:pPr>
-            <a:endParaRPr lang="en-US" sz="3200" dirty="0">
-              <a:solidFill>
-                <a:srgbClr val="1E3A5F"/>
-              </a:solidFill>
-              <a:latin typeface="Calibri Light" pitchFamily="34" charset="0"/>
-              <a:ea typeface="Calibri Light" pitchFamily="34" charset="-122"/>
-              <a:cs typeface="Calibri Light" pitchFamily="34" charset="-120"/>
-            </a:endParaRPr>
-          </a:p>
-          <a:p>
-            <a:pPr>
-              <a:spcAft>
-                <a:spcPts val="700"/>
-              </a:spcAft>
-            </a:pPr>
-            <a:endParaRPr lang="en-US" sz="3200" dirty="0"/>
-          </a:p>
-        </p:txBody>
-      </p:sp>
-      <p:sp>
-        <p:nvSpPr>
-          <p:cNvPr id="6" name="Shape 4">
-            <a:extLst>
-              <a:ext uri="{FF2B5EF4-FFF2-40B4-BE49-F238E27FC236}">
-                <a16:creationId xmlns:a16="http://schemas.microsoft.com/office/drawing/2014/main" id="{D1EB98EE-CC60-40BE-D2C1-40334C8C182A}"/>
-              </a:ext>
-            </a:extLst>
-          </p:cNvPr>
-          <p:cNvSpPr/>
-          <p:nvPr/>
-        </p:nvSpPr>
-        <p:spPr>
-          <a:xfrm>
-            <a:off x="5212080" y="1828800"/>
-            <a:ext cx="3657600" cy="3200400"/>
-          </a:xfrm>
-          <a:prstGeom prst="rect">
-            <a:avLst/>
-          </a:prstGeom>
-          <a:solidFill>
-            <a:srgbClr val="1E3A5F"/>
-          </a:solidFill>
-          <a:ln w="31750">
-            <a:solidFill>
-              <a:srgbClr val="C9A84C"/>
-            </a:solidFill>
-            <a:prstDash val="solid"/>
-          </a:ln>
-        </p:spPr>
-        <p:txBody>
-          <a:bodyPr/>
-          <a:lstStyle/>
-          <a:p>
-            <a:endParaRPr lang="en-US"/>
-          </a:p>
-        </p:txBody>
-      </p:sp>
-      <p:sp>
-        <p:nvSpPr>
-          <p:cNvPr id="7" name="Text 5">
-            <a:extLst>
-              <a:ext uri="{FF2B5EF4-FFF2-40B4-BE49-F238E27FC236}">
-                <a16:creationId xmlns:a16="http://schemas.microsoft.com/office/drawing/2014/main" id="{660CD30E-BC28-4894-1F4F-0546BAB9FEDA}"/>
-              </a:ext>
-            </a:extLst>
-          </p:cNvPr>
-          <p:cNvSpPr/>
-          <p:nvPr/>
-        </p:nvSpPr>
-        <p:spPr>
-          <a:xfrm>
-            <a:off x="5212080" y="1828800"/>
-            <a:ext cx="3657600" cy="3200400"/>
-          </a:xfrm>
-          <a:prstGeom prst="rect">
-            <a:avLst/>
-          </a:prstGeom>
-          <a:noFill/>
-          <a:ln/>
-        </p:spPr>
-        <p:txBody>
           <a:bodyPr wrap="square" rtlCol="0" anchor="ctr"/>
           <a:lstStyle/>
           <a:p>
@@ -9413,117 +9836,29 @@
               <a:buNone/>
             </a:pPr>
             <a:r>
-              <a:rPr lang="en-US" sz="2000" i="1" dirty="0">
-                <a:solidFill>
-                  <a:srgbClr val="CADCFC"/>
-                </a:solidFill>
-              </a:rPr>
-              <a:t>Try it live:</a:t>
-            </a:r>
-            <a:endParaRPr lang="en-US" sz="2000" dirty="0"/>
-          </a:p>
-          <a:p>
-            <a:pPr marL="0" indent="0" algn="ctr">
-              <a:buNone/>
-            </a:pPr>
-            <a:r>
-              <a:rPr lang="en-US" sz="900" dirty="0">
-                <a:solidFill>
-                  <a:srgbClr val="000000"/>
-                </a:solidFill>
-              </a:rPr>
-              <a:t>
-</a:t>
-            </a:r>
-            <a:endParaRPr lang="en-US" sz="2000" dirty="0"/>
-          </a:p>
-          <a:p>
-            <a:pPr algn="ctr"/>
-            <a:r>
-              <a:rPr lang="en-US" sz="2800" b="1" dirty="0">
+              <a:rPr lang="en-US" sz="1400" dirty="0">
+                <a:solidFill>
+                  <a:srgbClr val="FFFFFF"/>
+                </a:solidFill>
+              </a:rPr>
+              <a:t>John Weisenfeld  ·  jweisenfeld@psd1.org     </a:t>
+            </a:r>
+            <a:r>
+              <a:rPr lang="en-US" sz="1400" b="1" dirty="0">
                 <a:solidFill>
                   <a:srgbClr val="C9A84C"/>
                 </a:solidFill>
               </a:rPr>
-              <a:t>https://psd1.net/pmc1</a:t>
-            </a:r>
-            <a:endParaRPr lang="en-US" sz="2000" dirty="0"/>
-          </a:p>
-          <a:p>
-            <a:pPr algn="ctr"/>
-            <a:r>
-              <a:rPr lang="en-US" sz="2800" b="1" dirty="0">
-                <a:solidFill>
-                  <a:srgbClr val="C9A84C"/>
-                </a:solidFill>
-              </a:rPr>
-              <a:t>https://psd1.net/pmc2</a:t>
-            </a:r>
-            <a:endParaRPr lang="en-US" sz="2000" dirty="0"/>
-          </a:p>
-          <a:p>
-            <a:pPr marL="0" indent="0" algn="ctr">
-              <a:buNone/>
-            </a:pPr>
-            <a:r>
-              <a:rPr lang="en-US" sz="2800" b="1" dirty="0">
-                <a:solidFill>
-                  <a:srgbClr val="C9A84C"/>
-                </a:solidFill>
-              </a:rPr>
-              <a:t>https://psd1.net/pmc3 </a:t>
-            </a:r>
-            <a:endParaRPr lang="en-US" sz="2000" dirty="0"/>
-          </a:p>
-          <a:p>
-            <a:pPr marL="0" indent="0" algn="ctr">
-              <a:buNone/>
-            </a:pPr>
-            <a:r>
-              <a:rPr lang="en-US" sz="900" dirty="0">
-                <a:solidFill>
-                  <a:srgbClr val="000000"/>
-                </a:solidFill>
-              </a:rPr>
-              <a:t>
-</a:t>
-            </a:r>
-            <a:endParaRPr lang="en-US" sz="2000" dirty="0"/>
-          </a:p>
-          <a:p>
-            <a:pPr marL="0" indent="0" algn="ctr">
-              <a:buNone/>
-            </a:pPr>
-            <a:r>
-              <a:rPr lang="en-US" i="1" dirty="0">
-                <a:solidFill>
-                  <a:srgbClr val="FFFFFF"/>
-                </a:solidFill>
-              </a:rPr>
-              <a:t>Ask it anything about the</a:t>
-            </a:r>
-            <a:endParaRPr lang="en-US" sz="2000" dirty="0"/>
-          </a:p>
-          <a:p>
-            <a:pPr marL="0" indent="0" algn="ctr">
-              <a:buNone/>
-            </a:pPr>
-            <a:r>
-              <a:rPr lang="en-US" i="1" dirty="0">
-                <a:solidFill>
-                  <a:srgbClr val="FFFFFF"/>
-                </a:solidFill>
-              </a:rPr>
-              <a:t>Pasco Municipal Code</a:t>
-            </a:r>
-            <a:endParaRPr lang="en-US" sz="2000" dirty="0"/>
+              <a:t>http://orionhs.us/pmc</a:t>
+            </a:r>
+            <a:endParaRPr lang="en-US" sz="1400" dirty="0"/>
           </a:p>
         </p:txBody>
       </p:sp>
     </p:spTree>
     <p:extLst>
       <p:ext uri="{BB962C8B-B14F-4D97-AF65-F5344CB8AC3E}">
-        <p14:creationId xmlns:p14="http://schemas.microsoft.com/office/powerpoint/2010/main" val="74350300"/>
+        <p14:creationId xmlns:p14="http://schemas.microsoft.com/office/powerpoint/2010/main" val="2126237490"/>
       </p:ext>
     </p:extLst>
   </p:cSld>
@@ -9555,7 +9890,7 @@
           <p:cNvPr id="3" name="Picture 2">
             <a:extLst>
               <a:ext uri="{FF2B5EF4-FFF2-40B4-BE49-F238E27FC236}">
-                <a16:creationId xmlns:a16="http://schemas.microsoft.com/office/drawing/2014/main" id="{D86B3686-7CC8-D947-DE35-AA2DDC945187}"/>
+                <a16:creationId xmlns:a16="http://schemas.microsoft.com/office/drawing/2014/main" id="{E6681A5B-1366-7A60-D880-BC5F7EDD18A4}"/>
               </a:ext>
             </a:extLst>
           </p:cNvPr>
@@ -9582,10 +9917,10 @@
       </p:pic>
       <p:sp>
         <p:nvSpPr>
-          <p:cNvPr id="6" name="Explosion: 14 Points 5">
+          <p:cNvPr id="4" name="Explosion: 14 Points 3">
             <a:extLst>
               <a:ext uri="{FF2B5EF4-FFF2-40B4-BE49-F238E27FC236}">
-                <a16:creationId xmlns:a16="http://schemas.microsoft.com/office/drawing/2014/main" id="{9CCB19FC-4344-E71D-FB1E-0463A5181C98}"/>
+                <a16:creationId xmlns:a16="http://schemas.microsoft.com/office/drawing/2014/main" id="{E5B1A58F-2DBD-C14E-7903-D05B45E16A2D}"/>
               </a:ext>
             </a:extLst>
           </p:cNvPr>
@@ -9594,8 +9929,8 @@
         </p:nvSpPr>
         <p:spPr>
           <a:xfrm>
-            <a:off x="7401138" y="2377809"/>
-            <a:ext cx="1742862" cy="1473430"/>
+            <a:off x="6874013" y="2194928"/>
+            <a:ext cx="2806015" cy="2156353"/>
           </a:xfrm>
           <a:prstGeom prst="irregularSeal2">
             <a:avLst/>
@@ -9624,6 +9959,115 @@
             <a:pPr algn="ctr"/>
             <a:r>
               <a:rPr lang="en-US" dirty="0"/>
+              <a:t>That’s Better!</a:t>
+            </a:r>
+          </a:p>
+        </p:txBody>
+      </p:sp>
+    </p:spTree>
+    <p:extLst>
+      <p:ext uri="{BB962C8B-B14F-4D97-AF65-F5344CB8AC3E}">
+        <p14:creationId xmlns:p14="http://schemas.microsoft.com/office/powerpoint/2010/main" val="1813628016"/>
+      </p:ext>
+    </p:extLst>
+  </p:cSld>
+  <p:clrMapOvr>
+    <a:masterClrMapping/>
+  </p:clrMapOvr>
+</p:sld>
+</file>
+
+<file path=ppt/slides/slide31.xml><?xml version="1.0" encoding="utf-8"?>
+<p:sld xmlns:a="http://schemas.openxmlformats.org/drawingml/2006/main" xmlns:r="http://schemas.openxmlformats.org/officeDocument/2006/relationships" xmlns:p="http://schemas.openxmlformats.org/presentationml/2006/main">
+  <p:cSld>
+    <p:spTree>
+      <p:nvGrpSpPr>
+        <p:cNvPr id="1" name=""/>
+        <p:cNvGrpSpPr/>
+        <p:nvPr/>
+      </p:nvGrpSpPr>
+      <p:grpSpPr>
+        <a:xfrm>
+          <a:off x="0" y="0"/>
+          <a:ext cx="0" cy="0"/>
+          <a:chOff x="0" y="0"/>
+          <a:chExt cx="0" cy="0"/>
+        </a:xfrm>
+      </p:grpSpPr>
+      <p:pic>
+        <p:nvPicPr>
+          <p:cNvPr id="3" name="Picture 2">
+            <a:extLst>
+              <a:ext uri="{FF2B5EF4-FFF2-40B4-BE49-F238E27FC236}">
+                <a16:creationId xmlns:a16="http://schemas.microsoft.com/office/drawing/2014/main" id="{D86B3686-7CC8-D947-DE35-AA2DDC945187}"/>
+              </a:ext>
+            </a:extLst>
+          </p:cNvPr>
+          <p:cNvPicPr>
+            <a:picLocks noChangeAspect="1"/>
+          </p:cNvPicPr>
+          <p:nvPr/>
+        </p:nvPicPr>
+        <p:blipFill>
+          <a:blip r:embed="rId2"/>
+          <a:stretch>
+            <a:fillRect/>
+          </a:stretch>
+        </p:blipFill>
+        <p:spPr>
+          <a:xfrm>
+            <a:off x="0" y="857250"/>
+            <a:ext cx="9144000" cy="5143500"/>
+          </a:xfrm>
+          <a:prstGeom prst="rect">
+            <a:avLst/>
+          </a:prstGeom>
+        </p:spPr>
+      </p:pic>
+      <p:sp>
+        <p:nvSpPr>
+          <p:cNvPr id="6" name="Explosion: 14 Points 5">
+            <a:extLst>
+              <a:ext uri="{FF2B5EF4-FFF2-40B4-BE49-F238E27FC236}">
+                <a16:creationId xmlns:a16="http://schemas.microsoft.com/office/drawing/2014/main" id="{9CCB19FC-4344-E71D-FB1E-0463A5181C98}"/>
+              </a:ext>
+            </a:extLst>
+          </p:cNvPr>
+          <p:cNvSpPr/>
+          <p:nvPr/>
+        </p:nvSpPr>
+        <p:spPr>
+          <a:xfrm>
+            <a:off x="7401138" y="2377809"/>
+            <a:ext cx="1742862" cy="1473430"/>
+          </a:xfrm>
+          <a:prstGeom prst="irregularSeal2">
+            <a:avLst/>
+          </a:prstGeom>
+        </p:spPr>
+        <p:style>
+          <a:lnRef idx="2">
+            <a:schemeClr val="accent1">
+              <a:shade val="15000"/>
+            </a:schemeClr>
+          </a:lnRef>
+          <a:fillRef idx="1">
+            <a:schemeClr val="accent1"/>
+          </a:fillRef>
+          <a:effectRef idx="0">
+            <a:schemeClr val="accent1"/>
+          </a:effectRef>
+          <a:fontRef idx="minor">
+            <a:schemeClr val="lt1"/>
+          </a:fontRef>
+        </p:style>
+        <p:txBody>
+          <a:bodyPr rtlCol="0" anchor="ctr"/>
+          <a:lstStyle/>
+          <a:p>
+            <a:pPr algn="ctr"/>
+            <a:r>
+              <a:rPr lang="en-US" dirty="0"/>
               <a:t>Ruh-Roh!</a:t>
             </a:r>
           </a:p>
@@ -9642,7 +10086,7 @@
 </p:sld>
 </file>
 
-<file path=ppt/slides/slide31.xml><?xml version="1.0" encoding="utf-8"?>
+<file path=ppt/slides/slide32.xml><?xml version="1.0" encoding="utf-8"?>
 <p:sld xmlns:a="http://schemas.openxmlformats.org/drawingml/2006/main" xmlns:r="http://schemas.openxmlformats.org/officeDocument/2006/relationships" xmlns:p="http://schemas.openxmlformats.org/presentationml/2006/main">
   <p:cSld>
     <p:bg>
@@ -9924,77 +10368,6 @@
     <p:extLst>
       <p:ext uri="{BB962C8B-B14F-4D97-AF65-F5344CB8AC3E}">
         <p14:creationId xmlns:p14="http://schemas.microsoft.com/office/powerpoint/2010/main" val="1365329884"/>
-      </p:ext>
-    </p:extLst>
-  </p:cSld>
-  <p:clrMapOvr>
-    <a:masterClrMapping/>
-  </p:clrMapOvr>
-</p:sld>
-</file>
-
-<file path=ppt/slides/slide32.xml><?xml version="1.0" encoding="utf-8"?>
-<p:sld xmlns:a="http://schemas.openxmlformats.org/drawingml/2006/main" xmlns:r="http://schemas.openxmlformats.org/officeDocument/2006/relationships" xmlns:p="http://schemas.openxmlformats.org/presentationml/2006/main">
-  <p:cSld>
-    <p:bg>
-      <p:bgPr>
-        <a:solidFill>
-          <a:schemeClr val="bg1">
-            <a:lumMod val="65000"/>
-            <a:lumOff val="35000"/>
-          </a:schemeClr>
-        </a:solidFill>
-        <a:effectLst/>
-      </p:bgPr>
-    </p:bg>
-    <p:spTree>
-      <p:nvGrpSpPr>
-        <p:cNvPr id="1" name=""/>
-        <p:cNvGrpSpPr/>
-        <p:nvPr/>
-      </p:nvGrpSpPr>
-      <p:grpSpPr>
-        <a:xfrm>
-          <a:off x="0" y="0"/>
-          <a:ext cx="0" cy="0"/>
-          <a:chOff x="0" y="0"/>
-          <a:chExt cx="0" cy="0"/>
-        </a:xfrm>
-      </p:grpSpPr>
-      <p:pic>
-        <p:nvPicPr>
-          <p:cNvPr id="3" name="Picture 2">
-            <a:extLst>
-              <a:ext uri="{FF2B5EF4-FFF2-40B4-BE49-F238E27FC236}">
-                <a16:creationId xmlns:a16="http://schemas.microsoft.com/office/drawing/2014/main" id="{006E788D-8935-99EE-B717-9828DB194E7F}"/>
-              </a:ext>
-            </a:extLst>
-          </p:cNvPr>
-          <p:cNvPicPr>
-            <a:picLocks noChangeAspect="1"/>
-          </p:cNvPicPr>
-          <p:nvPr/>
-        </p:nvPicPr>
-        <p:blipFill>
-          <a:blip r:embed="rId2"/>
-          <a:stretch>
-            <a:fillRect/>
-          </a:stretch>
-        </p:blipFill>
-        <p:spPr>
-          <a:xfrm>
-            <a:off x="1247162" y="643467"/>
-            <a:ext cx="6649674" cy="5571066"/>
-          </a:xfrm>
-          <a:prstGeom prst="rect">
-            <a:avLst/>
-          </a:prstGeom>
-        </p:spPr>
-      </p:pic>
-    </p:spTree>
-    <p:extLst>
-      <p:ext uri="{BB962C8B-B14F-4D97-AF65-F5344CB8AC3E}">
-        <p14:creationId xmlns:p14="http://schemas.microsoft.com/office/powerpoint/2010/main" val="3101521944"/>
       </p:ext>
     </p:extLst>
   </p:cSld>
@@ -10037,6 +10410,77 @@
           <p:cNvPr id="3" name="Picture 2">
             <a:extLst>
               <a:ext uri="{FF2B5EF4-FFF2-40B4-BE49-F238E27FC236}">
+                <a16:creationId xmlns:a16="http://schemas.microsoft.com/office/drawing/2014/main" id="{006E788D-8935-99EE-B717-9828DB194E7F}"/>
+              </a:ext>
+            </a:extLst>
+          </p:cNvPr>
+          <p:cNvPicPr>
+            <a:picLocks noChangeAspect="1"/>
+          </p:cNvPicPr>
+          <p:nvPr/>
+        </p:nvPicPr>
+        <p:blipFill>
+          <a:blip r:embed="rId2"/>
+          <a:stretch>
+            <a:fillRect/>
+          </a:stretch>
+        </p:blipFill>
+        <p:spPr>
+          <a:xfrm>
+            <a:off x="1247162" y="643467"/>
+            <a:ext cx="6649674" cy="5571066"/>
+          </a:xfrm>
+          <a:prstGeom prst="rect">
+            <a:avLst/>
+          </a:prstGeom>
+        </p:spPr>
+      </p:pic>
+    </p:spTree>
+    <p:extLst>
+      <p:ext uri="{BB962C8B-B14F-4D97-AF65-F5344CB8AC3E}">
+        <p14:creationId xmlns:p14="http://schemas.microsoft.com/office/powerpoint/2010/main" val="3101521944"/>
+      </p:ext>
+    </p:extLst>
+  </p:cSld>
+  <p:clrMapOvr>
+    <a:masterClrMapping/>
+  </p:clrMapOvr>
+</p:sld>
+</file>
+
+<file path=ppt/slides/slide34.xml><?xml version="1.0" encoding="utf-8"?>
+<p:sld xmlns:a="http://schemas.openxmlformats.org/drawingml/2006/main" xmlns:r="http://schemas.openxmlformats.org/officeDocument/2006/relationships" xmlns:p="http://schemas.openxmlformats.org/presentationml/2006/main">
+  <p:cSld>
+    <p:bg>
+      <p:bgPr>
+        <a:solidFill>
+          <a:schemeClr val="bg1">
+            <a:lumMod val="65000"/>
+            <a:lumOff val="35000"/>
+          </a:schemeClr>
+        </a:solidFill>
+        <a:effectLst/>
+      </p:bgPr>
+    </p:bg>
+    <p:spTree>
+      <p:nvGrpSpPr>
+        <p:cNvPr id="1" name=""/>
+        <p:cNvGrpSpPr/>
+        <p:nvPr/>
+      </p:nvGrpSpPr>
+      <p:grpSpPr>
+        <a:xfrm>
+          <a:off x="0" y="0"/>
+          <a:ext cx="0" cy="0"/>
+          <a:chOff x="0" y="0"/>
+          <a:chExt cx="0" cy="0"/>
+        </a:xfrm>
+      </p:grpSpPr>
+      <p:pic>
+        <p:nvPicPr>
+          <p:cNvPr id="3" name="Picture 2">
+            <a:extLst>
+              <a:ext uri="{FF2B5EF4-FFF2-40B4-BE49-F238E27FC236}">
                 <a16:creationId xmlns:a16="http://schemas.microsoft.com/office/drawing/2014/main" id="{17A05E77-9C7D-2378-27E9-E780DDF61BC9}"/>
               </a:ext>
             </a:extLst>
@@ -10075,7 +10519,7 @@
 </p:sld>
 </file>
 
-<file path=ppt/slides/slide34.xml><?xml version="1.0" encoding="utf-8"?>
+<file path=ppt/slides/slide35.xml><?xml version="1.0" encoding="utf-8"?>
 <p:sld xmlns:a="http://schemas.openxmlformats.org/drawingml/2006/main" xmlns:r="http://schemas.openxmlformats.org/officeDocument/2006/relationships" xmlns:p="http://schemas.openxmlformats.org/presentationml/2006/main">
   <p:cSld>
     <p:bg>
@@ -10244,8 +10688,8 @@
         </p:nvSpPr>
         <p:spPr>
           <a:xfrm>
-            <a:off x="1530946" y="2191522"/>
-            <a:ext cx="6082114" cy="1754326"/>
+            <a:off x="847011" y="2191522"/>
+            <a:ext cx="7449989" cy="2585323"/>
           </a:xfrm>
           <a:prstGeom prst="rect">
             <a:avLst/>
@@ -10294,7 +10738,27 @@
                   </a:schemeClr>
                 </a:solidFill>
               </a:rPr>
-              <a:t>“Engineering Coach”</a:t>
+              <a:t>“Design a Bus Stop</a:t>
+            </a:r>
+          </a:p>
+          <a:p>
+            <a:pPr algn="ctr"/>
+            <a:r>
+              <a:rPr lang="en-US" sz="5400" b="1" dirty="0">
+                <a:ln w="22225">
+                  <a:solidFill>
+                    <a:schemeClr val="accent2"/>
+                  </a:solidFill>
+                  <a:prstDash val="solid"/>
+                </a:ln>
+                <a:solidFill>
+                  <a:schemeClr val="accent2">
+                    <a:lumMod val="40000"/>
+                    <a:lumOff val="60000"/>
+                  </a:schemeClr>
+                </a:solidFill>
+              </a:rPr>
+              <a:t>Civil Engineering Project”</a:t>
             </a:r>
           </a:p>
         </p:txBody>
@@ -10312,9 +10776,310 @@
 </p:sld>
 </file>
 
-<file path=ppt/slides/slide35.xml><?xml version="1.0" encoding="utf-8"?>
+<file path=ppt/slides/slide36.xml><?xml version="1.0" encoding="utf-8"?>
 <p:sld xmlns:a="http://schemas.openxmlformats.org/drawingml/2006/main" xmlns:r="http://schemas.openxmlformats.org/officeDocument/2006/relationships" xmlns:p="http://schemas.openxmlformats.org/presentationml/2006/main">
   <p:cSld>
+    <p:bg>
+      <p:bgPr>
+        <a:solidFill>
+          <a:schemeClr val="accent5">
+            <a:lumMod val="60000"/>
+            <a:lumOff val="40000"/>
+          </a:schemeClr>
+        </a:solidFill>
+        <a:effectLst/>
+      </p:bgPr>
+    </p:bg>
+    <p:spTree>
+      <p:nvGrpSpPr>
+        <p:cNvPr id="1" name=""/>
+        <p:cNvGrpSpPr/>
+        <p:nvPr/>
+      </p:nvGrpSpPr>
+      <p:grpSpPr>
+        <a:xfrm>
+          <a:off x="0" y="0"/>
+          <a:ext cx="0" cy="0"/>
+          <a:chOff x="0" y="0"/>
+          <a:chExt cx="0" cy="0"/>
+        </a:xfrm>
+      </p:grpSpPr>
+      <p:pic>
+        <p:nvPicPr>
+          <p:cNvPr id="3" name="Picture 2">
+            <a:extLst>
+              <a:ext uri="{FF2B5EF4-FFF2-40B4-BE49-F238E27FC236}">
+                <a16:creationId xmlns:a16="http://schemas.microsoft.com/office/drawing/2014/main" id="{E3B32BC7-20A6-82CF-A83E-E0606F8C7434}"/>
+              </a:ext>
+            </a:extLst>
+          </p:cNvPr>
+          <p:cNvPicPr>
+            <a:picLocks noChangeAspect="1"/>
+          </p:cNvPicPr>
+          <p:nvPr/>
+        </p:nvPicPr>
+        <p:blipFill>
+          <a:blip r:embed="rId2"/>
+          <a:stretch>
+            <a:fillRect/>
+          </a:stretch>
+        </p:blipFill>
+        <p:spPr>
+          <a:xfrm>
+            <a:off x="1374212" y="0"/>
+            <a:ext cx="6395575" cy="6858000"/>
+          </a:xfrm>
+          <a:prstGeom prst="rect">
+            <a:avLst/>
+          </a:prstGeom>
+        </p:spPr>
+      </p:pic>
+      <p:sp>
+        <p:nvSpPr>
+          <p:cNvPr id="4" name="Rectangle 3">
+            <a:extLst>
+              <a:ext uri="{FF2B5EF4-FFF2-40B4-BE49-F238E27FC236}">
+                <a16:creationId xmlns:a16="http://schemas.microsoft.com/office/drawing/2014/main" id="{E0F5B962-99CE-C1F8-3C68-865D092824F7}"/>
+              </a:ext>
+            </a:extLst>
+          </p:cNvPr>
+          <p:cNvSpPr/>
+          <p:nvPr/>
+        </p:nvSpPr>
+        <p:spPr>
+          <a:xfrm rot="16200000">
+            <a:off x="-769184" y="2674998"/>
+            <a:ext cx="2694520" cy="923330"/>
+          </a:xfrm>
+          <a:prstGeom prst="rect">
+            <a:avLst/>
+          </a:prstGeom>
+          <a:noFill/>
+        </p:spPr>
+        <p:txBody>
+          <a:bodyPr wrap="none" lIns="91440" tIns="45720" rIns="91440" bIns="45720">
+            <a:spAutoFit/>
+          </a:bodyPr>
+          <a:lstStyle/>
+          <a:p>
+            <a:pPr algn="ctr"/>
+            <a:r>
+              <a:rPr lang="en-US" sz="5400" b="1" dirty="0">
+                <a:ln w="22225">
+                  <a:solidFill>
+                    <a:schemeClr val="accent2"/>
+                  </a:solidFill>
+                  <a:prstDash val="solid"/>
+                </a:ln>
+                <a:solidFill>
+                  <a:schemeClr val="accent2">
+                    <a:lumMod val="40000"/>
+                    <a:lumOff val="60000"/>
+                  </a:schemeClr>
+                </a:solidFill>
+              </a:rPr>
+              <a:t>Proposal</a:t>
+            </a:r>
+          </a:p>
+        </p:txBody>
+      </p:sp>
+    </p:spTree>
+    <p:extLst>
+      <p:ext uri="{BB962C8B-B14F-4D97-AF65-F5344CB8AC3E}">
+        <p14:creationId xmlns:p14="http://schemas.microsoft.com/office/powerpoint/2010/main" val="414230944"/>
+      </p:ext>
+    </p:extLst>
+  </p:cSld>
+  <p:clrMapOvr>
+    <a:masterClrMapping/>
+  </p:clrMapOvr>
+</p:sld>
+</file>
+
+<file path=ppt/slides/slide37.xml><?xml version="1.0" encoding="utf-8"?>
+<p:sld xmlns:a="http://schemas.openxmlformats.org/drawingml/2006/main" xmlns:r="http://schemas.openxmlformats.org/officeDocument/2006/relationships" xmlns:p="http://schemas.openxmlformats.org/presentationml/2006/main">
+  <p:cSld>
+    <p:bg>
+      <p:bgPr>
+        <a:solidFill>
+          <a:schemeClr val="accent5">
+            <a:lumMod val="60000"/>
+            <a:lumOff val="40000"/>
+          </a:schemeClr>
+        </a:solidFill>
+        <a:effectLst/>
+      </p:bgPr>
+    </p:bg>
+    <p:spTree>
+      <p:nvGrpSpPr>
+        <p:cNvPr id="1" name=""/>
+        <p:cNvGrpSpPr/>
+        <p:nvPr/>
+      </p:nvGrpSpPr>
+      <p:grpSpPr>
+        <a:xfrm>
+          <a:off x="0" y="0"/>
+          <a:ext cx="0" cy="0"/>
+          <a:chOff x="0" y="0"/>
+          <a:chExt cx="0" cy="0"/>
+        </a:xfrm>
+      </p:grpSpPr>
+      <p:pic>
+        <p:nvPicPr>
+          <p:cNvPr id="3" name="Picture 2">
+            <a:extLst>
+              <a:ext uri="{FF2B5EF4-FFF2-40B4-BE49-F238E27FC236}">
+                <a16:creationId xmlns:a16="http://schemas.microsoft.com/office/drawing/2014/main" id="{716F0ADF-B594-E3AF-52B7-CB25AB473F32}"/>
+              </a:ext>
+            </a:extLst>
+          </p:cNvPr>
+          <p:cNvPicPr>
+            <a:picLocks noChangeAspect="1"/>
+          </p:cNvPicPr>
+          <p:nvPr/>
+        </p:nvPicPr>
+        <p:blipFill>
+          <a:blip r:embed="rId2"/>
+          <a:stretch>
+            <a:fillRect/>
+          </a:stretch>
+        </p:blipFill>
+        <p:spPr>
+          <a:xfrm>
+            <a:off x="0" y="857250"/>
+            <a:ext cx="9144000" cy="5143500"/>
+          </a:xfrm>
+          <a:prstGeom prst="rect">
+            <a:avLst/>
+          </a:prstGeom>
+        </p:spPr>
+      </p:pic>
+      <p:sp>
+        <p:nvSpPr>
+          <p:cNvPr id="4" name="Rectangle 3">
+            <a:extLst>
+              <a:ext uri="{FF2B5EF4-FFF2-40B4-BE49-F238E27FC236}">
+                <a16:creationId xmlns:a16="http://schemas.microsoft.com/office/drawing/2014/main" id="{F195936C-6A2A-1E2E-6CCB-3EA9A7F4C517}"/>
+              </a:ext>
+            </a:extLst>
+          </p:cNvPr>
+          <p:cNvSpPr/>
+          <p:nvPr/>
+        </p:nvSpPr>
+        <p:spPr>
+          <a:xfrm>
+            <a:off x="-37706" y="1902569"/>
+            <a:ext cx="5634876" cy="1754326"/>
+          </a:xfrm>
+          <a:prstGeom prst="rect">
+            <a:avLst/>
+          </a:prstGeom>
+          <a:noFill/>
+        </p:spPr>
+        <p:txBody>
+          <a:bodyPr wrap="none" lIns="91440" tIns="45720" rIns="91440" bIns="45720">
+            <a:spAutoFit/>
+          </a:bodyPr>
+          <a:lstStyle/>
+          <a:p>
+            <a:pPr algn="ctr"/>
+            <a:r>
+              <a:rPr lang="en-US" sz="5400" b="1" dirty="0">
+                <a:ln w="22225">
+                  <a:solidFill>
+                    <a:schemeClr val="accent2"/>
+                  </a:solidFill>
+                  <a:prstDash val="solid"/>
+                </a:ln>
+                <a:solidFill>
+                  <a:schemeClr val="accent2">
+                    <a:lumMod val="40000"/>
+                    <a:lumOff val="60000"/>
+                  </a:schemeClr>
+                </a:solidFill>
+              </a:rPr>
+              <a:t>AI-Enhanced</a:t>
+            </a:r>
+          </a:p>
+          <a:p>
+            <a:pPr algn="ctr"/>
+            <a:r>
+              <a:rPr lang="en-US" sz="5400" b="1" dirty="0">
+                <a:ln w="22225">
+                  <a:solidFill>
+                    <a:schemeClr val="accent2"/>
+                  </a:solidFill>
+                  <a:prstDash val="solid"/>
+                </a:ln>
+                <a:solidFill>
+                  <a:schemeClr val="accent2">
+                    <a:lumMod val="40000"/>
+                    <a:lumOff val="60000"/>
+                  </a:schemeClr>
+                </a:solidFill>
+              </a:rPr>
+              <a:t> Engineering Coach</a:t>
+            </a:r>
+          </a:p>
+        </p:txBody>
+      </p:sp>
+      <p:pic>
+        <p:nvPicPr>
+          <p:cNvPr id="6" name="Picture 5">
+            <a:extLst>
+              <a:ext uri="{FF2B5EF4-FFF2-40B4-BE49-F238E27FC236}">
+                <a16:creationId xmlns:a16="http://schemas.microsoft.com/office/drawing/2014/main" id="{3B782C5D-2761-773A-CE7F-029291E2D8CC}"/>
+              </a:ext>
+            </a:extLst>
+          </p:cNvPr>
+          <p:cNvPicPr>
+            <a:picLocks noChangeAspect="1"/>
+          </p:cNvPicPr>
+          <p:nvPr/>
+        </p:nvPicPr>
+        <p:blipFill>
+          <a:blip r:embed="rId3"/>
+          <a:stretch>
+            <a:fillRect/>
+          </a:stretch>
+        </p:blipFill>
+        <p:spPr>
+          <a:xfrm>
+            <a:off x="5559464" y="1721096"/>
+            <a:ext cx="3486637" cy="2619741"/>
+          </a:xfrm>
+          <a:prstGeom prst="rect">
+            <a:avLst/>
+          </a:prstGeom>
+        </p:spPr>
+      </p:pic>
+    </p:spTree>
+    <p:extLst>
+      <p:ext uri="{BB962C8B-B14F-4D97-AF65-F5344CB8AC3E}">
+        <p14:creationId xmlns:p14="http://schemas.microsoft.com/office/powerpoint/2010/main" val="118609472"/>
+      </p:ext>
+    </p:extLst>
+  </p:cSld>
+  <p:clrMapOvr>
+    <a:masterClrMapping/>
+  </p:clrMapOvr>
+</p:sld>
+</file>
+
+<file path=ppt/slides/slide38.xml><?xml version="1.0" encoding="utf-8"?>
+<p:sld xmlns:a="http://schemas.openxmlformats.org/drawingml/2006/main" xmlns:r="http://schemas.openxmlformats.org/officeDocument/2006/relationships" xmlns:p="http://schemas.openxmlformats.org/presentationml/2006/main">
+  <p:cSld>
+    <p:bg>
+      <p:bgPr>
+        <a:solidFill>
+          <a:schemeClr val="accent5">
+            <a:lumMod val="60000"/>
+            <a:lumOff val="40000"/>
+          </a:schemeClr>
+        </a:solidFill>
+        <a:effectLst/>
+      </p:bgPr>
+    </p:bg>
     <p:spTree>
       <p:nvGrpSpPr>
         <p:cNvPr id="1" name=""/>
@@ -10334,7 +11099,7 @@
           <p:cNvPr id="5" name="Picture 4">
             <a:extLst>
               <a:ext uri="{FF2B5EF4-FFF2-40B4-BE49-F238E27FC236}">
-                <a16:creationId xmlns:a16="http://schemas.microsoft.com/office/drawing/2014/main" id="{0EEA59B5-97E5-EE7E-12E3-45516910CCE4}"/>
+                <a16:creationId xmlns:a16="http://schemas.microsoft.com/office/drawing/2014/main" id="{FC29D759-F709-7CEA-4E2C-8D89C44A2CCC}"/>
               </a:ext>
             </a:extLst>
           </p:cNvPr>
@@ -10362,7 +11127,7 @@
     </p:spTree>
     <p:extLst>
       <p:ext uri="{BB962C8B-B14F-4D97-AF65-F5344CB8AC3E}">
-        <p14:creationId xmlns:p14="http://schemas.microsoft.com/office/powerpoint/2010/main" val="3703964326"/>
+        <p14:creationId xmlns:p14="http://schemas.microsoft.com/office/powerpoint/2010/main" val="1188094803"/>
       </p:ext>
     </p:extLst>
   </p:cSld>
@@ -10373,6 +11138,452 @@
 </file>
 
 <file path=ppt/slides/slide4.xml><?xml version="1.0" encoding="utf-8"?>
+<p:sld xmlns:a="http://schemas.openxmlformats.org/drawingml/2006/main" xmlns:r="http://schemas.openxmlformats.org/officeDocument/2006/relationships" xmlns:p="http://schemas.openxmlformats.org/presentationml/2006/main">
+  <p:cSld>
+    <p:bg>
+      <p:bgPr>
+        <a:solidFill>
+          <a:srgbClr val="F4F6F9"/>
+        </a:solidFill>
+        <a:effectLst/>
+      </p:bgPr>
+    </p:bg>
+    <p:spTree>
+      <p:nvGrpSpPr>
+        <p:cNvPr id="1" name="">
+          <a:extLst>
+            <a:ext uri="{FF2B5EF4-FFF2-40B4-BE49-F238E27FC236}">
+              <a16:creationId xmlns:a16="http://schemas.microsoft.com/office/drawing/2014/main" id="{DE416E4F-F7B0-3365-4F34-930357A6432D}"/>
+            </a:ext>
+          </a:extLst>
+        </p:cNvPr>
+        <p:cNvGrpSpPr/>
+        <p:nvPr/>
+      </p:nvGrpSpPr>
+      <p:grpSpPr>
+        <a:xfrm>
+          <a:off x="0" y="0"/>
+          <a:ext cx="0" cy="0"/>
+          <a:chOff x="0" y="0"/>
+          <a:chExt cx="0" cy="0"/>
+        </a:xfrm>
+      </p:grpSpPr>
+      <p:sp>
+        <p:nvSpPr>
+          <p:cNvPr id="2" name="Shape 0">
+            <a:extLst>
+              <a:ext uri="{FF2B5EF4-FFF2-40B4-BE49-F238E27FC236}">
+                <a16:creationId xmlns:a16="http://schemas.microsoft.com/office/drawing/2014/main" id="{3EFD1AD2-8817-6B00-55AE-AFB110166E60}"/>
+              </a:ext>
+            </a:extLst>
+          </p:cNvPr>
+          <p:cNvSpPr/>
+          <p:nvPr/>
+        </p:nvSpPr>
+        <p:spPr>
+          <a:xfrm>
+            <a:off x="0" y="0"/>
+            <a:ext cx="9144000" cy="1005840"/>
+          </a:xfrm>
+          <a:prstGeom prst="rect">
+            <a:avLst/>
+          </a:prstGeom>
+          <a:solidFill>
+            <a:srgbClr val="1E3A5F"/>
+          </a:solidFill>
+          <a:ln w="12700">
+            <a:solidFill>
+              <a:srgbClr val="1E3A5F"/>
+            </a:solidFill>
+            <a:prstDash val="solid"/>
+          </a:ln>
+        </p:spPr>
+        <p:txBody>
+          <a:bodyPr/>
+          <a:lstStyle/>
+          <a:p>
+            <a:endParaRPr lang="en-US"/>
+          </a:p>
+        </p:txBody>
+      </p:sp>
+      <p:sp>
+        <p:nvSpPr>
+          <p:cNvPr id="3" name="Text 1">
+            <a:extLst>
+              <a:ext uri="{FF2B5EF4-FFF2-40B4-BE49-F238E27FC236}">
+                <a16:creationId xmlns:a16="http://schemas.microsoft.com/office/drawing/2014/main" id="{A11293A5-D60A-A77C-74A6-35587A7D3634}"/>
+              </a:ext>
+            </a:extLst>
+          </p:cNvPr>
+          <p:cNvSpPr/>
+          <p:nvPr/>
+        </p:nvSpPr>
+        <p:spPr>
+          <a:xfrm>
+            <a:off x="320040" y="0"/>
+            <a:ext cx="8686800" cy="1005840"/>
+          </a:xfrm>
+          <a:prstGeom prst="rect">
+            <a:avLst/>
+          </a:prstGeom>
+          <a:noFill/>
+          <a:ln/>
+        </p:spPr>
+        <p:txBody>
+          <a:bodyPr wrap="square" lIns="0" tIns="0" rIns="0" bIns="0" rtlCol="0" anchor="ctr"/>
+          <a:lstStyle/>
+          <a:p>
+            <a:pPr marL="0" indent="0" algn="l">
+              <a:buNone/>
+            </a:pPr>
+            <a:r>
+              <a:rPr lang="en-US" sz="2800" b="1" dirty="0">
+                <a:solidFill>
+                  <a:srgbClr val="FFFFFF"/>
+                </a:solidFill>
+                <a:latin typeface="Calibri" pitchFamily="34" charset="0"/>
+                <a:ea typeface="Calibri" pitchFamily="34" charset="-122"/>
+                <a:cs typeface="Calibri" pitchFamily="34" charset="-120"/>
+              </a:rPr>
+              <a:t>Which Tool is Which? (More Versions as of 4/8/2026)</a:t>
+            </a:r>
+            <a:endParaRPr lang="en-US" sz="2800" dirty="0"/>
+          </a:p>
+        </p:txBody>
+      </p:sp>
+      <p:sp>
+        <p:nvSpPr>
+          <p:cNvPr id="4" name="Shape 2">
+            <a:extLst>
+              <a:ext uri="{FF2B5EF4-FFF2-40B4-BE49-F238E27FC236}">
+                <a16:creationId xmlns:a16="http://schemas.microsoft.com/office/drawing/2014/main" id="{36433EB1-274F-3BCD-554C-A62C79EEEA11}"/>
+              </a:ext>
+            </a:extLst>
+          </p:cNvPr>
+          <p:cNvSpPr/>
+          <p:nvPr/>
+        </p:nvSpPr>
+        <p:spPr>
+          <a:xfrm>
+            <a:off x="0" y="1005840"/>
+            <a:ext cx="73152" cy="5852160"/>
+          </a:xfrm>
+          <a:prstGeom prst="rect">
+            <a:avLst/>
+          </a:prstGeom>
+          <a:solidFill>
+            <a:srgbClr val="C9A84C"/>
+          </a:solidFill>
+          <a:ln w="12700">
+            <a:solidFill>
+              <a:srgbClr val="C9A84C"/>
+            </a:solidFill>
+            <a:prstDash val="solid"/>
+          </a:ln>
+        </p:spPr>
+        <p:txBody>
+          <a:bodyPr/>
+          <a:lstStyle/>
+          <a:p>
+            <a:endParaRPr lang="en-US"/>
+          </a:p>
+        </p:txBody>
+      </p:sp>
+      <p:sp>
+        <p:nvSpPr>
+          <p:cNvPr id="5" name="Text 3">
+            <a:extLst>
+              <a:ext uri="{FF2B5EF4-FFF2-40B4-BE49-F238E27FC236}">
+                <a16:creationId xmlns:a16="http://schemas.microsoft.com/office/drawing/2014/main" id="{71CC9ECC-451D-C085-4BF1-0C4C3E5D652F}"/>
+              </a:ext>
+            </a:extLst>
+          </p:cNvPr>
+          <p:cNvSpPr/>
+          <p:nvPr/>
+        </p:nvSpPr>
+        <p:spPr>
+          <a:xfrm>
+            <a:off x="320040" y="1234440"/>
+            <a:ext cx="4572000" cy="5212080"/>
+          </a:xfrm>
+          <a:prstGeom prst="rect">
+            <a:avLst/>
+          </a:prstGeom>
+          <a:noFill/>
+          <a:ln/>
+        </p:spPr>
+        <p:txBody>
+          <a:bodyPr wrap="square" rtlCol="0" anchor="t"/>
+          <a:lstStyle/>
+          <a:p>
+            <a:pPr>
+              <a:spcAft>
+                <a:spcPts val="700"/>
+              </a:spcAft>
+            </a:pPr>
+            <a:r>
+              <a:rPr lang="en-US" sz="3200" dirty="0">
+                <a:solidFill>
+                  <a:srgbClr val="1E3A5F"/>
+                </a:solidFill>
+                <a:latin typeface="Calibri Light" pitchFamily="34" charset="0"/>
+                <a:ea typeface="Calibri Light" pitchFamily="34" charset="-122"/>
+                <a:cs typeface="Calibri Light" pitchFamily="34" charset="-120"/>
+              </a:rPr>
+              <a:t>pmc1 is Gemini-based.</a:t>
+            </a:r>
+          </a:p>
+          <a:p>
+            <a:pPr>
+              <a:spcAft>
+                <a:spcPts val="700"/>
+              </a:spcAft>
+            </a:pPr>
+            <a:r>
+              <a:rPr lang="en-US" sz="3200" dirty="0">
+                <a:solidFill>
+                  <a:srgbClr val="1E3A5F"/>
+                </a:solidFill>
+                <a:latin typeface="Calibri Light" pitchFamily="34" charset="0"/>
+                <a:ea typeface="Calibri Light" pitchFamily="34" charset="-122"/>
+                <a:cs typeface="Calibri Light" pitchFamily="34" charset="-120"/>
+              </a:rPr>
+              <a:t>pmc2 is Claude-based.</a:t>
+            </a:r>
+          </a:p>
+          <a:p>
+            <a:pPr>
+              <a:spcAft>
+                <a:spcPts val="700"/>
+              </a:spcAft>
+            </a:pPr>
+            <a:r>
+              <a:rPr lang="en-US" sz="3200" dirty="0">
+                <a:solidFill>
+                  <a:srgbClr val="1E3A5F"/>
+                </a:solidFill>
+                <a:latin typeface="Calibri Light" pitchFamily="34" charset="0"/>
+                <a:ea typeface="Calibri Light" pitchFamily="34" charset="-122"/>
+                <a:cs typeface="Calibri Light" pitchFamily="34" charset="-120"/>
+              </a:rPr>
+              <a:t>pmc3 is ChatGPT-based.</a:t>
+            </a:r>
+          </a:p>
+          <a:p>
+            <a:pPr>
+              <a:spcAft>
+                <a:spcPts val="700"/>
+              </a:spcAft>
+            </a:pPr>
+            <a:endParaRPr lang="en-US" sz="3200" dirty="0">
+              <a:solidFill>
+                <a:srgbClr val="1E3A5F"/>
+              </a:solidFill>
+              <a:latin typeface="Calibri Light" pitchFamily="34" charset="0"/>
+              <a:ea typeface="Calibri Light" pitchFamily="34" charset="-122"/>
+              <a:cs typeface="Calibri Light" pitchFamily="34" charset="-120"/>
+            </a:endParaRPr>
+          </a:p>
+          <a:p>
+            <a:pPr>
+              <a:spcAft>
+                <a:spcPts val="700"/>
+              </a:spcAft>
+            </a:pPr>
+            <a:endParaRPr lang="en-US" sz="3200" dirty="0"/>
+          </a:p>
+        </p:txBody>
+      </p:sp>
+      <p:sp>
+        <p:nvSpPr>
+          <p:cNvPr id="6" name="Shape 4">
+            <a:extLst>
+              <a:ext uri="{FF2B5EF4-FFF2-40B4-BE49-F238E27FC236}">
+                <a16:creationId xmlns:a16="http://schemas.microsoft.com/office/drawing/2014/main" id="{D1EB98EE-CC60-40BE-D2C1-40334C8C182A}"/>
+              </a:ext>
+            </a:extLst>
+          </p:cNvPr>
+          <p:cNvSpPr/>
+          <p:nvPr/>
+        </p:nvSpPr>
+        <p:spPr>
+          <a:xfrm>
+            <a:off x="5212080" y="1828800"/>
+            <a:ext cx="3657600" cy="3200400"/>
+          </a:xfrm>
+          <a:prstGeom prst="rect">
+            <a:avLst/>
+          </a:prstGeom>
+          <a:solidFill>
+            <a:srgbClr val="1E3A5F"/>
+          </a:solidFill>
+          <a:ln w="31750">
+            <a:solidFill>
+              <a:srgbClr val="C9A84C"/>
+            </a:solidFill>
+            <a:prstDash val="solid"/>
+          </a:ln>
+        </p:spPr>
+        <p:txBody>
+          <a:bodyPr/>
+          <a:lstStyle/>
+          <a:p>
+            <a:endParaRPr lang="en-US"/>
+          </a:p>
+        </p:txBody>
+      </p:sp>
+      <p:sp>
+        <p:nvSpPr>
+          <p:cNvPr id="7" name="Text 5">
+            <a:extLst>
+              <a:ext uri="{FF2B5EF4-FFF2-40B4-BE49-F238E27FC236}">
+                <a16:creationId xmlns:a16="http://schemas.microsoft.com/office/drawing/2014/main" id="{660CD30E-BC28-4894-1F4F-0546BAB9FEDA}"/>
+              </a:ext>
+            </a:extLst>
+          </p:cNvPr>
+          <p:cNvSpPr/>
+          <p:nvPr/>
+        </p:nvSpPr>
+        <p:spPr>
+          <a:xfrm>
+            <a:off x="5212080" y="1828800"/>
+            <a:ext cx="3657600" cy="3200400"/>
+          </a:xfrm>
+          <a:prstGeom prst="rect">
+            <a:avLst/>
+          </a:prstGeom>
+          <a:noFill/>
+          <a:ln/>
+        </p:spPr>
+        <p:txBody>
+          <a:bodyPr wrap="square" rtlCol="0" anchor="ctr"/>
+          <a:lstStyle/>
+          <a:p>
+            <a:pPr marL="0" indent="0" algn="ctr">
+              <a:buNone/>
+            </a:pPr>
+            <a:r>
+              <a:rPr lang="en-US" sz="2000" i="1" dirty="0">
+                <a:solidFill>
+                  <a:srgbClr val="CADCFC"/>
+                </a:solidFill>
+              </a:rPr>
+              <a:t>Try it live:</a:t>
+            </a:r>
+            <a:endParaRPr lang="en-US" sz="2000" dirty="0"/>
+          </a:p>
+          <a:p>
+            <a:pPr marL="0" indent="0" algn="ctr">
+              <a:buNone/>
+            </a:pPr>
+            <a:r>
+              <a:rPr lang="en-US" sz="900" dirty="0">
+                <a:solidFill>
+                  <a:srgbClr val="000000"/>
+                </a:solidFill>
+              </a:rPr>
+              <a:t>
+</a:t>
+            </a:r>
+            <a:endParaRPr lang="en-US" sz="2000" dirty="0"/>
+          </a:p>
+          <a:p>
+            <a:pPr algn="ctr"/>
+            <a:r>
+              <a:rPr lang="en-US" sz="2800" b="1" dirty="0">
+                <a:solidFill>
+                  <a:srgbClr val="C9A84C"/>
+                </a:solidFill>
+              </a:rPr>
+              <a:t>https://psd1.net/pmc1</a:t>
+            </a:r>
+            <a:endParaRPr lang="en-US" sz="2000" dirty="0"/>
+          </a:p>
+          <a:p>
+            <a:pPr algn="ctr"/>
+            <a:r>
+              <a:rPr lang="en-US" sz="2800" b="1" dirty="0">
+                <a:solidFill>
+                  <a:srgbClr val="C9A84C"/>
+                </a:solidFill>
+              </a:rPr>
+              <a:t>https://psd1.net/pmc2</a:t>
+            </a:r>
+            <a:endParaRPr lang="en-US" sz="2000" dirty="0"/>
+          </a:p>
+          <a:p>
+            <a:pPr marL="0" indent="0" algn="ctr">
+              <a:buNone/>
+            </a:pPr>
+            <a:r>
+              <a:rPr lang="en-US" sz="2800" b="1" dirty="0">
+                <a:solidFill>
+                  <a:srgbClr val="C9A84C"/>
+                </a:solidFill>
+              </a:rPr>
+              <a:t>https://psd1.net/pmc3 </a:t>
+            </a:r>
+            <a:endParaRPr lang="en-US" sz="2000" dirty="0"/>
+          </a:p>
+          <a:p>
+            <a:pPr marL="0" indent="0" algn="ctr">
+              <a:buNone/>
+            </a:pPr>
+            <a:r>
+              <a:rPr lang="en-US" sz="900" dirty="0">
+                <a:solidFill>
+                  <a:srgbClr val="000000"/>
+                </a:solidFill>
+              </a:rPr>
+              <a:t>
+</a:t>
+            </a:r>
+            <a:endParaRPr lang="en-US" sz="2000" dirty="0"/>
+          </a:p>
+          <a:p>
+            <a:pPr marL="0" indent="0" algn="ctr">
+              <a:buNone/>
+            </a:pPr>
+            <a:r>
+              <a:rPr lang="en-US" i="1" dirty="0">
+                <a:solidFill>
+                  <a:srgbClr val="FFFFFF"/>
+                </a:solidFill>
+              </a:rPr>
+              <a:t>Ask it anything about the</a:t>
+            </a:r>
+            <a:endParaRPr lang="en-US" sz="2000" dirty="0"/>
+          </a:p>
+          <a:p>
+            <a:pPr marL="0" indent="0" algn="ctr">
+              <a:buNone/>
+            </a:pPr>
+            <a:r>
+              <a:rPr lang="en-US" i="1" dirty="0">
+                <a:solidFill>
+                  <a:srgbClr val="FFFFFF"/>
+                </a:solidFill>
+              </a:rPr>
+              <a:t>Pasco Municipal Code</a:t>
+            </a:r>
+            <a:endParaRPr lang="en-US" sz="2000" dirty="0"/>
+          </a:p>
+        </p:txBody>
+      </p:sp>
+    </p:spTree>
+    <p:extLst>
+      <p:ext uri="{BB962C8B-B14F-4D97-AF65-F5344CB8AC3E}">
+        <p14:creationId xmlns:p14="http://schemas.microsoft.com/office/powerpoint/2010/main" val="74350300"/>
+      </p:ext>
+    </p:extLst>
+  </p:cSld>
+  <p:clrMapOvr>
+    <a:masterClrMapping/>
+  </p:clrMapOvr>
+</p:sld>
+</file>
+
+<file path=ppt/slides/slide5.xml><?xml version="1.0" encoding="utf-8"?>
 <p:sld xmlns:a="http://schemas.openxmlformats.org/drawingml/2006/main" xmlns:r="http://schemas.openxmlformats.org/officeDocument/2006/relationships" xmlns:p="http://schemas.openxmlformats.org/presentationml/2006/main">
   <p:cSld name="Slide 2">
     <p:bg>
@@ -10845,7 +12056,7 @@
 </p:sld>
 </file>
 
-<file path=ppt/slides/slide5.xml><?xml version="1.0" encoding="utf-8"?>
+<file path=ppt/slides/slide6.xml><?xml version="1.0" encoding="utf-8"?>
 <p:sld xmlns:a="http://schemas.openxmlformats.org/drawingml/2006/main" xmlns:r="http://schemas.openxmlformats.org/officeDocument/2006/relationships" xmlns:p="http://schemas.openxmlformats.org/presentationml/2006/main">
   <p:cSld name="Slide 3">
     <p:bg>
@@ -11257,7 +12468,7 @@
 </p:sld>
 </file>
 
-<file path=ppt/slides/slide6.xml><?xml version="1.0" encoding="utf-8"?>
+<file path=ppt/slides/slide7.xml><?xml version="1.0" encoding="utf-8"?>
 <p:sld xmlns:a="http://schemas.openxmlformats.org/drawingml/2006/main" xmlns:r="http://schemas.openxmlformats.org/officeDocument/2006/relationships" xmlns:p="http://schemas.openxmlformats.org/presentationml/2006/main">
   <p:cSld name="Slide 4">
     <p:bg>
@@ -11914,7 +13125,7 @@
 </p:sld>
 </file>
 
-<file path=ppt/slides/slide7.xml><?xml version="1.0" encoding="utf-8"?>
+<file path=ppt/slides/slide8.xml><?xml version="1.0" encoding="utf-8"?>
 <p:sld xmlns:a="http://schemas.openxmlformats.org/drawingml/2006/main" xmlns:r="http://schemas.openxmlformats.org/officeDocument/2006/relationships" xmlns:p="http://schemas.openxmlformats.org/presentationml/2006/main">
   <p:cSld name="Slide 5">
     <p:bg>
@@ -12930,7 +14141,7 @@
 </p:sld>
 </file>
 
-<file path=ppt/slides/slide8.xml><?xml version="1.0" encoding="utf-8"?>
+<file path=ppt/slides/slide9.xml><?xml version="1.0" encoding="utf-8"?>
 <p:sld xmlns:a="http://schemas.openxmlformats.org/drawingml/2006/main" xmlns:r="http://schemas.openxmlformats.org/officeDocument/2006/relationships" xmlns:p="http://schemas.openxmlformats.org/presentationml/2006/main">
   <p:cSld name="Slide 6">
     <p:bg>
@@ -13617,763 +14828,6 @@
               <a:t>Cache storage is the dominant cost: ~$9/day baseline. Recommended for city deployment: Flash model with implicit caching (no storage fee) — estimated $50–100/month at typical staff usage.</a:t>
             </a:r>
             <a:endParaRPr lang="en-US" sz="1400" dirty="0"/>
-          </a:p>
-        </p:txBody>
-      </p:sp>
-    </p:spTree>
-  </p:cSld>
-  <p:clrMapOvr>
-    <a:masterClrMapping/>
-  </p:clrMapOvr>
-</p:sld>
-</file>
-
-<file path=ppt/slides/slide9.xml><?xml version="1.0" encoding="utf-8"?>
-<p:sld xmlns:a="http://schemas.openxmlformats.org/drawingml/2006/main" xmlns:r="http://schemas.openxmlformats.org/officeDocument/2006/relationships" xmlns:p="http://schemas.openxmlformats.org/presentationml/2006/main">
-  <p:cSld name="Slide 7">
-    <p:bg>
-      <p:bgPr>
-        <a:solidFill>
-          <a:srgbClr val="F4F6F9"/>
-        </a:solidFill>
-        <a:effectLst/>
-      </p:bgPr>
-    </p:bg>
-    <p:spTree>
-      <p:nvGrpSpPr>
-        <p:cNvPr id="1" name=""/>
-        <p:cNvGrpSpPr/>
-        <p:nvPr/>
-      </p:nvGrpSpPr>
-      <p:grpSpPr>
-        <a:xfrm>
-          <a:off x="0" y="0"/>
-          <a:ext cx="0" cy="0"/>
-          <a:chOff x="0" y="0"/>
-          <a:chExt cx="0" cy="0"/>
-        </a:xfrm>
-      </p:grpSpPr>
-      <p:sp>
-        <p:nvSpPr>
-          <p:cNvPr id="2" name="Shape 0"/>
-          <p:cNvSpPr/>
-          <p:nvPr/>
-        </p:nvSpPr>
-        <p:spPr>
-          <a:xfrm>
-            <a:off x="0" y="0"/>
-            <a:ext cx="9144000" cy="1005840"/>
-          </a:xfrm>
-          <a:prstGeom prst="rect">
-            <a:avLst/>
-          </a:prstGeom>
-          <a:solidFill>
-            <a:srgbClr val="1E3A5F"/>
-          </a:solidFill>
-          <a:ln w="12700">
-            <a:solidFill>
-              <a:srgbClr val="1E3A5F"/>
-            </a:solidFill>
-            <a:prstDash val="solid"/>
-          </a:ln>
-        </p:spPr>
-        <p:txBody>
-          <a:bodyPr/>
-          <a:lstStyle/>
-          <a:p>
-            <a:endParaRPr lang="en-US"/>
-          </a:p>
-        </p:txBody>
-      </p:sp>
-      <p:sp>
-        <p:nvSpPr>
-          <p:cNvPr id="3" name="Text 1"/>
-          <p:cNvSpPr/>
-          <p:nvPr/>
-        </p:nvSpPr>
-        <p:spPr>
-          <a:xfrm>
-            <a:off x="320040" y="0"/>
-            <a:ext cx="8686800" cy="1005840"/>
-          </a:xfrm>
-          <a:prstGeom prst="rect">
-            <a:avLst/>
-          </a:prstGeom>
-          <a:noFill/>
-          <a:ln/>
-        </p:spPr>
-        <p:txBody>
-          <a:bodyPr wrap="square" lIns="0" tIns="0" rIns="0" bIns="0" rtlCol="0" anchor="ctr"/>
-          <a:lstStyle/>
-          <a:p>
-            <a:pPr marL="0" indent="0" algn="l">
-              <a:buNone/>
-            </a:pPr>
-            <a:r>
-              <a:rPr lang="en-US" sz="2800" b="1" dirty="0">
-                <a:solidFill>
-                  <a:srgbClr val="FFFFFF"/>
-                </a:solidFill>
-                <a:latin typeface="Calibri" pitchFamily="34" charset="0"/>
-                <a:ea typeface="Calibri" pitchFamily="34" charset="-122"/>
-                <a:cs typeface="Calibri" pitchFamily="34" charset="-120"/>
-              </a:rPr>
-              <a:t>Replicating for Any City Department</a:t>
-            </a:r>
-            <a:endParaRPr lang="en-US" sz="2800" dirty="0"/>
-          </a:p>
-        </p:txBody>
-      </p:sp>
-      <p:sp>
-        <p:nvSpPr>
-          <p:cNvPr id="4" name="Shape 2"/>
-          <p:cNvSpPr/>
-          <p:nvPr/>
-        </p:nvSpPr>
-        <p:spPr>
-          <a:xfrm>
-            <a:off x="0" y="1005840"/>
-            <a:ext cx="73152" cy="5852160"/>
-          </a:xfrm>
-          <a:prstGeom prst="rect">
-            <a:avLst/>
-          </a:prstGeom>
-          <a:solidFill>
-            <a:srgbClr val="C9A84C"/>
-          </a:solidFill>
-          <a:ln w="12700">
-            <a:solidFill>
-              <a:srgbClr val="C9A84C"/>
-            </a:solidFill>
-            <a:prstDash val="solid"/>
-          </a:ln>
-        </p:spPr>
-        <p:txBody>
-          <a:bodyPr/>
-          <a:lstStyle/>
-          <a:p>
-            <a:endParaRPr lang="en-US"/>
-          </a:p>
-        </p:txBody>
-      </p:sp>
-      <p:sp>
-        <p:nvSpPr>
-          <p:cNvPr id="5" name="Shape 3"/>
-          <p:cNvSpPr/>
-          <p:nvPr/>
-        </p:nvSpPr>
-        <p:spPr>
-          <a:xfrm>
-            <a:off x="320040" y="1234440"/>
-            <a:ext cx="2651760" cy="1508760"/>
-          </a:xfrm>
-          <a:prstGeom prst="rect">
-            <a:avLst/>
-          </a:prstGeom>
-          <a:solidFill>
-            <a:srgbClr val="1E3A5F"/>
-          </a:solidFill>
-          <a:ln w="12700">
-            <a:solidFill>
-              <a:srgbClr val="C9A84C"/>
-            </a:solidFill>
-            <a:prstDash val="solid"/>
-          </a:ln>
-        </p:spPr>
-        <p:txBody>
-          <a:bodyPr/>
-          <a:lstStyle/>
-          <a:p>
-            <a:endParaRPr lang="en-US"/>
-          </a:p>
-        </p:txBody>
-      </p:sp>
-      <p:sp>
-        <p:nvSpPr>
-          <p:cNvPr id="6" name="Text 4"/>
-          <p:cNvSpPr/>
-          <p:nvPr/>
-        </p:nvSpPr>
-        <p:spPr>
-          <a:xfrm>
-            <a:off x="320040" y="1234440"/>
-            <a:ext cx="2651760" cy="1508760"/>
-          </a:xfrm>
-          <a:prstGeom prst="rect">
-            <a:avLst/>
-          </a:prstGeom>
-          <a:noFill/>
-          <a:ln/>
-        </p:spPr>
-        <p:txBody>
-          <a:bodyPr wrap="square" rtlCol="0" anchor="ctr"/>
-          <a:lstStyle/>
-          <a:p>
-            <a:pPr marL="0" indent="0" algn="ctr">
-              <a:buNone/>
-            </a:pPr>
-            <a:r>
-              <a:rPr lang="en-US" sz="1500" b="1" dirty="0">
-                <a:solidFill>
-                  <a:srgbClr val="FFFFFF"/>
-                </a:solidFill>
-              </a:rPr>
-              <a:t>Any Document</a:t>
-            </a:r>
-            <a:endParaRPr lang="en-US" sz="1500" dirty="0"/>
-          </a:p>
-          <a:p>
-            <a:pPr marL="0" indent="0" algn="ctr">
-              <a:buNone/>
-            </a:pPr>
-            <a:r>
-              <a:rPr lang="en-US" sz="400" dirty="0">
-                <a:solidFill>
-                  <a:srgbClr val="000000"/>
-                </a:solidFill>
-              </a:rPr>
-              <a:t>
-</a:t>
-            </a:r>
-            <a:endParaRPr lang="en-US" sz="1500" dirty="0"/>
-          </a:p>
-          <a:p>
-            <a:pPr marL="0" indent="0" algn="ctr">
-              <a:buNone/>
-            </a:pPr>
-            <a:r>
-              <a:rPr lang="en-US" sz="1200" dirty="0">
-                <a:solidFill>
-                  <a:srgbClr val="CADCFC"/>
-                </a:solidFill>
-              </a:rPr>
-              <a:t>Zoning, HR, Budgets, Permits</a:t>
-            </a:r>
-            <a:endParaRPr lang="en-US" sz="1500" dirty="0"/>
-          </a:p>
-        </p:txBody>
-      </p:sp>
-      <p:sp>
-        <p:nvSpPr>
-          <p:cNvPr id="7" name="Shape 5"/>
-          <p:cNvSpPr/>
-          <p:nvPr/>
-        </p:nvSpPr>
-        <p:spPr>
-          <a:xfrm>
-            <a:off x="3200400" y="1234440"/>
-            <a:ext cx="2651760" cy="1508760"/>
-          </a:xfrm>
-          <a:prstGeom prst="rect">
-            <a:avLst/>
-          </a:prstGeom>
-          <a:solidFill>
-            <a:srgbClr val="1E3A5F"/>
-          </a:solidFill>
-          <a:ln w="12700">
-            <a:solidFill>
-              <a:srgbClr val="C9A84C"/>
-            </a:solidFill>
-            <a:prstDash val="solid"/>
-          </a:ln>
-        </p:spPr>
-        <p:txBody>
-          <a:bodyPr/>
-          <a:lstStyle/>
-          <a:p>
-            <a:endParaRPr lang="en-US"/>
-          </a:p>
-        </p:txBody>
-      </p:sp>
-      <p:sp>
-        <p:nvSpPr>
-          <p:cNvPr id="8" name="Text 6"/>
-          <p:cNvSpPr/>
-          <p:nvPr/>
-        </p:nvSpPr>
-        <p:spPr>
-          <a:xfrm>
-            <a:off x="3200400" y="1234440"/>
-            <a:ext cx="2651760" cy="1508760"/>
-          </a:xfrm>
-          <a:prstGeom prst="rect">
-            <a:avLst/>
-          </a:prstGeom>
-          <a:noFill/>
-          <a:ln/>
-        </p:spPr>
-        <p:txBody>
-          <a:bodyPr wrap="square" rtlCol="0" anchor="ctr"/>
-          <a:lstStyle/>
-          <a:p>
-            <a:pPr marL="0" indent="0" algn="ctr">
-              <a:buNone/>
-            </a:pPr>
-            <a:r>
-              <a:rPr lang="en-US" sz="1500" b="1" dirty="0">
-                <a:solidFill>
-                  <a:srgbClr val="FFFFFF"/>
-                </a:solidFill>
-              </a:rPr>
-              <a:t>Own Folder</a:t>
-            </a:r>
-            <a:endParaRPr lang="en-US" sz="1500" dirty="0"/>
-          </a:p>
-          <a:p>
-            <a:pPr marL="0" indent="0" algn="ctr">
-              <a:buNone/>
-            </a:pPr>
-            <a:r>
-              <a:rPr lang="en-US" sz="400" dirty="0">
-                <a:solidFill>
-                  <a:srgbClr val="000000"/>
-                </a:solidFill>
-              </a:rPr>
-              <a:t>
-</a:t>
-            </a:r>
-            <a:endParaRPr lang="en-US" sz="1500" dirty="0"/>
-          </a:p>
-          <a:p>
-            <a:pPr marL="0" indent="0" algn="ctr">
-              <a:buNone/>
-            </a:pPr>
-            <a:r>
-              <a:rPr lang="en-US" sz="1200" dirty="0">
-                <a:solidFill>
-                  <a:srgbClr val="CADCFC"/>
-                </a:solidFill>
-              </a:rPr>
-              <a:t>Isolated deployment per dept</a:t>
-            </a:r>
-            <a:endParaRPr lang="en-US" sz="1500" dirty="0"/>
-          </a:p>
-        </p:txBody>
-      </p:sp>
-      <p:sp>
-        <p:nvSpPr>
-          <p:cNvPr id="9" name="Shape 7"/>
-          <p:cNvSpPr/>
-          <p:nvPr/>
-        </p:nvSpPr>
-        <p:spPr>
-          <a:xfrm>
-            <a:off x="6080760" y="1234440"/>
-            <a:ext cx="2651760" cy="1508760"/>
-          </a:xfrm>
-          <a:prstGeom prst="rect">
-            <a:avLst/>
-          </a:prstGeom>
-          <a:solidFill>
-            <a:srgbClr val="1E3A5F"/>
-          </a:solidFill>
-          <a:ln w="12700">
-            <a:solidFill>
-              <a:srgbClr val="C9A84C"/>
-            </a:solidFill>
-            <a:prstDash val="solid"/>
-          </a:ln>
-        </p:spPr>
-        <p:txBody>
-          <a:bodyPr/>
-          <a:lstStyle/>
-          <a:p>
-            <a:endParaRPr lang="en-US"/>
-          </a:p>
-        </p:txBody>
-      </p:sp>
-      <p:sp>
-        <p:nvSpPr>
-          <p:cNvPr id="10" name="Text 8"/>
-          <p:cNvSpPr/>
-          <p:nvPr/>
-        </p:nvSpPr>
-        <p:spPr>
-          <a:xfrm>
-            <a:off x="6080760" y="1234440"/>
-            <a:ext cx="2651760" cy="1508760"/>
-          </a:xfrm>
-          <a:prstGeom prst="rect">
-            <a:avLst/>
-          </a:prstGeom>
-          <a:noFill/>
-          <a:ln/>
-        </p:spPr>
-        <p:txBody>
-          <a:bodyPr wrap="square" rtlCol="0" anchor="ctr"/>
-          <a:lstStyle/>
-          <a:p>
-            <a:pPr marL="0" indent="0" algn="ctr">
-              <a:buNone/>
-            </a:pPr>
-            <a:r>
-              <a:rPr lang="en-US" sz="1500" b="1" dirty="0">
-                <a:solidFill>
-                  <a:srgbClr val="FFFFFF"/>
-                </a:solidFill>
-              </a:rPr>
-              <a:t>Custom System Prompt</a:t>
-            </a:r>
-            <a:endParaRPr lang="en-US" sz="1500" dirty="0"/>
-          </a:p>
-          <a:p>
-            <a:pPr marL="0" indent="0" algn="ctr">
-              <a:buNone/>
-            </a:pPr>
-            <a:r>
-              <a:rPr lang="en-US" sz="400" dirty="0">
-                <a:solidFill>
-                  <a:srgbClr val="000000"/>
-                </a:solidFill>
-              </a:rPr>
-              <a:t>
-</a:t>
-            </a:r>
-            <a:endParaRPr lang="en-US" sz="1500" dirty="0"/>
-          </a:p>
-          <a:p>
-            <a:pPr marL="0" indent="0" algn="ctr">
-              <a:buNone/>
-            </a:pPr>
-            <a:r>
-              <a:rPr lang="en-US" sz="1200" dirty="0">
-                <a:solidFill>
-                  <a:srgbClr val="CADCFC"/>
-                </a:solidFill>
-              </a:rPr>
-              <a:t>Defines AI expertise &amp; tone</a:t>
-            </a:r>
-            <a:endParaRPr lang="en-US" sz="1500" dirty="0"/>
-          </a:p>
-        </p:txBody>
-      </p:sp>
-      <p:sp>
-        <p:nvSpPr>
-          <p:cNvPr id="11" name="Shape 9"/>
-          <p:cNvSpPr/>
-          <p:nvPr/>
-        </p:nvSpPr>
-        <p:spPr>
-          <a:xfrm>
-            <a:off x="320040" y="2926080"/>
-            <a:ext cx="2651760" cy="1508760"/>
-          </a:xfrm>
-          <a:prstGeom prst="rect">
-            <a:avLst/>
-          </a:prstGeom>
-          <a:solidFill>
-            <a:srgbClr val="1E3A5F"/>
-          </a:solidFill>
-          <a:ln w="12700">
-            <a:solidFill>
-              <a:srgbClr val="C9A84C"/>
-            </a:solidFill>
-            <a:prstDash val="solid"/>
-          </a:ln>
-        </p:spPr>
-        <p:txBody>
-          <a:bodyPr/>
-          <a:lstStyle/>
-          <a:p>
-            <a:endParaRPr lang="en-US"/>
-          </a:p>
-        </p:txBody>
-      </p:sp>
-      <p:sp>
-        <p:nvSpPr>
-          <p:cNvPr id="12" name="Text 10"/>
-          <p:cNvSpPr/>
-          <p:nvPr/>
-        </p:nvSpPr>
-        <p:spPr>
-          <a:xfrm>
-            <a:off x="320040" y="2926080"/>
-            <a:ext cx="2651760" cy="1508760"/>
-          </a:xfrm>
-          <a:prstGeom prst="rect">
-            <a:avLst/>
-          </a:prstGeom>
-          <a:noFill/>
-          <a:ln/>
-        </p:spPr>
-        <p:txBody>
-          <a:bodyPr wrap="square" rtlCol="0" anchor="ctr"/>
-          <a:lstStyle/>
-          <a:p>
-            <a:pPr marL="0" indent="0" algn="ctr">
-              <a:buNone/>
-            </a:pPr>
-            <a:r>
-              <a:rPr lang="en-US" sz="1500" b="1" dirty="0">
-                <a:solidFill>
-                  <a:srgbClr val="FFFFFF"/>
-                </a:solidFill>
-              </a:rPr>
-              <a:t>2–4 Hours</a:t>
-            </a:r>
-            <a:endParaRPr lang="en-US" sz="1500" dirty="0"/>
-          </a:p>
-          <a:p>
-            <a:pPr marL="0" indent="0" algn="ctr">
-              <a:buNone/>
-            </a:pPr>
-            <a:r>
-              <a:rPr lang="en-US" sz="400" dirty="0">
-                <a:solidFill>
-                  <a:srgbClr val="000000"/>
-                </a:solidFill>
-              </a:rPr>
-              <a:t>
-</a:t>
-            </a:r>
-            <a:endParaRPr lang="en-US" sz="1500" dirty="0"/>
-          </a:p>
-          <a:p>
-            <a:pPr marL="0" indent="0" algn="ctr">
-              <a:buNone/>
-            </a:pPr>
-            <a:r>
-              <a:rPr lang="en-US" sz="1200" dirty="0">
-                <a:solidFill>
-                  <a:srgbClr val="CADCFC"/>
-                </a:solidFill>
-              </a:rPr>
-              <a:t>Estimated setup per department</a:t>
-            </a:r>
-            <a:endParaRPr lang="en-US" sz="1500" dirty="0"/>
-          </a:p>
-        </p:txBody>
-      </p:sp>
-      <p:sp>
-        <p:nvSpPr>
-          <p:cNvPr id="13" name="Shape 11"/>
-          <p:cNvSpPr/>
-          <p:nvPr/>
-        </p:nvSpPr>
-        <p:spPr>
-          <a:xfrm>
-            <a:off x="3200400" y="2926080"/>
-            <a:ext cx="2651760" cy="1508760"/>
-          </a:xfrm>
-          <a:prstGeom prst="rect">
-            <a:avLst/>
-          </a:prstGeom>
-          <a:solidFill>
-            <a:srgbClr val="1E3A5F"/>
-          </a:solidFill>
-          <a:ln w="12700">
-            <a:solidFill>
-              <a:srgbClr val="C9A84C"/>
-            </a:solidFill>
-            <a:prstDash val="solid"/>
-          </a:ln>
-        </p:spPr>
-        <p:txBody>
-          <a:bodyPr/>
-          <a:lstStyle/>
-          <a:p>
-            <a:endParaRPr lang="en-US"/>
-          </a:p>
-        </p:txBody>
-      </p:sp>
-      <p:sp>
-        <p:nvSpPr>
-          <p:cNvPr id="14" name="Text 12"/>
-          <p:cNvSpPr/>
-          <p:nvPr/>
-        </p:nvSpPr>
-        <p:spPr>
-          <a:xfrm>
-            <a:off x="3200400" y="2926080"/>
-            <a:ext cx="2651760" cy="1508760"/>
-          </a:xfrm>
-          <a:prstGeom prst="rect">
-            <a:avLst/>
-          </a:prstGeom>
-          <a:noFill/>
-          <a:ln/>
-        </p:spPr>
-        <p:txBody>
-          <a:bodyPr wrap="square" rtlCol="0" anchor="ctr"/>
-          <a:lstStyle/>
-          <a:p>
-            <a:pPr marL="0" indent="0" algn="ctr">
-              <a:buNone/>
-            </a:pPr>
-            <a:r>
-              <a:rPr lang="en-US" sz="1500" b="1" dirty="0">
-                <a:solidFill>
-                  <a:srgbClr val="FFFFFF"/>
-                </a:solidFill>
-              </a:rPr>
-              <a:t>Shared API Key</a:t>
-            </a:r>
-            <a:endParaRPr lang="en-US" sz="1500" dirty="0"/>
-          </a:p>
-          <a:p>
-            <a:pPr marL="0" indent="0" algn="ctr">
-              <a:buNone/>
-            </a:pPr>
-            <a:r>
-              <a:rPr lang="en-US" sz="400" dirty="0">
-                <a:solidFill>
-                  <a:srgbClr val="000000"/>
-                </a:solidFill>
-              </a:rPr>
-              <a:t>
-</a:t>
-            </a:r>
-            <a:endParaRPr lang="en-US" sz="1500" dirty="0"/>
-          </a:p>
-          <a:p>
-            <a:pPr marL="0" indent="0" algn="ctr">
-              <a:buNone/>
-            </a:pPr>
-            <a:r>
-              <a:rPr lang="en-US" sz="1200" dirty="0">
-                <a:solidFill>
-                  <a:srgbClr val="CADCFC"/>
-                </a:solidFill>
-              </a:rPr>
-              <a:t>Or each dept provisions their own</a:t>
-            </a:r>
-            <a:endParaRPr lang="en-US" sz="1500" dirty="0"/>
-          </a:p>
-        </p:txBody>
-      </p:sp>
-      <p:sp>
-        <p:nvSpPr>
-          <p:cNvPr id="15" name="Shape 13"/>
-          <p:cNvSpPr/>
-          <p:nvPr/>
-        </p:nvSpPr>
-        <p:spPr>
-          <a:xfrm>
-            <a:off x="6080760" y="2926080"/>
-            <a:ext cx="2651760" cy="1508760"/>
-          </a:xfrm>
-          <a:prstGeom prst="rect">
-            <a:avLst/>
-          </a:prstGeom>
-          <a:solidFill>
-            <a:srgbClr val="1E3A5F"/>
-          </a:solidFill>
-          <a:ln w="12700">
-            <a:solidFill>
-              <a:srgbClr val="C9A84C"/>
-            </a:solidFill>
-            <a:prstDash val="solid"/>
-          </a:ln>
-        </p:spPr>
-        <p:txBody>
-          <a:bodyPr/>
-          <a:lstStyle/>
-          <a:p>
-            <a:endParaRPr lang="en-US"/>
-          </a:p>
-        </p:txBody>
-      </p:sp>
-      <p:sp>
-        <p:nvSpPr>
-          <p:cNvPr id="16" name="Text 14"/>
-          <p:cNvSpPr/>
-          <p:nvPr/>
-        </p:nvSpPr>
-        <p:spPr>
-          <a:xfrm>
-            <a:off x="6080760" y="2926080"/>
-            <a:ext cx="2651760" cy="1508760"/>
-          </a:xfrm>
-          <a:prstGeom prst="rect">
-            <a:avLst/>
-          </a:prstGeom>
-          <a:noFill/>
-          <a:ln/>
-        </p:spPr>
-        <p:txBody>
-          <a:bodyPr wrap="square" rtlCol="0" anchor="ctr"/>
-          <a:lstStyle/>
-          <a:p>
-            <a:pPr marL="0" indent="0" algn="ctr">
-              <a:buNone/>
-            </a:pPr>
-            <a:r>
-              <a:rPr lang="en-US" sz="1500" b="1" dirty="0">
-                <a:solidFill>
-                  <a:srgbClr val="FFFFFF"/>
-                </a:solidFill>
-              </a:rPr>
-              <a:t>Under $20/mo</a:t>
-            </a:r>
-            <a:endParaRPr lang="en-US" sz="1500" dirty="0"/>
-          </a:p>
-          <a:p>
-            <a:pPr marL="0" indent="0" algn="ctr">
-              <a:buNone/>
-            </a:pPr>
-            <a:r>
-              <a:rPr lang="en-US" sz="400" dirty="0">
-                <a:solidFill>
-                  <a:srgbClr val="000000"/>
-                </a:solidFill>
-              </a:rPr>
-              <a:t>
-</a:t>
-            </a:r>
-            <a:endParaRPr lang="en-US" sz="1500" dirty="0"/>
-          </a:p>
-          <a:p>
-            <a:pPr marL="0" indent="0" algn="ctr">
-              <a:buNone/>
-            </a:pPr>
-            <a:r>
-              <a:rPr lang="en-US" sz="1200" dirty="0">
-                <a:solidFill>
-                  <a:srgbClr val="CADCFC"/>
-                </a:solidFill>
-              </a:rPr>
-              <a:t>Typical city staff usage</a:t>
-            </a:r>
-            <a:endParaRPr lang="en-US" sz="1500" dirty="0"/>
-          </a:p>
-        </p:txBody>
-      </p:sp>
-      <p:sp>
-        <p:nvSpPr>
-          <p:cNvPr id="17" name="Text 15"/>
-          <p:cNvSpPr/>
-          <p:nvPr/>
-        </p:nvSpPr>
-        <p:spPr>
-          <a:xfrm>
-            <a:off x="320040" y="6263640"/>
-            <a:ext cx="8503920" cy="457200"/>
-          </a:xfrm>
-          <a:prstGeom prst="rect">
-            <a:avLst/>
-          </a:prstGeom>
-          <a:noFill/>
-          <a:ln/>
-        </p:spPr>
-        <p:txBody>
-          <a:bodyPr wrap="square" rtlCol="0" anchor="ctr"/>
-          <a:lstStyle/>
-          <a:p>
-            <a:pPr marL="0" indent="0" algn="ctr">
-              <a:buNone/>
-            </a:pPr>
-            <a:r>
-              <a:rPr lang="en-US" sz="1300" i="1" dirty="0">
-                <a:solidFill>
-                  <a:srgbClr val="1E3A5F"/>
-                </a:solidFill>
-                <a:latin typeface="Calibri Light" pitchFamily="34" charset="0"/>
-                <a:ea typeface="Calibri Light" pitchFamily="34" charset="-122"/>
-                <a:cs typeface="Calibri Light" pitchFamily="34" charset="-120"/>
-              </a:rPr>
-              <a:t>All code is open source and sharable — no licensing or vendor lock-in</a:t>
-            </a:r>
-            <a:endParaRPr lang="en-US" sz="1300" dirty="0"/>
           </a:p>
         </p:txBody>
       </p:sp>

--- a/pmc1/PMC-AI-Technical-Overview.pptx
+++ b/pmc1/PMC-AI-Technical-Overview.pptx
@@ -5,7 +5,7 @@
     <p:sldMasterId id="2147483650" r:id="rId1"/>
   </p:sldMasterIdLst>
   <p:notesMasterIdLst>
-    <p:notesMasterId r:id="rId40"/>
+    <p:notesMasterId r:id="rId44"/>
   </p:notesMasterIdLst>
   <p:sldIdLst>
     <p:sldId id="256" r:id="rId2"/>
@@ -42,10 +42,14 @@
     <p:sldId id="278" r:id="rId33"/>
     <p:sldId id="279" r:id="rId34"/>
     <p:sldId id="280" r:id="rId35"/>
-    <p:sldId id="290" r:id="rId36"/>
-    <p:sldId id="294" r:id="rId37"/>
-    <p:sldId id="293" r:id="rId38"/>
-    <p:sldId id="292" r:id="rId39"/>
+    <p:sldId id="299" r:id="rId36"/>
+    <p:sldId id="296" r:id="rId37"/>
+    <p:sldId id="297" r:id="rId38"/>
+    <p:sldId id="298" r:id="rId39"/>
+    <p:sldId id="290" r:id="rId40"/>
+    <p:sldId id="294" r:id="rId41"/>
+    <p:sldId id="293" r:id="rId42"/>
+    <p:sldId id="292" r:id="rId43"/>
   </p:sldIdLst>
   <p:sldSz cx="9144000" cy="6858000" type="screen4x3"/>
   <p:notesSz cx="6858000" cy="9144000"/>
@@ -195,6 +199,14 @@
             <p14:sldId id="278"/>
             <p14:sldId id="279"/>
             <p14:sldId id="280"/>
+          </p14:sldIdLst>
+        </p14:section>
+        <p14:section name="Multilingual" id="{54AA985A-3713-4357-9AE7-A43B87CFFF9C}">
+          <p14:sldIdLst>
+            <p14:sldId id="299"/>
+            <p14:sldId id="296"/>
+            <p14:sldId id="297"/>
+            <p14:sldId id="298"/>
           </p14:sldIdLst>
         </p14:section>
         <p14:section name="Backstory" id="{3B61981A-34B7-4122-AB31-B71C3C9B6127}">
@@ -1461,6 +1473,114 @@
         <p:cNvPr id="1" name="">
           <a:extLst>
             <a:ext uri="{FF2B5EF4-FFF2-40B4-BE49-F238E27FC236}">
+              <a16:creationId xmlns:a16="http://schemas.microsoft.com/office/drawing/2014/main" id="{DB57E71E-DF4F-A1EA-94D0-104EB52EE6CA}"/>
+            </a:ext>
+          </a:extLst>
+        </p:cNvPr>
+        <p:cNvGrpSpPr/>
+        <p:nvPr/>
+      </p:nvGrpSpPr>
+      <p:grpSpPr>
+        <a:xfrm>
+          <a:off x="0" y="0"/>
+          <a:ext cx="0" cy="0"/>
+          <a:chOff x="0" y="0"/>
+          <a:chExt cx="0" cy="0"/>
+        </a:xfrm>
+      </p:grpSpPr>
+      <p:sp>
+        <p:nvSpPr>
+          <p:cNvPr id="2" name="Slide Image Placeholder 1">
+            <a:extLst>
+              <a:ext uri="{FF2B5EF4-FFF2-40B4-BE49-F238E27FC236}">
+                <a16:creationId xmlns:a16="http://schemas.microsoft.com/office/drawing/2014/main" id="{806669BD-2AF0-3D7B-1526-B66753A230CC}"/>
+              </a:ext>
+            </a:extLst>
+          </p:cNvPr>
+          <p:cNvSpPr>
+            <a:spLocks noGrp="1" noRot="1" noChangeAspect="1"/>
+          </p:cNvSpPr>
+          <p:nvPr>
+            <p:ph type="sldImg"/>
+          </p:nvPr>
+        </p:nvSpPr>
+        <p:spPr/>
+      </p:sp>
+      <p:sp>
+        <p:nvSpPr>
+          <p:cNvPr id="3" name="Notes Placeholder 2">
+            <a:extLst>
+              <a:ext uri="{FF2B5EF4-FFF2-40B4-BE49-F238E27FC236}">
+                <a16:creationId xmlns:a16="http://schemas.microsoft.com/office/drawing/2014/main" id="{8C81712D-B75E-0FF7-7ACE-160BA1FA64EC}"/>
+              </a:ext>
+            </a:extLst>
+          </p:cNvPr>
+          <p:cNvSpPr>
+            <a:spLocks noGrp="1"/>
+          </p:cNvSpPr>
+          <p:nvPr>
+            <p:ph type="body" idx="1"/>
+          </p:nvPr>
+        </p:nvSpPr>
+        <p:spPr/>
+        <p:txBody>
+          <a:bodyPr/>
+          <a:lstStyle/>
+          <a:p>
+            <a:endParaRPr lang="en-US" dirty="0"/>
+          </a:p>
+        </p:txBody>
+      </p:sp>
+      <p:sp>
+        <p:nvSpPr>
+          <p:cNvPr id="4" name="Slide Number Placeholder 3">
+            <a:extLst>
+              <a:ext uri="{FF2B5EF4-FFF2-40B4-BE49-F238E27FC236}">
+                <a16:creationId xmlns:a16="http://schemas.microsoft.com/office/drawing/2014/main" id="{1097A2D7-7050-1A19-5724-708E3BDB9C62}"/>
+              </a:ext>
+            </a:extLst>
+          </p:cNvPr>
+          <p:cNvSpPr>
+            <a:spLocks noGrp="1"/>
+          </p:cNvSpPr>
+          <p:nvPr>
+            <p:ph type="sldNum" sz="quarter" idx="10"/>
+          </p:nvPr>
+        </p:nvSpPr>
+        <p:spPr/>
+        <p:txBody>
+          <a:bodyPr/>
+          <a:lstStyle/>
+          <a:p>
+            <a:fld id="{F7021451-1387-4CA6-816F-3879F97B5CBC}" type="slidenum">
+              <a:rPr lang="en-US"/>
+              <a:t>35</a:t>
+            </a:fld>
+            <a:endParaRPr lang="en-US"/>
+          </a:p>
+        </p:txBody>
+      </p:sp>
+    </p:spTree>
+    <p:extLst>
+      <p:ext uri="{BB962C8B-B14F-4D97-AF65-F5344CB8AC3E}">
+        <p14:creationId xmlns:p14="http://schemas.microsoft.com/office/powerpoint/2010/main" val="4058325434"/>
+      </p:ext>
+    </p:extLst>
+  </p:cSld>
+  <p:clrMapOvr>
+    <a:masterClrMapping/>
+  </p:clrMapOvr>
+</p:notes>
+</file>
+
+<file path=ppt/notesSlides/notesSlide21.xml><?xml version="1.0" encoding="utf-8"?>
+<p:notes xmlns:a="http://schemas.openxmlformats.org/drawingml/2006/main" xmlns:r="http://schemas.openxmlformats.org/officeDocument/2006/relationships" xmlns:p="http://schemas.openxmlformats.org/presentationml/2006/main">
+  <p:cSld>
+    <p:spTree>
+      <p:nvGrpSpPr>
+        <p:cNvPr id="1" name="">
+          <a:extLst>
+            <a:ext uri="{FF2B5EF4-FFF2-40B4-BE49-F238E27FC236}">
               <a16:creationId xmlns:a16="http://schemas.microsoft.com/office/drawing/2014/main" id="{AC365172-E539-008D-6577-B8FAD5CE8CB5}"/>
             </a:ext>
           </a:extLst>
@@ -1542,7 +1662,7 @@
           <a:p>
             <a:fld id="{F7021451-1387-4CA6-816F-3879F97B5CBC}" type="slidenum">
               <a:rPr lang="en-US"/>
-              <a:t>35</a:t>
+              <a:t>39</a:t>
             </a:fld>
             <a:endParaRPr lang="en-US"/>
           </a:p>
@@ -1552,6 +1672,92 @@
     <p:extLst>
       <p:ext uri="{BB962C8B-B14F-4D97-AF65-F5344CB8AC3E}">
         <p14:creationId xmlns:p14="http://schemas.microsoft.com/office/powerpoint/2010/main" val="2310517239"/>
+      </p:ext>
+    </p:extLst>
+  </p:cSld>
+  <p:clrMapOvr>
+    <a:masterClrMapping/>
+  </p:clrMapOvr>
+</p:notes>
+</file>
+
+<file path=ppt/notesSlides/notesSlide22.xml><?xml version="1.0" encoding="utf-8"?>
+<p:notes xmlns:a="http://schemas.openxmlformats.org/drawingml/2006/main" xmlns:r="http://schemas.openxmlformats.org/officeDocument/2006/relationships" xmlns:p="http://schemas.openxmlformats.org/presentationml/2006/main">
+  <p:cSld>
+    <p:spTree>
+      <p:nvGrpSpPr>
+        <p:cNvPr id="1" name=""/>
+        <p:cNvGrpSpPr/>
+        <p:nvPr/>
+      </p:nvGrpSpPr>
+      <p:grpSpPr>
+        <a:xfrm>
+          <a:off x="0" y="0"/>
+          <a:ext cx="0" cy="0"/>
+          <a:chOff x="0" y="0"/>
+          <a:chExt cx="0" cy="0"/>
+        </a:xfrm>
+      </p:grpSpPr>
+      <p:sp>
+        <p:nvSpPr>
+          <p:cNvPr id="2" name="Slide Image Placeholder 1"/>
+          <p:cNvSpPr>
+            <a:spLocks noGrp="1" noRot="1" noChangeAspect="1"/>
+          </p:cNvSpPr>
+          <p:nvPr>
+            <p:ph type="sldImg"/>
+          </p:nvPr>
+        </p:nvSpPr>
+        <p:spPr>
+          <a:xfrm>
+            <a:off x="1371600" y="1143000"/>
+            <a:ext cx="4114800" cy="3086100"/>
+          </a:xfrm>
+          <a:prstGeom prst="rect">
+            <a:avLst/>
+          </a:prstGeom>
+          <a:noFill/>
+          <a:ln w="12700">
+            <a:solidFill>
+              <a:prstClr val="black"/>
+            </a:solidFill>
+          </a:ln>
+        </p:spPr>
+      </p:sp>
+      <p:sp>
+        <p:nvSpPr>
+          <p:cNvPr id="3" name="Notes Placeholder 2"/>
+          <p:cNvSpPr>
+            <a:spLocks noGrp="1"/>
+          </p:cNvSpPr>
+          <p:nvPr>
+            <p:ph type="body" idx="1"/>
+          </p:nvPr>
+        </p:nvSpPr>
+        <p:spPr>
+          <a:xfrm>
+            <a:off x="685800" y="4400550"/>
+            <a:ext cx="5486400" cy="3600450"/>
+          </a:xfrm>
+          <a:prstGeom prst="rect">
+            <a:avLst/>
+          </a:prstGeom>
+        </p:spPr>
+        <p:txBody>
+          <a:bodyPr/>
+          <a:lstStyle/>
+          <a:p>
+            <a:r>
+              <a:rPr lang="en-US" dirty="0"/>
+              <a:t>http://psd1.net/pmc1/Can-High-School-Students-and-AI-Design-a-Bus-Stop-Shelter.pdf </a:t>
+            </a:r>
+          </a:p>
+        </p:txBody>
+      </p:sp>
+    </p:spTree>
+    <p:extLst>
+      <p:ext uri="{BB962C8B-B14F-4D97-AF65-F5344CB8AC3E}">
+        <p14:creationId xmlns:p14="http://schemas.microsoft.com/office/powerpoint/2010/main" val="2334952753"/>
       </p:ext>
     </p:extLst>
   </p:cSld>
@@ -5226,8 +5432,21 @@
                 <a:cs typeface="Calibri Light" pitchFamily="34" charset="-120"/>
                 <a:hlinkClick r:id="rId3"/>
               </a:rPr>
-              <a:t>https://psd1.net/PMC-AI-Technical-Overview.pptx</a:t>
-            </a:r>
+              <a:t>https://psd1.net/pmc1/PMC-AI-Technical-Overview.pptx</a:t>
+            </a:r>
+            <a:endParaRPr lang="en-US" sz="2400" dirty="0">
+              <a:solidFill>
+                <a:srgbClr val="CADCFC"/>
+              </a:solidFill>
+              <a:latin typeface="Calibri Light" pitchFamily="34" charset="0"/>
+              <a:ea typeface="Calibri Light" pitchFamily="34" charset="-122"/>
+              <a:cs typeface="Calibri Light" pitchFamily="34" charset="-120"/>
+            </a:endParaRPr>
+          </a:p>
+          <a:p>
+            <a:pPr marL="0" indent="0" algn="l">
+              <a:buNone/>
+            </a:pPr>
             <a:r>
               <a:rPr lang="en-US" sz="2400" dirty="0">
                 <a:solidFill>
@@ -5236,47 +5455,71 @@
                 <a:latin typeface="Calibri Light" pitchFamily="34" charset="0"/>
                 <a:ea typeface="Calibri Light" pitchFamily="34" charset="-122"/>
                 <a:cs typeface="Calibri Light" pitchFamily="34" charset="-120"/>
-              </a:rPr>
-              <a:t> </a:t>
-            </a:r>
-            <a:endParaRPr lang="en-US" sz="2400" dirty="0"/>
-          </a:p>
-        </p:txBody>
-      </p:sp>
-      <p:sp>
-        <p:nvSpPr>
-          <p:cNvPr id="5" name="Text 3"/>
-          <p:cNvSpPr/>
-          <p:nvPr/>
-        </p:nvSpPr>
-        <p:spPr>
-          <a:xfrm>
-            <a:off x="548640" y="4114800"/>
-            <a:ext cx="8046720" cy="457200"/>
-          </a:xfrm>
-          <a:prstGeom prst="rect">
-            <a:avLst/>
-          </a:prstGeom>
-          <a:noFill/>
-          <a:ln/>
-        </p:spPr>
-        <p:txBody>
-          <a:bodyPr wrap="square" rtlCol="0" anchor="ctr"/>
-          <a:lstStyle/>
-          <a:p>
-            <a:pPr marL="0" indent="0" algn="l">
-              <a:buNone/>
-            </a:pPr>
-            <a:r>
-              <a:rPr lang="en-US" sz="1400" i="1" dirty="0">
-                <a:solidFill>
-                  <a:srgbClr val="FFFFFF"/>
+                <a:hlinkClick r:id="rId4"/>
+              </a:rPr>
+              <a:t>http://orionhs.us/20260410</a:t>
+            </a:r>
+            <a:r>
+              <a:rPr lang="en-US" sz="2400" dirty="0">
+                <a:solidFill>
+                  <a:srgbClr val="CADCFC"/>
                 </a:solidFill>
                 <a:latin typeface="Calibri Light" pitchFamily="34" charset="0"/>
                 <a:ea typeface="Calibri Light" pitchFamily="34" charset="-122"/>
                 <a:cs typeface="Calibri Light" pitchFamily="34" charset="-120"/>
               </a:rPr>
-              <a:t>John Weisenfeld  ·  Physics Teacher, Orion High School  ·  April 10, 2026</a:t>
+              <a:t>  </a:t>
+            </a:r>
+            <a:endParaRPr lang="en-US" sz="2400" dirty="0"/>
+          </a:p>
+        </p:txBody>
+      </p:sp>
+      <p:sp>
+        <p:nvSpPr>
+          <p:cNvPr id="5" name="Text 3"/>
+          <p:cNvSpPr/>
+          <p:nvPr/>
+        </p:nvSpPr>
+        <p:spPr>
+          <a:xfrm>
+            <a:off x="548640" y="5166360"/>
+            <a:ext cx="8046720" cy="457200"/>
+          </a:xfrm>
+          <a:prstGeom prst="rect">
+            <a:avLst/>
+          </a:prstGeom>
+          <a:noFill/>
+          <a:ln/>
+        </p:spPr>
+        <p:txBody>
+          <a:bodyPr wrap="square" rtlCol="0" anchor="ctr"/>
+          <a:lstStyle/>
+          <a:p>
+            <a:pPr marL="0" indent="0" algn="l">
+              <a:buNone/>
+            </a:pPr>
+            <a:r>
+              <a:rPr lang="en-US" sz="1400" i="1" dirty="0">
+                <a:solidFill>
+                  <a:srgbClr val="FFFFFF"/>
+                </a:solidFill>
+                <a:latin typeface="Calibri Light" pitchFamily="34" charset="0"/>
+                <a:ea typeface="Calibri Light" pitchFamily="34" charset="-122"/>
+                <a:cs typeface="Calibri Light" pitchFamily="34" charset="-120"/>
+                <a:hlinkClick r:id="rId5"/>
+              </a:rPr>
+              <a:t>John Weisenfeld</a:t>
+            </a:r>
+            <a:r>
+              <a:rPr lang="en-US" sz="1400" i="1" dirty="0">
+                <a:solidFill>
+                  <a:srgbClr val="FFFFFF"/>
+                </a:solidFill>
+                <a:latin typeface="Calibri Light" pitchFamily="34" charset="0"/>
+                <a:ea typeface="Calibri Light" pitchFamily="34" charset="-122"/>
+                <a:cs typeface="Calibri Light" pitchFamily="34" charset="-120"/>
+              </a:rPr>
+              <a:t> ·  Physics Teacher, Orion High School  ·  April 10, 2026</a:t>
             </a:r>
             <a:endParaRPr lang="en-US" sz="1400" dirty="0"/>
           </a:p>
@@ -6004,7 +6247,7 @@
                   <a:srgbClr val="FFFFFF"/>
                 </a:solidFill>
               </a:rPr>
-              <a:t>Under $20/mo</a:t>
+              <a:t>Under $200/mo</a:t>
             </a:r>
             <a:endParaRPr lang="en-US" sz="1500" dirty="0"/>
           </a:p>
@@ -6033,7 +6276,7 @@
                   <a:srgbClr val="CADCFC"/>
                 </a:solidFill>
               </a:rPr>
-              <a:t>Typical city staff usage</a:t>
+              <a:t>Typical(?) city staff usage</a:t>
             </a:r>
             <a:endParaRPr lang="en-US" sz="1500" dirty="0"/>
           </a:p>
@@ -8264,8 +8507,8 @@
           <a:chExt cx="0" cy="0"/>
         </a:xfrm>
       </p:grpSpPr>
-      <mc:AlternateContent xmlns:mc="http://schemas.openxmlformats.org/markup-compatibility/2006">
-        <mc:Choice xmlns:psez="http://schemas.microsoft.com/office/powerpoint/2016/sectionzoom" Requires="psez">
+      <mc:AlternateContent xmlns:mc="http://schemas.openxmlformats.org/markup-compatibility/2006" xmlns:psez="http://schemas.microsoft.com/office/powerpoint/2016/sectionzoom">
+        <mc:Choice Requires="psez">
           <p:graphicFrame>
             <p:nvGraphicFramePr>
               <p:cNvPr id="3" name="Section Zoom 2">
@@ -8322,7 +8565,7 @@
             </a:graphic>
           </p:graphicFrame>
         </mc:Choice>
-        <mc:Fallback>
+        <mc:Fallback xmlns="">
           <p:pic>
             <p:nvPicPr>
               <p:cNvPr id="3" name="Section Zoom 2">
@@ -8339,7 +8582,7 @@
               <p:nvPr/>
             </p:nvPicPr>
             <p:blipFill>
-              <a:blip r:embed="rId2"/>
+              <a:blip r:embed="rId4"/>
               <a:stretch>
                 <a:fillRect/>
               </a:stretch>
@@ -10525,6 +10768,461 @@
     <p:bg>
       <p:bgPr>
         <a:solidFill>
+          <a:schemeClr val="tx2">
+            <a:lumMod val="90000"/>
+          </a:schemeClr>
+        </a:solidFill>
+        <a:effectLst/>
+      </p:bgPr>
+    </p:bg>
+    <p:spTree>
+      <p:nvGrpSpPr>
+        <p:cNvPr id="1" name="">
+          <a:extLst>
+            <a:ext uri="{FF2B5EF4-FFF2-40B4-BE49-F238E27FC236}">
+              <a16:creationId xmlns:a16="http://schemas.microsoft.com/office/drawing/2014/main" id="{4F3DF2C4-6F38-E59B-4848-216DD2662ED6}"/>
+            </a:ext>
+          </a:extLst>
+        </p:cNvPr>
+        <p:cNvGrpSpPr/>
+        <p:nvPr/>
+      </p:nvGrpSpPr>
+      <p:grpSpPr>
+        <a:xfrm>
+          <a:off x="0" y="0"/>
+          <a:ext cx="0" cy="0"/>
+          <a:chOff x="0" y="0"/>
+          <a:chExt cx="0" cy="0"/>
+        </a:xfrm>
+      </p:grpSpPr>
+      <p:sp>
+        <p:nvSpPr>
+          <p:cNvPr id="2" name="Shape 0">
+            <a:extLst>
+              <a:ext uri="{FF2B5EF4-FFF2-40B4-BE49-F238E27FC236}">
+                <a16:creationId xmlns:a16="http://schemas.microsoft.com/office/drawing/2014/main" id="{54E1BD39-DEF8-0E10-CDF7-066971840725}"/>
+              </a:ext>
+            </a:extLst>
+          </p:cNvPr>
+          <p:cNvSpPr/>
+          <p:nvPr/>
+        </p:nvSpPr>
+        <p:spPr>
+          <a:xfrm>
+            <a:off x="0" y="0"/>
+            <a:ext cx="9144000" cy="1005840"/>
+          </a:xfrm>
+          <a:prstGeom prst="rect">
+            <a:avLst/>
+          </a:prstGeom>
+          <a:solidFill>
+            <a:srgbClr val="1E3A5F"/>
+          </a:solidFill>
+          <a:ln w="12700">
+            <a:solidFill>
+              <a:srgbClr val="1E3A5F"/>
+            </a:solidFill>
+            <a:prstDash val="solid"/>
+          </a:ln>
+        </p:spPr>
+        <p:txBody>
+          <a:bodyPr/>
+          <a:lstStyle/>
+          <a:p>
+            <a:endParaRPr lang="en-US"/>
+          </a:p>
+        </p:txBody>
+      </p:sp>
+      <p:sp>
+        <p:nvSpPr>
+          <p:cNvPr id="3" name="Text 1">
+            <a:extLst>
+              <a:ext uri="{FF2B5EF4-FFF2-40B4-BE49-F238E27FC236}">
+                <a16:creationId xmlns:a16="http://schemas.microsoft.com/office/drawing/2014/main" id="{BC523FB8-14C9-9D6A-1C15-02598C3C7E72}"/>
+              </a:ext>
+            </a:extLst>
+          </p:cNvPr>
+          <p:cNvSpPr/>
+          <p:nvPr/>
+        </p:nvSpPr>
+        <p:spPr>
+          <a:xfrm>
+            <a:off x="320040" y="0"/>
+            <a:ext cx="8686800" cy="1005840"/>
+          </a:xfrm>
+          <a:prstGeom prst="rect">
+            <a:avLst/>
+          </a:prstGeom>
+          <a:noFill/>
+          <a:ln/>
+        </p:spPr>
+        <p:txBody>
+          <a:bodyPr wrap="square" lIns="0" tIns="0" rIns="0" bIns="0" rtlCol="0" anchor="ctr"/>
+          <a:lstStyle/>
+          <a:p>
+            <a:pPr marL="0" indent="0" algn="l">
+              <a:buNone/>
+            </a:pPr>
+            <a:r>
+              <a:rPr lang="en-US" sz="2800" b="1" dirty="0">
+                <a:solidFill>
+                  <a:srgbClr val="FFFFFF"/>
+                </a:solidFill>
+                <a:latin typeface="Calibri" pitchFamily="34" charset="0"/>
+                <a:ea typeface="Calibri" pitchFamily="34" charset="-122"/>
+                <a:cs typeface="Calibri" pitchFamily="34" charset="-120"/>
+              </a:rPr>
+              <a:t>Appendix Slides</a:t>
+            </a:r>
+            <a:endParaRPr lang="en-US" sz="2800" dirty="0"/>
+          </a:p>
+        </p:txBody>
+      </p:sp>
+      <p:sp>
+        <p:nvSpPr>
+          <p:cNvPr id="4" name="Shape 2">
+            <a:extLst>
+              <a:ext uri="{FF2B5EF4-FFF2-40B4-BE49-F238E27FC236}">
+                <a16:creationId xmlns:a16="http://schemas.microsoft.com/office/drawing/2014/main" id="{50D967DC-4F6B-342F-6E89-548A6D218491}"/>
+              </a:ext>
+            </a:extLst>
+          </p:cNvPr>
+          <p:cNvSpPr/>
+          <p:nvPr/>
+        </p:nvSpPr>
+        <p:spPr>
+          <a:xfrm>
+            <a:off x="0" y="1005840"/>
+            <a:ext cx="73152" cy="5852160"/>
+          </a:xfrm>
+          <a:prstGeom prst="rect">
+            <a:avLst/>
+          </a:prstGeom>
+          <a:solidFill>
+            <a:srgbClr val="C9A84C"/>
+          </a:solidFill>
+          <a:ln w="12700">
+            <a:solidFill>
+              <a:srgbClr val="C9A84C"/>
+            </a:solidFill>
+            <a:prstDash val="solid"/>
+          </a:ln>
+        </p:spPr>
+        <p:txBody>
+          <a:bodyPr/>
+          <a:lstStyle/>
+          <a:p>
+            <a:endParaRPr lang="en-US"/>
+          </a:p>
+        </p:txBody>
+      </p:sp>
+      <p:sp>
+        <p:nvSpPr>
+          <p:cNvPr id="30" name="Rectangle 29">
+            <a:extLst>
+              <a:ext uri="{FF2B5EF4-FFF2-40B4-BE49-F238E27FC236}">
+                <a16:creationId xmlns:a16="http://schemas.microsoft.com/office/drawing/2014/main" id="{D7B78396-C3CC-69D5-AC01-4EFCDF360BFA}"/>
+              </a:ext>
+            </a:extLst>
+          </p:cNvPr>
+          <p:cNvSpPr/>
+          <p:nvPr/>
+        </p:nvSpPr>
+        <p:spPr>
+          <a:xfrm>
+            <a:off x="235086" y="2191522"/>
+            <a:ext cx="8673849" cy="3416320"/>
+          </a:xfrm>
+          <a:prstGeom prst="rect">
+            <a:avLst/>
+          </a:prstGeom>
+          <a:noFill/>
+        </p:spPr>
+        <p:txBody>
+          <a:bodyPr wrap="none" lIns="91440" tIns="45720" rIns="91440" bIns="45720">
+            <a:spAutoFit/>
+          </a:bodyPr>
+          <a:lstStyle/>
+          <a:p>
+            <a:pPr algn="ctr"/>
+            <a:r>
+              <a:rPr lang="en-US" sz="5400" dirty="0">
+                <a:ln w="0"/>
+                <a:solidFill>
+                  <a:schemeClr val="accent1"/>
+                </a:solidFill>
+                <a:effectLst>
+                  <a:outerShdw blurRad="38100" dist="25400" dir="5400000" algn="ctr" rotWithShape="0">
+                    <a:srgbClr val="6E747A">
+                      <a:alpha val="43000"/>
+                    </a:srgbClr>
+                  </a:outerShdw>
+                </a:effectLst>
+              </a:rPr>
+              <a:t>Ask a Question</a:t>
+            </a:r>
+          </a:p>
+          <a:p>
+            <a:pPr algn="ctr"/>
+            <a:r>
+              <a:rPr lang="en-US" sz="5400" dirty="0">
+                <a:ln w="0"/>
+                <a:solidFill>
+                  <a:schemeClr val="accent1"/>
+                </a:solidFill>
+                <a:effectLst>
+                  <a:outerShdw blurRad="38100" dist="25400" dir="5400000" algn="ctr" rotWithShape="0">
+                    <a:srgbClr val="6E747A">
+                      <a:alpha val="43000"/>
+                    </a:srgbClr>
+                  </a:outerShdw>
+                </a:effectLst>
+              </a:rPr>
+              <a:t>Any Language</a:t>
+            </a:r>
+          </a:p>
+          <a:p>
+            <a:pPr algn="ctr"/>
+            <a:r>
+              <a:rPr lang="en-US" sz="5400" dirty="0">
+                <a:ln w="0"/>
+                <a:solidFill>
+                  <a:schemeClr val="accent1"/>
+                </a:solidFill>
+                <a:effectLst>
+                  <a:outerShdw blurRad="38100" dist="25400" dir="5400000" algn="ctr" rotWithShape="0">
+                    <a:srgbClr val="6E747A">
+                      <a:alpha val="43000"/>
+                    </a:srgbClr>
+                  </a:outerShdw>
+                </a:effectLst>
+              </a:rPr>
+              <a:t>Response is in Same Language</a:t>
+            </a:r>
+          </a:p>
+          <a:p>
+            <a:pPr algn="ctr"/>
+            <a:r>
+              <a:rPr lang="en-US" sz="5400" dirty="0">
+                <a:ln w="0"/>
+                <a:solidFill>
+                  <a:schemeClr val="accent1"/>
+                </a:solidFill>
+                <a:effectLst>
+                  <a:outerShdw blurRad="38100" dist="25400" dir="5400000" algn="ctr" rotWithShape="0">
+                    <a:srgbClr val="6E747A">
+                      <a:alpha val="43000"/>
+                    </a:srgbClr>
+                  </a:outerShdw>
+                </a:effectLst>
+              </a:rPr>
+              <a:t>Even Complicated Questions</a:t>
+            </a:r>
+          </a:p>
+        </p:txBody>
+      </p:sp>
+    </p:spTree>
+    <p:extLst>
+      <p:ext uri="{BB962C8B-B14F-4D97-AF65-F5344CB8AC3E}">
+        <p14:creationId xmlns:p14="http://schemas.microsoft.com/office/powerpoint/2010/main" val="501027866"/>
+      </p:ext>
+    </p:extLst>
+  </p:cSld>
+  <p:clrMapOvr>
+    <a:masterClrMapping/>
+  </p:clrMapOvr>
+</p:sld>
+</file>
+
+<file path=ppt/slides/slide36.xml><?xml version="1.0" encoding="utf-8"?>
+<p:sld xmlns:a="http://schemas.openxmlformats.org/drawingml/2006/main" xmlns:r="http://schemas.openxmlformats.org/officeDocument/2006/relationships" xmlns:p="http://schemas.openxmlformats.org/presentationml/2006/main">
+  <p:cSld>
+    <p:spTree>
+      <p:nvGrpSpPr>
+        <p:cNvPr id="1" name=""/>
+        <p:cNvGrpSpPr/>
+        <p:nvPr/>
+      </p:nvGrpSpPr>
+      <p:grpSpPr>
+        <a:xfrm>
+          <a:off x="0" y="0"/>
+          <a:ext cx="0" cy="0"/>
+          <a:chOff x="0" y="0"/>
+          <a:chExt cx="0" cy="0"/>
+        </a:xfrm>
+      </p:grpSpPr>
+      <p:pic>
+        <p:nvPicPr>
+          <p:cNvPr id="3" name="Picture 2">
+            <a:hlinkClick r:id="rId2"/>
+            <a:extLst>
+              <a:ext uri="{FF2B5EF4-FFF2-40B4-BE49-F238E27FC236}">
+                <a16:creationId xmlns:a16="http://schemas.microsoft.com/office/drawing/2014/main" id="{769A60B6-1F84-7DA2-AB2F-4B3FE9A95ADC}"/>
+              </a:ext>
+            </a:extLst>
+          </p:cNvPr>
+          <p:cNvPicPr>
+            <a:picLocks noChangeAspect="1"/>
+          </p:cNvPicPr>
+          <p:nvPr/>
+        </p:nvPicPr>
+        <p:blipFill>
+          <a:blip r:embed="rId3"/>
+          <a:stretch>
+            <a:fillRect/>
+          </a:stretch>
+        </p:blipFill>
+        <p:spPr>
+          <a:xfrm>
+            <a:off x="0" y="-1"/>
+            <a:ext cx="9144000" cy="15262663"/>
+          </a:xfrm>
+          <a:prstGeom prst="rect">
+            <a:avLst/>
+          </a:prstGeom>
+        </p:spPr>
+      </p:pic>
+    </p:spTree>
+    <p:extLst>
+      <p:ext uri="{BB962C8B-B14F-4D97-AF65-F5344CB8AC3E}">
+        <p14:creationId xmlns:p14="http://schemas.microsoft.com/office/powerpoint/2010/main" val="599754920"/>
+      </p:ext>
+    </p:extLst>
+  </p:cSld>
+  <p:clrMapOvr>
+    <a:masterClrMapping/>
+  </p:clrMapOvr>
+</p:sld>
+</file>
+
+<file path=ppt/slides/slide37.xml><?xml version="1.0" encoding="utf-8"?>
+<p:sld xmlns:a="http://schemas.openxmlformats.org/drawingml/2006/main" xmlns:r="http://schemas.openxmlformats.org/officeDocument/2006/relationships" xmlns:p="http://schemas.openxmlformats.org/presentationml/2006/main">
+  <p:cSld>
+    <p:spTree>
+      <p:nvGrpSpPr>
+        <p:cNvPr id="1" name=""/>
+        <p:cNvGrpSpPr/>
+        <p:nvPr/>
+      </p:nvGrpSpPr>
+      <p:grpSpPr>
+        <a:xfrm>
+          <a:off x="0" y="0"/>
+          <a:ext cx="0" cy="0"/>
+          <a:chOff x="0" y="0"/>
+          <a:chExt cx="0" cy="0"/>
+        </a:xfrm>
+      </p:grpSpPr>
+      <p:pic>
+        <p:nvPicPr>
+          <p:cNvPr id="4" name="Picture 3">
+            <a:hlinkClick r:id="rId2"/>
+            <a:extLst>
+              <a:ext uri="{FF2B5EF4-FFF2-40B4-BE49-F238E27FC236}">
+                <a16:creationId xmlns:a16="http://schemas.microsoft.com/office/drawing/2014/main" id="{D9726C10-2449-153D-760D-B5FD3FF76AC7}"/>
+              </a:ext>
+            </a:extLst>
+          </p:cNvPr>
+          <p:cNvPicPr>
+            <a:picLocks noChangeAspect="1"/>
+          </p:cNvPicPr>
+          <p:nvPr/>
+        </p:nvPicPr>
+        <p:blipFill>
+          <a:blip r:embed="rId3"/>
+          <a:stretch>
+            <a:fillRect/>
+          </a:stretch>
+        </p:blipFill>
+        <p:spPr>
+          <a:xfrm>
+            <a:off x="0" y="0"/>
+            <a:ext cx="9143999" cy="16284298"/>
+          </a:xfrm>
+          <a:prstGeom prst="rect">
+            <a:avLst/>
+          </a:prstGeom>
+        </p:spPr>
+      </p:pic>
+    </p:spTree>
+    <p:extLst>
+      <p:ext uri="{BB962C8B-B14F-4D97-AF65-F5344CB8AC3E}">
+        <p14:creationId xmlns:p14="http://schemas.microsoft.com/office/powerpoint/2010/main" val="1481727462"/>
+      </p:ext>
+    </p:extLst>
+  </p:cSld>
+  <p:clrMapOvr>
+    <a:masterClrMapping/>
+  </p:clrMapOvr>
+</p:sld>
+</file>
+
+<file path=ppt/slides/slide38.xml><?xml version="1.0" encoding="utf-8"?>
+<p:sld xmlns:a="http://schemas.openxmlformats.org/drawingml/2006/main" xmlns:r="http://schemas.openxmlformats.org/officeDocument/2006/relationships" xmlns:p="http://schemas.openxmlformats.org/presentationml/2006/main">
+  <p:cSld>
+    <p:spTree>
+      <p:nvGrpSpPr>
+        <p:cNvPr id="1" name=""/>
+        <p:cNvGrpSpPr/>
+        <p:nvPr/>
+      </p:nvGrpSpPr>
+      <p:grpSpPr>
+        <a:xfrm>
+          <a:off x="0" y="0"/>
+          <a:ext cx="0" cy="0"/>
+          <a:chOff x="0" y="0"/>
+          <a:chExt cx="0" cy="0"/>
+        </a:xfrm>
+      </p:grpSpPr>
+      <p:pic>
+        <p:nvPicPr>
+          <p:cNvPr id="3" name="Picture 2">
+            <a:hlinkClick r:id="rId2"/>
+            <a:extLst>
+              <a:ext uri="{FF2B5EF4-FFF2-40B4-BE49-F238E27FC236}">
+                <a16:creationId xmlns:a16="http://schemas.microsoft.com/office/drawing/2014/main" id="{D74945C7-F9E8-A55B-5CB5-DEFC90D7810B}"/>
+              </a:ext>
+            </a:extLst>
+          </p:cNvPr>
+          <p:cNvPicPr>
+            <a:picLocks noChangeAspect="1"/>
+          </p:cNvPicPr>
+          <p:nvPr/>
+        </p:nvPicPr>
+        <p:blipFill>
+          <a:blip r:embed="rId3"/>
+          <a:stretch>
+            <a:fillRect/>
+          </a:stretch>
+        </p:blipFill>
+        <p:spPr>
+          <a:xfrm>
+            <a:off x="0" y="0"/>
+            <a:ext cx="9144000" cy="16295734"/>
+          </a:xfrm>
+          <a:prstGeom prst="rect">
+            <a:avLst/>
+          </a:prstGeom>
+        </p:spPr>
+      </p:pic>
+    </p:spTree>
+    <p:extLst>
+      <p:ext uri="{BB962C8B-B14F-4D97-AF65-F5344CB8AC3E}">
+        <p14:creationId xmlns:p14="http://schemas.microsoft.com/office/powerpoint/2010/main" val="2531471042"/>
+      </p:ext>
+    </p:extLst>
+  </p:cSld>
+  <p:clrMapOvr>
+    <a:masterClrMapping/>
+  </p:clrMapOvr>
+</p:sld>
+</file>
+
+<file path=ppt/slides/slide39.xml><?xml version="1.0" encoding="utf-8"?>
+<p:sld xmlns:a="http://schemas.openxmlformats.org/drawingml/2006/main" xmlns:r="http://schemas.openxmlformats.org/officeDocument/2006/relationships" xmlns:p="http://schemas.openxmlformats.org/presentationml/2006/main">
+  <p:cSld>
+    <p:bg>
+      <p:bgPr>
+        <a:solidFill>
           <a:schemeClr val="accent5">
             <a:lumMod val="60000"/>
             <a:lumOff val="40000"/>
@@ -10767,367 +11465,6 @@
     <p:extLst>
       <p:ext uri="{BB962C8B-B14F-4D97-AF65-F5344CB8AC3E}">
         <p14:creationId xmlns:p14="http://schemas.microsoft.com/office/powerpoint/2010/main" val="2220147311"/>
-      </p:ext>
-    </p:extLst>
-  </p:cSld>
-  <p:clrMapOvr>
-    <a:masterClrMapping/>
-  </p:clrMapOvr>
-</p:sld>
-</file>
-
-<file path=ppt/slides/slide36.xml><?xml version="1.0" encoding="utf-8"?>
-<p:sld xmlns:a="http://schemas.openxmlformats.org/drawingml/2006/main" xmlns:r="http://schemas.openxmlformats.org/officeDocument/2006/relationships" xmlns:p="http://schemas.openxmlformats.org/presentationml/2006/main">
-  <p:cSld>
-    <p:bg>
-      <p:bgPr>
-        <a:solidFill>
-          <a:schemeClr val="accent5">
-            <a:lumMod val="60000"/>
-            <a:lumOff val="40000"/>
-          </a:schemeClr>
-        </a:solidFill>
-        <a:effectLst/>
-      </p:bgPr>
-    </p:bg>
-    <p:spTree>
-      <p:nvGrpSpPr>
-        <p:cNvPr id="1" name=""/>
-        <p:cNvGrpSpPr/>
-        <p:nvPr/>
-      </p:nvGrpSpPr>
-      <p:grpSpPr>
-        <a:xfrm>
-          <a:off x="0" y="0"/>
-          <a:ext cx="0" cy="0"/>
-          <a:chOff x="0" y="0"/>
-          <a:chExt cx="0" cy="0"/>
-        </a:xfrm>
-      </p:grpSpPr>
-      <p:pic>
-        <p:nvPicPr>
-          <p:cNvPr id="3" name="Picture 2">
-            <a:extLst>
-              <a:ext uri="{FF2B5EF4-FFF2-40B4-BE49-F238E27FC236}">
-                <a16:creationId xmlns:a16="http://schemas.microsoft.com/office/drawing/2014/main" id="{E3B32BC7-20A6-82CF-A83E-E0606F8C7434}"/>
-              </a:ext>
-            </a:extLst>
-          </p:cNvPr>
-          <p:cNvPicPr>
-            <a:picLocks noChangeAspect="1"/>
-          </p:cNvPicPr>
-          <p:nvPr/>
-        </p:nvPicPr>
-        <p:blipFill>
-          <a:blip r:embed="rId2"/>
-          <a:stretch>
-            <a:fillRect/>
-          </a:stretch>
-        </p:blipFill>
-        <p:spPr>
-          <a:xfrm>
-            <a:off x="1374212" y="0"/>
-            <a:ext cx="6395575" cy="6858000"/>
-          </a:xfrm>
-          <a:prstGeom prst="rect">
-            <a:avLst/>
-          </a:prstGeom>
-        </p:spPr>
-      </p:pic>
-      <p:sp>
-        <p:nvSpPr>
-          <p:cNvPr id="4" name="Rectangle 3">
-            <a:extLst>
-              <a:ext uri="{FF2B5EF4-FFF2-40B4-BE49-F238E27FC236}">
-                <a16:creationId xmlns:a16="http://schemas.microsoft.com/office/drawing/2014/main" id="{E0F5B962-99CE-C1F8-3C68-865D092824F7}"/>
-              </a:ext>
-            </a:extLst>
-          </p:cNvPr>
-          <p:cNvSpPr/>
-          <p:nvPr/>
-        </p:nvSpPr>
-        <p:spPr>
-          <a:xfrm rot="16200000">
-            <a:off x="-769184" y="2674998"/>
-            <a:ext cx="2694520" cy="923330"/>
-          </a:xfrm>
-          <a:prstGeom prst="rect">
-            <a:avLst/>
-          </a:prstGeom>
-          <a:noFill/>
-        </p:spPr>
-        <p:txBody>
-          <a:bodyPr wrap="none" lIns="91440" tIns="45720" rIns="91440" bIns="45720">
-            <a:spAutoFit/>
-          </a:bodyPr>
-          <a:lstStyle/>
-          <a:p>
-            <a:pPr algn="ctr"/>
-            <a:r>
-              <a:rPr lang="en-US" sz="5400" b="1" dirty="0">
-                <a:ln w="22225">
-                  <a:solidFill>
-                    <a:schemeClr val="accent2"/>
-                  </a:solidFill>
-                  <a:prstDash val="solid"/>
-                </a:ln>
-                <a:solidFill>
-                  <a:schemeClr val="accent2">
-                    <a:lumMod val="40000"/>
-                    <a:lumOff val="60000"/>
-                  </a:schemeClr>
-                </a:solidFill>
-              </a:rPr>
-              <a:t>Proposal</a:t>
-            </a:r>
-          </a:p>
-        </p:txBody>
-      </p:sp>
-    </p:spTree>
-    <p:extLst>
-      <p:ext uri="{BB962C8B-B14F-4D97-AF65-F5344CB8AC3E}">
-        <p14:creationId xmlns:p14="http://schemas.microsoft.com/office/powerpoint/2010/main" val="414230944"/>
-      </p:ext>
-    </p:extLst>
-  </p:cSld>
-  <p:clrMapOvr>
-    <a:masterClrMapping/>
-  </p:clrMapOvr>
-</p:sld>
-</file>
-
-<file path=ppt/slides/slide37.xml><?xml version="1.0" encoding="utf-8"?>
-<p:sld xmlns:a="http://schemas.openxmlformats.org/drawingml/2006/main" xmlns:r="http://schemas.openxmlformats.org/officeDocument/2006/relationships" xmlns:p="http://schemas.openxmlformats.org/presentationml/2006/main">
-  <p:cSld>
-    <p:bg>
-      <p:bgPr>
-        <a:solidFill>
-          <a:schemeClr val="accent5">
-            <a:lumMod val="60000"/>
-            <a:lumOff val="40000"/>
-          </a:schemeClr>
-        </a:solidFill>
-        <a:effectLst/>
-      </p:bgPr>
-    </p:bg>
-    <p:spTree>
-      <p:nvGrpSpPr>
-        <p:cNvPr id="1" name=""/>
-        <p:cNvGrpSpPr/>
-        <p:nvPr/>
-      </p:nvGrpSpPr>
-      <p:grpSpPr>
-        <a:xfrm>
-          <a:off x="0" y="0"/>
-          <a:ext cx="0" cy="0"/>
-          <a:chOff x="0" y="0"/>
-          <a:chExt cx="0" cy="0"/>
-        </a:xfrm>
-      </p:grpSpPr>
-      <p:pic>
-        <p:nvPicPr>
-          <p:cNvPr id="3" name="Picture 2">
-            <a:extLst>
-              <a:ext uri="{FF2B5EF4-FFF2-40B4-BE49-F238E27FC236}">
-                <a16:creationId xmlns:a16="http://schemas.microsoft.com/office/drawing/2014/main" id="{716F0ADF-B594-E3AF-52B7-CB25AB473F32}"/>
-              </a:ext>
-            </a:extLst>
-          </p:cNvPr>
-          <p:cNvPicPr>
-            <a:picLocks noChangeAspect="1"/>
-          </p:cNvPicPr>
-          <p:nvPr/>
-        </p:nvPicPr>
-        <p:blipFill>
-          <a:blip r:embed="rId2"/>
-          <a:stretch>
-            <a:fillRect/>
-          </a:stretch>
-        </p:blipFill>
-        <p:spPr>
-          <a:xfrm>
-            <a:off x="0" y="857250"/>
-            <a:ext cx="9144000" cy="5143500"/>
-          </a:xfrm>
-          <a:prstGeom prst="rect">
-            <a:avLst/>
-          </a:prstGeom>
-        </p:spPr>
-      </p:pic>
-      <p:sp>
-        <p:nvSpPr>
-          <p:cNvPr id="4" name="Rectangle 3">
-            <a:extLst>
-              <a:ext uri="{FF2B5EF4-FFF2-40B4-BE49-F238E27FC236}">
-                <a16:creationId xmlns:a16="http://schemas.microsoft.com/office/drawing/2014/main" id="{F195936C-6A2A-1E2E-6CCB-3EA9A7F4C517}"/>
-              </a:ext>
-            </a:extLst>
-          </p:cNvPr>
-          <p:cNvSpPr/>
-          <p:nvPr/>
-        </p:nvSpPr>
-        <p:spPr>
-          <a:xfrm>
-            <a:off x="-37706" y="1902569"/>
-            <a:ext cx="5634876" cy="1754326"/>
-          </a:xfrm>
-          <a:prstGeom prst="rect">
-            <a:avLst/>
-          </a:prstGeom>
-          <a:noFill/>
-        </p:spPr>
-        <p:txBody>
-          <a:bodyPr wrap="none" lIns="91440" tIns="45720" rIns="91440" bIns="45720">
-            <a:spAutoFit/>
-          </a:bodyPr>
-          <a:lstStyle/>
-          <a:p>
-            <a:pPr algn="ctr"/>
-            <a:r>
-              <a:rPr lang="en-US" sz="5400" b="1" dirty="0">
-                <a:ln w="22225">
-                  <a:solidFill>
-                    <a:schemeClr val="accent2"/>
-                  </a:solidFill>
-                  <a:prstDash val="solid"/>
-                </a:ln>
-                <a:solidFill>
-                  <a:schemeClr val="accent2">
-                    <a:lumMod val="40000"/>
-                    <a:lumOff val="60000"/>
-                  </a:schemeClr>
-                </a:solidFill>
-              </a:rPr>
-              <a:t>AI-Enhanced</a:t>
-            </a:r>
-          </a:p>
-          <a:p>
-            <a:pPr algn="ctr"/>
-            <a:r>
-              <a:rPr lang="en-US" sz="5400" b="1" dirty="0">
-                <a:ln w="22225">
-                  <a:solidFill>
-                    <a:schemeClr val="accent2"/>
-                  </a:solidFill>
-                  <a:prstDash val="solid"/>
-                </a:ln>
-                <a:solidFill>
-                  <a:schemeClr val="accent2">
-                    <a:lumMod val="40000"/>
-                    <a:lumOff val="60000"/>
-                  </a:schemeClr>
-                </a:solidFill>
-              </a:rPr>
-              <a:t> Engineering Coach</a:t>
-            </a:r>
-          </a:p>
-        </p:txBody>
-      </p:sp>
-      <p:pic>
-        <p:nvPicPr>
-          <p:cNvPr id="6" name="Picture 5">
-            <a:extLst>
-              <a:ext uri="{FF2B5EF4-FFF2-40B4-BE49-F238E27FC236}">
-                <a16:creationId xmlns:a16="http://schemas.microsoft.com/office/drawing/2014/main" id="{3B782C5D-2761-773A-CE7F-029291E2D8CC}"/>
-              </a:ext>
-            </a:extLst>
-          </p:cNvPr>
-          <p:cNvPicPr>
-            <a:picLocks noChangeAspect="1"/>
-          </p:cNvPicPr>
-          <p:nvPr/>
-        </p:nvPicPr>
-        <p:blipFill>
-          <a:blip r:embed="rId3"/>
-          <a:stretch>
-            <a:fillRect/>
-          </a:stretch>
-        </p:blipFill>
-        <p:spPr>
-          <a:xfrm>
-            <a:off x="5559464" y="1721096"/>
-            <a:ext cx="3486637" cy="2619741"/>
-          </a:xfrm>
-          <a:prstGeom prst="rect">
-            <a:avLst/>
-          </a:prstGeom>
-        </p:spPr>
-      </p:pic>
-    </p:spTree>
-    <p:extLst>
-      <p:ext uri="{BB962C8B-B14F-4D97-AF65-F5344CB8AC3E}">
-        <p14:creationId xmlns:p14="http://schemas.microsoft.com/office/powerpoint/2010/main" val="118609472"/>
-      </p:ext>
-    </p:extLst>
-  </p:cSld>
-  <p:clrMapOvr>
-    <a:masterClrMapping/>
-  </p:clrMapOvr>
-</p:sld>
-</file>
-
-<file path=ppt/slides/slide38.xml><?xml version="1.0" encoding="utf-8"?>
-<p:sld xmlns:a="http://schemas.openxmlformats.org/drawingml/2006/main" xmlns:r="http://schemas.openxmlformats.org/officeDocument/2006/relationships" xmlns:p="http://schemas.openxmlformats.org/presentationml/2006/main">
-  <p:cSld>
-    <p:bg>
-      <p:bgPr>
-        <a:solidFill>
-          <a:schemeClr val="accent5">
-            <a:lumMod val="60000"/>
-            <a:lumOff val="40000"/>
-          </a:schemeClr>
-        </a:solidFill>
-        <a:effectLst/>
-      </p:bgPr>
-    </p:bg>
-    <p:spTree>
-      <p:nvGrpSpPr>
-        <p:cNvPr id="1" name=""/>
-        <p:cNvGrpSpPr/>
-        <p:nvPr/>
-      </p:nvGrpSpPr>
-      <p:grpSpPr>
-        <a:xfrm>
-          <a:off x="0" y="0"/>
-          <a:ext cx="0" cy="0"/>
-          <a:chOff x="0" y="0"/>
-          <a:chExt cx="0" cy="0"/>
-        </a:xfrm>
-      </p:grpSpPr>
-      <p:pic>
-        <p:nvPicPr>
-          <p:cNvPr id="5" name="Picture 4">
-            <a:extLst>
-              <a:ext uri="{FF2B5EF4-FFF2-40B4-BE49-F238E27FC236}">
-                <a16:creationId xmlns:a16="http://schemas.microsoft.com/office/drawing/2014/main" id="{FC29D759-F709-7CEA-4E2C-8D89C44A2CCC}"/>
-              </a:ext>
-            </a:extLst>
-          </p:cNvPr>
-          <p:cNvPicPr>
-            <a:picLocks noChangeAspect="1"/>
-          </p:cNvPicPr>
-          <p:nvPr/>
-        </p:nvPicPr>
-        <p:blipFill>
-          <a:blip r:embed="rId2"/>
-          <a:stretch>
-            <a:fillRect/>
-          </a:stretch>
-        </p:blipFill>
-        <p:spPr>
-          <a:xfrm>
-            <a:off x="0" y="857250"/>
-            <a:ext cx="9144000" cy="5143500"/>
-          </a:xfrm>
-          <a:prstGeom prst="rect">
-            <a:avLst/>
-          </a:prstGeom>
-        </p:spPr>
-      </p:pic>
-    </p:spTree>
-    <p:extLst>
-      <p:ext uri="{BB962C8B-B14F-4D97-AF65-F5344CB8AC3E}">
-        <p14:creationId xmlns:p14="http://schemas.microsoft.com/office/powerpoint/2010/main" val="1188094803"/>
       </p:ext>
     </p:extLst>
   </p:cSld>
@@ -11583,6 +11920,368 @@
 </p:sld>
 </file>
 
+<file path=ppt/slides/slide40.xml><?xml version="1.0" encoding="utf-8"?>
+<p:sld xmlns:a="http://schemas.openxmlformats.org/drawingml/2006/main" xmlns:r="http://schemas.openxmlformats.org/officeDocument/2006/relationships" xmlns:p="http://schemas.openxmlformats.org/presentationml/2006/main">
+  <p:cSld>
+    <p:bg>
+      <p:bgPr>
+        <a:solidFill>
+          <a:schemeClr val="accent5">
+            <a:lumMod val="60000"/>
+            <a:lumOff val="40000"/>
+          </a:schemeClr>
+        </a:solidFill>
+        <a:effectLst/>
+      </p:bgPr>
+    </p:bg>
+    <p:spTree>
+      <p:nvGrpSpPr>
+        <p:cNvPr id="1" name=""/>
+        <p:cNvGrpSpPr/>
+        <p:nvPr/>
+      </p:nvGrpSpPr>
+      <p:grpSpPr>
+        <a:xfrm>
+          <a:off x="0" y="0"/>
+          <a:ext cx="0" cy="0"/>
+          <a:chOff x="0" y="0"/>
+          <a:chExt cx="0" cy="0"/>
+        </a:xfrm>
+      </p:grpSpPr>
+      <p:pic>
+        <p:nvPicPr>
+          <p:cNvPr id="3" name="Picture 2">
+            <a:hlinkClick r:id="rId3"/>
+            <a:extLst>
+              <a:ext uri="{FF2B5EF4-FFF2-40B4-BE49-F238E27FC236}">
+                <a16:creationId xmlns:a16="http://schemas.microsoft.com/office/drawing/2014/main" id="{E3B32BC7-20A6-82CF-A83E-E0606F8C7434}"/>
+              </a:ext>
+            </a:extLst>
+          </p:cNvPr>
+          <p:cNvPicPr>
+            <a:picLocks noChangeAspect="1"/>
+          </p:cNvPicPr>
+          <p:nvPr/>
+        </p:nvPicPr>
+        <p:blipFill>
+          <a:blip r:embed="rId4"/>
+          <a:stretch>
+            <a:fillRect/>
+          </a:stretch>
+        </p:blipFill>
+        <p:spPr>
+          <a:xfrm>
+            <a:off x="1374212" y="0"/>
+            <a:ext cx="6395575" cy="6858000"/>
+          </a:xfrm>
+          <a:prstGeom prst="rect">
+            <a:avLst/>
+          </a:prstGeom>
+        </p:spPr>
+      </p:pic>
+      <p:sp>
+        <p:nvSpPr>
+          <p:cNvPr id="4" name="Rectangle 3">
+            <a:extLst>
+              <a:ext uri="{FF2B5EF4-FFF2-40B4-BE49-F238E27FC236}">
+                <a16:creationId xmlns:a16="http://schemas.microsoft.com/office/drawing/2014/main" id="{E0F5B962-99CE-C1F8-3C68-865D092824F7}"/>
+              </a:ext>
+            </a:extLst>
+          </p:cNvPr>
+          <p:cNvSpPr/>
+          <p:nvPr/>
+        </p:nvSpPr>
+        <p:spPr>
+          <a:xfrm rot="16200000">
+            <a:off x="-769184" y="2674998"/>
+            <a:ext cx="2694520" cy="923330"/>
+          </a:xfrm>
+          <a:prstGeom prst="rect">
+            <a:avLst/>
+          </a:prstGeom>
+          <a:noFill/>
+        </p:spPr>
+        <p:txBody>
+          <a:bodyPr wrap="none" lIns="91440" tIns="45720" rIns="91440" bIns="45720">
+            <a:spAutoFit/>
+          </a:bodyPr>
+          <a:lstStyle/>
+          <a:p>
+            <a:pPr algn="ctr"/>
+            <a:r>
+              <a:rPr lang="en-US" sz="5400" b="1" dirty="0">
+                <a:ln w="22225">
+                  <a:solidFill>
+                    <a:schemeClr val="accent2"/>
+                  </a:solidFill>
+                  <a:prstDash val="solid"/>
+                </a:ln>
+                <a:solidFill>
+                  <a:schemeClr val="accent2">
+                    <a:lumMod val="40000"/>
+                    <a:lumOff val="60000"/>
+                  </a:schemeClr>
+                </a:solidFill>
+              </a:rPr>
+              <a:t>Proposal</a:t>
+            </a:r>
+          </a:p>
+        </p:txBody>
+      </p:sp>
+    </p:spTree>
+    <p:extLst>
+      <p:ext uri="{BB962C8B-B14F-4D97-AF65-F5344CB8AC3E}">
+        <p14:creationId xmlns:p14="http://schemas.microsoft.com/office/powerpoint/2010/main" val="414230944"/>
+      </p:ext>
+    </p:extLst>
+  </p:cSld>
+  <p:clrMapOvr>
+    <a:masterClrMapping/>
+  </p:clrMapOvr>
+</p:sld>
+</file>
+
+<file path=ppt/slides/slide41.xml><?xml version="1.0" encoding="utf-8"?>
+<p:sld xmlns:a="http://schemas.openxmlformats.org/drawingml/2006/main" xmlns:r="http://schemas.openxmlformats.org/officeDocument/2006/relationships" xmlns:p="http://schemas.openxmlformats.org/presentationml/2006/main">
+  <p:cSld>
+    <p:bg>
+      <p:bgPr>
+        <a:solidFill>
+          <a:schemeClr val="accent5">
+            <a:lumMod val="60000"/>
+            <a:lumOff val="40000"/>
+          </a:schemeClr>
+        </a:solidFill>
+        <a:effectLst/>
+      </p:bgPr>
+    </p:bg>
+    <p:spTree>
+      <p:nvGrpSpPr>
+        <p:cNvPr id="1" name=""/>
+        <p:cNvGrpSpPr/>
+        <p:nvPr/>
+      </p:nvGrpSpPr>
+      <p:grpSpPr>
+        <a:xfrm>
+          <a:off x="0" y="0"/>
+          <a:ext cx="0" cy="0"/>
+          <a:chOff x="0" y="0"/>
+          <a:chExt cx="0" cy="0"/>
+        </a:xfrm>
+      </p:grpSpPr>
+      <p:pic>
+        <p:nvPicPr>
+          <p:cNvPr id="3" name="Picture 2">
+            <a:extLst>
+              <a:ext uri="{FF2B5EF4-FFF2-40B4-BE49-F238E27FC236}">
+                <a16:creationId xmlns:a16="http://schemas.microsoft.com/office/drawing/2014/main" id="{716F0ADF-B594-E3AF-52B7-CB25AB473F32}"/>
+              </a:ext>
+            </a:extLst>
+          </p:cNvPr>
+          <p:cNvPicPr>
+            <a:picLocks noChangeAspect="1"/>
+          </p:cNvPicPr>
+          <p:nvPr/>
+        </p:nvPicPr>
+        <p:blipFill>
+          <a:blip r:embed="rId2"/>
+          <a:stretch>
+            <a:fillRect/>
+          </a:stretch>
+        </p:blipFill>
+        <p:spPr>
+          <a:xfrm>
+            <a:off x="0" y="857250"/>
+            <a:ext cx="9144000" cy="5143500"/>
+          </a:xfrm>
+          <a:prstGeom prst="rect">
+            <a:avLst/>
+          </a:prstGeom>
+        </p:spPr>
+      </p:pic>
+      <p:sp>
+        <p:nvSpPr>
+          <p:cNvPr id="4" name="Rectangle 3">
+            <a:extLst>
+              <a:ext uri="{FF2B5EF4-FFF2-40B4-BE49-F238E27FC236}">
+                <a16:creationId xmlns:a16="http://schemas.microsoft.com/office/drawing/2014/main" id="{F195936C-6A2A-1E2E-6CCB-3EA9A7F4C517}"/>
+              </a:ext>
+            </a:extLst>
+          </p:cNvPr>
+          <p:cNvSpPr/>
+          <p:nvPr/>
+        </p:nvSpPr>
+        <p:spPr>
+          <a:xfrm>
+            <a:off x="-37706" y="1902569"/>
+            <a:ext cx="5634876" cy="1754326"/>
+          </a:xfrm>
+          <a:prstGeom prst="rect">
+            <a:avLst/>
+          </a:prstGeom>
+          <a:noFill/>
+        </p:spPr>
+        <p:txBody>
+          <a:bodyPr wrap="none" lIns="91440" tIns="45720" rIns="91440" bIns="45720">
+            <a:spAutoFit/>
+          </a:bodyPr>
+          <a:lstStyle/>
+          <a:p>
+            <a:pPr algn="ctr"/>
+            <a:r>
+              <a:rPr lang="en-US" sz="5400" b="1" dirty="0">
+                <a:ln w="22225">
+                  <a:solidFill>
+                    <a:schemeClr val="accent2"/>
+                  </a:solidFill>
+                  <a:prstDash val="solid"/>
+                </a:ln>
+                <a:solidFill>
+                  <a:schemeClr val="accent2">
+                    <a:lumMod val="40000"/>
+                    <a:lumOff val="60000"/>
+                  </a:schemeClr>
+                </a:solidFill>
+              </a:rPr>
+              <a:t>AI-Enhanced</a:t>
+            </a:r>
+          </a:p>
+          <a:p>
+            <a:pPr algn="ctr"/>
+            <a:r>
+              <a:rPr lang="en-US" sz="5400" b="1" dirty="0">
+                <a:ln w="22225">
+                  <a:solidFill>
+                    <a:schemeClr val="accent2"/>
+                  </a:solidFill>
+                  <a:prstDash val="solid"/>
+                </a:ln>
+                <a:solidFill>
+                  <a:schemeClr val="accent2">
+                    <a:lumMod val="40000"/>
+                    <a:lumOff val="60000"/>
+                  </a:schemeClr>
+                </a:solidFill>
+              </a:rPr>
+              <a:t> Engineering Coach</a:t>
+            </a:r>
+          </a:p>
+        </p:txBody>
+      </p:sp>
+      <p:pic>
+        <p:nvPicPr>
+          <p:cNvPr id="6" name="Picture 5">
+            <a:extLst>
+              <a:ext uri="{FF2B5EF4-FFF2-40B4-BE49-F238E27FC236}">
+                <a16:creationId xmlns:a16="http://schemas.microsoft.com/office/drawing/2014/main" id="{3B782C5D-2761-773A-CE7F-029291E2D8CC}"/>
+              </a:ext>
+            </a:extLst>
+          </p:cNvPr>
+          <p:cNvPicPr>
+            <a:picLocks noChangeAspect="1"/>
+          </p:cNvPicPr>
+          <p:nvPr/>
+        </p:nvPicPr>
+        <p:blipFill>
+          <a:blip r:embed="rId3"/>
+          <a:stretch>
+            <a:fillRect/>
+          </a:stretch>
+        </p:blipFill>
+        <p:spPr>
+          <a:xfrm>
+            <a:off x="5559464" y="1721096"/>
+            <a:ext cx="3486637" cy="2619741"/>
+          </a:xfrm>
+          <a:prstGeom prst="rect">
+            <a:avLst/>
+          </a:prstGeom>
+        </p:spPr>
+      </p:pic>
+    </p:spTree>
+    <p:extLst>
+      <p:ext uri="{BB962C8B-B14F-4D97-AF65-F5344CB8AC3E}">
+        <p14:creationId xmlns:p14="http://schemas.microsoft.com/office/powerpoint/2010/main" val="118609472"/>
+      </p:ext>
+    </p:extLst>
+  </p:cSld>
+  <p:clrMapOvr>
+    <a:masterClrMapping/>
+  </p:clrMapOvr>
+</p:sld>
+</file>
+
+<file path=ppt/slides/slide42.xml><?xml version="1.0" encoding="utf-8"?>
+<p:sld xmlns:a="http://schemas.openxmlformats.org/drawingml/2006/main" xmlns:r="http://schemas.openxmlformats.org/officeDocument/2006/relationships" xmlns:p="http://schemas.openxmlformats.org/presentationml/2006/main">
+  <p:cSld>
+    <p:bg>
+      <p:bgPr>
+        <a:solidFill>
+          <a:schemeClr val="accent5">
+            <a:lumMod val="60000"/>
+            <a:lumOff val="40000"/>
+          </a:schemeClr>
+        </a:solidFill>
+        <a:effectLst/>
+      </p:bgPr>
+    </p:bg>
+    <p:spTree>
+      <p:nvGrpSpPr>
+        <p:cNvPr id="1" name=""/>
+        <p:cNvGrpSpPr/>
+        <p:nvPr/>
+      </p:nvGrpSpPr>
+      <p:grpSpPr>
+        <a:xfrm>
+          <a:off x="0" y="0"/>
+          <a:ext cx="0" cy="0"/>
+          <a:chOff x="0" y="0"/>
+          <a:chExt cx="0" cy="0"/>
+        </a:xfrm>
+      </p:grpSpPr>
+      <p:pic>
+        <p:nvPicPr>
+          <p:cNvPr id="5" name="Picture 4">
+            <a:extLst>
+              <a:ext uri="{FF2B5EF4-FFF2-40B4-BE49-F238E27FC236}">
+                <a16:creationId xmlns:a16="http://schemas.microsoft.com/office/drawing/2014/main" id="{FC29D759-F709-7CEA-4E2C-8D89C44A2CCC}"/>
+              </a:ext>
+            </a:extLst>
+          </p:cNvPr>
+          <p:cNvPicPr>
+            <a:picLocks noChangeAspect="1"/>
+          </p:cNvPicPr>
+          <p:nvPr/>
+        </p:nvPicPr>
+        <p:blipFill>
+          <a:blip r:embed="rId2"/>
+          <a:stretch>
+            <a:fillRect/>
+          </a:stretch>
+        </p:blipFill>
+        <p:spPr>
+          <a:xfrm>
+            <a:off x="0" y="857250"/>
+            <a:ext cx="9144000" cy="5143500"/>
+          </a:xfrm>
+          <a:prstGeom prst="rect">
+            <a:avLst/>
+          </a:prstGeom>
+        </p:spPr>
+      </p:pic>
+    </p:spTree>
+    <p:extLst>
+      <p:ext uri="{BB962C8B-B14F-4D97-AF65-F5344CB8AC3E}">
+        <p14:creationId xmlns:p14="http://schemas.microsoft.com/office/powerpoint/2010/main" val="1188094803"/>
+      </p:ext>
+    </p:extLst>
+  </p:cSld>
+  <p:clrMapOvr>
+    <a:masterClrMapping/>
+  </p:clrMapOvr>
+</p:sld>
+</file>
+
 <file path=ppt/slides/slide5.xml><?xml version="1.0" encoding="utf-8"?>
 <p:sld xmlns:a="http://schemas.openxmlformats.org/drawingml/2006/main" xmlns:r="http://schemas.openxmlformats.org/officeDocument/2006/relationships" xmlns:p="http://schemas.openxmlformats.org/presentationml/2006/main">
   <p:cSld name="Slide 2">
@@ -12134,9 +12833,6 @@
           <a:bodyPr wrap="square" lIns="0" tIns="0" rIns="0" bIns="0" rtlCol="0" anchor="ctr"/>
           <a:lstStyle/>
           <a:p>
-            <a:pPr marL="0" indent="0" algn="l">
-              <a:buNone/>
-            </a:pPr>
             <a:r>
               <a:rPr lang="en-US" sz="2800" b="1" dirty="0">
                 <a:solidFill>
@@ -12146,7 +12842,7 @@
                 <a:ea typeface="Calibri" pitchFamily="34" charset="-122"/>
                 <a:cs typeface="Calibri" pitchFamily="34" charset="-120"/>
               </a:rPr>
-              <a:t>What the Tool Does</a:t>
+              <a:t>What the Tool Does (The Original, Gemini)</a:t>
             </a:r>
             <a:endParaRPr lang="en-US" sz="2800" dirty="0"/>
           </a:p>
@@ -12546,9 +13242,6 @@
           <a:bodyPr wrap="square" lIns="0" tIns="0" rIns="0" bIns="0" rtlCol="0" anchor="ctr"/>
           <a:lstStyle/>
           <a:p>
-            <a:pPr marL="0" indent="0" algn="l">
-              <a:buNone/>
-            </a:pPr>
             <a:r>
               <a:rPr lang="en-US" sz="2800" b="1" dirty="0">
                 <a:solidFill>
@@ -12558,7 +13251,7 @@
                 <a:ea typeface="Calibri" pitchFamily="34" charset="-122"/>
                 <a:cs typeface="Calibri" pitchFamily="34" charset="-120"/>
               </a:rPr>
-              <a:t>How It Works</a:t>
+              <a:t>How It Works (The Original, Gemini)</a:t>
             </a:r>
             <a:endParaRPr lang="en-US" sz="2800" dirty="0"/>
           </a:p>
@@ -13203,9 +13896,6 @@
           <a:bodyPr wrap="square" lIns="0" tIns="0" rIns="0" bIns="0" rtlCol="0" anchor="ctr"/>
           <a:lstStyle/>
           <a:p>
-            <a:pPr marL="0" indent="0" algn="l">
-              <a:buNone/>
-            </a:pPr>
             <a:r>
               <a:rPr lang="en-US" sz="2800" b="1" dirty="0">
                 <a:solidFill>
@@ -13215,7 +13905,7 @@
                 <a:ea typeface="Calibri" pitchFamily="34" charset="-122"/>
                 <a:cs typeface="Calibri" pitchFamily="34" charset="-120"/>
               </a:rPr>
-              <a:t>Source Code Structure</a:t>
+              <a:t>Source Code Structure (The Original, Gemini)</a:t>
             </a:r>
             <a:endParaRPr lang="en-US" sz="2800" dirty="0"/>
           </a:p>
@@ -14219,9 +14909,6 @@
           <a:bodyPr wrap="square" lIns="0" tIns="0" rIns="0" bIns="0" rtlCol="0" anchor="ctr"/>
           <a:lstStyle/>
           <a:p>
-            <a:pPr marL="0" indent="0" algn="l">
-              <a:buNone/>
-            </a:pPr>
             <a:r>
               <a:rPr lang="en-US" sz="2800" b="1" dirty="0">
                 <a:solidFill>
@@ -14231,7 +14918,7 @@
                 <a:ea typeface="Calibri" pitchFamily="34" charset="-122"/>
                 <a:cs typeface="Calibri" pitchFamily="34" charset="-120"/>
               </a:rPr>
-              <a:t>Understanding Query Costs</a:t>
+              <a:t>Understanding Query Costs (The Original, Gemini)</a:t>
             </a:r>
             <a:endParaRPr lang="en-US" sz="2800" dirty="0"/>
           </a:p>

--- a/pmc1/PMC-AI-Technical-Overview.pptx
+++ b/pmc1/PMC-AI-Technical-Overview.pptx
@@ -5334,7 +5334,7 @@
         </p:nvSpPr>
         <p:spPr>
           <a:xfrm>
-            <a:off x="548640" y="1097280"/>
+            <a:off x="548640" y="378143"/>
             <a:ext cx="8046720" cy="2194560"/>
           </a:xfrm>
           <a:prstGeom prst="rect">
@@ -5390,8 +5390,8 @@
         </p:nvSpPr>
         <p:spPr>
           <a:xfrm>
-            <a:off x="548640" y="3383280"/>
-            <a:ext cx="8046720" cy="640080"/>
+            <a:off x="495300" y="2397443"/>
+            <a:ext cx="8046720" cy="2063114"/>
           </a:xfrm>
           <a:prstGeom prst="rect">
             <a:avLst/>
@@ -5468,58 +5468,154 @@
                 <a:ea typeface="Calibri Light" pitchFamily="34" charset="-122"/>
                 <a:cs typeface="Calibri Light" pitchFamily="34" charset="-120"/>
               </a:rPr>
-              <a:t>  </a:t>
-            </a:r>
-            <a:endParaRPr lang="en-US" sz="2400" dirty="0"/>
-          </a:p>
-        </p:txBody>
-      </p:sp>
-      <p:sp>
-        <p:nvSpPr>
-          <p:cNvPr id="5" name="Text 3"/>
-          <p:cNvSpPr/>
-          <p:nvPr/>
-        </p:nvSpPr>
-        <p:spPr>
-          <a:xfrm>
-            <a:off x="548640" y="5166360"/>
-            <a:ext cx="8046720" cy="457200"/>
-          </a:xfrm>
-          <a:prstGeom prst="rect">
-            <a:avLst/>
-          </a:prstGeom>
-          <a:noFill/>
-          <a:ln/>
-        </p:spPr>
-        <p:txBody>
-          <a:bodyPr wrap="square" rtlCol="0" anchor="ctr"/>
-          <a:lstStyle/>
+              <a:t> (short link </a:t>
+            </a:r>
+            <a:r>
+              <a:rPr lang="en-US" sz="2400">
+                <a:solidFill>
+                  <a:srgbClr val="CADCFC"/>
+                </a:solidFill>
+                <a:latin typeface="Calibri Light" pitchFamily="34" charset="0"/>
+                <a:ea typeface="Calibri Light" pitchFamily="34" charset="-122"/>
+                <a:cs typeface="Calibri Light" pitchFamily="34" charset="-120"/>
+              </a:rPr>
+              <a:t>to presentation)</a:t>
+            </a:r>
+            <a:endParaRPr lang="en-US" sz="2400" dirty="0">
+              <a:solidFill>
+                <a:srgbClr val="CADCFC"/>
+              </a:solidFill>
+              <a:latin typeface="Calibri Light" pitchFamily="34" charset="0"/>
+              <a:ea typeface="Calibri Light" pitchFamily="34" charset="-122"/>
+              <a:cs typeface="Calibri Light" pitchFamily="34" charset="-120"/>
+            </a:endParaRPr>
+          </a:p>
           <a:p>
             <a:pPr marL="0" indent="0" algn="l">
               <a:buNone/>
             </a:pPr>
-            <a:r>
-              <a:rPr lang="en-US" sz="1400" i="1" dirty="0">
-                <a:solidFill>
-                  <a:srgbClr val="FFFFFF"/>
+            <a:endParaRPr lang="en-US" sz="2400" dirty="0">
+              <a:solidFill>
+                <a:srgbClr val="CADCFC"/>
+              </a:solidFill>
+              <a:latin typeface="Calibri Light" pitchFamily="34" charset="0"/>
+              <a:ea typeface="Calibri Light" pitchFamily="34" charset="-122"/>
+              <a:cs typeface="Calibri Light" pitchFamily="34" charset="-120"/>
+            </a:endParaRPr>
+          </a:p>
+          <a:p>
+            <a:pPr marL="0" indent="0" algn="l">
+              <a:buNone/>
+            </a:pPr>
+            <a:r>
+              <a:rPr lang="en-US" sz="2400" dirty="0">
+                <a:solidFill>
+                  <a:srgbClr val="CADCFC"/>
+                </a:solidFill>
+                <a:latin typeface="Calibri Light" pitchFamily="34" charset="0"/>
+                <a:ea typeface="Calibri Light" pitchFamily="34" charset="-122"/>
+                <a:cs typeface="Calibri Light" pitchFamily="34" charset="-120"/>
+              </a:rPr>
+              <a:t>Source: </a:t>
+            </a:r>
+            <a:r>
+              <a:rPr lang="en-US" sz="2400" dirty="0">
+                <a:solidFill>
+                  <a:srgbClr val="CADCFC"/>
                 </a:solidFill>
                 <a:latin typeface="Calibri Light" pitchFamily="34" charset="0"/>
                 <a:ea typeface="Calibri Light" pitchFamily="34" charset="-122"/>
                 <a:cs typeface="Calibri Light" pitchFamily="34" charset="-120"/>
                 <a:hlinkClick r:id="rId5"/>
               </a:rPr>
-              <a:t>John Weisenfeld</a:t>
-            </a:r>
-            <a:r>
-              <a:rPr lang="en-US" sz="1400" i="1" dirty="0">
-                <a:solidFill>
-                  <a:srgbClr val="FFFFFF"/>
+              <a:t>https://psd1.net/pmc1/pmc1.zip</a:t>
+            </a:r>
+            <a:r>
+              <a:rPr lang="en-US" sz="2400" dirty="0">
+                <a:solidFill>
+                  <a:srgbClr val="CADCFC"/>
                 </a:solidFill>
                 <a:latin typeface="Calibri Light" pitchFamily="34" charset="0"/>
                 <a:ea typeface="Calibri Light" pitchFamily="34" charset="-122"/>
                 <a:cs typeface="Calibri Light" pitchFamily="34" charset="-120"/>
               </a:rPr>
-              <a:t> ·  Physics Teacher, Orion High School  ·  April 10, 2026</a:t>
+              <a:t> </a:t>
+            </a:r>
+          </a:p>
+          <a:p>
+            <a:pPr marL="0" indent="0" algn="l">
+              <a:buNone/>
+            </a:pPr>
+            <a:endParaRPr lang="en-US" sz="2400" dirty="0"/>
+          </a:p>
+        </p:txBody>
+      </p:sp>
+      <p:sp>
+        <p:nvSpPr>
+          <p:cNvPr id="5" name="Text 3"/>
+          <p:cNvSpPr/>
+          <p:nvPr/>
+        </p:nvSpPr>
+        <p:spPr>
+          <a:xfrm>
+            <a:off x="4998720" y="5166360"/>
+            <a:ext cx="3596640" cy="457200"/>
+          </a:xfrm>
+          <a:prstGeom prst="rect">
+            <a:avLst/>
+          </a:prstGeom>
+          <a:noFill/>
+          <a:ln/>
+        </p:spPr>
+        <p:txBody>
+          <a:bodyPr wrap="square" rtlCol="0" anchor="ctr"/>
+          <a:lstStyle/>
+          <a:p>
+            <a:r>
+              <a:rPr lang="en-US" sz="1400" i="1" dirty="0">
+                <a:solidFill>
+                  <a:srgbClr val="FFFFFF"/>
+                </a:solidFill>
+                <a:latin typeface="Calibri Light" pitchFamily="34" charset="0"/>
+                <a:ea typeface="Calibri Light" pitchFamily="34" charset="-122"/>
+                <a:cs typeface="Calibri Light" pitchFamily="34" charset="-120"/>
+                <a:hlinkClick r:id="rId6"/>
+              </a:rPr>
+              <a:t>John Weisenfeld</a:t>
+            </a:r>
+            <a:r>
+              <a:rPr lang="en-US" sz="1400" i="1" dirty="0">
+                <a:solidFill>
+                  <a:srgbClr val="FFFFFF"/>
+                </a:solidFill>
+                <a:latin typeface="Calibri Light" pitchFamily="34" charset="0"/>
+                <a:ea typeface="Calibri Light" pitchFamily="34" charset="-122"/>
+                <a:cs typeface="Calibri Light" pitchFamily="34" charset="-120"/>
+              </a:rPr>
+              <a:t> ·  Physics Teacher, Orion High School  ·  April 10, 2026 · </a:t>
+            </a:r>
+            <a:r>
+              <a:rPr lang="en-US" sz="1400" i="1" dirty="0">
+                <a:solidFill>
+                  <a:srgbClr val="FFFFFF"/>
+                </a:solidFill>
+                <a:latin typeface="Calibri Light" pitchFamily="34" charset="0"/>
+                <a:ea typeface="Calibri Light" pitchFamily="34" charset="-122"/>
+                <a:cs typeface="Calibri Light" pitchFamily="34" charset="-120"/>
+                <a:hlinkClick r:id="rId7"/>
+              </a:rPr>
+              <a:t>jweisenfeld@psd1.org</a:t>
+            </a:r>
+            <a:r>
+              <a:rPr lang="en-US" sz="1400" i="1" dirty="0">
+                <a:solidFill>
+                  <a:srgbClr val="FFFFFF"/>
+                </a:solidFill>
+                <a:latin typeface="Calibri Light" pitchFamily="34" charset="0"/>
+                <a:ea typeface="Calibri Light" pitchFamily="34" charset="-122"/>
+                <a:cs typeface="Calibri Light" pitchFamily="34" charset="-120"/>
+              </a:rPr>
+              <a:t> </a:t>
             </a:r>
             <a:endParaRPr lang="en-US" sz="1400" dirty="0"/>
           </a:p>
@@ -5533,7 +5629,7 @@
         </p:nvSpPr>
         <p:spPr>
           <a:xfrm>
-            <a:off x="5486400" y="6126480"/>
+            <a:off x="-975360" y="5402580"/>
             <a:ext cx="3383280" cy="457200"/>
           </a:xfrm>
           <a:prstGeom prst="rect">
